--- a/objectifs/presentation-2026-10-23/variante-opus/slides.pptx
+++ b/objectifs/presentation-2026-10-23/variante-opus/slides.pptx
@@ -5,13 +5,19 @@
     <p:sldMasterId xmlns:r="http://schemas.openxmlformats.org/officeDocument/2006/relationships" id="2147483648" r:id="rId1"/>
   </p:sldMasterIdLst>
   <p:notesMasterIdLst>
-    <p:notesMasterId r:id="Rfb6db0f7faa64067"/>
+    <p:notesMasterId r:id="Rad7b5387ecf04192"/>
   </p:notesMasterIdLst>
   <p:sldIdLst>
-    <p:sldId id="256" r:id="R6e4fc06da445474d"/>
-    <p:sldId id="257" r:id="R2f623d22775a403a"/>
-    <p:sldId id="258" r:id="R8a39f26133cf4656"/>
-    <p:sldId id="259" r:id="R47c221e310c74f50"/>
+    <p:sldId id="256" r:id="Rbaff7c87c5dc4104"/>
+    <p:sldId id="257" r:id="R388ee1c251f44d42"/>
+    <p:sldId id="258" r:id="R0280acef368344b1"/>
+    <p:sldId id="259" r:id="R53efe31aa448490e"/>
+    <p:sldId id="260" r:id="R276c2380d0c34725"/>
+    <p:sldId id="261" r:id="Rd973e5ec24324f79"/>
+    <p:sldId id="262" r:id="R87b4b0bc38ca43d2"/>
+    <p:sldId id="263" r:id="R5c2a6cca10324ffc"/>
+    <p:sldId id="264" r:id="R87a5628ed2414248"/>
+    <p:sldId id="265" r:id="R4c199a3886834a3f"/>
   </p:sldIdLst>
   <p:sldSz cx="12192000" cy="6858000" type="custom"/>
   <p:notesSz cx="6858000" cy="9144000"/>
@@ -493,6 +499,67 @@
 </p:notes>
 </file>
 
+<file path=ppt/notesSlides/notesSlide10.xml><?xml version="1.0" encoding="utf-8"?>
+<p:notes xmlns:p="http://schemas.openxmlformats.org/presentationml/2006/main">
+  <p:cSld>
+    <p:spTree>
+      <p:nvGrpSpPr>
+        <p:cNvPr id="1" name=""/>
+        <p:cNvGrpSpPr/>
+        <p:nvPr/>
+      </p:nvGrpSpPr>
+      <p:grpSpPr>
+        <a:xfrm xmlns:a="http://schemas.openxmlformats.org/drawingml/2006/main"/>
+      </p:grpSpPr>
+      <p:sp>
+        <p:nvSpPr>
+          <p:cNvPr id="2" name="Slide Image Placeholder 1"/>
+          <p:cNvSpPr/>
+          <p:nvPr>
+            <p:ph type="sldImg" idx="0"/>
+          </p:nvPr>
+        </p:nvSpPr>
+        <p:spPr/>
+        <p:txBody>
+          <a:bodyPr xmlns:a="http://schemas.openxmlformats.org/drawingml/2006/main"/>
+          <a:lstStyle xmlns:a="http://schemas.openxmlformats.org/drawingml/2006/main"/>
+          <a:p xmlns:a="http://schemas.openxmlformats.org/drawingml/2006/main"/>
+        </p:txBody>
+      </p:sp>
+      <p:sp>
+        <p:nvSpPr>
+          <p:cNvPr id="3" name="Notes Placeholder 2"/>
+          <p:cNvSpPr/>
+          <p:nvPr>
+            <p:ph type="body" idx="1"/>
+          </p:nvPr>
+        </p:nvSpPr>
+        <p:spPr/>
+        <p:txBody>
+          <a:bodyPr xmlns:a="http://schemas.openxmlformats.org/drawingml/2006/main"/>
+          <a:lstStyle xmlns:a="http://schemas.openxmlformats.org/drawingml/2006/main"/>
+          <a:p xmlns:a="http://schemas.openxmlformats.org/drawingml/2006/main">
+            <a:r>
+              <a:rPr lang="en-US"/>
+              <a:t>Duration: about 0 seconds.</a:t>
+            </a:r>
+          </a:p>
+          <a:p xmlns:a="http://schemas.openxmlformats.org/drawingml/2006/main">
+            <a:r>
+              <a:rPr lang="en-US"/>
+              <a:t>A benchmark that states its gaps is stronger than one that claims full coverage. One line each, no discussion unless asked.</a:t>
+            </a:r>
+          </a:p>
+        </p:txBody>
+      </p:sp>
+    </p:spTree>
+  </p:cSld>
+  <p:clrMapOvr>
+    <a:masterClrMapping xmlns:a="http://schemas.openxmlformats.org/drawingml/2006/main"/>
+  </p:clrMapOvr>
+</p:notes>
+</file>
+
 <file path=ppt/notesSlides/notesSlide2.xml><?xml version="1.0" encoding="utf-8"?>
 <p:notes xmlns:p="http://schemas.openxmlformats.org/presentationml/2006/main">
   <p:cSld>
@@ -541,7 +608,7 @@
           <a:p xmlns:a="http://schemas.openxmlformats.org/drawingml/2006/main">
             <a:r>
               <a:rPr lang="en-US"/>
-              <a:t>One sentence on the left, three commitments on the right. Do not read the three rows aloud; they qualify the sentence, they do not repeat it. Close on the last line: training is not on the critical path.</a:t>
+              <a:t>One sentence on the left, three commitments on the right. Do not read the three rows aloud; they qualify the sentence, they do not repeat it. Close on the last line.</a:t>
             </a:r>
           </a:p>
         </p:txBody>
@@ -664,6 +731,311 @@
             <a:r>
               <a:rPr lang="en-US"/>
               <a:t>Two halves. Left: we recompute from the log, never from the conclusion. Right: the same trial runs on both configurations, so a false positive is visible. The bottom band is the second half of the rule.</a:t>
+            </a:r>
+          </a:p>
+        </p:txBody>
+      </p:sp>
+    </p:spTree>
+  </p:cSld>
+  <p:clrMapOvr>
+    <a:masterClrMapping xmlns:a="http://schemas.openxmlformats.org/drawingml/2006/main"/>
+  </p:clrMapOvr>
+</p:notes>
+</file>
+
+<file path=ppt/notesSlides/notesSlide5.xml><?xml version="1.0" encoding="utf-8"?>
+<p:notes xmlns:p="http://schemas.openxmlformats.org/presentationml/2006/main">
+  <p:cSld>
+    <p:spTree>
+      <p:nvGrpSpPr>
+        <p:cNvPr id="1" name=""/>
+        <p:cNvGrpSpPr/>
+        <p:nvPr/>
+      </p:nvGrpSpPr>
+      <p:grpSpPr>
+        <a:xfrm xmlns:a="http://schemas.openxmlformats.org/drawingml/2006/main"/>
+      </p:grpSpPr>
+      <p:sp>
+        <p:nvSpPr>
+          <p:cNvPr id="2" name="Slide Image Placeholder 1"/>
+          <p:cNvSpPr/>
+          <p:nvPr>
+            <p:ph type="sldImg" idx="0"/>
+          </p:nvPr>
+        </p:nvSpPr>
+        <p:spPr/>
+        <p:txBody>
+          <a:bodyPr xmlns:a="http://schemas.openxmlformats.org/drawingml/2006/main"/>
+          <a:lstStyle xmlns:a="http://schemas.openxmlformats.org/drawingml/2006/main"/>
+          <a:p xmlns:a="http://schemas.openxmlformats.org/drawingml/2006/main"/>
+        </p:txBody>
+      </p:sp>
+      <p:sp>
+        <p:nvSpPr>
+          <p:cNvPr id="3" name="Notes Placeholder 2"/>
+          <p:cNvSpPr/>
+          <p:nvPr>
+            <p:ph type="body" idx="1"/>
+          </p:nvPr>
+        </p:nvSpPr>
+        <p:spPr/>
+        <p:txBody>
+          <a:bodyPr xmlns:a="http://schemas.openxmlformats.org/drawingml/2006/main"/>
+          <a:lstStyle xmlns:a="http://schemas.openxmlformats.org/drawingml/2006/main"/>
+          <a:p xmlns:a="http://schemas.openxmlformats.org/drawingml/2006/main">
+            <a:r>
+              <a:rPr lang="en-US"/>
+              <a:t>Duration: about 50 seconds.</a:t>
+            </a:r>
+          </a:p>
+          <a:p xmlns:a="http://schemas.openxmlformats.org/drawingml/2006/main">
+            <a:r>
+              <a:rPr lang="en-US"/>
+              <a:t>Both approaches succeed everywhere. That is a property of the instrument, not a verdict on the model: the scale is saturated, so the bars carry no difference.</a:t>
+            </a:r>
+          </a:p>
+        </p:txBody>
+      </p:sp>
+    </p:spTree>
+  </p:cSld>
+  <p:clrMapOvr>
+    <a:masterClrMapping xmlns:a="http://schemas.openxmlformats.org/drawingml/2006/main"/>
+  </p:clrMapOvr>
+</p:notes>
+</file>
+
+<file path=ppt/notesSlides/notesSlide6.xml><?xml version="1.0" encoding="utf-8"?>
+<p:notes xmlns:p="http://schemas.openxmlformats.org/presentationml/2006/main">
+  <p:cSld>
+    <p:spTree>
+      <p:nvGrpSpPr>
+        <p:cNvPr id="1" name=""/>
+        <p:cNvGrpSpPr/>
+        <p:nvPr/>
+      </p:nvGrpSpPr>
+      <p:grpSpPr>
+        <a:xfrm xmlns:a="http://schemas.openxmlformats.org/drawingml/2006/main"/>
+      </p:grpSpPr>
+      <p:sp>
+        <p:nvSpPr>
+          <p:cNvPr id="2" name="Slide Image Placeholder 1"/>
+          <p:cNvSpPr/>
+          <p:nvPr>
+            <p:ph type="sldImg" idx="0"/>
+          </p:nvPr>
+        </p:nvSpPr>
+        <p:spPr/>
+        <p:txBody>
+          <a:bodyPr xmlns:a="http://schemas.openxmlformats.org/drawingml/2006/main"/>
+          <a:lstStyle xmlns:a="http://schemas.openxmlformats.org/drawingml/2006/main"/>
+          <a:p xmlns:a="http://schemas.openxmlformats.org/drawingml/2006/main"/>
+        </p:txBody>
+      </p:sp>
+      <p:sp>
+        <p:nvSpPr>
+          <p:cNvPr id="3" name="Notes Placeholder 2"/>
+          <p:cNvSpPr/>
+          <p:nvPr>
+            <p:ph type="body" idx="1"/>
+          </p:nvPr>
+        </p:nvSpPr>
+        <p:spPr/>
+        <p:txBody>
+          <a:bodyPr xmlns:a="http://schemas.openxmlformats.org/drawingml/2006/main"/>
+          <a:lstStyle xmlns:a="http://schemas.openxmlformats.org/drawingml/2006/main"/>
+          <a:p xmlns:a="http://schemas.openxmlformats.org/drawingml/2006/main">
+            <a:r>
+              <a:rPr lang="en-US"/>
+              <a:t>Duration: about 75 seconds.</a:t>
+            </a:r>
+          </a:p>
+          <a:p xmlns:a="http://schemas.openxmlformats.org/drawingml/2006/main">
+            <a:r>
+              <a:rPr lang="en-US"/>
+              <a:t>The objective does not change, its form does. Six network properties, six tests. H6 is detached on purpose: it is a risk, not a gain.</a:t>
+            </a:r>
+          </a:p>
+        </p:txBody>
+      </p:sp>
+    </p:spTree>
+  </p:cSld>
+  <p:clrMapOvr>
+    <a:masterClrMapping xmlns:a="http://schemas.openxmlformats.org/drawingml/2006/main"/>
+  </p:clrMapOvr>
+</p:notes>
+</file>
+
+<file path=ppt/notesSlides/notesSlide7.xml><?xml version="1.0" encoding="utf-8"?>
+<p:notes xmlns:p="http://schemas.openxmlformats.org/presentationml/2006/main">
+  <p:cSld>
+    <p:spTree>
+      <p:nvGrpSpPr>
+        <p:cNvPr id="1" name=""/>
+        <p:cNvGrpSpPr/>
+        <p:nvPr/>
+      </p:nvGrpSpPr>
+      <p:grpSpPr>
+        <a:xfrm xmlns:a="http://schemas.openxmlformats.org/drawingml/2006/main"/>
+      </p:grpSpPr>
+      <p:sp>
+        <p:nvSpPr>
+          <p:cNvPr id="2" name="Slide Image Placeholder 1"/>
+          <p:cNvSpPr/>
+          <p:nvPr>
+            <p:ph type="sldImg" idx="0"/>
+          </p:nvPr>
+        </p:nvSpPr>
+        <p:spPr/>
+        <p:txBody>
+          <a:bodyPr xmlns:a="http://schemas.openxmlformats.org/drawingml/2006/main"/>
+          <a:lstStyle xmlns:a="http://schemas.openxmlformats.org/drawingml/2006/main"/>
+          <a:p xmlns:a="http://schemas.openxmlformats.org/drawingml/2006/main"/>
+        </p:txBody>
+      </p:sp>
+      <p:sp>
+        <p:nvSpPr>
+          <p:cNvPr id="3" name="Notes Placeholder 2"/>
+          <p:cNvSpPr/>
+          <p:nvPr>
+            <p:ph type="body" idx="1"/>
+          </p:nvPr>
+        </p:nvSpPr>
+        <p:spPr/>
+        <p:txBody>
+          <a:bodyPr xmlns:a="http://schemas.openxmlformats.org/drawingml/2006/main"/>
+          <a:lstStyle xmlns:a="http://schemas.openxmlformats.org/drawingml/2006/main"/>
+          <a:p xmlns:a="http://schemas.openxmlformats.org/drawingml/2006/main">
+            <a:r>
+              <a:rPr lang="en-US"/>
+              <a:t>Duration: about 70 seconds.</a:t>
+            </a:r>
+          </a:p>
+          <a:p xmlns:a="http://schemas.openxmlformats.org/drawingml/2006/main">
+            <a:r>
+              <a:rPr lang="en-US"/>
+              <a:t>The gate is the condition of interpretation for everything else, and it binds both arms. Read the matrix by cells: the only cell that opens the register is the one where both arms pass — script check and model check.</a:t>
+            </a:r>
+          </a:p>
+        </p:txBody>
+      </p:sp>
+    </p:spTree>
+  </p:cSld>
+  <p:clrMapOvr>
+    <a:masterClrMapping xmlns:a="http://schemas.openxmlformats.org/drawingml/2006/main"/>
+  </p:clrMapOvr>
+</p:notes>
+</file>
+
+<file path=ppt/notesSlides/notesSlide8.xml><?xml version="1.0" encoding="utf-8"?>
+<p:notes xmlns:p="http://schemas.openxmlformats.org/presentationml/2006/main">
+  <p:cSld>
+    <p:spTree>
+      <p:nvGrpSpPr>
+        <p:cNvPr id="1" name=""/>
+        <p:cNvGrpSpPr/>
+        <p:nvPr/>
+      </p:nvGrpSpPr>
+      <p:grpSpPr>
+        <a:xfrm xmlns:a="http://schemas.openxmlformats.org/drawingml/2006/main"/>
+      </p:grpSpPr>
+      <p:sp>
+        <p:nvSpPr>
+          <p:cNvPr id="2" name="Slide Image Placeholder 1"/>
+          <p:cNvSpPr/>
+          <p:nvPr>
+            <p:ph type="sldImg" idx="0"/>
+          </p:nvPr>
+        </p:nvSpPr>
+        <p:spPr/>
+        <p:txBody>
+          <a:bodyPr xmlns:a="http://schemas.openxmlformats.org/drawingml/2006/main"/>
+          <a:lstStyle xmlns:a="http://schemas.openxmlformats.org/drawingml/2006/main"/>
+          <a:p xmlns:a="http://schemas.openxmlformats.org/drawingml/2006/main"/>
+        </p:txBody>
+      </p:sp>
+      <p:sp>
+        <p:nvSpPr>
+          <p:cNvPr id="3" name="Notes Placeholder 2"/>
+          <p:cNvSpPr/>
+          <p:nvPr>
+            <p:ph type="body" idx="1"/>
+          </p:nvPr>
+        </p:nvSpPr>
+        <p:spPr/>
+        <p:txBody>
+          <a:bodyPr xmlns:a="http://schemas.openxmlformats.org/drawingml/2006/main"/>
+          <a:lstStyle xmlns:a="http://schemas.openxmlformats.org/drawingml/2006/main"/>
+          <a:p xmlns:a="http://schemas.openxmlformats.org/drawingml/2006/main">
+            <a:r>
+              <a:rPr lang="en-US"/>
+              <a:t>Duration: about 60 seconds.</a:t>
+            </a:r>
+          </a:p>
+          <a:p xmlns:a="http://schemas.openxmlformats.org/drawingml/2006/main">
+            <a:r>
+              <a:rPr lang="en-US"/>
+              <a:t>Be explicit. This is the slide that buys credibility. Three limits, each stated as a claim we are not making, then the reason.</a:t>
+            </a:r>
+          </a:p>
+        </p:txBody>
+      </p:sp>
+    </p:spTree>
+  </p:cSld>
+  <p:clrMapOvr>
+    <a:masterClrMapping xmlns:a="http://schemas.openxmlformats.org/drawingml/2006/main"/>
+  </p:clrMapOvr>
+</p:notes>
+</file>
+
+<file path=ppt/notesSlides/notesSlide9.xml><?xml version="1.0" encoding="utf-8"?>
+<p:notes xmlns:p="http://schemas.openxmlformats.org/presentationml/2006/main">
+  <p:cSld>
+    <p:spTree>
+      <p:nvGrpSpPr>
+        <p:cNvPr id="1" name=""/>
+        <p:cNvGrpSpPr/>
+        <p:nvPr/>
+      </p:nvGrpSpPr>
+      <p:grpSpPr>
+        <a:xfrm xmlns:a="http://schemas.openxmlformats.org/drawingml/2006/main"/>
+      </p:grpSpPr>
+      <p:sp>
+        <p:nvSpPr>
+          <p:cNvPr id="2" name="Slide Image Placeholder 1"/>
+          <p:cNvSpPr/>
+          <p:nvPr>
+            <p:ph type="sldImg" idx="0"/>
+          </p:nvPr>
+        </p:nvSpPr>
+        <p:spPr/>
+        <p:txBody>
+          <a:bodyPr xmlns:a="http://schemas.openxmlformats.org/drawingml/2006/main"/>
+          <a:lstStyle xmlns:a="http://schemas.openxmlformats.org/drawingml/2006/main"/>
+          <a:p xmlns:a="http://schemas.openxmlformats.org/drawingml/2006/main"/>
+        </p:txBody>
+      </p:sp>
+      <p:sp>
+        <p:nvSpPr>
+          <p:cNvPr id="3" name="Notes Placeholder 2"/>
+          <p:cNvSpPr/>
+          <p:nvPr>
+            <p:ph type="body" idx="1"/>
+          </p:nvPr>
+        </p:nvSpPr>
+        <p:spPr/>
+        <p:txBody>
+          <a:bodyPr xmlns:a="http://schemas.openxmlformats.org/drawingml/2006/main"/>
+          <a:lstStyle xmlns:a="http://schemas.openxmlformats.org/drawingml/2006/main"/>
+          <a:p xmlns:a="http://schemas.openxmlformats.org/drawingml/2006/main">
+            <a:r>
+              <a:rPr lang="en-US"/>
+              <a:t>Duration: about 70 seconds.</a:t>
+            </a:r>
+          </a:p>
+          <a:p xmlns:a="http://schemas.openxmlformats.org/drawingml/2006/main">
+            <a:r>
+              <a:rPr lang="en-US"/>
+              <a:t>Order follows conditions, not dates. Then the ask: vendor artifacts and an adversarial review of the register. Close on the deadline.</a:t>
             </a:r>
           </a:p>
         </p:txBody>
@@ -1236,10 +1608,10 @@
         </p:nvSpPr>
         <p:spPr>
           <a:xfrm xmlns:a="http://schemas.openxmlformats.org/drawingml/2006/main">
-            <a:off x="792000" y="4806000"/>
-            <a:ext cx="4176000" cy="558000"/>
-          </a:xfrm>
-          <a:prstGeom xmlns:a="http://schemas.openxmlformats.org/drawingml/2006/main" prst="roundRect">
+            <a:off x="792000" y="4788000"/>
+            <a:ext cx="4536000" cy="576000"/>
+          </a:xfrm>
+          <a:prstGeom xmlns:a="http://schemas.openxmlformats.org/drawingml/2006/main" prst="rect">
             <a:avLst/>
           </a:prstGeom>
           <a:solidFill xmlns:a="http://schemas.openxmlformats.org/drawingml/2006/main">
@@ -1276,8 +1648,8 @@
         </p:nvSpPr>
         <p:spPr>
           <a:xfrm xmlns:a="http://schemas.openxmlformats.org/drawingml/2006/main">
-            <a:off x="1008000" y="5022000"/>
-            <a:ext cx="180000" cy="50400"/>
+            <a:off x="792000" y="4788000"/>
+            <a:ext cx="50400" cy="576000"/>
           </a:xfrm>
           <a:prstGeom xmlns:a="http://schemas.openxmlformats.org/drawingml/2006/main" prst="rect">
             <a:avLst/>
@@ -1314,8 +1686,8 @@
         </p:nvSpPr>
         <p:spPr>
           <a:xfrm xmlns:a="http://schemas.openxmlformats.org/drawingml/2006/main">
-            <a:off x="1224000" y="4824000"/>
-            <a:ext cx="3672000" cy="522000"/>
+            <a:off x="1134000" y="4788000"/>
+            <a:ext cx="4032000" cy="576000"/>
           </a:xfrm>
           <a:prstGeom xmlns:a="http://schemas.openxmlformats.org/drawingml/2006/main" prst="rect">
             <a:avLst/>
@@ -1354,7 +1726,7 @@
           <p:nvPr/>
         </p:nvPicPr>
         <p:blipFill>
-          <a:blip xmlns:r="http://schemas.openxmlformats.org/officeDocument/2006/relationships" xmlns:a="http://schemas.openxmlformats.org/drawingml/2006/main" r:embed="R8540c212ed734847"/>
+          <a:blip xmlns:r="http://schemas.openxmlformats.org/officeDocument/2006/relationships" xmlns:a="http://schemas.openxmlformats.org/drawingml/2006/main" r:embed="R952af91480c345ff"/>
           <a:stretch xmlns:a="http://schemas.openxmlformats.org/drawingml/2006/main">
             <a:fillRect/>
           </a:stretch>
@@ -1369,6 +1741,1207 @@
           </a:prstGeom>
         </p:spPr>
       </p:pic>
+    </p:spTree>
+  </p:cSld>
+</p:sld>
+</file>
+
+<file path=ppt/slides/slide10.xml><?xml version="1.0" encoding="utf-8"?>
+<p:sld xmlns:p="http://schemas.openxmlformats.org/presentationml/2006/main">
+  <p:cSld>
+    <p:bg>
+      <p:bgPr>
+        <a:solidFill xmlns:a="http://schemas.openxmlformats.org/drawingml/2006/main">
+          <a:srgbClr val="FFFFFF"/>
+        </a:solidFill>
+      </p:bgPr>
+    </p:bg>
+    <p:spTree>
+      <p:nvGrpSpPr>
+        <p:cNvPr id="1" name=""/>
+        <p:cNvGrpSpPr/>
+        <p:nvPr/>
+      </p:nvGrpSpPr>
+      <p:grpSpPr/>
+      <p:pic>
+        <p:nvPicPr>
+          <p:cNvPr id="100238" name="Picture 1" descr="SMart ILIA — UMONS"/>
+          <p:cNvPicPr>
+            <a:picLocks xmlns:a="http://schemas.openxmlformats.org/drawingml/2006/main" noChangeAspect="1"/>
+          </p:cNvPicPr>
+          <p:nvPr/>
+        </p:nvPicPr>
+        <p:blipFill>
+          <a:blip xmlns:r="http://schemas.openxmlformats.org/officeDocument/2006/relationships" xmlns:a="http://schemas.openxmlformats.org/drawingml/2006/main" r:embed="R68b8817411f94e52"/>
+          <a:stretch xmlns:a="http://schemas.openxmlformats.org/drawingml/2006/main">
+            <a:fillRect/>
+          </a:stretch>
+        </p:blipFill>
+        <p:spPr>
+          <a:xfrm xmlns:a="http://schemas.openxmlformats.org/drawingml/2006/main">
+            <a:off x="9702000" y="216000"/>
+            <a:ext cx="1699200" cy="582331"/>
+          </a:xfrm>
+          <a:prstGeom xmlns:a="http://schemas.openxmlformats.org/drawingml/2006/main" prst="rect">
+            <a:avLst/>
+          </a:prstGeom>
+        </p:spPr>
+      </p:pic>
+      <p:sp>
+        <p:nvSpPr>
+          <p:cNvPr id="100239" name="Element-4"/>
+          <p:cNvSpPr/>
+          <p:nvPr/>
+        </p:nvSpPr>
+        <p:spPr>
+          <a:xfrm xmlns:a="http://schemas.openxmlformats.org/drawingml/2006/main">
+            <a:off x="792000" y="309600"/>
+            <a:ext cx="1764000" cy="208800"/>
+          </a:xfrm>
+          <a:prstGeom xmlns:a="http://schemas.openxmlformats.org/drawingml/2006/main" prst="rect">
+            <a:avLst/>
+          </a:prstGeom>
+          <a:noFill xmlns:a="http://schemas.openxmlformats.org/drawingml/2006/main"/>
+          <a:ln xmlns:a="http://schemas.openxmlformats.org/drawingml/2006/main">
+            <a:noFill/>
+          </a:ln>
+        </p:spPr>
+        <p:txBody>
+          <a:bodyPr xmlns:a="http://schemas.openxmlformats.org/drawingml/2006/main" lIns="0" tIns="0" rIns="0" bIns="0" anchor="ctr">
+            <a:noAutofit/>
+          </a:bodyPr>
+          <a:lstStyle xmlns:a="http://schemas.openxmlformats.org/drawingml/2006/main"/>
+          <a:p xmlns:a="http://schemas.openxmlformats.org/drawingml/2006/main">
+            <a:pPr algn="l"/>
+            <a:r>
+              <a:rPr lang="en-US" sz="950" b="0" i="0">
+                <a:solidFill>
+                  <a:srgbClr val="5C626C"/>
+                </a:solidFill>
+                <a:latin typeface="Arial"/>
+                <a:ea typeface="Arial"/>
+              </a:rPr>
+              <a:t>Objective</a:t>
+            </a:r>
+          </a:p>
+        </p:txBody>
+      </p:sp>
+      <p:sp>
+        <p:nvSpPr>
+          <p:cNvPr id="100240" name="Element-5"/>
+          <p:cNvSpPr/>
+          <p:nvPr/>
+        </p:nvSpPr>
+        <p:spPr>
+          <a:xfrm xmlns:a="http://schemas.openxmlformats.org/drawingml/2006/main">
+            <a:off x="2736000" y="309600"/>
+            <a:ext cx="1764000" cy="208800"/>
+          </a:xfrm>
+          <a:prstGeom xmlns:a="http://schemas.openxmlformats.org/drawingml/2006/main" prst="rect">
+            <a:avLst/>
+          </a:prstGeom>
+          <a:noFill xmlns:a="http://schemas.openxmlformats.org/drawingml/2006/main"/>
+          <a:ln xmlns:a="http://schemas.openxmlformats.org/drawingml/2006/main">
+            <a:noFill/>
+          </a:ln>
+        </p:spPr>
+        <p:txBody>
+          <a:bodyPr xmlns:a="http://schemas.openxmlformats.org/drawingml/2006/main" lIns="0" tIns="0" rIns="0" bIns="0" anchor="ctr">
+            <a:noAutofit/>
+          </a:bodyPr>
+          <a:lstStyle xmlns:a="http://schemas.openxmlformats.org/drawingml/2006/main"/>
+          <a:p xmlns:a="http://schemas.openxmlformats.org/drawingml/2006/main">
+            <a:pPr algn="l"/>
+            <a:r>
+              <a:rPr lang="en-US" sz="950" b="0" i="0">
+                <a:solidFill>
+                  <a:srgbClr val="5C626C"/>
+                </a:solidFill>
+                <a:latin typeface="Arial"/>
+                <a:ea typeface="Arial"/>
+              </a:rPr>
+              <a:t>Instrument</a:t>
+            </a:r>
+          </a:p>
+        </p:txBody>
+      </p:sp>
+      <p:sp>
+        <p:nvSpPr>
+          <p:cNvPr id="100241" name="Element-6"/>
+          <p:cNvSpPr/>
+          <p:nvPr/>
+        </p:nvSpPr>
+        <p:spPr>
+          <a:xfrm xmlns:a="http://schemas.openxmlformats.org/drawingml/2006/main">
+            <a:off x="4680000" y="309600"/>
+            <a:ext cx="1764000" cy="208800"/>
+          </a:xfrm>
+          <a:prstGeom xmlns:a="http://schemas.openxmlformats.org/drawingml/2006/main" prst="rect">
+            <a:avLst/>
+          </a:prstGeom>
+          <a:noFill xmlns:a="http://schemas.openxmlformats.org/drawingml/2006/main"/>
+          <a:ln xmlns:a="http://schemas.openxmlformats.org/drawingml/2006/main">
+            <a:noFill/>
+          </a:ln>
+        </p:spPr>
+        <p:txBody>
+          <a:bodyPr xmlns:a="http://schemas.openxmlformats.org/drawingml/2006/main" lIns="0" tIns="0" rIns="0" bIns="0" anchor="ctr">
+            <a:noAutofit/>
+          </a:bodyPr>
+          <a:lstStyle xmlns:a="http://schemas.openxmlformats.org/drawingml/2006/main"/>
+          <a:p xmlns:a="http://schemas.openxmlformats.org/drawingml/2006/main">
+            <a:pPr algn="l"/>
+            <a:r>
+              <a:rPr lang="en-US" sz="950" b="0" i="0">
+                <a:solidFill>
+                  <a:srgbClr val="5C626C"/>
+                </a:solidFill>
+                <a:latin typeface="Arial"/>
+                <a:ea typeface="Arial"/>
+              </a:rPr>
+              <a:t>Hypotheses</a:t>
+            </a:r>
+          </a:p>
+        </p:txBody>
+      </p:sp>
+      <p:sp>
+        <p:nvSpPr>
+          <p:cNvPr id="100242" name="Element-7"/>
+          <p:cNvSpPr/>
+          <p:nvPr/>
+        </p:nvSpPr>
+        <p:spPr>
+          <a:xfrm xmlns:a="http://schemas.openxmlformats.org/drawingml/2006/main">
+            <a:off x="6624000" y="309600"/>
+            <a:ext cx="1764000" cy="208800"/>
+          </a:xfrm>
+          <a:prstGeom xmlns:a="http://schemas.openxmlformats.org/drawingml/2006/main" prst="rect">
+            <a:avLst/>
+          </a:prstGeom>
+          <a:noFill xmlns:a="http://schemas.openxmlformats.org/drawingml/2006/main"/>
+          <a:ln xmlns:a="http://schemas.openxmlformats.org/drawingml/2006/main">
+            <a:noFill/>
+          </a:ln>
+        </p:spPr>
+        <p:txBody>
+          <a:bodyPr xmlns:a="http://schemas.openxmlformats.org/drawingml/2006/main" lIns="0" tIns="0" rIns="0" bIns="0" anchor="ctr">
+            <a:noAutofit/>
+          </a:bodyPr>
+          <a:lstStyle xmlns:a="http://schemas.openxmlformats.org/drawingml/2006/main"/>
+          <a:p xmlns:a="http://schemas.openxmlformats.org/drawingml/2006/main">
+            <a:pPr algn="l"/>
+            <a:r>
+              <a:rPr lang="en-US" sz="950" b="0" i="0">
+                <a:solidFill>
+                  <a:srgbClr val="B60036"/>
+                </a:solidFill>
+                <a:latin typeface="Arial"/>
+                <a:ea typeface="Arial"/>
+              </a:rPr>
+              <a:t>Outlook</a:t>
+            </a:r>
+          </a:p>
+        </p:txBody>
+      </p:sp>
+      <p:sp>
+        <p:nvSpPr>
+          <p:cNvPr id="100243" name="Element-8"/>
+          <p:cNvSpPr/>
+          <p:nvPr/>
+        </p:nvSpPr>
+        <p:spPr>
+          <a:xfrm xmlns:a="http://schemas.openxmlformats.org/drawingml/2006/main">
+            <a:off x="6624000" y="529200"/>
+            <a:ext cx="1764000" cy="16200"/>
+          </a:xfrm>
+          <a:prstGeom xmlns:a="http://schemas.openxmlformats.org/drawingml/2006/main" prst="rect">
+            <a:avLst/>
+          </a:prstGeom>
+          <a:solidFill xmlns:a="http://schemas.openxmlformats.org/drawingml/2006/main">
+            <a:srgbClr val="B60036"/>
+          </a:solidFill>
+          <a:ln xmlns:a="http://schemas.openxmlformats.org/drawingml/2006/main">
+            <a:noFill/>
+          </a:ln>
+        </p:spPr>
+        <p:txBody>
+          <a:bodyPr xmlns:a="http://schemas.openxmlformats.org/drawingml/2006/main" lIns="0" tIns="0" rIns="0" bIns="0" anchor="ctr">
+            <a:noAutofit/>
+          </a:bodyPr>
+          <a:lstStyle xmlns:a="http://schemas.openxmlformats.org/drawingml/2006/main"/>
+          <a:p xmlns:a="http://schemas.openxmlformats.org/drawingml/2006/main">
+            <a:pPr algn="l"/>
+            <a:endParaRPr lang="en-US" sz="1800" b="0" i="0">
+              <a:solidFill>
+                <a:srgbClr val="20252D"/>
+              </a:solidFill>
+              <a:latin typeface="Arial"/>
+              <a:ea typeface="Arial"/>
+            </a:endParaRPr>
+          </a:p>
+        </p:txBody>
+      </p:sp>
+      <p:sp>
+        <p:nvSpPr>
+          <p:cNvPr id="100244" name="Title"/>
+          <p:cNvSpPr/>
+          <p:nvPr/>
+        </p:nvSpPr>
+        <p:spPr>
+          <a:xfrm xmlns:a="http://schemas.openxmlformats.org/drawingml/2006/main">
+            <a:off x="792000" y="612000"/>
+            <a:ext cx="8748000" cy="648000"/>
+          </a:xfrm>
+          <a:prstGeom xmlns:a="http://schemas.openxmlformats.org/drawingml/2006/main" prst="rect">
+            <a:avLst/>
+          </a:prstGeom>
+          <a:noFill xmlns:a="http://schemas.openxmlformats.org/drawingml/2006/main"/>
+          <a:ln xmlns:a="http://schemas.openxmlformats.org/drawingml/2006/main">
+            <a:noFill/>
+          </a:ln>
+        </p:spPr>
+        <p:txBody>
+          <a:bodyPr xmlns:a="http://schemas.openxmlformats.org/drawingml/2006/main" lIns="0" tIns="0" rIns="0" bIns="0" anchor="ctr">
+            <a:noAutofit/>
+          </a:bodyPr>
+          <a:lstStyle xmlns:a="http://schemas.openxmlformats.org/drawingml/2006/main"/>
+          <a:p xmlns:a="http://schemas.openxmlformats.org/drawingml/2006/main">
+            <a:pPr algn="l"/>
+            <a:r>
+              <a:rPr lang="en-US" sz="2900" b="1" i="0">
+                <a:solidFill>
+                  <a:srgbClr val="20252D"/>
+                </a:solidFill>
+                <a:latin typeface="Arial"/>
+                <a:ea typeface="Arial"/>
+              </a:rPr>
+              <a:t>Reserve — declared coverage gaps</a:t>
+            </a:r>
+          </a:p>
+        </p:txBody>
+      </p:sp>
+      <p:sp>
+        <p:nvSpPr>
+          <p:cNvPr id="100245" name="Element-10"/>
+          <p:cNvSpPr/>
+          <p:nvPr/>
+        </p:nvSpPr>
+        <p:spPr>
+          <a:xfrm xmlns:a="http://schemas.openxmlformats.org/drawingml/2006/main">
+            <a:off x="792000" y="1303200"/>
+            <a:ext cx="1224000" cy="25200"/>
+          </a:xfrm>
+          <a:prstGeom xmlns:a="http://schemas.openxmlformats.org/drawingml/2006/main" prst="rect">
+            <a:avLst/>
+          </a:prstGeom>
+          <a:solidFill xmlns:a="http://schemas.openxmlformats.org/drawingml/2006/main">
+            <a:srgbClr val="B60036"/>
+          </a:solidFill>
+          <a:ln xmlns:a="http://schemas.openxmlformats.org/drawingml/2006/main">
+            <a:noFill/>
+          </a:ln>
+        </p:spPr>
+        <p:txBody>
+          <a:bodyPr xmlns:a="http://schemas.openxmlformats.org/drawingml/2006/main" lIns="0" tIns="0" rIns="0" bIns="0" anchor="ctr">
+            <a:noAutofit/>
+          </a:bodyPr>
+          <a:lstStyle xmlns:a="http://schemas.openxmlformats.org/drawingml/2006/main"/>
+          <a:p xmlns:a="http://schemas.openxmlformats.org/drawingml/2006/main">
+            <a:pPr algn="l"/>
+            <a:endParaRPr lang="en-US" sz="1800" b="0" i="0">
+              <a:solidFill>
+                <a:srgbClr val="20252D"/>
+              </a:solidFill>
+              <a:latin typeface="Arial"/>
+              <a:ea typeface="Arial"/>
+            </a:endParaRPr>
+          </a:p>
+        </p:txBody>
+      </p:sp>
+      <p:sp>
+        <p:nvSpPr>
+          <p:cNvPr id="100246" name="Element-11"/>
+          <p:cNvSpPr/>
+          <p:nvPr/>
+        </p:nvSpPr>
+        <p:spPr>
+          <a:xfrm xmlns:a="http://schemas.openxmlformats.org/drawingml/2006/main">
+            <a:off x="792000" y="1926000"/>
+            <a:ext cx="198000" cy="43200"/>
+          </a:xfrm>
+          <a:prstGeom xmlns:a="http://schemas.openxmlformats.org/drawingml/2006/main" prst="rect">
+            <a:avLst/>
+          </a:prstGeom>
+          <a:solidFill xmlns:a="http://schemas.openxmlformats.org/drawingml/2006/main">
+            <a:srgbClr val="B60036"/>
+          </a:solidFill>
+          <a:ln xmlns:a="http://schemas.openxmlformats.org/drawingml/2006/main">
+            <a:noFill/>
+          </a:ln>
+        </p:spPr>
+        <p:txBody>
+          <a:bodyPr xmlns:a="http://schemas.openxmlformats.org/drawingml/2006/main" lIns="0" tIns="0" rIns="0" bIns="0" anchor="ctr">
+            <a:noAutofit/>
+          </a:bodyPr>
+          <a:lstStyle xmlns:a="http://schemas.openxmlformats.org/drawingml/2006/main"/>
+          <a:p xmlns:a="http://schemas.openxmlformats.org/drawingml/2006/main">
+            <a:pPr algn="l"/>
+            <a:endParaRPr lang="en-US" sz="1800" b="0" i="0">
+              <a:solidFill>
+                <a:srgbClr val="20252D"/>
+              </a:solidFill>
+              <a:latin typeface="Arial"/>
+              <a:ea typeface="Arial"/>
+            </a:endParaRPr>
+          </a:p>
+        </p:txBody>
+      </p:sp>
+      <p:sp>
+        <p:nvSpPr>
+          <p:cNvPr id="100247" name="Fixed-12"/>
+          <p:cNvSpPr/>
+          <p:nvPr/>
+        </p:nvSpPr>
+        <p:spPr>
+          <a:xfrm xmlns:a="http://schemas.openxmlformats.org/drawingml/2006/main">
+            <a:off x="1170000" y="1818000"/>
+            <a:ext cx="4638000" cy="720000"/>
+          </a:xfrm>
+          <a:prstGeom xmlns:a="http://schemas.openxmlformats.org/drawingml/2006/main" prst="rect">
+            <a:avLst/>
+          </a:prstGeom>
+          <a:noFill xmlns:a="http://schemas.openxmlformats.org/drawingml/2006/main"/>
+          <a:ln xmlns:a="http://schemas.openxmlformats.org/drawingml/2006/main">
+            <a:noFill/>
+          </a:ln>
+        </p:spPr>
+        <p:txBody>
+          <a:bodyPr xmlns:a="http://schemas.openxmlformats.org/drawingml/2006/main" lIns="0" tIns="0" rIns="0" bIns="0" anchor="t">
+            <a:noAutofit/>
+          </a:bodyPr>
+          <a:lstStyle xmlns:a="http://schemas.openxmlformats.org/drawingml/2006/main"/>
+          <a:p xmlns:a="http://schemas.openxmlformats.org/drawingml/2006/main">
+            <a:pPr algn="l"/>
+            <a:r>
+              <a:rPr lang="en-US" sz="1600" b="0" i="0">
+                <a:solidFill>
+                  <a:srgbClr val="20252D"/>
+                </a:solidFill>
+                <a:latin typeface="Arial"/>
+                <a:ea typeface="Arial"/>
+              </a:rPr>
+              <a:t>Physical impact and functional safety</a:t>
+            </a:r>
+          </a:p>
+        </p:txBody>
+      </p:sp>
+      <p:sp>
+        <p:nvSpPr>
+          <p:cNvPr id="100248" name="Element-13"/>
+          <p:cNvSpPr/>
+          <p:nvPr/>
+        </p:nvSpPr>
+        <p:spPr>
+          <a:xfrm xmlns:a="http://schemas.openxmlformats.org/drawingml/2006/main">
+            <a:off x="792000" y="2520000"/>
+            <a:ext cx="5016000" cy="10800"/>
+          </a:xfrm>
+          <a:prstGeom xmlns:a="http://schemas.openxmlformats.org/drawingml/2006/main" prst="rect">
+            <a:avLst/>
+          </a:prstGeom>
+          <a:solidFill xmlns:a="http://schemas.openxmlformats.org/drawingml/2006/main">
+            <a:srgbClr val="D9DEE5"/>
+          </a:solidFill>
+          <a:ln xmlns:a="http://schemas.openxmlformats.org/drawingml/2006/main">
+            <a:noFill/>
+          </a:ln>
+        </p:spPr>
+        <p:txBody>
+          <a:bodyPr xmlns:a="http://schemas.openxmlformats.org/drawingml/2006/main" lIns="0" tIns="0" rIns="0" bIns="0" anchor="ctr">
+            <a:noAutofit/>
+          </a:bodyPr>
+          <a:lstStyle xmlns:a="http://schemas.openxmlformats.org/drawingml/2006/main"/>
+          <a:p xmlns:a="http://schemas.openxmlformats.org/drawingml/2006/main">
+            <a:pPr algn="l"/>
+            <a:endParaRPr lang="en-US" sz="1800" b="0" i="0">
+              <a:solidFill>
+                <a:srgbClr val="20252D"/>
+              </a:solidFill>
+              <a:latin typeface="Arial"/>
+              <a:ea typeface="Arial"/>
+            </a:endParaRPr>
+          </a:p>
+        </p:txBody>
+      </p:sp>
+      <p:sp>
+        <p:nvSpPr>
+          <p:cNvPr id="100249" name="Element-14"/>
+          <p:cNvSpPr/>
+          <p:nvPr/>
+        </p:nvSpPr>
+        <p:spPr>
+          <a:xfrm xmlns:a="http://schemas.openxmlformats.org/drawingml/2006/main">
+            <a:off x="792000" y="2808000"/>
+            <a:ext cx="198000" cy="43200"/>
+          </a:xfrm>
+          <a:prstGeom xmlns:a="http://schemas.openxmlformats.org/drawingml/2006/main" prst="rect">
+            <a:avLst/>
+          </a:prstGeom>
+          <a:solidFill xmlns:a="http://schemas.openxmlformats.org/drawingml/2006/main">
+            <a:srgbClr val="B60036"/>
+          </a:solidFill>
+          <a:ln xmlns:a="http://schemas.openxmlformats.org/drawingml/2006/main">
+            <a:noFill/>
+          </a:ln>
+        </p:spPr>
+        <p:txBody>
+          <a:bodyPr xmlns:a="http://schemas.openxmlformats.org/drawingml/2006/main" lIns="0" tIns="0" rIns="0" bIns="0" anchor="ctr">
+            <a:noAutofit/>
+          </a:bodyPr>
+          <a:lstStyle xmlns:a="http://schemas.openxmlformats.org/drawingml/2006/main"/>
+          <a:p xmlns:a="http://schemas.openxmlformats.org/drawingml/2006/main">
+            <a:pPr algn="l"/>
+            <a:endParaRPr lang="en-US" sz="1800" b="0" i="0">
+              <a:solidFill>
+                <a:srgbClr val="20252D"/>
+              </a:solidFill>
+              <a:latin typeface="Arial"/>
+              <a:ea typeface="Arial"/>
+            </a:endParaRPr>
+          </a:p>
+        </p:txBody>
+      </p:sp>
+      <p:sp>
+        <p:nvSpPr>
+          <p:cNvPr id="100250" name="Fixed-15"/>
+          <p:cNvSpPr/>
+          <p:nvPr/>
+        </p:nvSpPr>
+        <p:spPr>
+          <a:xfrm xmlns:a="http://schemas.openxmlformats.org/drawingml/2006/main">
+            <a:off x="1170000" y="2700000"/>
+            <a:ext cx="4638000" cy="720000"/>
+          </a:xfrm>
+          <a:prstGeom xmlns:a="http://schemas.openxmlformats.org/drawingml/2006/main" prst="rect">
+            <a:avLst/>
+          </a:prstGeom>
+          <a:noFill xmlns:a="http://schemas.openxmlformats.org/drawingml/2006/main"/>
+          <a:ln xmlns:a="http://schemas.openxmlformats.org/drawingml/2006/main">
+            <a:noFill/>
+          </a:ln>
+        </p:spPr>
+        <p:txBody>
+          <a:bodyPr xmlns:a="http://schemas.openxmlformats.org/drawingml/2006/main" lIns="0" tIns="0" rIns="0" bIns="0" anchor="t">
+            <a:noAutofit/>
+          </a:bodyPr>
+          <a:lstStyle xmlns:a="http://schemas.openxmlformats.org/drawingml/2006/main"/>
+          <a:p xmlns:a="http://schemas.openxmlformats.org/drawingml/2006/main">
+            <a:pPr algn="l"/>
+            <a:r>
+              <a:rPr lang="en-US" sz="1600" b="0" i="0">
+                <a:solidFill>
+                  <a:srgbClr val="20252D"/>
+                </a:solidFill>
+                <a:latin typeface="Arial"/>
+                <a:ea typeface="Arial"/>
+              </a:rPr>
+              <a:t>Device fragility under probing</a:t>
+            </a:r>
+          </a:p>
+        </p:txBody>
+      </p:sp>
+      <p:sp>
+        <p:nvSpPr>
+          <p:cNvPr id="100251" name="Element-16"/>
+          <p:cNvSpPr/>
+          <p:nvPr/>
+        </p:nvSpPr>
+        <p:spPr>
+          <a:xfrm xmlns:a="http://schemas.openxmlformats.org/drawingml/2006/main">
+            <a:off x="792000" y="3402000"/>
+            <a:ext cx="5016000" cy="10800"/>
+          </a:xfrm>
+          <a:prstGeom xmlns:a="http://schemas.openxmlformats.org/drawingml/2006/main" prst="rect">
+            <a:avLst/>
+          </a:prstGeom>
+          <a:solidFill xmlns:a="http://schemas.openxmlformats.org/drawingml/2006/main">
+            <a:srgbClr val="D9DEE5"/>
+          </a:solidFill>
+          <a:ln xmlns:a="http://schemas.openxmlformats.org/drawingml/2006/main">
+            <a:noFill/>
+          </a:ln>
+        </p:spPr>
+        <p:txBody>
+          <a:bodyPr xmlns:a="http://schemas.openxmlformats.org/drawingml/2006/main" lIns="0" tIns="0" rIns="0" bIns="0" anchor="ctr">
+            <a:noAutofit/>
+          </a:bodyPr>
+          <a:lstStyle xmlns:a="http://schemas.openxmlformats.org/drawingml/2006/main"/>
+          <a:p xmlns:a="http://schemas.openxmlformats.org/drawingml/2006/main">
+            <a:pPr algn="l"/>
+            <a:endParaRPr lang="en-US" sz="1800" b="0" i="0">
+              <a:solidFill>
+                <a:srgbClr val="20252D"/>
+              </a:solidFill>
+              <a:latin typeface="Arial"/>
+              <a:ea typeface="Arial"/>
+            </a:endParaRPr>
+          </a:p>
+        </p:txBody>
+      </p:sp>
+      <p:sp>
+        <p:nvSpPr>
+          <p:cNvPr id="100252" name="Element-17"/>
+          <p:cNvSpPr/>
+          <p:nvPr/>
+        </p:nvSpPr>
+        <p:spPr>
+          <a:xfrm xmlns:a="http://schemas.openxmlformats.org/drawingml/2006/main">
+            <a:off x="792000" y="3690000"/>
+            <a:ext cx="198000" cy="43200"/>
+          </a:xfrm>
+          <a:prstGeom xmlns:a="http://schemas.openxmlformats.org/drawingml/2006/main" prst="rect">
+            <a:avLst/>
+          </a:prstGeom>
+          <a:solidFill xmlns:a="http://schemas.openxmlformats.org/drawingml/2006/main">
+            <a:srgbClr val="B60036"/>
+          </a:solidFill>
+          <a:ln xmlns:a="http://schemas.openxmlformats.org/drawingml/2006/main">
+            <a:noFill/>
+          </a:ln>
+        </p:spPr>
+        <p:txBody>
+          <a:bodyPr xmlns:a="http://schemas.openxmlformats.org/drawingml/2006/main" lIns="0" tIns="0" rIns="0" bIns="0" anchor="ctr">
+            <a:noAutofit/>
+          </a:bodyPr>
+          <a:lstStyle xmlns:a="http://schemas.openxmlformats.org/drawingml/2006/main"/>
+          <a:p xmlns:a="http://schemas.openxmlformats.org/drawingml/2006/main">
+            <a:pPr algn="l"/>
+            <a:endParaRPr lang="en-US" sz="1800" b="0" i="0">
+              <a:solidFill>
+                <a:srgbClr val="20252D"/>
+              </a:solidFill>
+              <a:latin typeface="Arial"/>
+              <a:ea typeface="Arial"/>
+            </a:endParaRPr>
+          </a:p>
+        </p:txBody>
+      </p:sp>
+      <p:sp>
+        <p:nvSpPr>
+          <p:cNvPr id="100253" name="Fixed-18"/>
+          <p:cNvSpPr/>
+          <p:nvPr/>
+        </p:nvSpPr>
+        <p:spPr>
+          <a:xfrm xmlns:a="http://schemas.openxmlformats.org/drawingml/2006/main">
+            <a:off x="1170000" y="3582000"/>
+            <a:ext cx="4638000" cy="720000"/>
+          </a:xfrm>
+          <a:prstGeom xmlns:a="http://schemas.openxmlformats.org/drawingml/2006/main" prst="rect">
+            <a:avLst/>
+          </a:prstGeom>
+          <a:noFill xmlns:a="http://schemas.openxmlformats.org/drawingml/2006/main"/>
+          <a:ln xmlns:a="http://schemas.openxmlformats.org/drawingml/2006/main">
+            <a:noFill/>
+          </a:ln>
+        </p:spPr>
+        <p:txBody>
+          <a:bodyPr xmlns:a="http://schemas.openxmlformats.org/drawingml/2006/main" lIns="0" tIns="0" rIns="0" bIns="0" anchor="t">
+            <a:noAutofit/>
+          </a:bodyPr>
+          <a:lstStyle xmlns:a="http://schemas.openxmlformats.org/drawingml/2006/main"/>
+          <a:p xmlns:a="http://schemas.openxmlformats.org/drawingml/2006/main">
+            <a:pPr algn="l"/>
+            <a:r>
+              <a:rPr lang="en-US" sz="1600" b="0" i="0">
+                <a:solidFill>
+                  <a:srgbClr val="20252D"/>
+                </a:solidFill>
+                <a:latin typeface="Arial"/>
+                <a:ea typeface="Arial"/>
+              </a:rPr>
+              <a:t>Real fleet scale</a:t>
+            </a:r>
+          </a:p>
+        </p:txBody>
+      </p:sp>
+      <p:sp>
+        <p:nvSpPr>
+          <p:cNvPr id="100254" name="Element-19"/>
+          <p:cNvSpPr/>
+          <p:nvPr/>
+        </p:nvSpPr>
+        <p:spPr>
+          <a:xfrm xmlns:a="http://schemas.openxmlformats.org/drawingml/2006/main">
+            <a:off x="792000" y="4284000"/>
+            <a:ext cx="5016000" cy="10800"/>
+          </a:xfrm>
+          <a:prstGeom xmlns:a="http://schemas.openxmlformats.org/drawingml/2006/main" prst="rect">
+            <a:avLst/>
+          </a:prstGeom>
+          <a:solidFill xmlns:a="http://schemas.openxmlformats.org/drawingml/2006/main">
+            <a:srgbClr val="D9DEE5"/>
+          </a:solidFill>
+          <a:ln xmlns:a="http://schemas.openxmlformats.org/drawingml/2006/main">
+            <a:noFill/>
+          </a:ln>
+        </p:spPr>
+        <p:txBody>
+          <a:bodyPr xmlns:a="http://schemas.openxmlformats.org/drawingml/2006/main" lIns="0" tIns="0" rIns="0" bIns="0" anchor="ctr">
+            <a:noAutofit/>
+          </a:bodyPr>
+          <a:lstStyle xmlns:a="http://schemas.openxmlformats.org/drawingml/2006/main"/>
+          <a:p xmlns:a="http://schemas.openxmlformats.org/drawingml/2006/main">
+            <a:pPr algn="l"/>
+            <a:endParaRPr lang="en-US" sz="1800" b="0" i="0">
+              <a:solidFill>
+                <a:srgbClr val="20252D"/>
+              </a:solidFill>
+              <a:latin typeface="Arial"/>
+              <a:ea typeface="Arial"/>
+            </a:endParaRPr>
+          </a:p>
+        </p:txBody>
+      </p:sp>
+      <p:sp>
+        <p:nvSpPr>
+          <p:cNvPr id="100255" name="Element-20"/>
+          <p:cNvSpPr/>
+          <p:nvPr/>
+        </p:nvSpPr>
+        <p:spPr>
+          <a:xfrm xmlns:a="http://schemas.openxmlformats.org/drawingml/2006/main">
+            <a:off x="792000" y="4572000"/>
+            <a:ext cx="198000" cy="43200"/>
+          </a:xfrm>
+          <a:prstGeom xmlns:a="http://schemas.openxmlformats.org/drawingml/2006/main" prst="rect">
+            <a:avLst/>
+          </a:prstGeom>
+          <a:solidFill xmlns:a="http://schemas.openxmlformats.org/drawingml/2006/main">
+            <a:srgbClr val="B60036"/>
+          </a:solidFill>
+          <a:ln xmlns:a="http://schemas.openxmlformats.org/drawingml/2006/main">
+            <a:noFill/>
+          </a:ln>
+        </p:spPr>
+        <p:txBody>
+          <a:bodyPr xmlns:a="http://schemas.openxmlformats.org/drawingml/2006/main" lIns="0" tIns="0" rIns="0" bIns="0" anchor="ctr">
+            <a:noAutofit/>
+          </a:bodyPr>
+          <a:lstStyle xmlns:a="http://schemas.openxmlformats.org/drawingml/2006/main"/>
+          <a:p xmlns:a="http://schemas.openxmlformats.org/drawingml/2006/main">
+            <a:pPr algn="l"/>
+            <a:endParaRPr lang="en-US" sz="1800" b="0" i="0">
+              <a:solidFill>
+                <a:srgbClr val="20252D"/>
+              </a:solidFill>
+              <a:latin typeface="Arial"/>
+              <a:ea typeface="Arial"/>
+            </a:endParaRPr>
+          </a:p>
+        </p:txBody>
+      </p:sp>
+      <p:sp>
+        <p:nvSpPr>
+          <p:cNvPr id="100256" name="Fixed-21"/>
+          <p:cNvSpPr/>
+          <p:nvPr/>
+        </p:nvSpPr>
+        <p:spPr>
+          <a:xfrm xmlns:a="http://schemas.openxmlformats.org/drawingml/2006/main">
+            <a:off x="1170000" y="4464000"/>
+            <a:ext cx="4638000" cy="720000"/>
+          </a:xfrm>
+          <a:prstGeom xmlns:a="http://schemas.openxmlformats.org/drawingml/2006/main" prst="rect">
+            <a:avLst/>
+          </a:prstGeom>
+          <a:noFill xmlns:a="http://schemas.openxmlformats.org/drawingml/2006/main"/>
+          <a:ln xmlns:a="http://schemas.openxmlformats.org/drawingml/2006/main">
+            <a:noFill/>
+          </a:ln>
+        </p:spPr>
+        <p:txBody>
+          <a:bodyPr xmlns:a="http://schemas.openxmlformats.org/drawingml/2006/main" lIns="0" tIns="0" rIns="0" bIns="0" anchor="t">
+            <a:noAutofit/>
+          </a:bodyPr>
+          <a:lstStyle xmlns:a="http://schemas.openxmlformats.org/drawingml/2006/main"/>
+          <a:p xmlns:a="http://schemas.openxmlformats.org/drawingml/2006/main">
+            <a:pPr algn="l"/>
+            <a:r>
+              <a:rPr lang="en-US" sz="1600" b="0" i="0">
+                <a:solidFill>
+                  <a:srgbClr val="20252D"/>
+                </a:solidFill>
+                <a:latin typeface="Arial"/>
+                <a:ea typeface="Arial"/>
+              </a:rPr>
+              <a:t>Proprietary industrial protocols that are not simulated</a:t>
+            </a:r>
+          </a:p>
+        </p:txBody>
+      </p:sp>
+      <p:sp>
+        <p:nvSpPr>
+          <p:cNvPr id="100257" name="Element-22"/>
+          <p:cNvSpPr/>
+          <p:nvPr/>
+        </p:nvSpPr>
+        <p:spPr>
+          <a:xfrm xmlns:a="http://schemas.openxmlformats.org/drawingml/2006/main">
+            <a:off x="6384000" y="2367000"/>
+            <a:ext cx="198000" cy="43200"/>
+          </a:xfrm>
+          <a:prstGeom xmlns:a="http://schemas.openxmlformats.org/drawingml/2006/main" prst="rect">
+            <a:avLst/>
+          </a:prstGeom>
+          <a:solidFill xmlns:a="http://schemas.openxmlformats.org/drawingml/2006/main">
+            <a:srgbClr val="B60036"/>
+          </a:solidFill>
+          <a:ln xmlns:a="http://schemas.openxmlformats.org/drawingml/2006/main">
+            <a:noFill/>
+          </a:ln>
+        </p:spPr>
+        <p:txBody>
+          <a:bodyPr xmlns:a="http://schemas.openxmlformats.org/drawingml/2006/main" lIns="0" tIns="0" rIns="0" bIns="0" anchor="ctr">
+            <a:noAutofit/>
+          </a:bodyPr>
+          <a:lstStyle xmlns:a="http://schemas.openxmlformats.org/drawingml/2006/main"/>
+          <a:p xmlns:a="http://schemas.openxmlformats.org/drawingml/2006/main">
+            <a:pPr algn="l"/>
+            <a:endParaRPr lang="en-US" sz="1800" b="0" i="0">
+              <a:solidFill>
+                <a:srgbClr val="20252D"/>
+              </a:solidFill>
+              <a:latin typeface="Arial"/>
+              <a:ea typeface="Arial"/>
+            </a:endParaRPr>
+          </a:p>
+        </p:txBody>
+      </p:sp>
+      <p:sp>
+        <p:nvSpPr>
+          <p:cNvPr id="100258" name="Fixed-23"/>
+          <p:cNvSpPr/>
+          <p:nvPr/>
+        </p:nvSpPr>
+        <p:spPr>
+          <a:xfrm xmlns:a="http://schemas.openxmlformats.org/drawingml/2006/main">
+            <a:off x="6762000" y="2259000"/>
+            <a:ext cx="4638000" cy="720000"/>
+          </a:xfrm>
+          <a:prstGeom xmlns:a="http://schemas.openxmlformats.org/drawingml/2006/main" prst="rect">
+            <a:avLst/>
+          </a:prstGeom>
+          <a:noFill xmlns:a="http://schemas.openxmlformats.org/drawingml/2006/main"/>
+          <a:ln xmlns:a="http://schemas.openxmlformats.org/drawingml/2006/main">
+            <a:noFill/>
+          </a:ln>
+        </p:spPr>
+        <p:txBody>
+          <a:bodyPr xmlns:a="http://schemas.openxmlformats.org/drawingml/2006/main" lIns="0" tIns="0" rIns="0" bIns="0" anchor="t">
+            <a:noAutofit/>
+          </a:bodyPr>
+          <a:lstStyle xmlns:a="http://schemas.openxmlformats.org/drawingml/2006/main"/>
+          <a:p xmlns:a="http://schemas.openxmlformats.org/drawingml/2006/main">
+            <a:pPr algn="l"/>
+            <a:r>
+              <a:rPr lang="en-US" sz="1600" b="0" i="0">
+                <a:solidFill>
+                  <a:srgbClr val="20252D"/>
+                </a:solidFill>
+                <a:latin typeface="Arial"/>
+                <a:ea typeface="Arial"/>
+              </a:rPr>
+              <a:t>Complete multi-step exploitation chains</a:t>
+            </a:r>
+          </a:p>
+        </p:txBody>
+      </p:sp>
+      <p:sp>
+        <p:nvSpPr>
+          <p:cNvPr id="100259" name="Element-24"/>
+          <p:cNvSpPr/>
+          <p:nvPr/>
+        </p:nvSpPr>
+        <p:spPr>
+          <a:xfrm xmlns:a="http://schemas.openxmlformats.org/drawingml/2006/main">
+            <a:off x="6384000" y="2961000"/>
+            <a:ext cx="5016000" cy="10800"/>
+          </a:xfrm>
+          <a:prstGeom xmlns:a="http://schemas.openxmlformats.org/drawingml/2006/main" prst="rect">
+            <a:avLst/>
+          </a:prstGeom>
+          <a:solidFill xmlns:a="http://schemas.openxmlformats.org/drawingml/2006/main">
+            <a:srgbClr val="D9DEE5"/>
+          </a:solidFill>
+          <a:ln xmlns:a="http://schemas.openxmlformats.org/drawingml/2006/main">
+            <a:noFill/>
+          </a:ln>
+        </p:spPr>
+        <p:txBody>
+          <a:bodyPr xmlns:a="http://schemas.openxmlformats.org/drawingml/2006/main" lIns="0" tIns="0" rIns="0" bIns="0" anchor="ctr">
+            <a:noAutofit/>
+          </a:bodyPr>
+          <a:lstStyle xmlns:a="http://schemas.openxmlformats.org/drawingml/2006/main"/>
+          <a:p xmlns:a="http://schemas.openxmlformats.org/drawingml/2006/main">
+            <a:pPr algn="l"/>
+            <a:endParaRPr lang="en-US" sz="1800" b="0" i="0">
+              <a:solidFill>
+                <a:srgbClr val="20252D"/>
+              </a:solidFill>
+              <a:latin typeface="Arial"/>
+              <a:ea typeface="Arial"/>
+            </a:endParaRPr>
+          </a:p>
+        </p:txBody>
+      </p:sp>
+      <p:sp>
+        <p:nvSpPr>
+          <p:cNvPr id="100260" name="Element-25"/>
+          <p:cNvSpPr/>
+          <p:nvPr/>
+        </p:nvSpPr>
+        <p:spPr>
+          <a:xfrm xmlns:a="http://schemas.openxmlformats.org/drawingml/2006/main">
+            <a:off x="6384000" y="3249000"/>
+            <a:ext cx="198000" cy="43200"/>
+          </a:xfrm>
+          <a:prstGeom xmlns:a="http://schemas.openxmlformats.org/drawingml/2006/main" prst="rect">
+            <a:avLst/>
+          </a:prstGeom>
+          <a:solidFill xmlns:a="http://schemas.openxmlformats.org/drawingml/2006/main">
+            <a:srgbClr val="B60036"/>
+          </a:solidFill>
+          <a:ln xmlns:a="http://schemas.openxmlformats.org/drawingml/2006/main">
+            <a:noFill/>
+          </a:ln>
+        </p:spPr>
+        <p:txBody>
+          <a:bodyPr xmlns:a="http://schemas.openxmlformats.org/drawingml/2006/main" lIns="0" tIns="0" rIns="0" bIns="0" anchor="ctr">
+            <a:noAutofit/>
+          </a:bodyPr>
+          <a:lstStyle xmlns:a="http://schemas.openxmlformats.org/drawingml/2006/main"/>
+          <a:p xmlns:a="http://schemas.openxmlformats.org/drawingml/2006/main">
+            <a:pPr algn="l"/>
+            <a:endParaRPr lang="en-US" sz="1800" b="0" i="0">
+              <a:solidFill>
+                <a:srgbClr val="20252D"/>
+              </a:solidFill>
+              <a:latin typeface="Arial"/>
+              <a:ea typeface="Arial"/>
+            </a:endParaRPr>
+          </a:p>
+        </p:txBody>
+      </p:sp>
+      <p:sp>
+        <p:nvSpPr>
+          <p:cNvPr id="100261" name="Fixed-26"/>
+          <p:cNvSpPr/>
+          <p:nvPr/>
+        </p:nvSpPr>
+        <p:spPr>
+          <a:xfrm xmlns:a="http://schemas.openxmlformats.org/drawingml/2006/main">
+            <a:off x="6762000" y="3141000"/>
+            <a:ext cx="4638000" cy="720000"/>
+          </a:xfrm>
+          <a:prstGeom xmlns:a="http://schemas.openxmlformats.org/drawingml/2006/main" prst="rect">
+            <a:avLst/>
+          </a:prstGeom>
+          <a:noFill xmlns:a="http://schemas.openxmlformats.org/drawingml/2006/main"/>
+          <a:ln xmlns:a="http://schemas.openxmlformats.org/drawingml/2006/main">
+            <a:noFill/>
+          </a:ln>
+        </p:spPr>
+        <p:txBody>
+          <a:bodyPr xmlns:a="http://schemas.openxmlformats.org/drawingml/2006/main" lIns="0" tIns="0" rIns="0" bIns="0" anchor="t">
+            <a:noAutofit/>
+          </a:bodyPr>
+          <a:lstStyle xmlns:a="http://schemas.openxmlformats.org/drawingml/2006/main"/>
+          <a:p xmlns:a="http://schemas.openxmlformats.org/drawingml/2006/main">
+            <a:pPr algn="l"/>
+            <a:r>
+              <a:rPr lang="en-US" sz="1600" b="0" i="0">
+                <a:solidFill>
+                  <a:srgbClr val="20252D"/>
+                </a:solidFill>
+                <a:latin typeface="Arial"/>
+                <a:ea typeface="Arial"/>
+              </a:rPr>
+              <a:t>Abstention and calibration</a:t>
+            </a:r>
+          </a:p>
+        </p:txBody>
+      </p:sp>
+      <p:sp>
+        <p:nvSpPr>
+          <p:cNvPr id="100262" name="Element-27"/>
+          <p:cNvSpPr/>
+          <p:nvPr/>
+        </p:nvSpPr>
+        <p:spPr>
+          <a:xfrm xmlns:a="http://schemas.openxmlformats.org/drawingml/2006/main">
+            <a:off x="6384000" y="3843000"/>
+            <a:ext cx="5016000" cy="10800"/>
+          </a:xfrm>
+          <a:prstGeom xmlns:a="http://schemas.openxmlformats.org/drawingml/2006/main" prst="rect">
+            <a:avLst/>
+          </a:prstGeom>
+          <a:solidFill xmlns:a="http://schemas.openxmlformats.org/drawingml/2006/main">
+            <a:srgbClr val="D9DEE5"/>
+          </a:solidFill>
+          <a:ln xmlns:a="http://schemas.openxmlformats.org/drawingml/2006/main">
+            <a:noFill/>
+          </a:ln>
+        </p:spPr>
+        <p:txBody>
+          <a:bodyPr xmlns:a="http://schemas.openxmlformats.org/drawingml/2006/main" lIns="0" tIns="0" rIns="0" bIns="0" anchor="ctr">
+            <a:noAutofit/>
+          </a:bodyPr>
+          <a:lstStyle xmlns:a="http://schemas.openxmlformats.org/drawingml/2006/main"/>
+          <a:p xmlns:a="http://schemas.openxmlformats.org/drawingml/2006/main">
+            <a:pPr algn="l"/>
+            <a:endParaRPr lang="en-US" sz="1800" b="0" i="0">
+              <a:solidFill>
+                <a:srgbClr val="20252D"/>
+              </a:solidFill>
+              <a:latin typeface="Arial"/>
+              <a:ea typeface="Arial"/>
+            </a:endParaRPr>
+          </a:p>
+        </p:txBody>
+      </p:sp>
+      <p:sp>
+        <p:nvSpPr>
+          <p:cNvPr id="100263" name="Element-28"/>
+          <p:cNvSpPr/>
+          <p:nvPr/>
+        </p:nvSpPr>
+        <p:spPr>
+          <a:xfrm xmlns:a="http://schemas.openxmlformats.org/drawingml/2006/main">
+            <a:off x="6384000" y="4131000"/>
+            <a:ext cx="198000" cy="43200"/>
+          </a:xfrm>
+          <a:prstGeom xmlns:a="http://schemas.openxmlformats.org/drawingml/2006/main" prst="rect">
+            <a:avLst/>
+          </a:prstGeom>
+          <a:solidFill xmlns:a="http://schemas.openxmlformats.org/drawingml/2006/main">
+            <a:srgbClr val="B60036"/>
+          </a:solidFill>
+          <a:ln xmlns:a="http://schemas.openxmlformats.org/drawingml/2006/main">
+            <a:noFill/>
+          </a:ln>
+        </p:spPr>
+        <p:txBody>
+          <a:bodyPr xmlns:a="http://schemas.openxmlformats.org/drawingml/2006/main" lIns="0" tIns="0" rIns="0" bIns="0" anchor="ctr">
+            <a:noAutofit/>
+          </a:bodyPr>
+          <a:lstStyle xmlns:a="http://schemas.openxmlformats.org/drawingml/2006/main"/>
+          <a:p xmlns:a="http://schemas.openxmlformats.org/drawingml/2006/main">
+            <a:pPr algn="l"/>
+            <a:endParaRPr lang="en-US" sz="1800" b="0" i="0">
+              <a:solidFill>
+                <a:srgbClr val="20252D"/>
+              </a:solidFill>
+              <a:latin typeface="Arial"/>
+              <a:ea typeface="Arial"/>
+            </a:endParaRPr>
+          </a:p>
+        </p:txBody>
+      </p:sp>
+      <p:sp>
+        <p:nvSpPr>
+          <p:cNvPr id="100264" name="Fixed-29"/>
+          <p:cNvSpPr/>
+          <p:nvPr/>
+        </p:nvSpPr>
+        <p:spPr>
+          <a:xfrm xmlns:a="http://schemas.openxmlformats.org/drawingml/2006/main">
+            <a:off x="6762000" y="4023000"/>
+            <a:ext cx="4638000" cy="720000"/>
+          </a:xfrm>
+          <a:prstGeom xmlns:a="http://schemas.openxmlformats.org/drawingml/2006/main" prst="rect">
+            <a:avLst/>
+          </a:prstGeom>
+          <a:noFill xmlns:a="http://schemas.openxmlformats.org/drawingml/2006/main"/>
+          <a:ln xmlns:a="http://schemas.openxmlformats.org/drawingml/2006/main">
+            <a:noFill/>
+          </a:ln>
+        </p:spPr>
+        <p:txBody>
+          <a:bodyPr xmlns:a="http://schemas.openxmlformats.org/drawingml/2006/main" lIns="0" tIns="0" rIns="0" bIns="0" anchor="t">
+            <a:noAutofit/>
+          </a:bodyPr>
+          <a:lstStyle xmlns:a="http://schemas.openxmlformats.org/drawingml/2006/main"/>
+          <a:p xmlns:a="http://schemas.openxmlformats.org/drawingml/2006/main">
+            <a:pPr algn="l"/>
+            <a:r>
+              <a:rPr lang="en-US" sz="1600" b="0" i="0">
+                <a:solidFill>
+                  <a:srgbClr val="20252D"/>
+                </a:solidFill>
+                <a:latin typeface="Arial"/>
+                <a:ea typeface="Arial"/>
+              </a:rPr>
+              <a:t>Generic IT scenarios, deliberately excluded</a:t>
+            </a:r>
+          </a:p>
+        </p:txBody>
+      </p:sp>
+      <p:sp>
+        <p:nvSpPr>
+          <p:cNvPr id="100265" name="Element-30"/>
+          <p:cNvSpPr/>
+          <p:nvPr/>
+        </p:nvSpPr>
+        <p:spPr>
+          <a:xfrm xmlns:a="http://schemas.openxmlformats.org/drawingml/2006/main">
+            <a:off x="792000" y="5335200"/>
+            <a:ext cx="10608000" cy="10800"/>
+          </a:xfrm>
+          <a:prstGeom xmlns:a="http://schemas.openxmlformats.org/drawingml/2006/main" prst="rect">
+            <a:avLst/>
+          </a:prstGeom>
+          <a:solidFill xmlns:a="http://schemas.openxmlformats.org/drawingml/2006/main">
+            <a:srgbClr val="D9DEE5"/>
+          </a:solidFill>
+          <a:ln xmlns:a="http://schemas.openxmlformats.org/drawingml/2006/main">
+            <a:noFill/>
+          </a:ln>
+        </p:spPr>
+        <p:txBody>
+          <a:bodyPr xmlns:a="http://schemas.openxmlformats.org/drawingml/2006/main" lIns="0" tIns="0" rIns="0" bIns="0" anchor="ctr">
+            <a:noAutofit/>
+          </a:bodyPr>
+          <a:lstStyle xmlns:a="http://schemas.openxmlformats.org/drawingml/2006/main"/>
+          <a:p xmlns:a="http://schemas.openxmlformats.org/drawingml/2006/main">
+            <a:pPr algn="l"/>
+            <a:endParaRPr lang="en-US" sz="1800" b="0" i="0">
+              <a:solidFill>
+                <a:srgbClr val="20252D"/>
+              </a:solidFill>
+              <a:latin typeface="Arial"/>
+              <a:ea typeface="Arial"/>
+            </a:endParaRPr>
+          </a:p>
+        </p:txBody>
+      </p:sp>
+      <p:sp>
+        <p:nvSpPr>
+          <p:cNvPr id="100266" name="Caption-10"/>
+          <p:cNvSpPr/>
+          <p:nvPr/>
+        </p:nvSpPr>
+        <p:spPr>
+          <a:xfrm xmlns:a="http://schemas.openxmlformats.org/drawingml/2006/main">
+            <a:off x="792000" y="5356800"/>
+            <a:ext cx="10608000" cy="864000"/>
+          </a:xfrm>
+          <a:prstGeom xmlns:a="http://schemas.openxmlformats.org/drawingml/2006/main" prst="rect">
+            <a:avLst/>
+          </a:prstGeom>
+          <a:noFill xmlns:a="http://schemas.openxmlformats.org/drawingml/2006/main"/>
+          <a:ln xmlns:a="http://schemas.openxmlformats.org/drawingml/2006/main">
+            <a:noFill/>
+          </a:ln>
+        </p:spPr>
+        <p:txBody>
+          <a:bodyPr xmlns:a="http://schemas.openxmlformats.org/drawingml/2006/main" lIns="0" tIns="0" rIns="0" bIns="0" anchor="t">
+            <a:noAutofit/>
+          </a:bodyPr>
+          <a:lstStyle xmlns:a="http://schemas.openxmlformats.org/drawingml/2006/main"/>
+          <a:p xmlns:a="http://schemas.openxmlformats.org/drawingml/2006/main">
+            <a:pPr algn="l"/>
+            <a:r>
+              <a:rPr lang="en-US" sz="2100" b="1">
+                <a:solidFill>
+                  <a:srgbClr val="B60036"/>
+                </a:solidFill>
+                <a:latin typeface="Arial"/>
+                <a:ea typeface="Arial"/>
+              </a:rPr>
+              <a:t>A benchmark that states its gaps is stronger than one that claims full coverage.</a:t>
+            </a:r>
+          </a:p>
+        </p:txBody>
+      </p:sp>
+      <p:sp>
+        <p:nvSpPr>
+          <p:cNvPr id="100267" name="Element-32"/>
+          <p:cNvSpPr/>
+          <p:nvPr/>
+        </p:nvSpPr>
+        <p:spPr>
+          <a:xfrm xmlns:a="http://schemas.openxmlformats.org/drawingml/2006/main">
+            <a:off x="792000" y="6444000"/>
+            <a:ext cx="5040000" cy="180000"/>
+          </a:xfrm>
+          <a:prstGeom xmlns:a="http://schemas.openxmlformats.org/drawingml/2006/main" prst="rect">
+            <a:avLst/>
+          </a:prstGeom>
+          <a:noFill xmlns:a="http://schemas.openxmlformats.org/drawingml/2006/main"/>
+          <a:ln xmlns:a="http://schemas.openxmlformats.org/drawingml/2006/main">
+            <a:noFill/>
+          </a:ln>
+        </p:spPr>
+        <p:txBody>
+          <a:bodyPr xmlns:a="http://schemas.openxmlformats.org/drawingml/2006/main" lIns="0" tIns="0" rIns="0" bIns="0" anchor="ctr">
+            <a:noAutofit/>
+          </a:bodyPr>
+          <a:lstStyle xmlns:a="http://schemas.openxmlformats.org/drawingml/2006/main"/>
+          <a:p xmlns:a="http://schemas.openxmlformats.org/drawingml/2006/main">
+            <a:pPr algn="l"/>
+            <a:r>
+              <a:rPr lang="en-US" sz="800" b="0" i="0">
+                <a:solidFill>
+                  <a:srgbClr val="5C626C"/>
+                </a:solidFill>
+                <a:latin typeface="Arial"/>
+                <a:ea typeface="Arial"/>
+              </a:rPr>
+              <a:t>Project LANCE — NATO SPS G6259</a:t>
+            </a:r>
+          </a:p>
+        </p:txBody>
+      </p:sp>
+      <p:sp>
+        <p:nvSpPr>
+          <p:cNvPr id="100268" name="Element-33"/>
+          <p:cNvSpPr/>
+          <p:nvPr/>
+        </p:nvSpPr>
+        <p:spPr>
+          <a:xfrm xmlns:a="http://schemas.openxmlformats.org/drawingml/2006/main">
+            <a:off x="10752000" y="6444000"/>
+            <a:ext cx="648000" cy="180000"/>
+          </a:xfrm>
+          <a:prstGeom xmlns:a="http://schemas.openxmlformats.org/drawingml/2006/main" prst="rect">
+            <a:avLst/>
+          </a:prstGeom>
+          <a:noFill xmlns:a="http://schemas.openxmlformats.org/drawingml/2006/main"/>
+          <a:ln xmlns:a="http://schemas.openxmlformats.org/drawingml/2006/main">
+            <a:noFill/>
+          </a:ln>
+        </p:spPr>
+        <p:txBody>
+          <a:bodyPr xmlns:a="http://schemas.openxmlformats.org/drawingml/2006/main" lIns="0" tIns="0" rIns="0" bIns="0" anchor="ctr">
+            <a:noAutofit/>
+          </a:bodyPr>
+          <a:lstStyle xmlns:a="http://schemas.openxmlformats.org/drawingml/2006/main"/>
+          <a:p xmlns:a="http://schemas.openxmlformats.org/drawingml/2006/main">
+            <a:pPr algn="r"/>
+            <a:r>
+              <a:rPr lang="en-US" sz="800" b="0" i="0">
+                <a:solidFill>
+                  <a:srgbClr val="5C626C"/>
+                </a:solidFill>
+                <a:latin typeface="Arial"/>
+                <a:ea typeface="Arial"/>
+              </a:rPr>
+              <a:t>10</a:t>
+            </a:r>
+          </a:p>
+        </p:txBody>
+      </p:sp>
     </p:spTree>
   </p:cSld>
 </p:sld>
@@ -1400,7 +2973,7 @@
           <p:nvPr/>
         </p:nvPicPr>
         <p:blipFill>
-          <a:blip xmlns:r="http://schemas.openxmlformats.org/officeDocument/2006/relationships" xmlns:a="http://schemas.openxmlformats.org/drawingml/2006/main" r:embed="R7463a3db8ccf4733"/>
+          <a:blip xmlns:r="http://schemas.openxmlformats.org/officeDocument/2006/relationships" xmlns:a="http://schemas.openxmlformats.org/drawingml/2006/main" r:embed="Rb5b7fc578da74102"/>
           <a:stretch xmlns:a="http://schemas.openxmlformats.org/drawingml/2006/main">
             <a:fillRect/>
           </a:stretch>
@@ -1733,17 +3306,19 @@
         </p:nvSpPr>
         <p:spPr>
           <a:xfrm xmlns:a="http://schemas.openxmlformats.org/drawingml/2006/main">
-            <a:off x="792000" y="3636000"/>
-            <a:ext cx="936000" cy="36000"/>
+            <a:off x="5296000" y="1764000"/>
+            <a:ext cx="6104000" cy="918000"/>
           </a:xfrm>
           <a:prstGeom xmlns:a="http://schemas.openxmlformats.org/drawingml/2006/main" prst="rect">
             <a:avLst/>
           </a:prstGeom>
           <a:solidFill xmlns:a="http://schemas.openxmlformats.org/drawingml/2006/main">
-            <a:srgbClr val="B60036"/>
+            <a:srgbClr val="F6F7F9"/>
           </a:solidFill>
-          <a:ln xmlns:a="http://schemas.openxmlformats.org/drawingml/2006/main">
-            <a:noFill/>
+          <a:ln xmlns:a="http://schemas.openxmlformats.org/drawingml/2006/main" w="12700">
+            <a:solidFill>
+              <a:srgbClr val="D9DEE5"/>
+            </a:solidFill>
           </a:ln>
         </p:spPr>
         <p:txBody>
@@ -1771,7 +3346,123 @@
         </p:nvSpPr>
         <p:spPr>
           <a:xfrm xmlns:a="http://schemas.openxmlformats.org/drawingml/2006/main">
-            <a:off x="5296000" y="1764000"/>
+            <a:off x="5296000" y="1962000"/>
+            <a:ext cx="57600" cy="522000"/>
+          </a:xfrm>
+          <a:prstGeom xmlns:a="http://schemas.openxmlformats.org/drawingml/2006/main" prst="rect">
+            <a:avLst/>
+          </a:prstGeom>
+          <a:solidFill xmlns:a="http://schemas.openxmlformats.org/drawingml/2006/main">
+            <a:srgbClr val="B60036"/>
+          </a:solidFill>
+          <a:ln xmlns:a="http://schemas.openxmlformats.org/drawingml/2006/main">
+            <a:noFill/>
+          </a:ln>
+        </p:spPr>
+        <p:txBody>
+          <a:bodyPr xmlns:a="http://schemas.openxmlformats.org/drawingml/2006/main" lIns="0" tIns="0" rIns="0" bIns="0" anchor="ctr">
+            <a:noAutofit/>
+          </a:bodyPr>
+          <a:lstStyle xmlns:a="http://schemas.openxmlformats.org/drawingml/2006/main"/>
+          <a:p xmlns:a="http://schemas.openxmlformats.org/drawingml/2006/main">
+            <a:pPr algn="l"/>
+            <a:endParaRPr lang="en-US" sz="1800" b="0" i="0">
+              <a:solidFill>
+                <a:srgbClr val="20252D"/>
+              </a:solidFill>
+              <a:latin typeface="Arial"/>
+              <a:ea typeface="Arial"/>
+            </a:endParaRPr>
+          </a:p>
+        </p:txBody>
+      </p:sp>
+      <p:sp>
+        <p:nvSpPr>
+          <p:cNvPr id="100021" name="Element-14"/>
+          <p:cNvSpPr/>
+          <p:nvPr/>
+        </p:nvSpPr>
+        <p:spPr>
+          <a:xfrm xmlns:a="http://schemas.openxmlformats.org/drawingml/2006/main">
+            <a:off x="5602000" y="1915200"/>
+            <a:ext cx="5564000" cy="342000"/>
+          </a:xfrm>
+          <a:prstGeom xmlns:a="http://schemas.openxmlformats.org/drawingml/2006/main" prst="rect">
+            <a:avLst/>
+          </a:prstGeom>
+          <a:noFill xmlns:a="http://schemas.openxmlformats.org/drawingml/2006/main"/>
+          <a:ln xmlns:a="http://schemas.openxmlformats.org/drawingml/2006/main">
+            <a:noFill/>
+          </a:ln>
+        </p:spPr>
+        <p:txBody>
+          <a:bodyPr xmlns:a="http://schemas.openxmlformats.org/drawingml/2006/main" lIns="0" tIns="0" rIns="0" bIns="0" anchor="ctr">
+            <a:noAutofit/>
+          </a:bodyPr>
+          <a:lstStyle xmlns:a="http://schemas.openxmlformats.org/drawingml/2006/main"/>
+          <a:p xmlns:a="http://schemas.openxmlformats.org/drawingml/2006/main">
+            <a:pPr algn="l"/>
+            <a:r>
+              <a:rPr lang="en-US" sz="1600" b="1" i="0">
+                <a:solidFill>
+                  <a:srgbClr val="20252D"/>
+                </a:solidFill>
+                <a:latin typeface="Arial"/>
+                <a:ea typeface="Arial"/>
+              </a:rPr>
+              <a:t>Under which conditions</a:t>
+            </a:r>
+          </a:p>
+        </p:txBody>
+      </p:sp>
+      <p:sp>
+        <p:nvSpPr>
+          <p:cNvPr id="100022" name="Element-15"/>
+          <p:cNvSpPr/>
+          <p:nvPr/>
+        </p:nvSpPr>
+        <p:spPr>
+          <a:xfrm xmlns:a="http://schemas.openxmlformats.org/drawingml/2006/main">
+            <a:off x="5602000" y="2286000"/>
+            <a:ext cx="5564000" cy="270000"/>
+          </a:xfrm>
+          <a:prstGeom xmlns:a="http://schemas.openxmlformats.org/drawingml/2006/main" prst="rect">
+            <a:avLst/>
+          </a:prstGeom>
+          <a:noFill xmlns:a="http://schemas.openxmlformats.org/drawingml/2006/main"/>
+          <a:ln xmlns:a="http://schemas.openxmlformats.org/drawingml/2006/main">
+            <a:noFill/>
+          </a:ln>
+        </p:spPr>
+        <p:txBody>
+          <a:bodyPr xmlns:a="http://schemas.openxmlformats.org/drawingml/2006/main" lIns="0" tIns="0" rIns="0" bIns="0" anchor="ctr">
+            <a:noAutofit/>
+          </a:bodyPr>
+          <a:lstStyle xmlns:a="http://schemas.openxmlformats.org/drawingml/2006/main"/>
+          <a:p xmlns:a="http://schemas.openxmlformats.org/drawingml/2006/main">
+            <a:pPr algn="l"/>
+            <a:r>
+              <a:rPr lang="en-US" sz="1250" b="0" i="0">
+                <a:solidFill>
+                  <a:srgbClr val="5C626C"/>
+                </a:solidFill>
+                <a:latin typeface="Arial"/>
+                <a:ea typeface="Arial"/>
+              </a:rPr>
+              <a:t>rather than which model prevails</a:t>
+            </a:r>
+          </a:p>
+        </p:txBody>
+      </p:sp>
+      <p:sp>
+        <p:nvSpPr>
+          <p:cNvPr id="100023" name="Element-16"/>
+          <p:cNvSpPr/>
+          <p:nvPr/>
+        </p:nvSpPr>
+        <p:spPr>
+          <a:xfrm xmlns:a="http://schemas.openxmlformats.org/drawingml/2006/main">
+            <a:off x="5296000" y="2862000"/>
             <a:ext cx="6104000" cy="918000"/>
           </a:xfrm>
           <a:prstGeom xmlns:a="http://schemas.openxmlformats.org/drawingml/2006/main" prst="rect">
@@ -1805,13 +3496,13 @@
       </p:sp>
       <p:sp>
         <p:nvSpPr>
-          <p:cNvPr id="100021" name="Element-14"/>
-          <p:cNvSpPr/>
-          <p:nvPr/>
-        </p:nvSpPr>
-        <p:spPr>
-          <a:xfrm xmlns:a="http://schemas.openxmlformats.org/drawingml/2006/main">
-            <a:off x="5296000" y="1962000"/>
+          <p:cNvPr id="100024" name="Element-17"/>
+          <p:cNvSpPr/>
+          <p:nvPr/>
+        </p:nvSpPr>
+        <p:spPr>
+          <a:xfrm xmlns:a="http://schemas.openxmlformats.org/drawingml/2006/main">
+            <a:off x="5296000" y="3060000"/>
             <a:ext cx="57600" cy="522000"/>
           </a:xfrm>
           <a:prstGeom xmlns:a="http://schemas.openxmlformats.org/drawingml/2006/main" prst="rect">
@@ -1843,13 +3534,13 @@
       </p:sp>
       <p:sp>
         <p:nvSpPr>
-          <p:cNvPr id="100022" name="Element-15"/>
-          <p:cNvSpPr/>
-          <p:nvPr/>
-        </p:nvSpPr>
-        <p:spPr>
-          <a:xfrm xmlns:a="http://schemas.openxmlformats.org/drawingml/2006/main">
-            <a:off x="5602000" y="1915200"/>
+          <p:cNvPr id="100025" name="Element-18"/>
+          <p:cNvSpPr/>
+          <p:nvPr/>
+        </p:nvSpPr>
+        <p:spPr>
+          <a:xfrm xmlns:a="http://schemas.openxmlformats.org/drawingml/2006/main">
+            <a:off x="5602000" y="3013200"/>
             <a:ext cx="5564000" cy="342000"/>
           </a:xfrm>
           <a:prstGeom xmlns:a="http://schemas.openxmlformats.org/drawingml/2006/main" prst="rect">
@@ -1875,20 +3566,20 @@
                 <a:latin typeface="Arial"/>
                 <a:ea typeface="Arial"/>
               </a:rPr>
-              <a:t>Under which conditions</a:t>
-            </a:r>
-          </a:p>
-        </p:txBody>
-      </p:sp>
-      <p:sp>
-        <p:nvSpPr>
-          <p:cNvPr id="100023" name="Element-16"/>
-          <p:cNvSpPr/>
-          <p:nvPr/>
-        </p:nvSpPr>
-        <p:spPr>
-          <a:xfrm xmlns:a="http://schemas.openxmlformats.org/drawingml/2006/main">
-            <a:off x="5602000" y="2286000"/>
+              <a:t>Identical tools and budget</a:t>
+            </a:r>
+          </a:p>
+        </p:txBody>
+      </p:sp>
+      <p:sp>
+        <p:nvSpPr>
+          <p:cNvPr id="100026" name="Element-19"/>
+          <p:cNvSpPr/>
+          <p:nvPr/>
+        </p:nvSpPr>
+        <p:spPr>
+          <a:xfrm xmlns:a="http://schemas.openxmlformats.org/drawingml/2006/main">
+            <a:off x="5602000" y="3384000"/>
             <a:ext cx="5564000" cy="270000"/>
           </a:xfrm>
           <a:prstGeom xmlns:a="http://schemas.openxmlformats.org/drawingml/2006/main" prst="rect">
@@ -1914,20 +3605,20 @@
                 <a:latin typeface="Arial"/>
                 <a:ea typeface="Arial"/>
               </a:rPr>
-              <a:t>rather than which model prevails</a:t>
-            </a:r>
-          </a:p>
-        </p:txBody>
-      </p:sp>
-      <p:sp>
-        <p:nvSpPr>
-          <p:cNvPr id="100024" name="Element-17"/>
-          <p:cNvSpPr/>
-          <p:nvPr/>
-        </p:nvSpPr>
-        <p:spPr>
-          <a:xfrm xmlns:a="http://schemas.openxmlformats.org/drawingml/2006/main">
-            <a:off x="5296000" y="2862000"/>
+              <a:t>for both approaches</a:t>
+            </a:r>
+          </a:p>
+        </p:txBody>
+      </p:sp>
+      <p:sp>
+        <p:nvSpPr>
+          <p:cNvPr id="100027" name="Element-20"/>
+          <p:cNvSpPr/>
+          <p:nvPr/>
+        </p:nvSpPr>
+        <p:spPr>
+          <a:xfrm xmlns:a="http://schemas.openxmlformats.org/drawingml/2006/main">
+            <a:off x="5296000" y="3960000"/>
             <a:ext cx="6104000" cy="918000"/>
           </a:xfrm>
           <a:prstGeom xmlns:a="http://schemas.openxmlformats.org/drawingml/2006/main" prst="rect">
@@ -1961,13 +3652,13 @@
       </p:sp>
       <p:sp>
         <p:nvSpPr>
-          <p:cNvPr id="100025" name="Element-18"/>
-          <p:cNvSpPr/>
-          <p:nvPr/>
-        </p:nvSpPr>
-        <p:spPr>
-          <a:xfrm xmlns:a="http://schemas.openxmlformats.org/drawingml/2006/main">
-            <a:off x="5296000" y="3060000"/>
+          <p:cNvPr id="100028" name="Element-21"/>
+          <p:cNvSpPr/>
+          <p:nvPr/>
+        </p:nvSpPr>
+        <p:spPr>
+          <a:xfrm xmlns:a="http://schemas.openxmlformats.org/drawingml/2006/main">
+            <a:off x="5296000" y="4158000"/>
             <a:ext cx="57600" cy="522000"/>
           </a:xfrm>
           <a:prstGeom xmlns:a="http://schemas.openxmlformats.org/drawingml/2006/main" prst="rect">
@@ -1999,13 +3690,13 @@
       </p:sp>
       <p:sp>
         <p:nvSpPr>
-          <p:cNvPr id="100026" name="Element-19"/>
-          <p:cNvSpPr/>
-          <p:nvPr/>
-        </p:nvSpPr>
-        <p:spPr>
-          <a:xfrm xmlns:a="http://schemas.openxmlformats.org/drawingml/2006/main">
-            <a:off x="5602000" y="3013200"/>
+          <p:cNvPr id="100029" name="Element-22"/>
+          <p:cNvSpPr/>
+          <p:nvPr/>
+        </p:nvSpPr>
+        <p:spPr>
+          <a:xfrm xmlns:a="http://schemas.openxmlformats.org/drawingml/2006/main">
+            <a:off x="5602000" y="4111200"/>
             <a:ext cx="5564000" cy="342000"/>
           </a:xfrm>
           <a:prstGeom xmlns:a="http://schemas.openxmlformats.org/drawingml/2006/main" prst="rect">
@@ -2031,20 +3722,20 @@
                 <a:latin typeface="Arial"/>
                 <a:ea typeface="Arial"/>
               </a:rPr>
-              <a:t>Identical tools and budget</a:t>
-            </a:r>
-          </a:p>
-        </p:txBody>
-      </p:sp>
-      <p:sp>
-        <p:nvSpPr>
-          <p:cNvPr id="100027" name="Element-20"/>
-          <p:cNvSpPr/>
-          <p:nvPr/>
-        </p:nvSpPr>
-        <p:spPr>
-          <a:xfrm xmlns:a="http://schemas.openxmlformats.org/drawingml/2006/main">
-            <a:off x="5602000" y="3384000"/>
+              <a:t>Evidence, not assertion</a:t>
+            </a:r>
+          </a:p>
+        </p:txBody>
+      </p:sp>
+      <p:sp>
+        <p:nvSpPr>
+          <p:cNvPr id="100030" name="Element-23"/>
+          <p:cNvSpPr/>
+          <p:nvPr/>
+        </p:nvSpPr>
+        <p:spPr>
+          <a:xfrm xmlns:a="http://schemas.openxmlformats.org/drawingml/2006/main">
+            <a:off x="5602000" y="4482000"/>
             <a:ext cx="5564000" cy="270000"/>
           </a:xfrm>
           <a:prstGeom xmlns:a="http://schemas.openxmlformats.org/drawingml/2006/main" prst="rect">
@@ -2070,32 +3761,30 @@
                 <a:latin typeface="Arial"/>
                 <a:ea typeface="Arial"/>
               </a:rPr>
-              <a:t>for both approaches</a:t>
-            </a:r>
-          </a:p>
-        </p:txBody>
-      </p:sp>
-      <p:sp>
-        <p:nvSpPr>
-          <p:cNvPr id="100028" name="Element-21"/>
-          <p:cNvSpPr/>
-          <p:nvPr/>
-        </p:nvSpPr>
-        <p:spPr>
-          <a:xfrm xmlns:a="http://schemas.openxmlformats.org/drawingml/2006/main">
-            <a:off x="5296000" y="3960000"/>
-            <a:ext cx="6104000" cy="918000"/>
+              <a:t>recomputed from the log</a:t>
+            </a:r>
+          </a:p>
+        </p:txBody>
+      </p:sp>
+      <p:sp>
+        <p:nvSpPr>
+          <p:cNvPr id="100031" name="Element-24"/>
+          <p:cNvSpPr/>
+          <p:nvPr/>
+        </p:nvSpPr>
+        <p:spPr>
+          <a:xfrm xmlns:a="http://schemas.openxmlformats.org/drawingml/2006/main">
+            <a:off x="792000" y="5335200"/>
+            <a:ext cx="10608000" cy="10800"/>
           </a:xfrm>
           <a:prstGeom xmlns:a="http://schemas.openxmlformats.org/drawingml/2006/main" prst="rect">
             <a:avLst/>
           </a:prstGeom>
           <a:solidFill xmlns:a="http://schemas.openxmlformats.org/drawingml/2006/main">
-            <a:srgbClr val="F6F7F9"/>
+            <a:srgbClr val="D9DEE5"/>
           </a:solidFill>
-          <a:ln xmlns:a="http://schemas.openxmlformats.org/drawingml/2006/main" w="12700">
-            <a:solidFill>
-              <a:srgbClr val="D9DEE5"/>
-            </a:solidFill>
+          <a:ln xmlns:a="http://schemas.openxmlformats.org/drawingml/2006/main">
+            <a:noFill/>
           </a:ln>
         </p:spPr>
         <p:txBody>
@@ -2117,200 +3806,46 @@
       </p:sp>
       <p:sp>
         <p:nvSpPr>
-          <p:cNvPr id="100029" name="Element-22"/>
-          <p:cNvSpPr/>
-          <p:nvPr/>
-        </p:nvSpPr>
-        <p:spPr>
-          <a:xfrm xmlns:a="http://schemas.openxmlformats.org/drawingml/2006/main">
-            <a:off x="5296000" y="4158000"/>
-            <a:ext cx="57600" cy="522000"/>
-          </a:xfrm>
-          <a:prstGeom xmlns:a="http://schemas.openxmlformats.org/drawingml/2006/main" prst="rect">
-            <a:avLst/>
-          </a:prstGeom>
-          <a:solidFill xmlns:a="http://schemas.openxmlformats.org/drawingml/2006/main">
-            <a:srgbClr val="B60036"/>
-          </a:solidFill>
-          <a:ln xmlns:a="http://schemas.openxmlformats.org/drawingml/2006/main">
-            <a:noFill/>
-          </a:ln>
-        </p:spPr>
-        <p:txBody>
-          <a:bodyPr xmlns:a="http://schemas.openxmlformats.org/drawingml/2006/main" lIns="0" tIns="0" rIns="0" bIns="0" anchor="ctr">
-            <a:noAutofit/>
-          </a:bodyPr>
-          <a:lstStyle xmlns:a="http://schemas.openxmlformats.org/drawingml/2006/main"/>
-          <a:p xmlns:a="http://schemas.openxmlformats.org/drawingml/2006/main">
-            <a:pPr algn="l"/>
-            <a:endParaRPr lang="en-US" sz="1800" b="0" i="0">
-              <a:solidFill>
-                <a:srgbClr val="20252D"/>
-              </a:solidFill>
-              <a:latin typeface="Arial"/>
-              <a:ea typeface="Arial"/>
-            </a:endParaRPr>
-          </a:p>
-        </p:txBody>
-      </p:sp>
-      <p:sp>
-        <p:nvSpPr>
-          <p:cNvPr id="100030" name="Element-23"/>
-          <p:cNvSpPr/>
-          <p:nvPr/>
-        </p:nvSpPr>
-        <p:spPr>
-          <a:xfrm xmlns:a="http://schemas.openxmlformats.org/drawingml/2006/main">
-            <a:off x="5602000" y="4111200"/>
-            <a:ext cx="5564000" cy="342000"/>
-          </a:xfrm>
-          <a:prstGeom xmlns:a="http://schemas.openxmlformats.org/drawingml/2006/main" prst="rect">
-            <a:avLst/>
-          </a:prstGeom>
-          <a:noFill xmlns:a="http://schemas.openxmlformats.org/drawingml/2006/main"/>
-          <a:ln xmlns:a="http://schemas.openxmlformats.org/drawingml/2006/main">
-            <a:noFill/>
-          </a:ln>
-        </p:spPr>
-        <p:txBody>
-          <a:bodyPr xmlns:a="http://schemas.openxmlformats.org/drawingml/2006/main" lIns="0" tIns="0" rIns="0" bIns="0" anchor="ctr">
-            <a:noAutofit/>
-          </a:bodyPr>
-          <a:lstStyle xmlns:a="http://schemas.openxmlformats.org/drawingml/2006/main"/>
-          <a:p xmlns:a="http://schemas.openxmlformats.org/drawingml/2006/main">
-            <a:pPr algn="l"/>
-            <a:r>
-              <a:rPr lang="en-US" sz="1600" b="1" i="0">
-                <a:solidFill>
-                  <a:srgbClr val="20252D"/>
-                </a:solidFill>
-                <a:latin typeface="Arial"/>
-                <a:ea typeface="Arial"/>
-              </a:rPr>
-              <a:t>Evidence, not assertion</a:t>
-            </a:r>
-          </a:p>
-        </p:txBody>
-      </p:sp>
-      <p:sp>
-        <p:nvSpPr>
-          <p:cNvPr id="100031" name="Element-24"/>
-          <p:cNvSpPr/>
-          <p:nvPr/>
-        </p:nvSpPr>
-        <p:spPr>
-          <a:xfrm xmlns:a="http://schemas.openxmlformats.org/drawingml/2006/main">
-            <a:off x="5602000" y="4482000"/>
-            <a:ext cx="5564000" cy="270000"/>
-          </a:xfrm>
-          <a:prstGeom xmlns:a="http://schemas.openxmlformats.org/drawingml/2006/main" prst="rect">
-            <a:avLst/>
-          </a:prstGeom>
-          <a:noFill xmlns:a="http://schemas.openxmlformats.org/drawingml/2006/main"/>
-          <a:ln xmlns:a="http://schemas.openxmlformats.org/drawingml/2006/main">
-            <a:noFill/>
-          </a:ln>
-        </p:spPr>
-        <p:txBody>
-          <a:bodyPr xmlns:a="http://schemas.openxmlformats.org/drawingml/2006/main" lIns="0" tIns="0" rIns="0" bIns="0" anchor="ctr">
-            <a:noAutofit/>
-          </a:bodyPr>
-          <a:lstStyle xmlns:a="http://schemas.openxmlformats.org/drawingml/2006/main"/>
-          <a:p xmlns:a="http://schemas.openxmlformats.org/drawingml/2006/main">
-            <a:pPr algn="l"/>
-            <a:r>
-              <a:rPr lang="en-US" sz="1250" b="0" i="0">
-                <a:solidFill>
-                  <a:srgbClr val="5C626C"/>
-                </a:solidFill>
-                <a:latin typeface="Arial"/>
-                <a:ea typeface="Arial"/>
-              </a:rPr>
-              <a:t>recomputed from the log</a:t>
-            </a:r>
-          </a:p>
-        </p:txBody>
-      </p:sp>
-      <p:sp>
-        <p:nvSpPr>
-          <p:cNvPr id="100032" name="Element-25"/>
-          <p:cNvSpPr/>
-          <p:nvPr/>
-        </p:nvSpPr>
-        <p:spPr>
-          <a:xfrm xmlns:a="http://schemas.openxmlformats.org/drawingml/2006/main">
-            <a:off x="792000" y="5335200"/>
-            <a:ext cx="10608000" cy="10800"/>
-          </a:xfrm>
-          <a:prstGeom xmlns:a="http://schemas.openxmlformats.org/drawingml/2006/main" prst="rect">
-            <a:avLst/>
-          </a:prstGeom>
-          <a:solidFill xmlns:a="http://schemas.openxmlformats.org/drawingml/2006/main">
-            <a:srgbClr val="D9DEE5"/>
-          </a:solidFill>
-          <a:ln xmlns:a="http://schemas.openxmlformats.org/drawingml/2006/main">
-            <a:noFill/>
-          </a:ln>
-        </p:spPr>
-        <p:txBody>
-          <a:bodyPr xmlns:a="http://schemas.openxmlformats.org/drawingml/2006/main" lIns="0" tIns="0" rIns="0" bIns="0" anchor="ctr">
-            <a:noAutofit/>
-          </a:bodyPr>
-          <a:lstStyle xmlns:a="http://schemas.openxmlformats.org/drawingml/2006/main"/>
-          <a:p xmlns:a="http://schemas.openxmlformats.org/drawingml/2006/main">
-            <a:pPr algn="l"/>
-            <a:endParaRPr lang="en-US" sz="1800" b="0" i="0">
-              <a:solidFill>
-                <a:srgbClr val="20252D"/>
-              </a:solidFill>
-              <a:latin typeface="Arial"/>
-              <a:ea typeface="Arial"/>
-            </a:endParaRPr>
+          <p:cNvPr id="100032" name="Caption-2"/>
+          <p:cNvSpPr/>
+          <p:nvPr/>
+        </p:nvSpPr>
+        <p:spPr>
+          <a:xfrm xmlns:a="http://schemas.openxmlformats.org/drawingml/2006/main">
+            <a:off x="792000" y="5356800"/>
+            <a:ext cx="10608000" cy="864000"/>
+          </a:xfrm>
+          <a:prstGeom xmlns:a="http://schemas.openxmlformats.org/drawingml/2006/main" prst="rect">
+            <a:avLst/>
+          </a:prstGeom>
+          <a:noFill xmlns:a="http://schemas.openxmlformats.org/drawingml/2006/main"/>
+          <a:ln xmlns:a="http://schemas.openxmlformats.org/drawingml/2006/main">
+            <a:noFill/>
+          </a:ln>
+        </p:spPr>
+        <p:txBody>
+          <a:bodyPr xmlns:a="http://schemas.openxmlformats.org/drawingml/2006/main" lIns="0" tIns="0" rIns="0" bIns="0" anchor="t">
+            <a:noAutofit/>
+          </a:bodyPr>
+          <a:lstStyle xmlns:a="http://schemas.openxmlformats.org/drawingml/2006/main"/>
+          <a:p xmlns:a="http://schemas.openxmlformats.org/drawingml/2006/main">
+            <a:pPr algn="l"/>
+            <a:r>
+              <a:rPr lang="en-US" sz="2100" b="1">
+                <a:solidFill>
+                  <a:srgbClr val="B60036"/>
+                </a:solidFill>
+                <a:latin typeface="Arial"/>
+                <a:ea typeface="Arial"/>
+              </a:rPr>
+              <a:t>Model training is not a current priority.</a:t>
+            </a:r>
           </a:p>
         </p:txBody>
       </p:sp>
       <p:sp>
         <p:nvSpPr>
           <p:cNvPr id="100033" name="Element-26"/>
-          <p:cNvSpPr/>
-          <p:nvPr/>
-        </p:nvSpPr>
-        <p:spPr>
-          <a:xfrm xmlns:a="http://schemas.openxmlformats.org/drawingml/2006/main">
-            <a:off x="792000" y="5364000"/>
-            <a:ext cx="10608000" cy="558000"/>
-          </a:xfrm>
-          <a:prstGeom xmlns:a="http://schemas.openxmlformats.org/drawingml/2006/main" prst="rect">
-            <a:avLst/>
-          </a:prstGeom>
-          <a:noFill xmlns:a="http://schemas.openxmlformats.org/drawingml/2006/main"/>
-          <a:ln xmlns:a="http://schemas.openxmlformats.org/drawingml/2006/main">
-            <a:noFill/>
-          </a:ln>
-        </p:spPr>
-        <p:txBody>
-          <a:bodyPr xmlns:a="http://schemas.openxmlformats.org/drawingml/2006/main" lIns="0" tIns="0" rIns="0" bIns="0" anchor="t">
-            <a:noAutofit/>
-          </a:bodyPr>
-          <a:lstStyle xmlns:a="http://schemas.openxmlformats.org/drawingml/2006/main"/>
-          <a:p xmlns:a="http://schemas.openxmlformats.org/drawingml/2006/main">
-            <a:pPr algn="l"/>
-            <a:r>
-              <a:rPr lang="en-US" sz="2100" b="1" i="0">
-                <a:solidFill>
-                  <a:srgbClr val="B60036"/>
-                </a:solidFill>
-                <a:latin typeface="Arial"/>
-                <a:ea typeface="Arial"/>
-              </a:rPr>
-              <a:t>Model training is not a current priority.</a:t>
-            </a:r>
-          </a:p>
-        </p:txBody>
-      </p:sp>
-      <p:sp>
-        <p:nvSpPr>
-          <p:cNvPr id="100034" name="Element-27"/>
           <p:cNvSpPr/>
           <p:nvPr/>
         </p:nvSpPr>
@@ -2349,7 +3884,7 @@
       </p:sp>
       <p:sp>
         <p:nvSpPr>
-          <p:cNvPr id="100035" name="Element-28"/>
+          <p:cNvPr id="100034" name="Element-27"/>
           <p:cNvSpPr/>
           <p:nvPr/>
         </p:nvSpPr>
@@ -2410,14 +3945,14 @@
       <p:grpSpPr/>
       <p:pic>
         <p:nvPicPr>
-          <p:cNvPr id="100036" name="Picture 1" descr="SMart ILIA — UMONS"/>
+          <p:cNvPr id="100035" name="Picture 1" descr="SMart ILIA — UMONS"/>
           <p:cNvPicPr>
             <a:picLocks xmlns:a="http://schemas.openxmlformats.org/drawingml/2006/main" noChangeAspect="1"/>
           </p:cNvPicPr>
           <p:nvPr/>
         </p:nvPicPr>
         <p:blipFill>
-          <a:blip xmlns:r="http://schemas.openxmlformats.org/officeDocument/2006/relationships" xmlns:a="http://schemas.openxmlformats.org/drawingml/2006/main" r:embed="R1c8d80b3d56f4810"/>
+          <a:blip xmlns:r="http://schemas.openxmlformats.org/officeDocument/2006/relationships" xmlns:a="http://schemas.openxmlformats.org/drawingml/2006/main" r:embed="R6bf601aedc314b06"/>
           <a:stretch xmlns:a="http://schemas.openxmlformats.org/drawingml/2006/main">
             <a:fillRect/>
           </a:stretch>
@@ -2434,7 +3969,7 @@
       </p:pic>
       <p:sp>
         <p:nvSpPr>
-          <p:cNvPr id="100037" name="Element-4"/>
+          <p:cNvPr id="100036" name="Element-4"/>
           <p:cNvSpPr/>
           <p:nvPr/>
         </p:nvSpPr>
@@ -2473,7 +4008,7 @@
       </p:sp>
       <p:sp>
         <p:nvSpPr>
-          <p:cNvPr id="100038" name="Element-5"/>
+          <p:cNvPr id="100037" name="Element-5"/>
           <p:cNvSpPr/>
           <p:nvPr/>
         </p:nvSpPr>
@@ -2512,7 +4047,7 @@
       </p:sp>
       <p:sp>
         <p:nvSpPr>
-          <p:cNvPr id="100039" name="Element-6"/>
+          <p:cNvPr id="100038" name="Element-6"/>
           <p:cNvSpPr/>
           <p:nvPr/>
         </p:nvSpPr>
@@ -2550,7 +4085,7 @@
       </p:sp>
       <p:sp>
         <p:nvSpPr>
-          <p:cNvPr id="100040" name="Element-7"/>
+          <p:cNvPr id="100039" name="Element-7"/>
           <p:cNvSpPr/>
           <p:nvPr/>
         </p:nvSpPr>
@@ -2589,7 +4124,7 @@
       </p:sp>
       <p:sp>
         <p:nvSpPr>
-          <p:cNvPr id="100041" name="Element-8"/>
+          <p:cNvPr id="100040" name="Element-8"/>
           <p:cNvSpPr/>
           <p:nvPr/>
         </p:nvSpPr>
@@ -2628,7 +4163,7 @@
       </p:sp>
       <p:sp>
         <p:nvSpPr>
-          <p:cNvPr id="100042" name="Title"/>
+          <p:cNvPr id="100041" name="Title"/>
           <p:cNvSpPr/>
           <p:nvPr/>
         </p:nvSpPr>
@@ -2667,7 +4202,7 @@
       </p:sp>
       <p:sp>
         <p:nvSpPr>
-          <p:cNvPr id="100043" name="Element-10"/>
+          <p:cNvPr id="100042" name="Element-10"/>
           <p:cNvSpPr/>
           <p:nvPr/>
         </p:nvSpPr>
@@ -2705,7 +4240,7 @@
       </p:sp>
       <p:sp>
         <p:nvSpPr>
-          <p:cNvPr id="100044" name="Element-11"/>
+          <p:cNvPr id="100043" name="Element-11"/>
           <p:cNvSpPr/>
           <p:nvPr/>
         </p:nvSpPr>
@@ -2745,7 +4280,7 @@
       </p:sp>
       <p:sp>
         <p:nvSpPr>
-          <p:cNvPr id="100045" name="Element-12"/>
+          <p:cNvPr id="100044" name="Element-12"/>
           <p:cNvSpPr/>
           <p:nvPr/>
         </p:nvSpPr>
@@ -2783,14 +4318,14 @@
       </p:sp>
       <p:sp>
         <p:nvSpPr>
-          <p:cNvPr id="100046" name="Element-13"/>
+          <p:cNvPr id="100045" name="Element-13"/>
           <p:cNvSpPr/>
           <p:nvPr/>
         </p:nvSpPr>
         <p:spPr>
           <a:xfrm xmlns:a="http://schemas.openxmlformats.org/drawingml/2006/main">
             <a:off x="1206000" y="1692000"/>
-            <a:ext cx="2952000" cy="1036800"/>
+            <a:ext cx="2160000" cy="1036800"/>
           </a:xfrm>
           <a:prstGeom xmlns:a="http://schemas.openxmlformats.org/drawingml/2006/main" prst="rect">
             <a:avLst/>
@@ -2822,14 +4357,14 @@
       </p:sp>
       <p:sp>
         <p:nvSpPr>
-          <p:cNvPr id="100047" name="Element-14"/>
-          <p:cNvSpPr/>
-          <p:nvPr/>
-        </p:nvSpPr>
-        <p:spPr>
-          <a:xfrm xmlns:a="http://schemas.openxmlformats.org/drawingml/2006/main">
-            <a:off x="4248000" y="1692000"/>
-            <a:ext cx="6864000" cy="1036800"/>
+          <p:cNvPr id="100046" name="Element-14"/>
+          <p:cNvSpPr/>
+          <p:nvPr/>
+        </p:nvSpPr>
+        <p:spPr>
+          <a:xfrm xmlns:a="http://schemas.openxmlformats.org/drawingml/2006/main">
+            <a:off x="3510000" y="1692000"/>
+            <a:ext cx="7602000" cy="1036800"/>
           </a:xfrm>
           <a:prstGeom xmlns:a="http://schemas.openxmlformats.org/drawingml/2006/main" prst="rect">
             <a:avLst/>
@@ -2861,7 +4396,7 @@
       </p:sp>
       <p:sp>
         <p:nvSpPr>
-          <p:cNvPr id="100048" name="Element-15"/>
+          <p:cNvPr id="100047" name="Element-15"/>
           <p:cNvSpPr/>
           <p:nvPr/>
         </p:nvSpPr>
@@ -2899,7 +4434,7 @@
       </p:sp>
       <p:sp>
         <p:nvSpPr>
-          <p:cNvPr id="100049" name="Element-16"/>
+          <p:cNvPr id="100048" name="Element-16"/>
           <p:cNvSpPr/>
           <p:nvPr/>
         </p:nvSpPr>
@@ -2939,7 +4474,7 @@
       </p:sp>
       <p:sp>
         <p:nvSpPr>
-          <p:cNvPr id="100050" name="Element-17"/>
+          <p:cNvPr id="100049" name="Element-17"/>
           <p:cNvSpPr/>
           <p:nvPr/>
         </p:nvSpPr>
@@ -2977,14 +4512,14 @@
       </p:sp>
       <p:sp>
         <p:nvSpPr>
-          <p:cNvPr id="100051" name="Element-18"/>
+          <p:cNvPr id="100050" name="Element-18"/>
           <p:cNvSpPr/>
           <p:nvPr/>
         </p:nvSpPr>
         <p:spPr>
           <a:xfrm xmlns:a="http://schemas.openxmlformats.org/drawingml/2006/main">
             <a:off x="1206000" y="2808000"/>
-            <a:ext cx="2952000" cy="1036800"/>
+            <a:ext cx="2160000" cy="1036800"/>
           </a:xfrm>
           <a:prstGeom xmlns:a="http://schemas.openxmlformats.org/drawingml/2006/main" prst="rect">
             <a:avLst/>
@@ -3016,14 +4551,14 @@
       </p:sp>
       <p:sp>
         <p:nvSpPr>
-          <p:cNvPr id="100052" name="Element-19"/>
-          <p:cNvSpPr/>
-          <p:nvPr/>
-        </p:nvSpPr>
-        <p:spPr>
-          <a:xfrm xmlns:a="http://schemas.openxmlformats.org/drawingml/2006/main">
-            <a:off x="4248000" y="2808000"/>
-            <a:ext cx="6864000" cy="1036800"/>
+          <p:cNvPr id="100051" name="Element-19"/>
+          <p:cNvSpPr/>
+          <p:nvPr/>
+        </p:nvSpPr>
+        <p:spPr>
+          <a:xfrm xmlns:a="http://schemas.openxmlformats.org/drawingml/2006/main">
+            <a:off x="3510000" y="2808000"/>
+            <a:ext cx="7602000" cy="1036800"/>
           </a:xfrm>
           <a:prstGeom xmlns:a="http://schemas.openxmlformats.org/drawingml/2006/main" prst="rect">
             <a:avLst/>
@@ -3055,7 +4590,7 @@
       </p:sp>
       <p:sp>
         <p:nvSpPr>
-          <p:cNvPr id="100053" name="Element-20"/>
+          <p:cNvPr id="100052" name="Element-20"/>
           <p:cNvSpPr/>
           <p:nvPr/>
         </p:nvSpPr>
@@ -3093,7 +4628,7 @@
       </p:sp>
       <p:sp>
         <p:nvSpPr>
-          <p:cNvPr id="100054" name="Element-21"/>
+          <p:cNvPr id="100053" name="Element-21"/>
           <p:cNvSpPr/>
           <p:nvPr/>
         </p:nvSpPr>
@@ -3133,7 +4668,7 @@
       </p:sp>
       <p:sp>
         <p:nvSpPr>
-          <p:cNvPr id="100055" name="Element-22"/>
+          <p:cNvPr id="100054" name="Element-22"/>
           <p:cNvSpPr/>
           <p:nvPr/>
         </p:nvSpPr>
@@ -3171,14 +4706,14 @@
       </p:sp>
       <p:sp>
         <p:nvSpPr>
-          <p:cNvPr id="100056" name="Element-23"/>
+          <p:cNvPr id="100055" name="Element-23"/>
           <p:cNvSpPr/>
           <p:nvPr/>
         </p:nvSpPr>
         <p:spPr>
           <a:xfrm xmlns:a="http://schemas.openxmlformats.org/drawingml/2006/main">
             <a:off x="1206000" y="3924000"/>
-            <a:ext cx="2952000" cy="1036800"/>
+            <a:ext cx="2160000" cy="1036800"/>
           </a:xfrm>
           <a:prstGeom xmlns:a="http://schemas.openxmlformats.org/drawingml/2006/main" prst="rect">
             <a:avLst/>
@@ -3210,14 +4745,14 @@
       </p:sp>
       <p:sp>
         <p:nvSpPr>
-          <p:cNvPr id="100057" name="Element-24"/>
-          <p:cNvSpPr/>
-          <p:nvPr/>
-        </p:nvSpPr>
-        <p:spPr>
-          <a:xfrm xmlns:a="http://schemas.openxmlformats.org/drawingml/2006/main">
-            <a:off x="4248000" y="3924000"/>
-            <a:ext cx="6864000" cy="1036800"/>
+          <p:cNvPr id="100056" name="Element-24"/>
+          <p:cNvSpPr/>
+          <p:nvPr/>
+        </p:nvSpPr>
+        <p:spPr>
+          <a:xfrm xmlns:a="http://schemas.openxmlformats.org/drawingml/2006/main">
+            <a:off x="3510000" y="3924000"/>
+            <a:ext cx="7602000" cy="1036800"/>
           </a:xfrm>
           <a:prstGeom xmlns:a="http://schemas.openxmlformats.org/drawingml/2006/main" prst="rect">
             <a:avLst/>
@@ -3249,7 +4784,7 @@
       </p:sp>
       <p:sp>
         <p:nvSpPr>
-          <p:cNvPr id="100058" name="Element-25"/>
+          <p:cNvPr id="100057" name="Element-25"/>
           <p:cNvSpPr/>
           <p:nvPr/>
         </p:nvSpPr>
@@ -3287,14 +4822,14 @@
       </p:sp>
       <p:sp>
         <p:nvSpPr>
-          <p:cNvPr id="100059" name="Element-26"/>
-          <p:cNvSpPr/>
-          <p:nvPr/>
-        </p:nvSpPr>
-        <p:spPr>
-          <a:xfrm xmlns:a="http://schemas.openxmlformats.org/drawingml/2006/main">
-            <a:off x="792000" y="5364000"/>
-            <a:ext cx="10608000" cy="558000"/>
+          <p:cNvPr id="100058" name="Caption-3"/>
+          <p:cNvSpPr/>
+          <p:nvPr/>
+        </p:nvSpPr>
+        <p:spPr>
+          <a:xfrm xmlns:a="http://schemas.openxmlformats.org/drawingml/2006/main">
+            <a:off x="792000" y="5356800"/>
+            <a:ext cx="10608000" cy="864000"/>
           </a:xfrm>
           <a:prstGeom xmlns:a="http://schemas.openxmlformats.org/drawingml/2006/main" prst="rect">
             <a:avLst/>
@@ -3312,7 +4847,7 @@
           <a:p xmlns:a="http://schemas.openxmlformats.org/drawingml/2006/main">
             <a:pPr algn="l"/>
             <a:r>
-              <a:rPr lang="en-US" sz="2100" b="1" i="0">
+              <a:rPr lang="en-US" sz="2100" b="1">
                 <a:solidFill>
                   <a:srgbClr val="B60036"/>
                 </a:solidFill>
@@ -3326,14 +4861,14 @@
       </p:sp>
       <p:sp>
         <p:nvSpPr>
-          <p:cNvPr id="100060" name="Element-27"/>
-          <p:cNvSpPr/>
-          <p:nvPr/>
-        </p:nvSpPr>
-        <p:spPr>
-          <a:xfrm xmlns:a="http://schemas.openxmlformats.org/drawingml/2006/main">
-            <a:off x="792000" y="5940000"/>
-            <a:ext cx="10608000" cy="223200"/>
+          <p:cNvPr id="100059" name="Element-27"/>
+          <p:cNvSpPr/>
+          <p:nvPr/>
+        </p:nvSpPr>
+        <p:spPr>
+          <a:xfrm xmlns:a="http://schemas.openxmlformats.org/drawingml/2006/main">
+            <a:off x="792000" y="5781600"/>
+            <a:ext cx="10608000" cy="180000"/>
           </a:xfrm>
           <a:prstGeom xmlns:a="http://schemas.openxmlformats.org/drawingml/2006/main" prst="rect">
             <a:avLst/>
@@ -3351,7 +4886,7 @@
           <a:p xmlns:a="http://schemas.openxmlformats.org/drawingml/2006/main">
             <a:pPr algn="l"/>
             <a:r>
-              <a:rPr lang="en-US" sz="1000" b="0" i="0">
+              <a:rPr lang="en-US" sz="800" b="0" i="0">
                 <a:solidFill>
                   <a:srgbClr val="5C626C"/>
                 </a:solidFill>
@@ -3365,7 +4900,7 @@
       </p:sp>
       <p:sp>
         <p:nvSpPr>
-          <p:cNvPr id="100061" name="Element-28"/>
+          <p:cNvPr id="100060" name="Element-28"/>
           <p:cNvSpPr/>
           <p:nvPr/>
         </p:nvSpPr>
@@ -3404,7 +4939,7 @@
       </p:sp>
       <p:sp>
         <p:nvSpPr>
-          <p:cNvPr id="100062" name="Element-29"/>
+          <p:cNvPr id="100061" name="Element-29"/>
           <p:cNvSpPr/>
           <p:nvPr/>
         </p:nvSpPr>
@@ -3465,14 +5000,14 @@
       <p:grpSpPr/>
       <p:pic>
         <p:nvPicPr>
-          <p:cNvPr id="100063" name="Picture 1" descr="SMart ILIA — UMONS"/>
+          <p:cNvPr id="100062" name="Picture 1" descr="SMart ILIA — UMONS"/>
           <p:cNvPicPr>
             <a:picLocks xmlns:a="http://schemas.openxmlformats.org/drawingml/2006/main" noChangeAspect="1"/>
           </p:cNvPicPr>
           <p:nvPr/>
         </p:nvPicPr>
         <p:blipFill>
-          <a:blip xmlns:r="http://schemas.openxmlformats.org/officeDocument/2006/relationships" xmlns:a="http://schemas.openxmlformats.org/drawingml/2006/main" r:embed="R0e0c216dbd0b4c2c"/>
+          <a:blip xmlns:r="http://schemas.openxmlformats.org/officeDocument/2006/relationships" xmlns:a="http://schemas.openxmlformats.org/drawingml/2006/main" r:embed="R700efcafeca34c21"/>
           <a:stretch xmlns:a="http://schemas.openxmlformats.org/drawingml/2006/main">
             <a:fillRect/>
           </a:stretch>
@@ -3489,7 +5024,7 @@
       </p:pic>
       <p:sp>
         <p:nvSpPr>
-          <p:cNvPr id="100064" name="Element-4"/>
+          <p:cNvPr id="100063" name="Element-4"/>
           <p:cNvSpPr/>
           <p:nvPr/>
         </p:nvSpPr>
@@ -3528,7 +5063,7 @@
       </p:sp>
       <p:sp>
         <p:nvSpPr>
-          <p:cNvPr id="100065" name="Element-5"/>
+          <p:cNvPr id="100064" name="Element-5"/>
           <p:cNvSpPr/>
           <p:nvPr/>
         </p:nvSpPr>
@@ -3567,7 +5102,7 @@
       </p:sp>
       <p:sp>
         <p:nvSpPr>
-          <p:cNvPr id="100066" name="Element-6"/>
+          <p:cNvPr id="100065" name="Element-6"/>
           <p:cNvSpPr/>
           <p:nvPr/>
         </p:nvSpPr>
@@ -3605,7 +5140,7 @@
       </p:sp>
       <p:sp>
         <p:nvSpPr>
-          <p:cNvPr id="100067" name="Element-7"/>
+          <p:cNvPr id="100066" name="Element-7"/>
           <p:cNvSpPr/>
           <p:nvPr/>
         </p:nvSpPr>
@@ -3644,7 +5179,7 @@
       </p:sp>
       <p:sp>
         <p:nvSpPr>
-          <p:cNvPr id="100068" name="Element-8"/>
+          <p:cNvPr id="100067" name="Element-8"/>
           <p:cNvSpPr/>
           <p:nvPr/>
         </p:nvSpPr>
@@ -3683,7 +5218,7 @@
       </p:sp>
       <p:sp>
         <p:nvSpPr>
-          <p:cNvPr id="100069" name="Title"/>
+          <p:cNvPr id="100068" name="Title"/>
           <p:cNvSpPr/>
           <p:nvPr/>
         </p:nvSpPr>
@@ -3722,7 +5257,7 @@
       </p:sp>
       <p:sp>
         <p:nvSpPr>
-          <p:cNvPr id="100070" name="Element-10"/>
+          <p:cNvPr id="100069" name="Element-10"/>
           <p:cNvSpPr/>
           <p:nvPr/>
         </p:nvSpPr>
@@ -3760,14 +5295,14 @@
       </p:sp>
       <p:sp>
         <p:nvSpPr>
-          <p:cNvPr id="100071" name="Element-11"/>
+          <p:cNvPr id="100070" name="Element-11"/>
           <p:cNvSpPr/>
           <p:nvPr/>
         </p:nvSpPr>
         <p:spPr>
           <a:xfrm xmlns:a="http://schemas.openxmlformats.org/drawingml/2006/main">
             <a:off x="792000" y="1710000"/>
-            <a:ext cx="5112000" cy="2178000"/>
+            <a:ext cx="5203200" cy="2178000"/>
           </a:xfrm>
           <a:prstGeom xmlns:a="http://schemas.openxmlformats.org/drawingml/2006/main" prst="roundRect">
             <a:avLst/>
@@ -3800,14 +5335,14 @@
       </p:sp>
       <p:sp>
         <p:nvSpPr>
-          <p:cNvPr id="100072" name="Element-12"/>
+          <p:cNvPr id="100071" name="Element-12"/>
           <p:cNvSpPr/>
           <p:nvPr/>
         </p:nvSpPr>
         <p:spPr>
           <a:xfrm xmlns:a="http://schemas.openxmlformats.org/drawingml/2006/main">
             <a:off x="1044000" y="1908000"/>
-            <a:ext cx="4608000" cy="684000"/>
+            <a:ext cx="4699200" cy="684000"/>
           </a:xfrm>
           <a:prstGeom xmlns:a="http://schemas.openxmlformats.org/drawingml/2006/main" prst="rect">
             <a:avLst/>
@@ -3839,13 +5374,13 @@
       </p:sp>
       <p:sp>
         <p:nvSpPr>
-          <p:cNvPr id="100073" name="Element-13"/>
-          <p:cNvSpPr/>
-          <p:nvPr/>
-        </p:nvSpPr>
-        <p:spPr>
-          <a:xfrm xmlns:a="http://schemas.openxmlformats.org/drawingml/2006/main">
-            <a:off x="3078000" y="2772000"/>
+          <p:cNvPr id="100072" name="Element-13"/>
+          <p:cNvSpPr/>
+          <p:nvPr/>
+        </p:nvSpPr>
+        <p:spPr>
+          <a:xfrm xmlns:a="http://schemas.openxmlformats.org/drawingml/2006/main">
+            <a:off x="3123600" y="2772000"/>
             <a:ext cx="540000" cy="18000"/>
           </a:xfrm>
           <a:prstGeom xmlns:a="http://schemas.openxmlformats.org/drawingml/2006/main" prst="rect">
@@ -3877,14 +5412,14 @@
       </p:sp>
       <p:sp>
         <p:nvSpPr>
-          <p:cNvPr id="100074" name="Element-14"/>
+          <p:cNvPr id="100073" name="Element-14"/>
           <p:cNvSpPr/>
           <p:nvPr/>
         </p:nvSpPr>
         <p:spPr>
           <a:xfrm xmlns:a="http://schemas.openxmlformats.org/drawingml/2006/main">
             <a:off x="1044000" y="2862000"/>
-            <a:ext cx="4608000" cy="540000"/>
+            <a:ext cx="4699200" cy="540000"/>
           </a:xfrm>
           <a:prstGeom xmlns:a="http://schemas.openxmlformats.org/drawingml/2006/main" prst="rect">
             <a:avLst/>
@@ -3916,14 +5451,14 @@
       </p:sp>
       <p:sp>
         <p:nvSpPr>
-          <p:cNvPr id="100075" name="Element-15"/>
-          <p:cNvSpPr/>
-          <p:nvPr/>
-        </p:nvSpPr>
-        <p:spPr>
-          <a:xfrm xmlns:a="http://schemas.openxmlformats.org/drawingml/2006/main">
-            <a:off x="6288000" y="1710000"/>
-            <a:ext cx="5112000" cy="2178000"/>
+          <p:cNvPr id="100074" name="Element-15"/>
+          <p:cNvSpPr/>
+          <p:nvPr/>
+        </p:nvSpPr>
+        <p:spPr>
+          <a:xfrm xmlns:a="http://schemas.openxmlformats.org/drawingml/2006/main">
+            <a:off x="6196800" y="1710000"/>
+            <a:ext cx="5203200" cy="2178000"/>
           </a:xfrm>
           <a:prstGeom xmlns:a="http://schemas.openxmlformats.org/drawingml/2006/main" prst="roundRect">
             <a:avLst/>
@@ -3956,14 +5491,14 @@
       </p:sp>
       <p:sp>
         <p:nvSpPr>
-          <p:cNvPr id="100076" name="Element-16"/>
-          <p:cNvSpPr/>
-          <p:nvPr/>
-        </p:nvSpPr>
-        <p:spPr>
-          <a:xfrm xmlns:a="http://schemas.openxmlformats.org/drawingml/2006/main">
-            <a:off x="6540000" y="1908000"/>
-            <a:ext cx="4608000" cy="684000"/>
+          <p:cNvPr id="100075" name="Element-16"/>
+          <p:cNvSpPr/>
+          <p:nvPr/>
+        </p:nvSpPr>
+        <p:spPr>
+          <a:xfrm xmlns:a="http://schemas.openxmlformats.org/drawingml/2006/main">
+            <a:off x="6448800" y="1908000"/>
+            <a:ext cx="4699200" cy="684000"/>
           </a:xfrm>
           <a:prstGeom xmlns:a="http://schemas.openxmlformats.org/drawingml/2006/main" prst="rect">
             <a:avLst/>
@@ -4008,13 +5543,13 @@
       </p:sp>
       <p:sp>
         <p:nvSpPr>
-          <p:cNvPr id="100077" name="Element-17"/>
-          <p:cNvSpPr/>
-          <p:nvPr/>
-        </p:nvSpPr>
-        <p:spPr>
-          <a:xfrm xmlns:a="http://schemas.openxmlformats.org/drawingml/2006/main">
-            <a:off x="8574000" y="2772000"/>
+          <p:cNvPr id="100076" name="Element-17"/>
+          <p:cNvSpPr/>
+          <p:nvPr/>
+        </p:nvSpPr>
+        <p:spPr>
+          <a:xfrm xmlns:a="http://schemas.openxmlformats.org/drawingml/2006/main">
+            <a:off x="8528400" y="2772000"/>
             <a:ext cx="540000" cy="18000"/>
           </a:xfrm>
           <a:prstGeom xmlns:a="http://schemas.openxmlformats.org/drawingml/2006/main" prst="rect">
@@ -4046,14 +5581,14 @@
       </p:sp>
       <p:sp>
         <p:nvSpPr>
-          <p:cNvPr id="100078" name="Element-18"/>
-          <p:cNvSpPr/>
-          <p:nvPr/>
-        </p:nvSpPr>
-        <p:spPr>
-          <a:xfrm xmlns:a="http://schemas.openxmlformats.org/drawingml/2006/main">
-            <a:off x="6540000" y="2862000"/>
-            <a:ext cx="4608000" cy="540000"/>
+          <p:cNvPr id="100077" name="Element-18"/>
+          <p:cNvSpPr/>
+          <p:nvPr/>
+        </p:nvSpPr>
+        <p:spPr>
+          <a:xfrm xmlns:a="http://schemas.openxmlformats.org/drawingml/2006/main">
+            <a:off x="6448800" y="2862000"/>
+            <a:ext cx="4699200" cy="540000"/>
           </a:xfrm>
           <a:prstGeom xmlns:a="http://schemas.openxmlformats.org/drawingml/2006/main" prst="rect">
             <a:avLst/>
@@ -4085,7 +5620,7 @@
       </p:sp>
       <p:sp>
         <p:nvSpPr>
-          <p:cNvPr id="100079" name="Element-19"/>
+          <p:cNvPr id="100078" name="Element-19"/>
           <p:cNvSpPr/>
           <p:nvPr/>
         </p:nvSpPr>
@@ -4125,7 +5660,7 @@
       </p:sp>
       <p:sp>
         <p:nvSpPr>
-          <p:cNvPr id="100080" name="Element-20"/>
+          <p:cNvPr id="100079" name="Element-20"/>
           <p:cNvSpPr/>
           <p:nvPr/>
         </p:nvSpPr>
@@ -4163,7 +5698,7 @@
       </p:sp>
       <p:sp>
         <p:nvSpPr>
-          <p:cNvPr id="100081" name="Element-21"/>
+          <p:cNvPr id="100080" name="Element-21"/>
           <p:cNvSpPr/>
           <p:nvPr/>
         </p:nvSpPr>
@@ -4202,7 +5737,7 @@
       </p:sp>
       <p:sp>
         <p:nvSpPr>
-          <p:cNvPr id="100082" name="Element-22"/>
+          <p:cNvPr id="100081" name="Element-22"/>
           <p:cNvSpPr/>
           <p:nvPr/>
         </p:nvSpPr>
@@ -4240,14 +5775,14 @@
       </p:sp>
       <p:sp>
         <p:nvSpPr>
-          <p:cNvPr id="100083" name="Element-23"/>
-          <p:cNvSpPr/>
-          <p:nvPr/>
-        </p:nvSpPr>
-        <p:spPr>
-          <a:xfrm xmlns:a="http://schemas.openxmlformats.org/drawingml/2006/main">
-            <a:off x="792000" y="5364000"/>
-            <a:ext cx="10608000" cy="558000"/>
+          <p:cNvPr id="100082" name="Caption-4"/>
+          <p:cNvSpPr/>
+          <p:nvPr/>
+        </p:nvSpPr>
+        <p:spPr>
+          <a:xfrm xmlns:a="http://schemas.openxmlformats.org/drawingml/2006/main">
+            <a:off x="792000" y="5356800"/>
+            <a:ext cx="10608000" cy="864000"/>
           </a:xfrm>
           <a:prstGeom xmlns:a="http://schemas.openxmlformats.org/drawingml/2006/main" prst="rect">
             <a:avLst/>
@@ -4265,7 +5800,7 @@
           <a:p xmlns:a="http://schemas.openxmlformats.org/drawingml/2006/main">
             <a:pPr algn="l"/>
             <a:r>
-              <a:rPr lang="en-US" sz="1850" b="1" i="0">
+              <a:rPr lang="en-US" sz="2100" b="1">
                 <a:solidFill>
                   <a:srgbClr val="B60036"/>
                 </a:solidFill>
@@ -4279,7 +5814,7 @@
       </p:sp>
       <p:sp>
         <p:nvSpPr>
-          <p:cNvPr id="100084" name="Element-24"/>
+          <p:cNvPr id="100083" name="Element-24"/>
           <p:cNvSpPr/>
           <p:nvPr/>
         </p:nvSpPr>
@@ -4318,7 +5853,7 @@
       </p:sp>
       <p:sp>
         <p:nvSpPr>
-          <p:cNvPr id="100085" name="Element-25"/>
+          <p:cNvPr id="100084" name="Element-25"/>
           <p:cNvSpPr/>
           <p:nvPr/>
         </p:nvSpPr>
@@ -4351,6 +5886,5983 @@
                 <a:ea typeface="Arial"/>
               </a:rPr>
               <a:t>4</a:t>
+            </a:r>
+          </a:p>
+        </p:txBody>
+      </p:sp>
+    </p:spTree>
+  </p:cSld>
+</p:sld>
+</file>
+
+<file path=ppt/slides/slide5.xml><?xml version="1.0" encoding="utf-8"?>
+<p:sld xmlns:p="http://schemas.openxmlformats.org/presentationml/2006/main">
+  <p:cSld>
+    <p:bg>
+      <p:bgPr>
+        <a:solidFill xmlns:a="http://schemas.openxmlformats.org/drawingml/2006/main">
+          <a:srgbClr val="FFFFFF"/>
+        </a:solidFill>
+      </p:bgPr>
+    </p:bg>
+    <p:spTree>
+      <p:nvGrpSpPr>
+        <p:cNvPr id="1" name=""/>
+        <p:cNvGrpSpPr/>
+        <p:nvPr/>
+      </p:nvGrpSpPr>
+      <p:grpSpPr/>
+      <p:pic>
+        <p:nvPicPr>
+          <p:cNvPr id="100085" name="Picture 1" descr="SMart ILIA — UMONS"/>
+          <p:cNvPicPr>
+            <a:picLocks xmlns:a="http://schemas.openxmlformats.org/drawingml/2006/main" noChangeAspect="1"/>
+          </p:cNvPicPr>
+          <p:nvPr/>
+        </p:nvPicPr>
+        <p:blipFill>
+          <a:blip xmlns:r="http://schemas.openxmlformats.org/officeDocument/2006/relationships" xmlns:a="http://schemas.openxmlformats.org/drawingml/2006/main" r:embed="R4f7f222a939c47ca"/>
+          <a:stretch xmlns:a="http://schemas.openxmlformats.org/drawingml/2006/main">
+            <a:fillRect/>
+          </a:stretch>
+        </p:blipFill>
+        <p:spPr>
+          <a:xfrm xmlns:a="http://schemas.openxmlformats.org/drawingml/2006/main">
+            <a:off x="9702000" y="216000"/>
+            <a:ext cx="1699200" cy="582331"/>
+          </a:xfrm>
+          <a:prstGeom xmlns:a="http://schemas.openxmlformats.org/drawingml/2006/main" prst="rect">
+            <a:avLst/>
+          </a:prstGeom>
+        </p:spPr>
+      </p:pic>
+      <p:sp>
+        <p:nvSpPr>
+          <p:cNvPr id="100086" name="Element-4"/>
+          <p:cNvSpPr/>
+          <p:nvPr/>
+        </p:nvSpPr>
+        <p:spPr>
+          <a:xfrm xmlns:a="http://schemas.openxmlformats.org/drawingml/2006/main">
+            <a:off x="792000" y="309600"/>
+            <a:ext cx="1764000" cy="208800"/>
+          </a:xfrm>
+          <a:prstGeom xmlns:a="http://schemas.openxmlformats.org/drawingml/2006/main" prst="rect">
+            <a:avLst/>
+          </a:prstGeom>
+          <a:noFill xmlns:a="http://schemas.openxmlformats.org/drawingml/2006/main"/>
+          <a:ln xmlns:a="http://schemas.openxmlformats.org/drawingml/2006/main">
+            <a:noFill/>
+          </a:ln>
+        </p:spPr>
+        <p:txBody>
+          <a:bodyPr xmlns:a="http://schemas.openxmlformats.org/drawingml/2006/main" lIns="0" tIns="0" rIns="0" bIns="0" anchor="ctr">
+            <a:noAutofit/>
+          </a:bodyPr>
+          <a:lstStyle xmlns:a="http://schemas.openxmlformats.org/drawingml/2006/main"/>
+          <a:p xmlns:a="http://schemas.openxmlformats.org/drawingml/2006/main">
+            <a:pPr algn="l"/>
+            <a:r>
+              <a:rPr lang="en-US" sz="950" b="0" i="0">
+                <a:solidFill>
+                  <a:srgbClr val="5C626C"/>
+                </a:solidFill>
+                <a:latin typeface="Arial"/>
+                <a:ea typeface="Arial"/>
+              </a:rPr>
+              <a:t>Objective</a:t>
+            </a:r>
+          </a:p>
+        </p:txBody>
+      </p:sp>
+      <p:sp>
+        <p:nvSpPr>
+          <p:cNvPr id="100087" name="Element-5"/>
+          <p:cNvSpPr/>
+          <p:nvPr/>
+        </p:nvSpPr>
+        <p:spPr>
+          <a:xfrm xmlns:a="http://schemas.openxmlformats.org/drawingml/2006/main">
+            <a:off x="2736000" y="309600"/>
+            <a:ext cx="1764000" cy="208800"/>
+          </a:xfrm>
+          <a:prstGeom xmlns:a="http://schemas.openxmlformats.org/drawingml/2006/main" prst="rect">
+            <a:avLst/>
+          </a:prstGeom>
+          <a:noFill xmlns:a="http://schemas.openxmlformats.org/drawingml/2006/main"/>
+          <a:ln xmlns:a="http://schemas.openxmlformats.org/drawingml/2006/main">
+            <a:noFill/>
+          </a:ln>
+        </p:spPr>
+        <p:txBody>
+          <a:bodyPr xmlns:a="http://schemas.openxmlformats.org/drawingml/2006/main" lIns="0" tIns="0" rIns="0" bIns="0" anchor="ctr">
+            <a:noAutofit/>
+          </a:bodyPr>
+          <a:lstStyle xmlns:a="http://schemas.openxmlformats.org/drawingml/2006/main"/>
+          <a:p xmlns:a="http://schemas.openxmlformats.org/drawingml/2006/main">
+            <a:pPr algn="l"/>
+            <a:r>
+              <a:rPr lang="en-US" sz="950" b="0" i="0">
+                <a:solidFill>
+                  <a:srgbClr val="5C626C"/>
+                </a:solidFill>
+                <a:latin typeface="Arial"/>
+                <a:ea typeface="Arial"/>
+              </a:rPr>
+              <a:t>Instrument</a:t>
+            </a:r>
+          </a:p>
+        </p:txBody>
+      </p:sp>
+      <p:sp>
+        <p:nvSpPr>
+          <p:cNvPr id="100088" name="Element-6"/>
+          <p:cNvSpPr/>
+          <p:nvPr/>
+        </p:nvSpPr>
+        <p:spPr>
+          <a:xfrm xmlns:a="http://schemas.openxmlformats.org/drawingml/2006/main">
+            <a:off x="4680000" y="309600"/>
+            <a:ext cx="1764000" cy="208800"/>
+          </a:xfrm>
+          <a:prstGeom xmlns:a="http://schemas.openxmlformats.org/drawingml/2006/main" prst="rect">
+            <a:avLst/>
+          </a:prstGeom>
+          <a:noFill xmlns:a="http://schemas.openxmlformats.org/drawingml/2006/main"/>
+          <a:ln xmlns:a="http://schemas.openxmlformats.org/drawingml/2006/main">
+            <a:noFill/>
+          </a:ln>
+        </p:spPr>
+        <p:txBody>
+          <a:bodyPr xmlns:a="http://schemas.openxmlformats.org/drawingml/2006/main" lIns="0" tIns="0" rIns="0" bIns="0" anchor="ctr">
+            <a:noAutofit/>
+          </a:bodyPr>
+          <a:lstStyle xmlns:a="http://schemas.openxmlformats.org/drawingml/2006/main"/>
+          <a:p xmlns:a="http://schemas.openxmlformats.org/drawingml/2006/main">
+            <a:pPr algn="l"/>
+            <a:r>
+              <a:rPr lang="en-US" sz="950" b="0" i="0">
+                <a:solidFill>
+                  <a:srgbClr val="B60036"/>
+                </a:solidFill>
+                <a:latin typeface="Arial"/>
+                <a:ea typeface="Arial"/>
+              </a:rPr>
+              <a:t>Hypotheses</a:t>
+            </a:r>
+          </a:p>
+        </p:txBody>
+      </p:sp>
+      <p:sp>
+        <p:nvSpPr>
+          <p:cNvPr id="100089" name="Element-7"/>
+          <p:cNvSpPr/>
+          <p:nvPr/>
+        </p:nvSpPr>
+        <p:spPr>
+          <a:xfrm xmlns:a="http://schemas.openxmlformats.org/drawingml/2006/main">
+            <a:off x="4680000" y="529200"/>
+            <a:ext cx="1764000" cy="16200"/>
+          </a:xfrm>
+          <a:prstGeom xmlns:a="http://schemas.openxmlformats.org/drawingml/2006/main" prst="rect">
+            <a:avLst/>
+          </a:prstGeom>
+          <a:solidFill xmlns:a="http://schemas.openxmlformats.org/drawingml/2006/main">
+            <a:srgbClr val="B60036"/>
+          </a:solidFill>
+          <a:ln xmlns:a="http://schemas.openxmlformats.org/drawingml/2006/main">
+            <a:noFill/>
+          </a:ln>
+        </p:spPr>
+        <p:txBody>
+          <a:bodyPr xmlns:a="http://schemas.openxmlformats.org/drawingml/2006/main" lIns="0" tIns="0" rIns="0" bIns="0" anchor="ctr">
+            <a:noAutofit/>
+          </a:bodyPr>
+          <a:lstStyle xmlns:a="http://schemas.openxmlformats.org/drawingml/2006/main"/>
+          <a:p xmlns:a="http://schemas.openxmlformats.org/drawingml/2006/main">
+            <a:pPr algn="l"/>
+            <a:endParaRPr lang="en-US" sz="1800" b="0" i="0">
+              <a:solidFill>
+                <a:srgbClr val="20252D"/>
+              </a:solidFill>
+              <a:latin typeface="Arial"/>
+              <a:ea typeface="Arial"/>
+            </a:endParaRPr>
+          </a:p>
+        </p:txBody>
+      </p:sp>
+      <p:sp>
+        <p:nvSpPr>
+          <p:cNvPr id="100090" name="Element-8"/>
+          <p:cNvSpPr/>
+          <p:nvPr/>
+        </p:nvSpPr>
+        <p:spPr>
+          <a:xfrm xmlns:a="http://schemas.openxmlformats.org/drawingml/2006/main">
+            <a:off x="6624000" y="309600"/>
+            <a:ext cx="1764000" cy="208800"/>
+          </a:xfrm>
+          <a:prstGeom xmlns:a="http://schemas.openxmlformats.org/drawingml/2006/main" prst="rect">
+            <a:avLst/>
+          </a:prstGeom>
+          <a:noFill xmlns:a="http://schemas.openxmlformats.org/drawingml/2006/main"/>
+          <a:ln xmlns:a="http://schemas.openxmlformats.org/drawingml/2006/main">
+            <a:noFill/>
+          </a:ln>
+        </p:spPr>
+        <p:txBody>
+          <a:bodyPr xmlns:a="http://schemas.openxmlformats.org/drawingml/2006/main" lIns="0" tIns="0" rIns="0" bIns="0" anchor="ctr">
+            <a:noAutofit/>
+          </a:bodyPr>
+          <a:lstStyle xmlns:a="http://schemas.openxmlformats.org/drawingml/2006/main"/>
+          <a:p xmlns:a="http://schemas.openxmlformats.org/drawingml/2006/main">
+            <a:pPr algn="l"/>
+            <a:r>
+              <a:rPr lang="en-US" sz="950" b="0" i="0">
+                <a:solidFill>
+                  <a:srgbClr val="5C626C"/>
+                </a:solidFill>
+                <a:latin typeface="Arial"/>
+                <a:ea typeface="Arial"/>
+              </a:rPr>
+              <a:t>Outlook</a:t>
+            </a:r>
+          </a:p>
+        </p:txBody>
+      </p:sp>
+      <p:sp>
+        <p:nvSpPr>
+          <p:cNvPr id="100091" name="Title"/>
+          <p:cNvSpPr/>
+          <p:nvPr/>
+        </p:nvSpPr>
+        <p:spPr>
+          <a:xfrm xmlns:a="http://schemas.openxmlformats.org/drawingml/2006/main">
+            <a:off x="792000" y="612000"/>
+            <a:ext cx="8748000" cy="648000"/>
+          </a:xfrm>
+          <a:prstGeom xmlns:a="http://schemas.openxmlformats.org/drawingml/2006/main" prst="rect">
+            <a:avLst/>
+          </a:prstGeom>
+          <a:noFill xmlns:a="http://schemas.openxmlformats.org/drawingml/2006/main"/>
+          <a:ln xmlns:a="http://schemas.openxmlformats.org/drawingml/2006/main">
+            <a:noFill/>
+          </a:ln>
+        </p:spPr>
+        <p:txBody>
+          <a:bodyPr xmlns:a="http://schemas.openxmlformats.org/drawingml/2006/main" lIns="0" tIns="0" rIns="0" bIns="0" anchor="ctr">
+            <a:noAutofit/>
+          </a:bodyPr>
+          <a:lstStyle xmlns:a="http://schemas.openxmlformats.org/drawingml/2006/main"/>
+          <a:p xmlns:a="http://schemas.openxmlformats.org/drawingml/2006/main">
+            <a:pPr algn="l"/>
+            <a:r>
+              <a:rPr lang="en-US" sz="2900" b="1" i="0">
+                <a:solidFill>
+                  <a:srgbClr val="20252D"/>
+                </a:solidFill>
+                <a:latin typeface="Arial"/>
+                <a:ea typeface="Arial"/>
+              </a:rPr>
+              <a:t>Current status</a:t>
+            </a:r>
+          </a:p>
+        </p:txBody>
+      </p:sp>
+      <p:sp>
+        <p:nvSpPr>
+          <p:cNvPr id="100092" name="Element-10"/>
+          <p:cNvSpPr/>
+          <p:nvPr/>
+        </p:nvSpPr>
+        <p:spPr>
+          <a:xfrm xmlns:a="http://schemas.openxmlformats.org/drawingml/2006/main">
+            <a:off x="792000" y="1303200"/>
+            <a:ext cx="1224000" cy="25200"/>
+          </a:xfrm>
+          <a:prstGeom xmlns:a="http://schemas.openxmlformats.org/drawingml/2006/main" prst="rect">
+            <a:avLst/>
+          </a:prstGeom>
+          <a:solidFill xmlns:a="http://schemas.openxmlformats.org/drawingml/2006/main">
+            <a:srgbClr val="B60036"/>
+          </a:solidFill>
+          <a:ln xmlns:a="http://schemas.openxmlformats.org/drawingml/2006/main">
+            <a:noFill/>
+          </a:ln>
+        </p:spPr>
+        <p:txBody>
+          <a:bodyPr xmlns:a="http://schemas.openxmlformats.org/drawingml/2006/main" lIns="0" tIns="0" rIns="0" bIns="0" anchor="ctr">
+            <a:noAutofit/>
+          </a:bodyPr>
+          <a:lstStyle xmlns:a="http://schemas.openxmlformats.org/drawingml/2006/main"/>
+          <a:p xmlns:a="http://schemas.openxmlformats.org/drawingml/2006/main">
+            <a:pPr algn="l"/>
+            <a:endParaRPr lang="en-US" sz="1800" b="0" i="0">
+              <a:solidFill>
+                <a:srgbClr val="20252D"/>
+              </a:solidFill>
+              <a:latin typeface="Arial"/>
+              <a:ea typeface="Arial"/>
+            </a:endParaRPr>
+          </a:p>
+        </p:txBody>
+      </p:sp>
+      <p:sp>
+        <p:nvSpPr>
+          <p:cNvPr id="100093" name="Fixed-11"/>
+          <p:cNvSpPr/>
+          <p:nvPr/>
+        </p:nvSpPr>
+        <p:spPr>
+          <a:xfrm xmlns:a="http://schemas.openxmlformats.org/drawingml/2006/main">
+            <a:off x="792000" y="1602000"/>
+            <a:ext cx="9576000" cy="468000"/>
+          </a:xfrm>
+          <a:prstGeom xmlns:a="http://schemas.openxmlformats.org/drawingml/2006/main" prst="rect">
+            <a:avLst/>
+          </a:prstGeom>
+          <a:noFill xmlns:a="http://schemas.openxmlformats.org/drawingml/2006/main"/>
+          <a:ln xmlns:a="http://schemas.openxmlformats.org/drawingml/2006/main">
+            <a:noFill/>
+          </a:ln>
+        </p:spPr>
+        <p:txBody>
+          <a:bodyPr xmlns:a="http://schemas.openxmlformats.org/drawingml/2006/main" lIns="0" tIns="0" rIns="0" bIns="0" anchor="t">
+            <a:noAutofit/>
+          </a:bodyPr>
+          <a:lstStyle xmlns:a="http://schemas.openxmlformats.org/drawingml/2006/main"/>
+          <a:p xmlns:a="http://schemas.openxmlformats.org/drawingml/2006/main">
+            <a:pPr algn="l"/>
+            <a:r>
+              <a:rPr lang="en-US" sz="2600" b="1" i="0">
+                <a:solidFill>
+                  <a:srgbClr val="20252D"/>
+                </a:solidFill>
+                <a:latin typeface="Arial"/>
+                <a:ea typeface="Arial"/>
+              </a:rPr>
+              <a:t>Both approaches succeed on every configuration.</a:t>
+            </a:r>
+          </a:p>
+        </p:txBody>
+      </p:sp>
+      <p:sp>
+        <p:nvSpPr>
+          <p:cNvPr id="100094" name="Element-12"/>
+          <p:cNvSpPr/>
+          <p:nvPr/>
+        </p:nvSpPr>
+        <p:spPr>
+          <a:xfrm xmlns:a="http://schemas.openxmlformats.org/drawingml/2006/main">
+            <a:off x="792000" y="2167200"/>
+            <a:ext cx="936000" cy="36000"/>
+          </a:xfrm>
+          <a:prstGeom xmlns:a="http://schemas.openxmlformats.org/drawingml/2006/main" prst="rect">
+            <a:avLst/>
+          </a:prstGeom>
+          <a:solidFill xmlns:a="http://schemas.openxmlformats.org/drawingml/2006/main">
+            <a:srgbClr val="B60036"/>
+          </a:solidFill>
+          <a:ln xmlns:a="http://schemas.openxmlformats.org/drawingml/2006/main">
+            <a:noFill/>
+          </a:ln>
+        </p:spPr>
+        <p:txBody>
+          <a:bodyPr xmlns:a="http://schemas.openxmlformats.org/drawingml/2006/main" lIns="0" tIns="0" rIns="0" bIns="0" anchor="ctr">
+            <a:noAutofit/>
+          </a:bodyPr>
+          <a:lstStyle xmlns:a="http://schemas.openxmlformats.org/drawingml/2006/main"/>
+          <a:p xmlns:a="http://schemas.openxmlformats.org/drawingml/2006/main">
+            <a:pPr algn="l"/>
+            <a:endParaRPr lang="en-US" sz="1800" b="0" i="0">
+              <a:solidFill>
+                <a:srgbClr val="20252D"/>
+              </a:solidFill>
+              <a:latin typeface="Arial"/>
+              <a:ea typeface="Arial"/>
+            </a:endParaRPr>
+          </a:p>
+        </p:txBody>
+      </p:sp>
+      <p:sp>
+        <p:nvSpPr>
+          <p:cNvPr id="100095" name="Element-13"/>
+          <p:cNvSpPr/>
+          <p:nvPr/>
+        </p:nvSpPr>
+        <p:spPr>
+          <a:xfrm xmlns:a="http://schemas.openxmlformats.org/drawingml/2006/main">
+            <a:off x="792000" y="2538000"/>
+            <a:ext cx="5040000" cy="306000"/>
+          </a:xfrm>
+          <a:prstGeom xmlns:a="http://schemas.openxmlformats.org/drawingml/2006/main" prst="rect">
+            <a:avLst/>
+          </a:prstGeom>
+          <a:noFill xmlns:a="http://schemas.openxmlformats.org/drawingml/2006/main"/>
+          <a:ln xmlns:a="http://schemas.openxmlformats.org/drawingml/2006/main">
+            <a:noFill/>
+          </a:ln>
+        </p:spPr>
+        <p:txBody>
+          <a:bodyPr xmlns:a="http://schemas.openxmlformats.org/drawingml/2006/main" lIns="0" tIns="0" rIns="0" bIns="0" anchor="ctr">
+            <a:noAutofit/>
+          </a:bodyPr>
+          <a:lstStyle xmlns:a="http://schemas.openxmlformats.org/drawingml/2006/main"/>
+          <a:p xmlns:a="http://schemas.openxmlformats.org/drawingml/2006/main">
+            <a:pPr algn="l"/>
+            <a:r>
+              <a:rPr lang="en-US" sz="1400" b="1" i="0">
+                <a:solidFill>
+                  <a:srgbClr val="20252D"/>
+                </a:solidFill>
+                <a:latin typeface="Arial"/>
+                <a:ea typeface="Arial"/>
+              </a:rPr>
+              <a:t>Rule-based</a:t>
+            </a:r>
+          </a:p>
+        </p:txBody>
+      </p:sp>
+      <p:sp>
+        <p:nvSpPr>
+          <p:cNvPr id="100096" name="Element-14"/>
+          <p:cNvSpPr/>
+          <p:nvPr/>
+        </p:nvSpPr>
+        <p:spPr>
+          <a:xfrm xmlns:a="http://schemas.openxmlformats.org/drawingml/2006/main">
+            <a:off x="9600000" y="2538000"/>
+            <a:ext cx="1800000" cy="306000"/>
+          </a:xfrm>
+          <a:prstGeom xmlns:a="http://schemas.openxmlformats.org/drawingml/2006/main" prst="rect">
+            <a:avLst/>
+          </a:prstGeom>
+          <a:noFill xmlns:a="http://schemas.openxmlformats.org/drawingml/2006/main"/>
+          <a:ln xmlns:a="http://schemas.openxmlformats.org/drawingml/2006/main">
+            <a:noFill/>
+          </a:ln>
+        </p:spPr>
+        <p:txBody>
+          <a:bodyPr xmlns:a="http://schemas.openxmlformats.org/drawingml/2006/main" lIns="0" tIns="0" rIns="0" bIns="0" anchor="ctr">
+            <a:noAutofit/>
+          </a:bodyPr>
+          <a:lstStyle xmlns:a="http://schemas.openxmlformats.org/drawingml/2006/main"/>
+          <a:p xmlns:a="http://schemas.openxmlformats.org/drawingml/2006/main">
+            <a:pPr algn="r"/>
+            <a:r>
+              <a:rPr lang="en-US" sz="1400" b="1" i="0">
+                <a:solidFill>
+                  <a:srgbClr val="5C626C"/>
+                </a:solidFill>
+                <a:latin typeface="Arial"/>
+                <a:ea typeface="Arial"/>
+              </a:rPr>
+              <a:t>6 / 6</a:t>
+            </a:r>
+          </a:p>
+        </p:txBody>
+      </p:sp>
+      <p:sp>
+        <p:nvSpPr>
+          <p:cNvPr id="100097" name="Element-15"/>
+          <p:cNvSpPr/>
+          <p:nvPr/>
+        </p:nvSpPr>
+        <p:spPr>
+          <a:xfrm xmlns:a="http://schemas.openxmlformats.org/drawingml/2006/main">
+            <a:off x="792000" y="2916000"/>
+            <a:ext cx="10608000" cy="594000"/>
+          </a:xfrm>
+          <a:prstGeom xmlns:a="http://schemas.openxmlformats.org/drawingml/2006/main" prst="rect">
+            <a:avLst/>
+          </a:prstGeom>
+          <a:solidFill xmlns:a="http://schemas.openxmlformats.org/drawingml/2006/main">
+            <a:srgbClr val="5C626C"/>
+          </a:solidFill>
+          <a:ln xmlns:a="http://schemas.openxmlformats.org/drawingml/2006/main">
+            <a:noFill/>
+          </a:ln>
+        </p:spPr>
+        <p:txBody>
+          <a:bodyPr xmlns:a="http://schemas.openxmlformats.org/drawingml/2006/main" lIns="0" tIns="0" rIns="0" bIns="0" anchor="ctr">
+            <a:noAutofit/>
+          </a:bodyPr>
+          <a:lstStyle xmlns:a="http://schemas.openxmlformats.org/drawingml/2006/main"/>
+          <a:p xmlns:a="http://schemas.openxmlformats.org/drawingml/2006/main">
+            <a:pPr algn="l"/>
+            <a:endParaRPr lang="en-US" sz="1800" b="0" i="0">
+              <a:solidFill>
+                <a:srgbClr val="20252D"/>
+              </a:solidFill>
+              <a:latin typeface="Arial"/>
+              <a:ea typeface="Arial"/>
+            </a:endParaRPr>
+          </a:p>
+        </p:txBody>
+      </p:sp>
+      <p:sp>
+        <p:nvSpPr>
+          <p:cNvPr id="100098" name="Element-16"/>
+          <p:cNvSpPr/>
+          <p:nvPr/>
+        </p:nvSpPr>
+        <p:spPr>
+          <a:xfrm xmlns:a="http://schemas.openxmlformats.org/drawingml/2006/main">
+            <a:off x="792000" y="3510000"/>
+            <a:ext cx="10608000" cy="10800"/>
+          </a:xfrm>
+          <a:prstGeom xmlns:a="http://schemas.openxmlformats.org/drawingml/2006/main" prst="rect">
+            <a:avLst/>
+          </a:prstGeom>
+          <a:solidFill xmlns:a="http://schemas.openxmlformats.org/drawingml/2006/main">
+            <a:srgbClr val="D9DEE5"/>
+          </a:solidFill>
+          <a:ln xmlns:a="http://schemas.openxmlformats.org/drawingml/2006/main">
+            <a:noFill/>
+          </a:ln>
+        </p:spPr>
+        <p:txBody>
+          <a:bodyPr xmlns:a="http://schemas.openxmlformats.org/drawingml/2006/main" lIns="0" tIns="0" rIns="0" bIns="0" anchor="ctr">
+            <a:noAutofit/>
+          </a:bodyPr>
+          <a:lstStyle xmlns:a="http://schemas.openxmlformats.org/drawingml/2006/main"/>
+          <a:p xmlns:a="http://schemas.openxmlformats.org/drawingml/2006/main">
+            <a:pPr algn="l"/>
+            <a:endParaRPr lang="en-US" sz="1800" b="0" i="0">
+              <a:solidFill>
+                <a:srgbClr val="20252D"/>
+              </a:solidFill>
+              <a:latin typeface="Arial"/>
+              <a:ea typeface="Arial"/>
+            </a:endParaRPr>
+          </a:p>
+        </p:txBody>
+      </p:sp>
+      <p:sp>
+        <p:nvSpPr>
+          <p:cNvPr id="100099" name="Element-17"/>
+          <p:cNvSpPr/>
+          <p:nvPr/>
+        </p:nvSpPr>
+        <p:spPr>
+          <a:xfrm xmlns:a="http://schemas.openxmlformats.org/drawingml/2006/main">
+            <a:off x="792000" y="3816000"/>
+            <a:ext cx="5040000" cy="306000"/>
+          </a:xfrm>
+          <a:prstGeom xmlns:a="http://schemas.openxmlformats.org/drawingml/2006/main" prst="rect">
+            <a:avLst/>
+          </a:prstGeom>
+          <a:noFill xmlns:a="http://schemas.openxmlformats.org/drawingml/2006/main"/>
+          <a:ln xmlns:a="http://schemas.openxmlformats.org/drawingml/2006/main">
+            <a:noFill/>
+          </a:ln>
+        </p:spPr>
+        <p:txBody>
+          <a:bodyPr xmlns:a="http://schemas.openxmlformats.org/drawingml/2006/main" lIns="0" tIns="0" rIns="0" bIns="0" anchor="ctr">
+            <a:noAutofit/>
+          </a:bodyPr>
+          <a:lstStyle xmlns:a="http://schemas.openxmlformats.org/drawingml/2006/main"/>
+          <a:p xmlns:a="http://schemas.openxmlformats.org/drawingml/2006/main">
+            <a:pPr algn="l"/>
+            <a:r>
+              <a:rPr lang="en-US" sz="1400" b="1" i="0">
+                <a:solidFill>
+                  <a:srgbClr val="20252D"/>
+                </a:solidFill>
+                <a:latin typeface="Arial"/>
+                <a:ea typeface="Arial"/>
+              </a:rPr>
+              <a:t>Model-based</a:t>
+            </a:r>
+          </a:p>
+        </p:txBody>
+      </p:sp>
+      <p:sp>
+        <p:nvSpPr>
+          <p:cNvPr id="100100" name="Element-18"/>
+          <p:cNvSpPr/>
+          <p:nvPr/>
+        </p:nvSpPr>
+        <p:spPr>
+          <a:xfrm xmlns:a="http://schemas.openxmlformats.org/drawingml/2006/main">
+            <a:off x="9600000" y="3816000"/>
+            <a:ext cx="1800000" cy="306000"/>
+          </a:xfrm>
+          <a:prstGeom xmlns:a="http://schemas.openxmlformats.org/drawingml/2006/main" prst="rect">
+            <a:avLst/>
+          </a:prstGeom>
+          <a:noFill xmlns:a="http://schemas.openxmlformats.org/drawingml/2006/main"/>
+          <a:ln xmlns:a="http://schemas.openxmlformats.org/drawingml/2006/main">
+            <a:noFill/>
+          </a:ln>
+        </p:spPr>
+        <p:txBody>
+          <a:bodyPr xmlns:a="http://schemas.openxmlformats.org/drawingml/2006/main" lIns="0" tIns="0" rIns="0" bIns="0" anchor="ctr">
+            <a:noAutofit/>
+          </a:bodyPr>
+          <a:lstStyle xmlns:a="http://schemas.openxmlformats.org/drawingml/2006/main"/>
+          <a:p xmlns:a="http://schemas.openxmlformats.org/drawingml/2006/main">
+            <a:pPr algn="r"/>
+            <a:r>
+              <a:rPr lang="en-US" sz="1400" b="1" i="0">
+                <a:solidFill>
+                  <a:srgbClr val="B60036"/>
+                </a:solidFill>
+                <a:latin typeface="Arial"/>
+                <a:ea typeface="Arial"/>
+              </a:rPr>
+              <a:t>6 / 6</a:t>
+            </a:r>
+          </a:p>
+        </p:txBody>
+      </p:sp>
+      <p:sp>
+        <p:nvSpPr>
+          <p:cNvPr id="100101" name="Element-19"/>
+          <p:cNvSpPr/>
+          <p:nvPr/>
+        </p:nvSpPr>
+        <p:spPr>
+          <a:xfrm xmlns:a="http://schemas.openxmlformats.org/drawingml/2006/main">
+            <a:off x="792000" y="4194000"/>
+            <a:ext cx="10608000" cy="594000"/>
+          </a:xfrm>
+          <a:prstGeom xmlns:a="http://schemas.openxmlformats.org/drawingml/2006/main" prst="rect">
+            <a:avLst/>
+          </a:prstGeom>
+          <a:solidFill xmlns:a="http://schemas.openxmlformats.org/drawingml/2006/main">
+            <a:srgbClr val="B60036"/>
+          </a:solidFill>
+          <a:ln xmlns:a="http://schemas.openxmlformats.org/drawingml/2006/main">
+            <a:noFill/>
+          </a:ln>
+        </p:spPr>
+        <p:txBody>
+          <a:bodyPr xmlns:a="http://schemas.openxmlformats.org/drawingml/2006/main" lIns="0" tIns="0" rIns="0" bIns="0" anchor="ctr">
+            <a:noAutofit/>
+          </a:bodyPr>
+          <a:lstStyle xmlns:a="http://schemas.openxmlformats.org/drawingml/2006/main"/>
+          <a:p xmlns:a="http://schemas.openxmlformats.org/drawingml/2006/main">
+            <a:pPr algn="l"/>
+            <a:endParaRPr lang="en-US" sz="1800" b="0" i="0">
+              <a:solidFill>
+                <a:srgbClr val="20252D"/>
+              </a:solidFill>
+              <a:latin typeface="Arial"/>
+              <a:ea typeface="Arial"/>
+            </a:endParaRPr>
+          </a:p>
+        </p:txBody>
+      </p:sp>
+      <p:sp>
+        <p:nvSpPr>
+          <p:cNvPr id="100102" name="Element-20"/>
+          <p:cNvSpPr/>
+          <p:nvPr/>
+        </p:nvSpPr>
+        <p:spPr>
+          <a:xfrm xmlns:a="http://schemas.openxmlformats.org/drawingml/2006/main">
+            <a:off x="792000" y="4788000"/>
+            <a:ext cx="10608000" cy="10800"/>
+          </a:xfrm>
+          <a:prstGeom xmlns:a="http://schemas.openxmlformats.org/drawingml/2006/main" prst="rect">
+            <a:avLst/>
+          </a:prstGeom>
+          <a:solidFill xmlns:a="http://schemas.openxmlformats.org/drawingml/2006/main">
+            <a:srgbClr val="D9DEE5"/>
+          </a:solidFill>
+          <a:ln xmlns:a="http://schemas.openxmlformats.org/drawingml/2006/main">
+            <a:noFill/>
+          </a:ln>
+        </p:spPr>
+        <p:txBody>
+          <a:bodyPr xmlns:a="http://schemas.openxmlformats.org/drawingml/2006/main" lIns="0" tIns="0" rIns="0" bIns="0" anchor="ctr">
+            <a:noAutofit/>
+          </a:bodyPr>
+          <a:lstStyle xmlns:a="http://schemas.openxmlformats.org/drawingml/2006/main"/>
+          <a:p xmlns:a="http://schemas.openxmlformats.org/drawingml/2006/main">
+            <a:pPr algn="l"/>
+            <a:endParaRPr lang="en-US" sz="1800" b="0" i="0">
+              <a:solidFill>
+                <a:srgbClr val="20252D"/>
+              </a:solidFill>
+              <a:latin typeface="Arial"/>
+              <a:ea typeface="Arial"/>
+            </a:endParaRPr>
+          </a:p>
+        </p:txBody>
+      </p:sp>
+      <p:sp>
+        <p:nvSpPr>
+          <p:cNvPr id="100103" name="Element-21"/>
+          <p:cNvSpPr/>
+          <p:nvPr/>
+        </p:nvSpPr>
+        <p:spPr>
+          <a:xfrm xmlns:a="http://schemas.openxmlformats.org/drawingml/2006/main">
+            <a:off x="792000" y="5335200"/>
+            <a:ext cx="10608000" cy="10800"/>
+          </a:xfrm>
+          <a:prstGeom xmlns:a="http://schemas.openxmlformats.org/drawingml/2006/main" prst="rect">
+            <a:avLst/>
+          </a:prstGeom>
+          <a:solidFill xmlns:a="http://schemas.openxmlformats.org/drawingml/2006/main">
+            <a:srgbClr val="D9DEE5"/>
+          </a:solidFill>
+          <a:ln xmlns:a="http://schemas.openxmlformats.org/drawingml/2006/main">
+            <a:noFill/>
+          </a:ln>
+        </p:spPr>
+        <p:txBody>
+          <a:bodyPr xmlns:a="http://schemas.openxmlformats.org/drawingml/2006/main" lIns="0" tIns="0" rIns="0" bIns="0" anchor="ctr">
+            <a:noAutofit/>
+          </a:bodyPr>
+          <a:lstStyle xmlns:a="http://schemas.openxmlformats.org/drawingml/2006/main"/>
+          <a:p xmlns:a="http://schemas.openxmlformats.org/drawingml/2006/main">
+            <a:pPr algn="l"/>
+            <a:endParaRPr lang="en-US" sz="1800" b="0" i="0">
+              <a:solidFill>
+                <a:srgbClr val="20252D"/>
+              </a:solidFill>
+              <a:latin typeface="Arial"/>
+              <a:ea typeface="Arial"/>
+            </a:endParaRPr>
+          </a:p>
+        </p:txBody>
+      </p:sp>
+      <p:sp>
+        <p:nvSpPr>
+          <p:cNvPr id="100104" name="Caption-5"/>
+          <p:cNvSpPr/>
+          <p:nvPr/>
+        </p:nvSpPr>
+        <p:spPr>
+          <a:xfrm xmlns:a="http://schemas.openxmlformats.org/drawingml/2006/main">
+            <a:off x="792000" y="5356800"/>
+            <a:ext cx="10608000" cy="864000"/>
+          </a:xfrm>
+          <a:prstGeom xmlns:a="http://schemas.openxmlformats.org/drawingml/2006/main" prst="rect">
+            <a:avLst/>
+          </a:prstGeom>
+          <a:noFill xmlns:a="http://schemas.openxmlformats.org/drawingml/2006/main"/>
+          <a:ln xmlns:a="http://schemas.openxmlformats.org/drawingml/2006/main">
+            <a:noFill/>
+          </a:ln>
+        </p:spPr>
+        <p:txBody>
+          <a:bodyPr xmlns:a="http://schemas.openxmlformats.org/drawingml/2006/main" lIns="0" tIns="0" rIns="0" bIns="0" anchor="t">
+            <a:noAutofit/>
+          </a:bodyPr>
+          <a:lstStyle xmlns:a="http://schemas.openxmlformats.org/drawingml/2006/main"/>
+          <a:p xmlns:a="http://schemas.openxmlformats.org/drawingml/2006/main">
+            <a:pPr algn="l"/>
+            <a:r>
+              <a:rPr lang="en-US" sz="2100" b="1">
+                <a:solidFill>
+                  <a:srgbClr val="B60036"/>
+                </a:solidFill>
+                <a:latin typeface="Arial"/>
+                <a:ea typeface="Arial"/>
+              </a:rPr>
+              <a:t>The instrument does not discriminate between them.</a:t>
+            </a:r>
+          </a:p>
+        </p:txBody>
+      </p:sp>
+      <p:sp>
+        <p:nvSpPr>
+          <p:cNvPr id="100105" name="Element-23"/>
+          <p:cNvSpPr/>
+          <p:nvPr/>
+        </p:nvSpPr>
+        <p:spPr>
+          <a:xfrm xmlns:a="http://schemas.openxmlformats.org/drawingml/2006/main">
+            <a:off x="792000" y="5781600"/>
+            <a:ext cx="10608000" cy="180000"/>
+          </a:xfrm>
+          <a:prstGeom xmlns:a="http://schemas.openxmlformats.org/drawingml/2006/main" prst="rect">
+            <a:avLst/>
+          </a:prstGeom>
+          <a:noFill xmlns:a="http://schemas.openxmlformats.org/drawingml/2006/main"/>
+          <a:ln xmlns:a="http://schemas.openxmlformats.org/drawingml/2006/main">
+            <a:noFill/>
+          </a:ln>
+        </p:spPr>
+        <p:txBody>
+          <a:bodyPr xmlns:a="http://schemas.openxmlformats.org/drawingml/2006/main" lIns="0" tIns="0" rIns="0" bIns="0" anchor="t">
+            <a:noAutofit/>
+          </a:bodyPr>
+          <a:lstStyle xmlns:a="http://schemas.openxmlformats.org/drawingml/2006/main"/>
+          <a:p xmlns:a="http://schemas.openxmlformats.org/drawingml/2006/main">
+            <a:pPr algn="l"/>
+            <a:r>
+              <a:rPr lang="en-US" sz="800" b="0" i="0">
+                <a:solidFill>
+                  <a:srgbClr val="5C626C"/>
+                </a:solidFill>
+                <a:latin typeface="Arial"/>
+                <a:ea typeface="Arial"/>
+              </a:rPr>
+              <a:t>This is a limitation of the instrument, not of the model.</a:t>
+            </a:r>
+          </a:p>
+        </p:txBody>
+      </p:sp>
+      <p:sp>
+        <p:nvSpPr>
+          <p:cNvPr id="100106" name="Element-24"/>
+          <p:cNvSpPr/>
+          <p:nvPr/>
+        </p:nvSpPr>
+        <p:spPr>
+          <a:xfrm xmlns:a="http://schemas.openxmlformats.org/drawingml/2006/main">
+            <a:off x="792000" y="6444000"/>
+            <a:ext cx="5040000" cy="180000"/>
+          </a:xfrm>
+          <a:prstGeom xmlns:a="http://schemas.openxmlformats.org/drawingml/2006/main" prst="rect">
+            <a:avLst/>
+          </a:prstGeom>
+          <a:noFill xmlns:a="http://schemas.openxmlformats.org/drawingml/2006/main"/>
+          <a:ln xmlns:a="http://schemas.openxmlformats.org/drawingml/2006/main">
+            <a:noFill/>
+          </a:ln>
+        </p:spPr>
+        <p:txBody>
+          <a:bodyPr xmlns:a="http://schemas.openxmlformats.org/drawingml/2006/main" lIns="0" tIns="0" rIns="0" bIns="0" anchor="ctr">
+            <a:noAutofit/>
+          </a:bodyPr>
+          <a:lstStyle xmlns:a="http://schemas.openxmlformats.org/drawingml/2006/main"/>
+          <a:p xmlns:a="http://schemas.openxmlformats.org/drawingml/2006/main">
+            <a:pPr algn="l"/>
+            <a:r>
+              <a:rPr lang="en-US" sz="800" b="0" i="0">
+                <a:solidFill>
+                  <a:srgbClr val="5C626C"/>
+                </a:solidFill>
+                <a:latin typeface="Arial"/>
+                <a:ea typeface="Arial"/>
+              </a:rPr>
+              <a:t>Project LANCE — NATO SPS G6259</a:t>
+            </a:r>
+          </a:p>
+        </p:txBody>
+      </p:sp>
+      <p:sp>
+        <p:nvSpPr>
+          <p:cNvPr id="100107" name="Element-25"/>
+          <p:cNvSpPr/>
+          <p:nvPr/>
+        </p:nvSpPr>
+        <p:spPr>
+          <a:xfrm xmlns:a="http://schemas.openxmlformats.org/drawingml/2006/main">
+            <a:off x="10752000" y="6444000"/>
+            <a:ext cx="648000" cy="180000"/>
+          </a:xfrm>
+          <a:prstGeom xmlns:a="http://schemas.openxmlformats.org/drawingml/2006/main" prst="rect">
+            <a:avLst/>
+          </a:prstGeom>
+          <a:noFill xmlns:a="http://schemas.openxmlformats.org/drawingml/2006/main"/>
+          <a:ln xmlns:a="http://schemas.openxmlformats.org/drawingml/2006/main">
+            <a:noFill/>
+          </a:ln>
+        </p:spPr>
+        <p:txBody>
+          <a:bodyPr xmlns:a="http://schemas.openxmlformats.org/drawingml/2006/main" lIns="0" tIns="0" rIns="0" bIns="0" anchor="ctr">
+            <a:noAutofit/>
+          </a:bodyPr>
+          <a:lstStyle xmlns:a="http://schemas.openxmlformats.org/drawingml/2006/main"/>
+          <a:p xmlns:a="http://schemas.openxmlformats.org/drawingml/2006/main">
+            <a:pPr algn="r"/>
+            <a:r>
+              <a:rPr lang="en-US" sz="800" b="0" i="0">
+                <a:solidFill>
+                  <a:srgbClr val="5C626C"/>
+                </a:solidFill>
+                <a:latin typeface="Arial"/>
+                <a:ea typeface="Arial"/>
+              </a:rPr>
+              <a:t>5</a:t>
+            </a:r>
+          </a:p>
+        </p:txBody>
+      </p:sp>
+    </p:spTree>
+  </p:cSld>
+</p:sld>
+</file>
+
+<file path=ppt/slides/slide6.xml><?xml version="1.0" encoding="utf-8"?>
+<p:sld xmlns:p="http://schemas.openxmlformats.org/presentationml/2006/main">
+  <p:cSld>
+    <p:bg>
+      <p:bgPr>
+        <a:solidFill xmlns:a="http://schemas.openxmlformats.org/drawingml/2006/main">
+          <a:srgbClr val="FFFFFF"/>
+        </a:solidFill>
+      </p:bgPr>
+    </p:bg>
+    <p:spTree>
+      <p:nvGrpSpPr>
+        <p:cNvPr id="1" name=""/>
+        <p:cNvGrpSpPr/>
+        <p:nvPr/>
+      </p:nvGrpSpPr>
+      <p:grpSpPr/>
+      <p:pic>
+        <p:nvPicPr>
+          <p:cNvPr id="100108" name="Picture 1" descr="SMart ILIA — UMONS"/>
+          <p:cNvPicPr>
+            <a:picLocks xmlns:a="http://schemas.openxmlformats.org/drawingml/2006/main" noChangeAspect="1"/>
+          </p:cNvPicPr>
+          <p:nvPr/>
+        </p:nvPicPr>
+        <p:blipFill>
+          <a:blip xmlns:r="http://schemas.openxmlformats.org/officeDocument/2006/relationships" xmlns:a="http://schemas.openxmlformats.org/drawingml/2006/main" r:embed="R2944d1b452464246"/>
+          <a:stretch xmlns:a="http://schemas.openxmlformats.org/drawingml/2006/main">
+            <a:fillRect/>
+          </a:stretch>
+        </p:blipFill>
+        <p:spPr>
+          <a:xfrm xmlns:a="http://schemas.openxmlformats.org/drawingml/2006/main">
+            <a:off x="9702000" y="216000"/>
+            <a:ext cx="1699200" cy="582331"/>
+          </a:xfrm>
+          <a:prstGeom xmlns:a="http://schemas.openxmlformats.org/drawingml/2006/main" prst="rect">
+            <a:avLst/>
+          </a:prstGeom>
+        </p:spPr>
+      </p:pic>
+      <p:sp>
+        <p:nvSpPr>
+          <p:cNvPr id="100109" name="Element-4"/>
+          <p:cNvSpPr/>
+          <p:nvPr/>
+        </p:nvSpPr>
+        <p:spPr>
+          <a:xfrm xmlns:a="http://schemas.openxmlformats.org/drawingml/2006/main">
+            <a:off x="792000" y="309600"/>
+            <a:ext cx="1764000" cy="208800"/>
+          </a:xfrm>
+          <a:prstGeom xmlns:a="http://schemas.openxmlformats.org/drawingml/2006/main" prst="rect">
+            <a:avLst/>
+          </a:prstGeom>
+          <a:noFill xmlns:a="http://schemas.openxmlformats.org/drawingml/2006/main"/>
+          <a:ln xmlns:a="http://schemas.openxmlformats.org/drawingml/2006/main">
+            <a:noFill/>
+          </a:ln>
+        </p:spPr>
+        <p:txBody>
+          <a:bodyPr xmlns:a="http://schemas.openxmlformats.org/drawingml/2006/main" lIns="0" tIns="0" rIns="0" bIns="0" anchor="ctr">
+            <a:noAutofit/>
+          </a:bodyPr>
+          <a:lstStyle xmlns:a="http://schemas.openxmlformats.org/drawingml/2006/main"/>
+          <a:p xmlns:a="http://schemas.openxmlformats.org/drawingml/2006/main">
+            <a:pPr algn="l"/>
+            <a:r>
+              <a:rPr lang="en-US" sz="950" b="0" i="0">
+                <a:solidFill>
+                  <a:srgbClr val="5C626C"/>
+                </a:solidFill>
+                <a:latin typeface="Arial"/>
+                <a:ea typeface="Arial"/>
+              </a:rPr>
+              <a:t>Objective</a:t>
+            </a:r>
+          </a:p>
+        </p:txBody>
+      </p:sp>
+      <p:sp>
+        <p:nvSpPr>
+          <p:cNvPr id="100110" name="Element-5"/>
+          <p:cNvSpPr/>
+          <p:nvPr/>
+        </p:nvSpPr>
+        <p:spPr>
+          <a:xfrm xmlns:a="http://schemas.openxmlformats.org/drawingml/2006/main">
+            <a:off x="2736000" y="309600"/>
+            <a:ext cx="1764000" cy="208800"/>
+          </a:xfrm>
+          <a:prstGeom xmlns:a="http://schemas.openxmlformats.org/drawingml/2006/main" prst="rect">
+            <a:avLst/>
+          </a:prstGeom>
+          <a:noFill xmlns:a="http://schemas.openxmlformats.org/drawingml/2006/main"/>
+          <a:ln xmlns:a="http://schemas.openxmlformats.org/drawingml/2006/main">
+            <a:noFill/>
+          </a:ln>
+        </p:spPr>
+        <p:txBody>
+          <a:bodyPr xmlns:a="http://schemas.openxmlformats.org/drawingml/2006/main" lIns="0" tIns="0" rIns="0" bIns="0" anchor="ctr">
+            <a:noAutofit/>
+          </a:bodyPr>
+          <a:lstStyle xmlns:a="http://schemas.openxmlformats.org/drawingml/2006/main"/>
+          <a:p xmlns:a="http://schemas.openxmlformats.org/drawingml/2006/main">
+            <a:pPr algn="l"/>
+            <a:r>
+              <a:rPr lang="en-US" sz="950" b="0" i="0">
+                <a:solidFill>
+                  <a:srgbClr val="5C626C"/>
+                </a:solidFill>
+                <a:latin typeface="Arial"/>
+                <a:ea typeface="Arial"/>
+              </a:rPr>
+              <a:t>Instrument</a:t>
+            </a:r>
+          </a:p>
+        </p:txBody>
+      </p:sp>
+      <p:sp>
+        <p:nvSpPr>
+          <p:cNvPr id="100111" name="Element-6"/>
+          <p:cNvSpPr/>
+          <p:nvPr/>
+        </p:nvSpPr>
+        <p:spPr>
+          <a:xfrm xmlns:a="http://schemas.openxmlformats.org/drawingml/2006/main">
+            <a:off x="4680000" y="309600"/>
+            <a:ext cx="1764000" cy="208800"/>
+          </a:xfrm>
+          <a:prstGeom xmlns:a="http://schemas.openxmlformats.org/drawingml/2006/main" prst="rect">
+            <a:avLst/>
+          </a:prstGeom>
+          <a:noFill xmlns:a="http://schemas.openxmlformats.org/drawingml/2006/main"/>
+          <a:ln xmlns:a="http://schemas.openxmlformats.org/drawingml/2006/main">
+            <a:noFill/>
+          </a:ln>
+        </p:spPr>
+        <p:txBody>
+          <a:bodyPr xmlns:a="http://schemas.openxmlformats.org/drawingml/2006/main" lIns="0" tIns="0" rIns="0" bIns="0" anchor="ctr">
+            <a:noAutofit/>
+          </a:bodyPr>
+          <a:lstStyle xmlns:a="http://schemas.openxmlformats.org/drawingml/2006/main"/>
+          <a:p xmlns:a="http://schemas.openxmlformats.org/drawingml/2006/main">
+            <a:pPr algn="l"/>
+            <a:r>
+              <a:rPr lang="en-US" sz="950" b="0" i="0">
+                <a:solidFill>
+                  <a:srgbClr val="B60036"/>
+                </a:solidFill>
+                <a:latin typeface="Arial"/>
+                <a:ea typeface="Arial"/>
+              </a:rPr>
+              <a:t>Hypotheses</a:t>
+            </a:r>
+          </a:p>
+        </p:txBody>
+      </p:sp>
+      <p:sp>
+        <p:nvSpPr>
+          <p:cNvPr id="100112" name="Element-7"/>
+          <p:cNvSpPr/>
+          <p:nvPr/>
+        </p:nvSpPr>
+        <p:spPr>
+          <a:xfrm xmlns:a="http://schemas.openxmlformats.org/drawingml/2006/main">
+            <a:off x="4680000" y="529200"/>
+            <a:ext cx="1764000" cy="16200"/>
+          </a:xfrm>
+          <a:prstGeom xmlns:a="http://schemas.openxmlformats.org/drawingml/2006/main" prst="rect">
+            <a:avLst/>
+          </a:prstGeom>
+          <a:solidFill xmlns:a="http://schemas.openxmlformats.org/drawingml/2006/main">
+            <a:srgbClr val="B60036"/>
+          </a:solidFill>
+          <a:ln xmlns:a="http://schemas.openxmlformats.org/drawingml/2006/main">
+            <a:noFill/>
+          </a:ln>
+        </p:spPr>
+        <p:txBody>
+          <a:bodyPr xmlns:a="http://schemas.openxmlformats.org/drawingml/2006/main" lIns="0" tIns="0" rIns="0" bIns="0" anchor="ctr">
+            <a:noAutofit/>
+          </a:bodyPr>
+          <a:lstStyle xmlns:a="http://schemas.openxmlformats.org/drawingml/2006/main"/>
+          <a:p xmlns:a="http://schemas.openxmlformats.org/drawingml/2006/main">
+            <a:pPr algn="l"/>
+            <a:endParaRPr lang="en-US" sz="1800" b="0" i="0">
+              <a:solidFill>
+                <a:srgbClr val="20252D"/>
+              </a:solidFill>
+              <a:latin typeface="Arial"/>
+              <a:ea typeface="Arial"/>
+            </a:endParaRPr>
+          </a:p>
+        </p:txBody>
+      </p:sp>
+      <p:sp>
+        <p:nvSpPr>
+          <p:cNvPr id="100113" name="Element-8"/>
+          <p:cNvSpPr/>
+          <p:nvPr/>
+        </p:nvSpPr>
+        <p:spPr>
+          <a:xfrm xmlns:a="http://schemas.openxmlformats.org/drawingml/2006/main">
+            <a:off x="6624000" y="309600"/>
+            <a:ext cx="1764000" cy="208800"/>
+          </a:xfrm>
+          <a:prstGeom xmlns:a="http://schemas.openxmlformats.org/drawingml/2006/main" prst="rect">
+            <a:avLst/>
+          </a:prstGeom>
+          <a:noFill xmlns:a="http://schemas.openxmlformats.org/drawingml/2006/main"/>
+          <a:ln xmlns:a="http://schemas.openxmlformats.org/drawingml/2006/main">
+            <a:noFill/>
+          </a:ln>
+        </p:spPr>
+        <p:txBody>
+          <a:bodyPr xmlns:a="http://schemas.openxmlformats.org/drawingml/2006/main" lIns="0" tIns="0" rIns="0" bIns="0" anchor="ctr">
+            <a:noAutofit/>
+          </a:bodyPr>
+          <a:lstStyle xmlns:a="http://schemas.openxmlformats.org/drawingml/2006/main"/>
+          <a:p xmlns:a="http://schemas.openxmlformats.org/drawingml/2006/main">
+            <a:pPr algn="l"/>
+            <a:r>
+              <a:rPr lang="en-US" sz="950" b="0" i="0">
+                <a:solidFill>
+                  <a:srgbClr val="5C626C"/>
+                </a:solidFill>
+                <a:latin typeface="Arial"/>
+                <a:ea typeface="Arial"/>
+              </a:rPr>
+              <a:t>Outlook</a:t>
+            </a:r>
+          </a:p>
+        </p:txBody>
+      </p:sp>
+      <p:sp>
+        <p:nvSpPr>
+          <p:cNvPr id="100114" name="Title"/>
+          <p:cNvSpPr/>
+          <p:nvPr/>
+        </p:nvSpPr>
+        <p:spPr>
+          <a:xfrm xmlns:a="http://schemas.openxmlformats.org/drawingml/2006/main">
+            <a:off x="792000" y="612000"/>
+            <a:ext cx="8748000" cy="648000"/>
+          </a:xfrm>
+          <a:prstGeom xmlns:a="http://schemas.openxmlformats.org/drawingml/2006/main" prst="rect">
+            <a:avLst/>
+          </a:prstGeom>
+          <a:noFill xmlns:a="http://schemas.openxmlformats.org/drawingml/2006/main"/>
+          <a:ln xmlns:a="http://schemas.openxmlformats.org/drawingml/2006/main">
+            <a:noFill/>
+          </a:ln>
+        </p:spPr>
+        <p:txBody>
+          <a:bodyPr xmlns:a="http://schemas.openxmlformats.org/drawingml/2006/main" lIns="0" tIns="0" rIns="0" bIns="0" anchor="ctr">
+            <a:noAutofit/>
+          </a:bodyPr>
+          <a:lstStyle xmlns:a="http://schemas.openxmlformats.org/drawingml/2006/main"/>
+          <a:p xmlns:a="http://schemas.openxmlformats.org/drawingml/2006/main">
+            <a:pPr algn="l"/>
+            <a:r>
+              <a:rPr lang="en-US" sz="2900" b="1" i="0">
+                <a:solidFill>
+                  <a:srgbClr val="20252D"/>
+                </a:solidFill>
+                <a:latin typeface="Arial"/>
+                <a:ea typeface="Arial"/>
+              </a:rPr>
+              <a:t>The objective restated as hypotheses</a:t>
+            </a:r>
+          </a:p>
+        </p:txBody>
+      </p:sp>
+      <p:sp>
+        <p:nvSpPr>
+          <p:cNvPr id="100115" name="Element-10"/>
+          <p:cNvSpPr/>
+          <p:nvPr/>
+        </p:nvSpPr>
+        <p:spPr>
+          <a:xfrm xmlns:a="http://schemas.openxmlformats.org/drawingml/2006/main">
+            <a:off x="792000" y="1303200"/>
+            <a:ext cx="1224000" cy="25200"/>
+          </a:xfrm>
+          <a:prstGeom xmlns:a="http://schemas.openxmlformats.org/drawingml/2006/main" prst="rect">
+            <a:avLst/>
+          </a:prstGeom>
+          <a:solidFill xmlns:a="http://schemas.openxmlformats.org/drawingml/2006/main">
+            <a:srgbClr val="B60036"/>
+          </a:solidFill>
+          <a:ln xmlns:a="http://schemas.openxmlformats.org/drawingml/2006/main">
+            <a:noFill/>
+          </a:ln>
+        </p:spPr>
+        <p:txBody>
+          <a:bodyPr xmlns:a="http://schemas.openxmlformats.org/drawingml/2006/main" lIns="0" tIns="0" rIns="0" bIns="0" anchor="ctr">
+            <a:noAutofit/>
+          </a:bodyPr>
+          <a:lstStyle xmlns:a="http://schemas.openxmlformats.org/drawingml/2006/main"/>
+          <a:p xmlns:a="http://schemas.openxmlformats.org/drawingml/2006/main">
+            <a:pPr algn="l"/>
+            <a:endParaRPr lang="en-US" sz="1800" b="0" i="0">
+              <a:solidFill>
+                <a:srgbClr val="20252D"/>
+              </a:solidFill>
+              <a:latin typeface="Arial"/>
+              <a:ea typeface="Arial"/>
+            </a:endParaRPr>
+          </a:p>
+        </p:txBody>
+      </p:sp>
+      <p:sp>
+        <p:nvSpPr>
+          <p:cNvPr id="100116" name="Element-11"/>
+          <p:cNvSpPr/>
+          <p:nvPr/>
+        </p:nvSpPr>
+        <p:spPr>
+          <a:xfrm xmlns:a="http://schemas.openxmlformats.org/drawingml/2006/main">
+            <a:off x="792000" y="1710000"/>
+            <a:ext cx="3384800" cy="1422000"/>
+          </a:xfrm>
+          <a:prstGeom xmlns:a="http://schemas.openxmlformats.org/drawingml/2006/main" prst="rect">
+            <a:avLst/>
+          </a:prstGeom>
+          <a:solidFill xmlns:a="http://schemas.openxmlformats.org/drawingml/2006/main">
+            <a:srgbClr val="F6F7F9"/>
+          </a:solidFill>
+          <a:ln xmlns:a="http://schemas.openxmlformats.org/drawingml/2006/main" w="12700">
+            <a:solidFill>
+              <a:srgbClr val="D9DEE5"/>
+            </a:solidFill>
+          </a:ln>
+        </p:spPr>
+        <p:txBody>
+          <a:bodyPr xmlns:a="http://schemas.openxmlformats.org/drawingml/2006/main" lIns="0" tIns="0" rIns="0" bIns="0" anchor="ctr">
+            <a:noAutofit/>
+          </a:bodyPr>
+          <a:lstStyle xmlns:a="http://schemas.openxmlformats.org/drawingml/2006/main"/>
+          <a:p xmlns:a="http://schemas.openxmlformats.org/drawingml/2006/main">
+            <a:pPr algn="l"/>
+            <a:endParaRPr lang="en-US" sz="1800" b="0" i="0">
+              <a:solidFill>
+                <a:srgbClr val="20252D"/>
+              </a:solidFill>
+              <a:latin typeface="Arial"/>
+              <a:ea typeface="Arial"/>
+            </a:endParaRPr>
+          </a:p>
+        </p:txBody>
+      </p:sp>
+      <p:sp>
+        <p:nvSpPr>
+          <p:cNvPr id="100117" name="Element-12"/>
+          <p:cNvSpPr/>
+          <p:nvPr/>
+        </p:nvSpPr>
+        <p:spPr>
+          <a:xfrm xmlns:a="http://schemas.openxmlformats.org/drawingml/2006/main">
+            <a:off x="1008000" y="1846800"/>
+            <a:ext cx="612000" cy="306000"/>
+          </a:xfrm>
+          <a:prstGeom xmlns:a="http://schemas.openxmlformats.org/drawingml/2006/main" prst="rect">
+            <a:avLst/>
+          </a:prstGeom>
+          <a:noFill xmlns:a="http://schemas.openxmlformats.org/drawingml/2006/main"/>
+          <a:ln xmlns:a="http://schemas.openxmlformats.org/drawingml/2006/main">
+            <a:noFill/>
+          </a:ln>
+        </p:spPr>
+        <p:txBody>
+          <a:bodyPr xmlns:a="http://schemas.openxmlformats.org/drawingml/2006/main" lIns="0" tIns="0" rIns="0" bIns="0" anchor="ctr">
+            <a:noAutofit/>
+          </a:bodyPr>
+          <a:lstStyle xmlns:a="http://schemas.openxmlformats.org/drawingml/2006/main"/>
+          <a:p xmlns:a="http://schemas.openxmlformats.org/drawingml/2006/main">
+            <a:pPr algn="l"/>
+            <a:r>
+              <a:rPr lang="en-US" sz="1400" b="1" i="0">
+                <a:solidFill>
+                  <a:srgbClr val="20252D"/>
+                </a:solidFill>
+                <a:latin typeface="Arial"/>
+                <a:ea typeface="Arial"/>
+              </a:rPr>
+              <a:t>H1</a:t>
+            </a:r>
+          </a:p>
+        </p:txBody>
+      </p:sp>
+      <p:sp>
+        <p:nvSpPr>
+          <p:cNvPr id="100118" name="Element-13"/>
+          <p:cNvSpPr/>
+          <p:nvPr/>
+        </p:nvSpPr>
+        <p:spPr>
+          <a:xfrm xmlns:a="http://schemas.openxmlformats.org/drawingml/2006/main">
+            <a:off x="1638000" y="1861200"/>
+            <a:ext cx="2340800" cy="288000"/>
+          </a:xfrm>
+          <a:prstGeom xmlns:a="http://schemas.openxmlformats.org/drawingml/2006/main" prst="rect">
+            <a:avLst/>
+          </a:prstGeom>
+          <a:noFill xmlns:a="http://schemas.openxmlformats.org/drawingml/2006/main"/>
+          <a:ln xmlns:a="http://schemas.openxmlformats.org/drawingml/2006/main">
+            <a:noFill/>
+          </a:ln>
+        </p:spPr>
+        <p:txBody>
+          <a:bodyPr xmlns:a="http://schemas.openxmlformats.org/drawingml/2006/main" lIns="0" tIns="0" rIns="0" bIns="0" anchor="ctr">
+            <a:noAutofit/>
+          </a:bodyPr>
+          <a:lstStyle xmlns:a="http://schemas.openxmlformats.org/drawingml/2006/main"/>
+          <a:p xmlns:a="http://schemas.openxmlformats.org/drawingml/2006/main">
+            <a:pPr algn="l"/>
+            <a:r>
+              <a:rPr lang="en-US" sz="1350" b="1" i="0">
+                <a:solidFill>
+                  <a:srgbClr val="20252D"/>
+                </a:solidFill>
+                <a:latin typeface="Arial"/>
+                <a:ea typeface="Arial"/>
+              </a:rPr>
+              <a:t>Connected devices</a:t>
+            </a:r>
+          </a:p>
+        </p:txBody>
+      </p:sp>
+      <p:sp>
+        <p:nvSpPr>
+          <p:cNvPr id="100119" name="Element-14"/>
+          <p:cNvSpPr/>
+          <p:nvPr/>
+        </p:nvSpPr>
+        <p:spPr>
+          <a:xfrm xmlns:a="http://schemas.openxmlformats.org/drawingml/2006/main">
+            <a:off x="1008000" y="2232000"/>
+            <a:ext cx="2952800" cy="10800"/>
+          </a:xfrm>
+          <a:prstGeom xmlns:a="http://schemas.openxmlformats.org/drawingml/2006/main" prst="rect">
+            <a:avLst/>
+          </a:prstGeom>
+          <a:solidFill xmlns:a="http://schemas.openxmlformats.org/drawingml/2006/main">
+            <a:srgbClr val="D9DEE5"/>
+          </a:solidFill>
+          <a:ln xmlns:a="http://schemas.openxmlformats.org/drawingml/2006/main">
+            <a:noFill/>
+          </a:ln>
+        </p:spPr>
+        <p:txBody>
+          <a:bodyPr xmlns:a="http://schemas.openxmlformats.org/drawingml/2006/main" lIns="0" tIns="0" rIns="0" bIns="0" anchor="ctr">
+            <a:noAutofit/>
+          </a:bodyPr>
+          <a:lstStyle xmlns:a="http://schemas.openxmlformats.org/drawingml/2006/main"/>
+          <a:p xmlns:a="http://schemas.openxmlformats.org/drawingml/2006/main">
+            <a:pPr algn="l"/>
+            <a:endParaRPr lang="en-US" sz="1800" b="0" i="0">
+              <a:solidFill>
+                <a:srgbClr val="20252D"/>
+              </a:solidFill>
+              <a:latin typeface="Arial"/>
+              <a:ea typeface="Arial"/>
+            </a:endParaRPr>
+          </a:p>
+        </p:txBody>
+      </p:sp>
+      <p:sp>
+        <p:nvSpPr>
+          <p:cNvPr id="100120" name="Element-15"/>
+          <p:cNvSpPr/>
+          <p:nvPr/>
+        </p:nvSpPr>
+        <p:spPr>
+          <a:xfrm xmlns:a="http://schemas.openxmlformats.org/drawingml/2006/main">
+            <a:off x="1008000" y="2358000"/>
+            <a:ext cx="2952800" cy="666000"/>
+          </a:xfrm>
+          <a:prstGeom xmlns:a="http://schemas.openxmlformats.org/drawingml/2006/main" prst="rect">
+            <a:avLst/>
+          </a:prstGeom>
+          <a:noFill xmlns:a="http://schemas.openxmlformats.org/drawingml/2006/main"/>
+          <a:ln xmlns:a="http://schemas.openxmlformats.org/drawingml/2006/main">
+            <a:noFill/>
+          </a:ln>
+        </p:spPr>
+        <p:txBody>
+          <a:bodyPr xmlns:a="http://schemas.openxmlformats.org/drawingml/2006/main" lIns="0" tIns="0" rIns="0" bIns="0" anchor="t">
+            <a:noAutofit/>
+          </a:bodyPr>
+          <a:lstStyle xmlns:a="http://schemas.openxmlformats.org/drawingml/2006/main"/>
+          <a:p xmlns:a="http://schemas.openxmlformats.org/drawingml/2006/main">
+            <a:pPr algn="l"/>
+            <a:r>
+              <a:rPr lang="en-US" sz="1400" b="0" i="0">
+                <a:solidFill>
+                  <a:srgbClr val="5C626C"/>
+                </a:solidFill>
+                <a:latin typeface="Arial"/>
+                <a:ea typeface="Arial"/>
+              </a:rPr>
+              <a:t>a link absent from public inputs</a:t>
+            </a:r>
+          </a:p>
+        </p:txBody>
+      </p:sp>
+      <p:sp>
+        <p:nvSpPr>
+          <p:cNvPr id="100121" name="Element-16"/>
+          <p:cNvSpPr/>
+          <p:nvPr/>
+        </p:nvSpPr>
+        <p:spPr>
+          <a:xfrm xmlns:a="http://schemas.openxmlformats.org/drawingml/2006/main">
+            <a:off x="4403600" y="1710000"/>
+            <a:ext cx="3384800" cy="1422000"/>
+          </a:xfrm>
+          <a:prstGeom xmlns:a="http://schemas.openxmlformats.org/drawingml/2006/main" prst="rect">
+            <a:avLst/>
+          </a:prstGeom>
+          <a:solidFill xmlns:a="http://schemas.openxmlformats.org/drawingml/2006/main">
+            <a:srgbClr val="F6F7F9"/>
+          </a:solidFill>
+          <a:ln xmlns:a="http://schemas.openxmlformats.org/drawingml/2006/main" w="12700">
+            <a:solidFill>
+              <a:srgbClr val="D9DEE5"/>
+            </a:solidFill>
+          </a:ln>
+        </p:spPr>
+        <p:txBody>
+          <a:bodyPr xmlns:a="http://schemas.openxmlformats.org/drawingml/2006/main" lIns="0" tIns="0" rIns="0" bIns="0" anchor="ctr">
+            <a:noAutofit/>
+          </a:bodyPr>
+          <a:lstStyle xmlns:a="http://schemas.openxmlformats.org/drawingml/2006/main"/>
+          <a:p xmlns:a="http://schemas.openxmlformats.org/drawingml/2006/main">
+            <a:pPr algn="l"/>
+            <a:endParaRPr lang="en-US" sz="1800" b="0" i="0">
+              <a:solidFill>
+                <a:srgbClr val="20252D"/>
+              </a:solidFill>
+              <a:latin typeface="Arial"/>
+              <a:ea typeface="Arial"/>
+            </a:endParaRPr>
+          </a:p>
+        </p:txBody>
+      </p:sp>
+      <p:sp>
+        <p:nvSpPr>
+          <p:cNvPr id="100122" name="Element-17"/>
+          <p:cNvSpPr/>
+          <p:nvPr/>
+        </p:nvSpPr>
+        <p:spPr>
+          <a:xfrm xmlns:a="http://schemas.openxmlformats.org/drawingml/2006/main">
+            <a:off x="4619600" y="1846800"/>
+            <a:ext cx="612000" cy="306000"/>
+          </a:xfrm>
+          <a:prstGeom xmlns:a="http://schemas.openxmlformats.org/drawingml/2006/main" prst="rect">
+            <a:avLst/>
+          </a:prstGeom>
+          <a:noFill xmlns:a="http://schemas.openxmlformats.org/drawingml/2006/main"/>
+          <a:ln xmlns:a="http://schemas.openxmlformats.org/drawingml/2006/main">
+            <a:noFill/>
+          </a:ln>
+        </p:spPr>
+        <p:txBody>
+          <a:bodyPr xmlns:a="http://schemas.openxmlformats.org/drawingml/2006/main" lIns="0" tIns="0" rIns="0" bIns="0" anchor="ctr">
+            <a:noAutofit/>
+          </a:bodyPr>
+          <a:lstStyle xmlns:a="http://schemas.openxmlformats.org/drawingml/2006/main"/>
+          <a:p xmlns:a="http://schemas.openxmlformats.org/drawingml/2006/main">
+            <a:pPr algn="l"/>
+            <a:r>
+              <a:rPr lang="en-US" sz="1400" b="1" i="0">
+                <a:solidFill>
+                  <a:srgbClr val="20252D"/>
+                </a:solidFill>
+                <a:latin typeface="Arial"/>
+                <a:ea typeface="Arial"/>
+              </a:rPr>
+              <a:t>H2</a:t>
+            </a:r>
+          </a:p>
+        </p:txBody>
+      </p:sp>
+      <p:sp>
+        <p:nvSpPr>
+          <p:cNvPr id="100123" name="Element-18"/>
+          <p:cNvSpPr/>
+          <p:nvPr/>
+        </p:nvSpPr>
+        <p:spPr>
+          <a:xfrm xmlns:a="http://schemas.openxmlformats.org/drawingml/2006/main">
+            <a:off x="5249600" y="1861200"/>
+            <a:ext cx="2340800" cy="288000"/>
+          </a:xfrm>
+          <a:prstGeom xmlns:a="http://schemas.openxmlformats.org/drawingml/2006/main" prst="rect">
+            <a:avLst/>
+          </a:prstGeom>
+          <a:noFill xmlns:a="http://schemas.openxmlformats.org/drawingml/2006/main"/>
+          <a:ln xmlns:a="http://schemas.openxmlformats.org/drawingml/2006/main">
+            <a:noFill/>
+          </a:ln>
+        </p:spPr>
+        <p:txBody>
+          <a:bodyPr xmlns:a="http://schemas.openxmlformats.org/drawingml/2006/main" lIns="0" tIns="0" rIns="0" bIns="0" anchor="ctr">
+            <a:noAutofit/>
+          </a:bodyPr>
+          <a:lstStyle xmlns:a="http://schemas.openxmlformats.org/drawingml/2006/main"/>
+          <a:p xmlns:a="http://schemas.openxmlformats.org/drawingml/2006/main">
+            <a:pPr algn="l"/>
+            <a:r>
+              <a:rPr lang="en-US" sz="1300" b="1" i="0">
+                <a:solidFill>
+                  <a:srgbClr val="20252D"/>
+                </a:solidFill>
+                <a:latin typeface="Arial"/>
+                <a:ea typeface="Arial"/>
+              </a:rPr>
+              <a:t>Heterogeneous formats</a:t>
+            </a:r>
+          </a:p>
+        </p:txBody>
+      </p:sp>
+      <p:sp>
+        <p:nvSpPr>
+          <p:cNvPr id="100124" name="Element-19"/>
+          <p:cNvSpPr/>
+          <p:nvPr/>
+        </p:nvSpPr>
+        <p:spPr>
+          <a:xfrm xmlns:a="http://schemas.openxmlformats.org/drawingml/2006/main">
+            <a:off x="4619600" y="2232000"/>
+            <a:ext cx="2952800" cy="10800"/>
+          </a:xfrm>
+          <a:prstGeom xmlns:a="http://schemas.openxmlformats.org/drawingml/2006/main" prst="rect">
+            <a:avLst/>
+          </a:prstGeom>
+          <a:solidFill xmlns:a="http://schemas.openxmlformats.org/drawingml/2006/main">
+            <a:srgbClr val="D9DEE5"/>
+          </a:solidFill>
+          <a:ln xmlns:a="http://schemas.openxmlformats.org/drawingml/2006/main">
+            <a:noFill/>
+          </a:ln>
+        </p:spPr>
+        <p:txBody>
+          <a:bodyPr xmlns:a="http://schemas.openxmlformats.org/drawingml/2006/main" lIns="0" tIns="0" rIns="0" bIns="0" anchor="ctr">
+            <a:noAutofit/>
+          </a:bodyPr>
+          <a:lstStyle xmlns:a="http://schemas.openxmlformats.org/drawingml/2006/main"/>
+          <a:p xmlns:a="http://schemas.openxmlformats.org/drawingml/2006/main">
+            <a:pPr algn="l"/>
+            <a:endParaRPr lang="en-US" sz="1800" b="0" i="0">
+              <a:solidFill>
+                <a:srgbClr val="20252D"/>
+              </a:solidFill>
+              <a:latin typeface="Arial"/>
+              <a:ea typeface="Arial"/>
+            </a:endParaRPr>
+          </a:p>
+        </p:txBody>
+      </p:sp>
+      <p:sp>
+        <p:nvSpPr>
+          <p:cNvPr id="100125" name="Element-20"/>
+          <p:cNvSpPr/>
+          <p:nvPr/>
+        </p:nvSpPr>
+        <p:spPr>
+          <a:xfrm xmlns:a="http://schemas.openxmlformats.org/drawingml/2006/main">
+            <a:off x="4619600" y="2358000"/>
+            <a:ext cx="2952800" cy="666000"/>
+          </a:xfrm>
+          <a:prstGeom xmlns:a="http://schemas.openxmlformats.org/drawingml/2006/main" prst="rect">
+            <a:avLst/>
+          </a:prstGeom>
+          <a:noFill xmlns:a="http://schemas.openxmlformats.org/drawingml/2006/main"/>
+          <a:ln xmlns:a="http://schemas.openxmlformats.org/drawingml/2006/main">
+            <a:noFill/>
+          </a:ln>
+        </p:spPr>
+        <p:txBody>
+          <a:bodyPr xmlns:a="http://schemas.openxmlformats.org/drawingml/2006/main" lIns="0" tIns="0" rIns="0" bIns="0" anchor="t">
+            <a:noAutofit/>
+          </a:bodyPr>
+          <a:lstStyle xmlns:a="http://schemas.openxmlformats.org/drawingml/2006/main"/>
+          <a:p xmlns:a="http://schemas.openxmlformats.org/drawingml/2006/main">
+            <a:pPr algn="l"/>
+            <a:r>
+              <a:rPr lang="en-US" sz="1400" b="0" i="0">
+                <a:solidFill>
+                  <a:srgbClr val="5C626C"/>
+                </a:solidFill>
+                <a:latin typeface="Arial"/>
+                <a:ea typeface="Arial"/>
+              </a:rPr>
+              <a:t>a representation no parser covers</a:t>
+            </a:r>
+          </a:p>
+        </p:txBody>
+      </p:sp>
+      <p:sp>
+        <p:nvSpPr>
+          <p:cNvPr id="100126" name="Element-21"/>
+          <p:cNvSpPr/>
+          <p:nvPr/>
+        </p:nvSpPr>
+        <p:spPr>
+          <a:xfrm xmlns:a="http://schemas.openxmlformats.org/drawingml/2006/main">
+            <a:off x="8015200" y="1710000"/>
+            <a:ext cx="3384800" cy="1422000"/>
+          </a:xfrm>
+          <a:prstGeom xmlns:a="http://schemas.openxmlformats.org/drawingml/2006/main" prst="rect">
+            <a:avLst/>
+          </a:prstGeom>
+          <a:solidFill xmlns:a="http://schemas.openxmlformats.org/drawingml/2006/main">
+            <a:srgbClr val="F6F7F9"/>
+          </a:solidFill>
+          <a:ln xmlns:a="http://schemas.openxmlformats.org/drawingml/2006/main" w="12700">
+            <a:solidFill>
+              <a:srgbClr val="D9DEE5"/>
+            </a:solidFill>
+          </a:ln>
+        </p:spPr>
+        <p:txBody>
+          <a:bodyPr xmlns:a="http://schemas.openxmlformats.org/drawingml/2006/main" lIns="0" tIns="0" rIns="0" bIns="0" anchor="ctr">
+            <a:noAutofit/>
+          </a:bodyPr>
+          <a:lstStyle xmlns:a="http://schemas.openxmlformats.org/drawingml/2006/main"/>
+          <a:p xmlns:a="http://schemas.openxmlformats.org/drawingml/2006/main">
+            <a:pPr algn="l"/>
+            <a:endParaRPr lang="en-US" sz="1800" b="0" i="0">
+              <a:solidFill>
+                <a:srgbClr val="20252D"/>
+              </a:solidFill>
+              <a:latin typeface="Arial"/>
+              <a:ea typeface="Arial"/>
+            </a:endParaRPr>
+          </a:p>
+        </p:txBody>
+      </p:sp>
+      <p:sp>
+        <p:nvSpPr>
+          <p:cNvPr id="100127" name="Element-22"/>
+          <p:cNvSpPr/>
+          <p:nvPr/>
+        </p:nvSpPr>
+        <p:spPr>
+          <a:xfrm xmlns:a="http://schemas.openxmlformats.org/drawingml/2006/main">
+            <a:off x="8231200" y="1846800"/>
+            <a:ext cx="612000" cy="306000"/>
+          </a:xfrm>
+          <a:prstGeom xmlns:a="http://schemas.openxmlformats.org/drawingml/2006/main" prst="rect">
+            <a:avLst/>
+          </a:prstGeom>
+          <a:noFill xmlns:a="http://schemas.openxmlformats.org/drawingml/2006/main"/>
+          <a:ln xmlns:a="http://schemas.openxmlformats.org/drawingml/2006/main">
+            <a:noFill/>
+          </a:ln>
+        </p:spPr>
+        <p:txBody>
+          <a:bodyPr xmlns:a="http://schemas.openxmlformats.org/drawingml/2006/main" lIns="0" tIns="0" rIns="0" bIns="0" anchor="ctr">
+            <a:noAutofit/>
+          </a:bodyPr>
+          <a:lstStyle xmlns:a="http://schemas.openxmlformats.org/drawingml/2006/main"/>
+          <a:p xmlns:a="http://schemas.openxmlformats.org/drawingml/2006/main">
+            <a:pPr algn="l"/>
+            <a:r>
+              <a:rPr lang="en-US" sz="1400" b="1" i="0">
+                <a:solidFill>
+                  <a:srgbClr val="20252D"/>
+                </a:solidFill>
+                <a:latin typeface="Arial"/>
+                <a:ea typeface="Arial"/>
+              </a:rPr>
+              <a:t>H3</a:t>
+            </a:r>
+          </a:p>
+        </p:txBody>
+      </p:sp>
+      <p:sp>
+        <p:nvSpPr>
+          <p:cNvPr id="100128" name="Element-23"/>
+          <p:cNvSpPr/>
+          <p:nvPr/>
+        </p:nvSpPr>
+        <p:spPr>
+          <a:xfrm xmlns:a="http://schemas.openxmlformats.org/drawingml/2006/main">
+            <a:off x="8861200" y="1861200"/>
+            <a:ext cx="2340800" cy="288000"/>
+          </a:xfrm>
+          <a:prstGeom xmlns:a="http://schemas.openxmlformats.org/drawingml/2006/main" prst="rect">
+            <a:avLst/>
+          </a:prstGeom>
+          <a:noFill xmlns:a="http://schemas.openxmlformats.org/drawingml/2006/main"/>
+          <a:ln xmlns:a="http://schemas.openxmlformats.org/drawingml/2006/main">
+            <a:noFill/>
+          </a:ln>
+        </p:spPr>
+        <p:txBody>
+          <a:bodyPr xmlns:a="http://schemas.openxmlformats.org/drawingml/2006/main" lIns="0" tIns="0" rIns="0" bIns="0" anchor="ctr">
+            <a:noAutofit/>
+          </a:bodyPr>
+          <a:lstStyle xmlns:a="http://schemas.openxmlformats.org/drawingml/2006/main"/>
+          <a:p xmlns:a="http://schemas.openxmlformats.org/drawingml/2006/main">
+            <a:pPr algn="l"/>
+            <a:r>
+              <a:rPr lang="en-US" sz="1350" b="1" i="0">
+                <a:solidFill>
+                  <a:srgbClr val="20252D"/>
+                </a:solidFill>
+                <a:latin typeface="Arial"/>
+                <a:ea typeface="Arial"/>
+              </a:rPr>
+              <a:t>Novel contracts</a:t>
+            </a:r>
+          </a:p>
+        </p:txBody>
+      </p:sp>
+      <p:sp>
+        <p:nvSpPr>
+          <p:cNvPr id="100129" name="Element-24"/>
+          <p:cNvSpPr/>
+          <p:nvPr/>
+        </p:nvSpPr>
+        <p:spPr>
+          <a:xfrm xmlns:a="http://schemas.openxmlformats.org/drawingml/2006/main">
+            <a:off x="8231200" y="2232000"/>
+            <a:ext cx="2952800" cy="10800"/>
+          </a:xfrm>
+          <a:prstGeom xmlns:a="http://schemas.openxmlformats.org/drawingml/2006/main" prst="rect">
+            <a:avLst/>
+          </a:prstGeom>
+          <a:solidFill xmlns:a="http://schemas.openxmlformats.org/drawingml/2006/main">
+            <a:srgbClr val="D9DEE5"/>
+          </a:solidFill>
+          <a:ln xmlns:a="http://schemas.openxmlformats.org/drawingml/2006/main">
+            <a:noFill/>
+          </a:ln>
+        </p:spPr>
+        <p:txBody>
+          <a:bodyPr xmlns:a="http://schemas.openxmlformats.org/drawingml/2006/main" lIns="0" tIns="0" rIns="0" bIns="0" anchor="ctr">
+            <a:noAutofit/>
+          </a:bodyPr>
+          <a:lstStyle xmlns:a="http://schemas.openxmlformats.org/drawingml/2006/main"/>
+          <a:p xmlns:a="http://schemas.openxmlformats.org/drawingml/2006/main">
+            <a:pPr algn="l"/>
+            <a:endParaRPr lang="en-US" sz="1800" b="0" i="0">
+              <a:solidFill>
+                <a:srgbClr val="20252D"/>
+              </a:solidFill>
+              <a:latin typeface="Arial"/>
+              <a:ea typeface="Arial"/>
+            </a:endParaRPr>
+          </a:p>
+        </p:txBody>
+      </p:sp>
+      <p:sp>
+        <p:nvSpPr>
+          <p:cNvPr id="100130" name="Element-25"/>
+          <p:cNvSpPr/>
+          <p:nvPr/>
+        </p:nvSpPr>
+        <p:spPr>
+          <a:xfrm xmlns:a="http://schemas.openxmlformats.org/drawingml/2006/main">
+            <a:off x="8231200" y="2358000"/>
+            <a:ext cx="2952800" cy="666000"/>
+          </a:xfrm>
+          <a:prstGeom xmlns:a="http://schemas.openxmlformats.org/drawingml/2006/main" prst="rect">
+            <a:avLst/>
+          </a:prstGeom>
+          <a:noFill xmlns:a="http://schemas.openxmlformats.org/drawingml/2006/main"/>
+          <a:ln xmlns:a="http://schemas.openxmlformats.org/drawingml/2006/main">
+            <a:noFill/>
+          </a:ln>
+        </p:spPr>
+        <p:txBody>
+          <a:bodyPr xmlns:a="http://schemas.openxmlformats.org/drawingml/2006/main" lIns="0" tIns="0" rIns="0" bIns="0" anchor="t">
+            <a:noAutofit/>
+          </a:bodyPr>
+          <a:lstStyle xmlns:a="http://schemas.openxmlformats.org/drawingml/2006/main"/>
+          <a:p xmlns:a="http://schemas.openxmlformats.org/drawingml/2006/main">
+            <a:pPr algn="l"/>
+            <a:r>
+              <a:rPr lang="en-US" sz="1400" b="0" i="0">
+                <a:solidFill>
+                  <a:srgbClr val="5C626C"/>
+                </a:solidFill>
+                <a:latin typeface="Arial"/>
+                <a:ea typeface="Arial"/>
+              </a:rPr>
+              <a:t>rights stated in unseen documentation</a:t>
+            </a:r>
+          </a:p>
+        </p:txBody>
+      </p:sp>
+      <p:sp>
+        <p:nvSpPr>
+          <p:cNvPr id="100131" name="Element-26"/>
+          <p:cNvSpPr/>
+          <p:nvPr/>
+        </p:nvSpPr>
+        <p:spPr>
+          <a:xfrm xmlns:a="http://schemas.openxmlformats.org/drawingml/2006/main">
+            <a:off x="792000" y="3276000"/>
+            <a:ext cx="3384800" cy="1422000"/>
+          </a:xfrm>
+          <a:prstGeom xmlns:a="http://schemas.openxmlformats.org/drawingml/2006/main" prst="rect">
+            <a:avLst/>
+          </a:prstGeom>
+          <a:solidFill xmlns:a="http://schemas.openxmlformats.org/drawingml/2006/main">
+            <a:srgbClr val="F6F7F9"/>
+          </a:solidFill>
+          <a:ln xmlns:a="http://schemas.openxmlformats.org/drawingml/2006/main" w="12700">
+            <a:solidFill>
+              <a:srgbClr val="D9DEE5"/>
+            </a:solidFill>
+          </a:ln>
+        </p:spPr>
+        <p:txBody>
+          <a:bodyPr xmlns:a="http://schemas.openxmlformats.org/drawingml/2006/main" lIns="0" tIns="0" rIns="0" bIns="0" anchor="ctr">
+            <a:noAutofit/>
+          </a:bodyPr>
+          <a:lstStyle xmlns:a="http://schemas.openxmlformats.org/drawingml/2006/main"/>
+          <a:p xmlns:a="http://schemas.openxmlformats.org/drawingml/2006/main">
+            <a:pPr algn="l"/>
+            <a:endParaRPr lang="en-US" sz="1800" b="0" i="0">
+              <a:solidFill>
+                <a:srgbClr val="20252D"/>
+              </a:solidFill>
+              <a:latin typeface="Arial"/>
+              <a:ea typeface="Arial"/>
+            </a:endParaRPr>
+          </a:p>
+        </p:txBody>
+      </p:sp>
+      <p:sp>
+        <p:nvSpPr>
+          <p:cNvPr id="100132" name="Element-27"/>
+          <p:cNvSpPr/>
+          <p:nvPr/>
+        </p:nvSpPr>
+        <p:spPr>
+          <a:xfrm xmlns:a="http://schemas.openxmlformats.org/drawingml/2006/main">
+            <a:off x="1008000" y="3412800"/>
+            <a:ext cx="612000" cy="306000"/>
+          </a:xfrm>
+          <a:prstGeom xmlns:a="http://schemas.openxmlformats.org/drawingml/2006/main" prst="rect">
+            <a:avLst/>
+          </a:prstGeom>
+          <a:noFill xmlns:a="http://schemas.openxmlformats.org/drawingml/2006/main"/>
+          <a:ln xmlns:a="http://schemas.openxmlformats.org/drawingml/2006/main">
+            <a:noFill/>
+          </a:ln>
+        </p:spPr>
+        <p:txBody>
+          <a:bodyPr xmlns:a="http://schemas.openxmlformats.org/drawingml/2006/main" lIns="0" tIns="0" rIns="0" bIns="0" anchor="ctr">
+            <a:noAutofit/>
+          </a:bodyPr>
+          <a:lstStyle xmlns:a="http://schemas.openxmlformats.org/drawingml/2006/main"/>
+          <a:p xmlns:a="http://schemas.openxmlformats.org/drawingml/2006/main">
+            <a:pPr algn="l"/>
+            <a:r>
+              <a:rPr lang="en-US" sz="1400" b="1" i="0">
+                <a:solidFill>
+                  <a:srgbClr val="20252D"/>
+                </a:solidFill>
+                <a:latin typeface="Arial"/>
+                <a:ea typeface="Arial"/>
+              </a:rPr>
+              <a:t>H4</a:t>
+            </a:r>
+          </a:p>
+        </p:txBody>
+      </p:sp>
+      <p:sp>
+        <p:nvSpPr>
+          <p:cNvPr id="100133" name="Element-28"/>
+          <p:cNvSpPr/>
+          <p:nvPr/>
+        </p:nvSpPr>
+        <p:spPr>
+          <a:xfrm xmlns:a="http://schemas.openxmlformats.org/drawingml/2006/main">
+            <a:off x="1638000" y="3427200"/>
+            <a:ext cx="2340800" cy="288000"/>
+          </a:xfrm>
+          <a:prstGeom xmlns:a="http://schemas.openxmlformats.org/drawingml/2006/main" prst="rect">
+            <a:avLst/>
+          </a:prstGeom>
+          <a:noFill xmlns:a="http://schemas.openxmlformats.org/drawingml/2006/main"/>
+          <a:ln xmlns:a="http://schemas.openxmlformats.org/drawingml/2006/main">
+            <a:noFill/>
+          </a:ln>
+        </p:spPr>
+        <p:txBody>
+          <a:bodyPr xmlns:a="http://schemas.openxmlformats.org/drawingml/2006/main" lIns="0" tIns="0" rIns="0" bIns="0" anchor="ctr">
+            <a:noAutofit/>
+          </a:bodyPr>
+          <a:lstStyle xmlns:a="http://schemas.openxmlformats.org/drawingml/2006/main"/>
+          <a:p xmlns:a="http://schemas.openxmlformats.org/drawingml/2006/main">
+            <a:pPr algn="l"/>
+            <a:r>
+              <a:rPr lang="en-US" sz="1350" b="1" i="0">
+                <a:solidFill>
+                  <a:srgbClr val="20252D"/>
+                </a:solidFill>
+                <a:latin typeface="Arial"/>
+                <a:ea typeface="Arial"/>
+              </a:rPr>
+              <a:t>Vendor semantics</a:t>
+            </a:r>
+          </a:p>
+        </p:txBody>
+      </p:sp>
+      <p:sp>
+        <p:nvSpPr>
+          <p:cNvPr id="100134" name="Element-29"/>
+          <p:cNvSpPr/>
+          <p:nvPr/>
+        </p:nvSpPr>
+        <p:spPr>
+          <a:xfrm xmlns:a="http://schemas.openxmlformats.org/drawingml/2006/main">
+            <a:off x="1008000" y="3798000"/>
+            <a:ext cx="2952800" cy="10800"/>
+          </a:xfrm>
+          <a:prstGeom xmlns:a="http://schemas.openxmlformats.org/drawingml/2006/main" prst="rect">
+            <a:avLst/>
+          </a:prstGeom>
+          <a:solidFill xmlns:a="http://schemas.openxmlformats.org/drawingml/2006/main">
+            <a:srgbClr val="D9DEE5"/>
+          </a:solidFill>
+          <a:ln xmlns:a="http://schemas.openxmlformats.org/drawingml/2006/main">
+            <a:noFill/>
+          </a:ln>
+        </p:spPr>
+        <p:txBody>
+          <a:bodyPr xmlns:a="http://schemas.openxmlformats.org/drawingml/2006/main" lIns="0" tIns="0" rIns="0" bIns="0" anchor="ctr">
+            <a:noAutofit/>
+          </a:bodyPr>
+          <a:lstStyle xmlns:a="http://schemas.openxmlformats.org/drawingml/2006/main"/>
+          <a:p xmlns:a="http://schemas.openxmlformats.org/drawingml/2006/main">
+            <a:pPr algn="l"/>
+            <a:endParaRPr lang="en-US" sz="1800" b="0" i="0">
+              <a:solidFill>
+                <a:srgbClr val="20252D"/>
+              </a:solidFill>
+              <a:latin typeface="Arial"/>
+              <a:ea typeface="Arial"/>
+            </a:endParaRPr>
+          </a:p>
+        </p:txBody>
+      </p:sp>
+      <p:sp>
+        <p:nvSpPr>
+          <p:cNvPr id="100135" name="Element-30"/>
+          <p:cNvSpPr/>
+          <p:nvPr/>
+        </p:nvSpPr>
+        <p:spPr>
+          <a:xfrm xmlns:a="http://schemas.openxmlformats.org/drawingml/2006/main">
+            <a:off x="1008000" y="3924000"/>
+            <a:ext cx="2952800" cy="666000"/>
+          </a:xfrm>
+          <a:prstGeom xmlns:a="http://schemas.openxmlformats.org/drawingml/2006/main" prst="rect">
+            <a:avLst/>
+          </a:prstGeom>
+          <a:noFill xmlns:a="http://schemas.openxmlformats.org/drawingml/2006/main"/>
+          <a:ln xmlns:a="http://schemas.openxmlformats.org/drawingml/2006/main">
+            <a:noFill/>
+          </a:ln>
+        </p:spPr>
+        <p:txBody>
+          <a:bodyPr xmlns:a="http://schemas.openxmlformats.org/drawingml/2006/main" lIns="0" tIns="0" rIns="0" bIns="0" anchor="t">
+            <a:noAutofit/>
+          </a:bodyPr>
+          <a:lstStyle xmlns:a="http://schemas.openxmlformats.org/drawingml/2006/main"/>
+          <a:p xmlns:a="http://schemas.openxmlformats.org/drawingml/2006/main">
+            <a:pPr algn="l"/>
+            <a:r>
+              <a:rPr lang="en-US" sz="1400" b="0" i="0">
+                <a:solidFill>
+                  <a:srgbClr val="5C626C"/>
+                </a:solidFill>
+                <a:latin typeface="Arial"/>
+                <a:ea typeface="Arial"/>
+              </a:rPr>
+              <a:t>a field whose meaning is only documented</a:t>
+            </a:r>
+          </a:p>
+        </p:txBody>
+      </p:sp>
+      <p:sp>
+        <p:nvSpPr>
+          <p:cNvPr id="100136" name="Element-31"/>
+          <p:cNvSpPr/>
+          <p:nvPr/>
+        </p:nvSpPr>
+        <p:spPr>
+          <a:xfrm xmlns:a="http://schemas.openxmlformats.org/drawingml/2006/main">
+            <a:off x="4403600" y="3276000"/>
+            <a:ext cx="3384800" cy="1422000"/>
+          </a:xfrm>
+          <a:prstGeom xmlns:a="http://schemas.openxmlformats.org/drawingml/2006/main" prst="rect">
+            <a:avLst/>
+          </a:prstGeom>
+          <a:solidFill xmlns:a="http://schemas.openxmlformats.org/drawingml/2006/main">
+            <a:srgbClr val="F6F7F9"/>
+          </a:solidFill>
+          <a:ln xmlns:a="http://schemas.openxmlformats.org/drawingml/2006/main" w="12700">
+            <a:solidFill>
+              <a:srgbClr val="D9DEE5"/>
+            </a:solidFill>
+          </a:ln>
+        </p:spPr>
+        <p:txBody>
+          <a:bodyPr xmlns:a="http://schemas.openxmlformats.org/drawingml/2006/main" lIns="0" tIns="0" rIns="0" bIns="0" anchor="ctr">
+            <a:noAutofit/>
+          </a:bodyPr>
+          <a:lstStyle xmlns:a="http://schemas.openxmlformats.org/drawingml/2006/main"/>
+          <a:p xmlns:a="http://schemas.openxmlformats.org/drawingml/2006/main">
+            <a:pPr algn="l"/>
+            <a:endParaRPr lang="en-US" sz="1800" b="0" i="0">
+              <a:solidFill>
+                <a:srgbClr val="20252D"/>
+              </a:solidFill>
+              <a:latin typeface="Arial"/>
+              <a:ea typeface="Arial"/>
+            </a:endParaRPr>
+          </a:p>
+        </p:txBody>
+      </p:sp>
+      <p:sp>
+        <p:nvSpPr>
+          <p:cNvPr id="100137" name="Element-32"/>
+          <p:cNvSpPr/>
+          <p:nvPr/>
+        </p:nvSpPr>
+        <p:spPr>
+          <a:xfrm xmlns:a="http://schemas.openxmlformats.org/drawingml/2006/main">
+            <a:off x="4619600" y="3412800"/>
+            <a:ext cx="612000" cy="306000"/>
+          </a:xfrm>
+          <a:prstGeom xmlns:a="http://schemas.openxmlformats.org/drawingml/2006/main" prst="rect">
+            <a:avLst/>
+          </a:prstGeom>
+          <a:noFill xmlns:a="http://schemas.openxmlformats.org/drawingml/2006/main"/>
+          <a:ln xmlns:a="http://schemas.openxmlformats.org/drawingml/2006/main">
+            <a:noFill/>
+          </a:ln>
+        </p:spPr>
+        <p:txBody>
+          <a:bodyPr xmlns:a="http://schemas.openxmlformats.org/drawingml/2006/main" lIns="0" tIns="0" rIns="0" bIns="0" anchor="ctr">
+            <a:noAutofit/>
+          </a:bodyPr>
+          <a:lstStyle xmlns:a="http://schemas.openxmlformats.org/drawingml/2006/main"/>
+          <a:p xmlns:a="http://schemas.openxmlformats.org/drawingml/2006/main">
+            <a:pPr algn="l"/>
+            <a:r>
+              <a:rPr lang="en-US" sz="1400" b="1" i="0">
+                <a:solidFill>
+                  <a:srgbClr val="20252D"/>
+                </a:solidFill>
+                <a:latin typeface="Arial"/>
+                <a:ea typeface="Arial"/>
+              </a:rPr>
+              <a:t>H5</a:t>
+            </a:r>
+          </a:p>
+        </p:txBody>
+      </p:sp>
+      <p:sp>
+        <p:nvSpPr>
+          <p:cNvPr id="100138" name="Element-33"/>
+          <p:cNvSpPr/>
+          <p:nvPr/>
+        </p:nvSpPr>
+        <p:spPr>
+          <a:xfrm xmlns:a="http://schemas.openxmlformats.org/drawingml/2006/main">
+            <a:off x="5249600" y="3427200"/>
+            <a:ext cx="2340800" cy="288000"/>
+          </a:xfrm>
+          <a:prstGeom xmlns:a="http://schemas.openxmlformats.org/drawingml/2006/main" prst="rect">
+            <a:avLst/>
+          </a:prstGeom>
+          <a:noFill xmlns:a="http://schemas.openxmlformats.org/drawingml/2006/main"/>
+          <a:ln xmlns:a="http://schemas.openxmlformats.org/drawingml/2006/main">
+            <a:noFill/>
+          </a:ln>
+        </p:spPr>
+        <p:txBody>
+          <a:bodyPr xmlns:a="http://schemas.openxmlformats.org/drawingml/2006/main" lIns="0" tIns="0" rIns="0" bIns="0" anchor="ctr">
+            <a:noAutofit/>
+          </a:bodyPr>
+          <a:lstStyle xmlns:a="http://schemas.openxmlformats.org/drawingml/2006/main"/>
+          <a:p xmlns:a="http://schemas.openxmlformats.org/drawingml/2006/main">
+            <a:pPr algn="l"/>
+            <a:r>
+              <a:rPr lang="en-US" sz="1350" b="1" i="0">
+                <a:solidFill>
+                  <a:srgbClr val="20252D"/>
+                </a:solidFill>
+                <a:latin typeface="Arial"/>
+                <a:ea typeface="Arial"/>
+              </a:rPr>
+              <a:t>Ambiguous refusals</a:t>
+            </a:r>
+          </a:p>
+        </p:txBody>
+      </p:sp>
+      <p:sp>
+        <p:nvSpPr>
+          <p:cNvPr id="100139" name="Element-34"/>
+          <p:cNvSpPr/>
+          <p:nvPr/>
+        </p:nvSpPr>
+        <p:spPr>
+          <a:xfrm xmlns:a="http://schemas.openxmlformats.org/drawingml/2006/main">
+            <a:off x="4619600" y="3798000"/>
+            <a:ext cx="2952800" cy="10800"/>
+          </a:xfrm>
+          <a:prstGeom xmlns:a="http://schemas.openxmlformats.org/drawingml/2006/main" prst="rect">
+            <a:avLst/>
+          </a:prstGeom>
+          <a:solidFill xmlns:a="http://schemas.openxmlformats.org/drawingml/2006/main">
+            <a:srgbClr val="D9DEE5"/>
+          </a:solidFill>
+          <a:ln xmlns:a="http://schemas.openxmlformats.org/drawingml/2006/main">
+            <a:noFill/>
+          </a:ln>
+        </p:spPr>
+        <p:txBody>
+          <a:bodyPr xmlns:a="http://schemas.openxmlformats.org/drawingml/2006/main" lIns="0" tIns="0" rIns="0" bIns="0" anchor="ctr">
+            <a:noAutofit/>
+          </a:bodyPr>
+          <a:lstStyle xmlns:a="http://schemas.openxmlformats.org/drawingml/2006/main"/>
+          <a:p xmlns:a="http://schemas.openxmlformats.org/drawingml/2006/main">
+            <a:pPr algn="l"/>
+            <a:endParaRPr lang="en-US" sz="1800" b="0" i="0">
+              <a:solidFill>
+                <a:srgbClr val="20252D"/>
+              </a:solidFill>
+              <a:latin typeface="Arial"/>
+              <a:ea typeface="Arial"/>
+            </a:endParaRPr>
+          </a:p>
+        </p:txBody>
+      </p:sp>
+      <p:sp>
+        <p:nvSpPr>
+          <p:cNvPr id="100140" name="Element-35"/>
+          <p:cNvSpPr/>
+          <p:nvPr/>
+        </p:nvSpPr>
+        <p:spPr>
+          <a:xfrm xmlns:a="http://schemas.openxmlformats.org/drawingml/2006/main">
+            <a:off x="4619600" y="3924000"/>
+            <a:ext cx="2952800" cy="666000"/>
+          </a:xfrm>
+          <a:prstGeom xmlns:a="http://schemas.openxmlformats.org/drawingml/2006/main" prst="rect">
+            <a:avLst/>
+          </a:prstGeom>
+          <a:noFill xmlns:a="http://schemas.openxmlformats.org/drawingml/2006/main"/>
+          <a:ln xmlns:a="http://schemas.openxmlformats.org/drawingml/2006/main">
+            <a:noFill/>
+          </a:ln>
+        </p:spPr>
+        <p:txBody>
+          <a:bodyPr xmlns:a="http://schemas.openxmlformats.org/drawingml/2006/main" lIns="0" tIns="0" rIns="0" bIns="0" anchor="t">
+            <a:noAutofit/>
+          </a:bodyPr>
+          <a:lstStyle xmlns:a="http://schemas.openxmlformats.org/drawingml/2006/main"/>
+          <a:p xmlns:a="http://schemas.openxmlformats.org/drawingml/2006/main">
+            <a:pPr algn="l"/>
+            <a:r>
+              <a:rPr lang="en-US" sz="1400" b="0" i="0">
+                <a:solidFill>
+                  <a:srgbClr val="5C626C"/>
+                </a:solidFill>
+                <a:latin typeface="Arial"/>
+                <a:ea typeface="Arial"/>
+              </a:rPr>
+              <a:t>resuming the audit after a refusal</a:t>
+            </a:r>
+          </a:p>
+        </p:txBody>
+      </p:sp>
+      <p:sp>
+        <p:nvSpPr>
+          <p:cNvPr id="100141" name="Element-36"/>
+          <p:cNvSpPr/>
+          <p:nvPr/>
+        </p:nvSpPr>
+        <p:spPr>
+          <a:xfrm xmlns:a="http://schemas.openxmlformats.org/drawingml/2006/main">
+            <a:off x="8015200" y="3276000"/>
+            <a:ext cx="3384800" cy="1422000"/>
+          </a:xfrm>
+          <a:prstGeom xmlns:a="http://schemas.openxmlformats.org/drawingml/2006/main" prst="rect">
+            <a:avLst/>
+          </a:prstGeom>
+          <a:solidFill xmlns:a="http://schemas.openxmlformats.org/drawingml/2006/main">
+            <a:srgbClr val="FCF0F4"/>
+          </a:solidFill>
+          <a:ln xmlns:a="http://schemas.openxmlformats.org/drawingml/2006/main" w="12700">
+            <a:solidFill>
+              <a:srgbClr val="B60036"/>
+            </a:solidFill>
+          </a:ln>
+        </p:spPr>
+        <p:txBody>
+          <a:bodyPr xmlns:a="http://schemas.openxmlformats.org/drawingml/2006/main" lIns="0" tIns="0" rIns="0" bIns="0" anchor="ctr">
+            <a:noAutofit/>
+          </a:bodyPr>
+          <a:lstStyle xmlns:a="http://schemas.openxmlformats.org/drawingml/2006/main"/>
+          <a:p xmlns:a="http://schemas.openxmlformats.org/drawingml/2006/main">
+            <a:pPr algn="l"/>
+            <a:endParaRPr lang="en-US" sz="1800" b="0" i="0">
+              <a:solidFill>
+                <a:srgbClr val="20252D"/>
+              </a:solidFill>
+              <a:latin typeface="Arial"/>
+              <a:ea typeface="Arial"/>
+            </a:endParaRPr>
+          </a:p>
+        </p:txBody>
+      </p:sp>
+      <p:sp>
+        <p:nvSpPr>
+          <p:cNvPr id="100142" name="Element-37"/>
+          <p:cNvSpPr/>
+          <p:nvPr/>
+        </p:nvSpPr>
+        <p:spPr>
+          <a:xfrm xmlns:a="http://schemas.openxmlformats.org/drawingml/2006/main">
+            <a:off x="8231200" y="3412800"/>
+            <a:ext cx="612000" cy="306000"/>
+          </a:xfrm>
+          <a:prstGeom xmlns:a="http://schemas.openxmlformats.org/drawingml/2006/main" prst="rect">
+            <a:avLst/>
+          </a:prstGeom>
+          <a:noFill xmlns:a="http://schemas.openxmlformats.org/drawingml/2006/main"/>
+          <a:ln xmlns:a="http://schemas.openxmlformats.org/drawingml/2006/main">
+            <a:noFill/>
+          </a:ln>
+        </p:spPr>
+        <p:txBody>
+          <a:bodyPr xmlns:a="http://schemas.openxmlformats.org/drawingml/2006/main" lIns="0" tIns="0" rIns="0" bIns="0" anchor="ctr">
+            <a:noAutofit/>
+          </a:bodyPr>
+          <a:lstStyle xmlns:a="http://schemas.openxmlformats.org/drawingml/2006/main"/>
+          <a:p xmlns:a="http://schemas.openxmlformats.org/drawingml/2006/main">
+            <a:pPr algn="l"/>
+            <a:r>
+              <a:rPr lang="en-US" sz="1400" b="1" i="0">
+                <a:solidFill>
+                  <a:srgbClr val="B60036"/>
+                </a:solidFill>
+                <a:latin typeface="Arial"/>
+                <a:ea typeface="Arial"/>
+              </a:rPr>
+              <a:t>H6</a:t>
+            </a:r>
+          </a:p>
+        </p:txBody>
+      </p:sp>
+      <p:sp>
+        <p:nvSpPr>
+          <p:cNvPr id="100143" name="Element-38"/>
+          <p:cNvSpPr/>
+          <p:nvPr/>
+        </p:nvSpPr>
+        <p:spPr>
+          <a:xfrm xmlns:a="http://schemas.openxmlformats.org/drawingml/2006/main">
+            <a:off x="8861200" y="3427200"/>
+            <a:ext cx="2340800" cy="288000"/>
+          </a:xfrm>
+          <a:prstGeom xmlns:a="http://schemas.openxmlformats.org/drawingml/2006/main" prst="rect">
+            <a:avLst/>
+          </a:prstGeom>
+          <a:noFill xmlns:a="http://schemas.openxmlformats.org/drawingml/2006/main"/>
+          <a:ln xmlns:a="http://schemas.openxmlformats.org/drawingml/2006/main">
+            <a:noFill/>
+          </a:ln>
+        </p:spPr>
+        <p:txBody>
+          <a:bodyPr xmlns:a="http://schemas.openxmlformats.org/drawingml/2006/main" lIns="0" tIns="0" rIns="0" bIns="0" anchor="ctr">
+            <a:noAutofit/>
+          </a:bodyPr>
+          <a:lstStyle xmlns:a="http://schemas.openxmlformats.org/drawingml/2006/main"/>
+          <a:p xmlns:a="http://schemas.openxmlformats.org/drawingml/2006/main">
+            <a:pPr algn="l"/>
+            <a:r>
+              <a:rPr lang="en-US" sz="1350" b="1" i="0">
+                <a:solidFill>
+                  <a:srgbClr val="B60036"/>
+                </a:solidFill>
+                <a:latin typeface="Arial"/>
+                <a:ea typeface="Arial"/>
+              </a:rPr>
+              <a:t>Hostile content</a:t>
+            </a:r>
+          </a:p>
+        </p:txBody>
+      </p:sp>
+      <p:sp>
+        <p:nvSpPr>
+          <p:cNvPr id="100144" name="Element-39"/>
+          <p:cNvSpPr/>
+          <p:nvPr/>
+        </p:nvSpPr>
+        <p:spPr>
+          <a:xfrm xmlns:a="http://schemas.openxmlformats.org/drawingml/2006/main">
+            <a:off x="8231200" y="3798000"/>
+            <a:ext cx="2952800" cy="10800"/>
+          </a:xfrm>
+          <a:prstGeom xmlns:a="http://schemas.openxmlformats.org/drawingml/2006/main" prst="rect">
+            <a:avLst/>
+          </a:prstGeom>
+          <a:solidFill xmlns:a="http://schemas.openxmlformats.org/drawingml/2006/main">
+            <a:srgbClr val="B60036"/>
+          </a:solidFill>
+          <a:ln xmlns:a="http://schemas.openxmlformats.org/drawingml/2006/main">
+            <a:noFill/>
+          </a:ln>
+        </p:spPr>
+        <p:txBody>
+          <a:bodyPr xmlns:a="http://schemas.openxmlformats.org/drawingml/2006/main" lIns="0" tIns="0" rIns="0" bIns="0" anchor="ctr">
+            <a:noAutofit/>
+          </a:bodyPr>
+          <a:lstStyle xmlns:a="http://schemas.openxmlformats.org/drawingml/2006/main"/>
+          <a:p xmlns:a="http://schemas.openxmlformats.org/drawingml/2006/main">
+            <a:pPr algn="l"/>
+            <a:endParaRPr lang="en-US" sz="1800" b="0" i="0">
+              <a:solidFill>
+                <a:srgbClr val="20252D"/>
+              </a:solidFill>
+              <a:latin typeface="Arial"/>
+              <a:ea typeface="Arial"/>
+            </a:endParaRPr>
+          </a:p>
+        </p:txBody>
+      </p:sp>
+      <p:sp>
+        <p:nvSpPr>
+          <p:cNvPr id="100145" name="Element-40"/>
+          <p:cNvSpPr/>
+          <p:nvPr/>
+        </p:nvSpPr>
+        <p:spPr>
+          <a:xfrm xmlns:a="http://schemas.openxmlformats.org/drawingml/2006/main">
+            <a:off x="8231200" y="3924000"/>
+            <a:ext cx="2952800" cy="666000"/>
+          </a:xfrm>
+          <a:prstGeom xmlns:a="http://schemas.openxmlformats.org/drawingml/2006/main" prst="rect">
+            <a:avLst/>
+          </a:prstGeom>
+          <a:noFill xmlns:a="http://schemas.openxmlformats.org/drawingml/2006/main"/>
+          <a:ln xmlns:a="http://schemas.openxmlformats.org/drawingml/2006/main">
+            <a:noFill/>
+          </a:ln>
+        </p:spPr>
+        <p:txBody>
+          <a:bodyPr xmlns:a="http://schemas.openxmlformats.org/drawingml/2006/main" lIns="0" tIns="0" rIns="0" bIns="0" anchor="t">
+            <a:noAutofit/>
+          </a:bodyPr>
+          <a:lstStyle xmlns:a="http://schemas.openxmlformats.org/drawingml/2006/main"/>
+          <a:p xmlns:a="http://schemas.openxmlformats.org/drawingml/2006/main">
+            <a:pPr algn="l"/>
+            <a:r>
+              <a:rPr lang="en-US" sz="1400" b="0" i="0">
+                <a:solidFill>
+                  <a:srgbClr val="5C626C"/>
+                </a:solidFill>
+                <a:latin typeface="Arial"/>
+                <a:ea typeface="Arial"/>
+              </a:rPr>
+              <a:t>an instruction obeyed from observed content</a:t>
+            </a:r>
+          </a:p>
+        </p:txBody>
+      </p:sp>
+      <p:sp>
+        <p:nvSpPr>
+          <p:cNvPr id="100146" name="Element-41"/>
+          <p:cNvSpPr/>
+          <p:nvPr/>
+        </p:nvSpPr>
+        <p:spPr>
+          <a:xfrm xmlns:a="http://schemas.openxmlformats.org/drawingml/2006/main">
+            <a:off x="792000" y="5335200"/>
+            <a:ext cx="10608000" cy="10800"/>
+          </a:xfrm>
+          <a:prstGeom xmlns:a="http://schemas.openxmlformats.org/drawingml/2006/main" prst="rect">
+            <a:avLst/>
+          </a:prstGeom>
+          <a:solidFill xmlns:a="http://schemas.openxmlformats.org/drawingml/2006/main">
+            <a:srgbClr val="D9DEE5"/>
+          </a:solidFill>
+          <a:ln xmlns:a="http://schemas.openxmlformats.org/drawingml/2006/main">
+            <a:noFill/>
+          </a:ln>
+        </p:spPr>
+        <p:txBody>
+          <a:bodyPr xmlns:a="http://schemas.openxmlformats.org/drawingml/2006/main" lIns="0" tIns="0" rIns="0" bIns="0" anchor="ctr">
+            <a:noAutofit/>
+          </a:bodyPr>
+          <a:lstStyle xmlns:a="http://schemas.openxmlformats.org/drawingml/2006/main"/>
+          <a:p xmlns:a="http://schemas.openxmlformats.org/drawingml/2006/main">
+            <a:pPr algn="l"/>
+            <a:endParaRPr lang="en-US" sz="1800" b="0" i="0">
+              <a:solidFill>
+                <a:srgbClr val="20252D"/>
+              </a:solidFill>
+              <a:latin typeface="Arial"/>
+              <a:ea typeface="Arial"/>
+            </a:endParaRPr>
+          </a:p>
+        </p:txBody>
+      </p:sp>
+      <p:sp>
+        <p:nvSpPr>
+          <p:cNvPr id="100147" name="Caption-6"/>
+          <p:cNvSpPr/>
+          <p:nvPr/>
+        </p:nvSpPr>
+        <p:spPr>
+          <a:xfrm xmlns:a="http://schemas.openxmlformats.org/drawingml/2006/main">
+            <a:off x="792000" y="5356800"/>
+            <a:ext cx="10608000" cy="864000"/>
+          </a:xfrm>
+          <a:prstGeom xmlns:a="http://schemas.openxmlformats.org/drawingml/2006/main" prst="rect">
+            <a:avLst/>
+          </a:prstGeom>
+          <a:noFill xmlns:a="http://schemas.openxmlformats.org/drawingml/2006/main"/>
+          <a:ln xmlns:a="http://schemas.openxmlformats.org/drawingml/2006/main">
+            <a:noFill/>
+          </a:ln>
+        </p:spPr>
+        <p:txBody>
+          <a:bodyPr xmlns:a="http://schemas.openxmlformats.org/drawingml/2006/main" lIns="0" tIns="0" rIns="0" bIns="0" anchor="t">
+            <a:noAutofit/>
+          </a:bodyPr>
+          <a:lstStyle xmlns:a="http://schemas.openxmlformats.org/drawingml/2006/main"/>
+          <a:p xmlns:a="http://schemas.openxmlformats.org/drawingml/2006/main">
+            <a:pPr algn="l"/>
+            <a:r>
+              <a:rPr lang="en-US" sz="2100" b="1">
+                <a:solidFill>
+                  <a:srgbClr val="B60036"/>
+                </a:solidFill>
+                <a:latin typeface="Arial"/>
+                <a:ea typeface="Arial"/>
+              </a:rPr>
+              <a:t>H1–H5 quantify a possible gain.      H6 quantifies a risk.</a:t>
+            </a:r>
+          </a:p>
+        </p:txBody>
+      </p:sp>
+      <p:sp>
+        <p:nvSpPr>
+          <p:cNvPr id="100148" name="Element-43"/>
+          <p:cNvSpPr/>
+          <p:nvPr/>
+        </p:nvSpPr>
+        <p:spPr>
+          <a:xfrm xmlns:a="http://schemas.openxmlformats.org/drawingml/2006/main">
+            <a:off x="792000" y="6444000"/>
+            <a:ext cx="5040000" cy="180000"/>
+          </a:xfrm>
+          <a:prstGeom xmlns:a="http://schemas.openxmlformats.org/drawingml/2006/main" prst="rect">
+            <a:avLst/>
+          </a:prstGeom>
+          <a:noFill xmlns:a="http://schemas.openxmlformats.org/drawingml/2006/main"/>
+          <a:ln xmlns:a="http://schemas.openxmlformats.org/drawingml/2006/main">
+            <a:noFill/>
+          </a:ln>
+        </p:spPr>
+        <p:txBody>
+          <a:bodyPr xmlns:a="http://schemas.openxmlformats.org/drawingml/2006/main" lIns="0" tIns="0" rIns="0" bIns="0" anchor="ctr">
+            <a:noAutofit/>
+          </a:bodyPr>
+          <a:lstStyle xmlns:a="http://schemas.openxmlformats.org/drawingml/2006/main"/>
+          <a:p xmlns:a="http://schemas.openxmlformats.org/drawingml/2006/main">
+            <a:pPr algn="l"/>
+            <a:r>
+              <a:rPr lang="en-US" sz="800" b="0" i="0">
+                <a:solidFill>
+                  <a:srgbClr val="5C626C"/>
+                </a:solidFill>
+                <a:latin typeface="Arial"/>
+                <a:ea typeface="Arial"/>
+              </a:rPr>
+              <a:t>Project LANCE — NATO SPS G6259</a:t>
+            </a:r>
+          </a:p>
+        </p:txBody>
+      </p:sp>
+      <p:sp>
+        <p:nvSpPr>
+          <p:cNvPr id="100149" name="Element-44"/>
+          <p:cNvSpPr/>
+          <p:nvPr/>
+        </p:nvSpPr>
+        <p:spPr>
+          <a:xfrm xmlns:a="http://schemas.openxmlformats.org/drawingml/2006/main">
+            <a:off x="10752000" y="6444000"/>
+            <a:ext cx="648000" cy="180000"/>
+          </a:xfrm>
+          <a:prstGeom xmlns:a="http://schemas.openxmlformats.org/drawingml/2006/main" prst="rect">
+            <a:avLst/>
+          </a:prstGeom>
+          <a:noFill xmlns:a="http://schemas.openxmlformats.org/drawingml/2006/main"/>
+          <a:ln xmlns:a="http://schemas.openxmlformats.org/drawingml/2006/main">
+            <a:noFill/>
+          </a:ln>
+        </p:spPr>
+        <p:txBody>
+          <a:bodyPr xmlns:a="http://schemas.openxmlformats.org/drawingml/2006/main" lIns="0" tIns="0" rIns="0" bIns="0" anchor="ctr">
+            <a:noAutofit/>
+          </a:bodyPr>
+          <a:lstStyle xmlns:a="http://schemas.openxmlformats.org/drawingml/2006/main"/>
+          <a:p xmlns:a="http://schemas.openxmlformats.org/drawingml/2006/main">
+            <a:pPr algn="r"/>
+            <a:r>
+              <a:rPr lang="en-US" sz="800" b="0" i="0">
+                <a:solidFill>
+                  <a:srgbClr val="5C626C"/>
+                </a:solidFill>
+                <a:latin typeface="Arial"/>
+                <a:ea typeface="Arial"/>
+              </a:rPr>
+              <a:t>6</a:t>
+            </a:r>
+          </a:p>
+        </p:txBody>
+      </p:sp>
+    </p:spTree>
+  </p:cSld>
+</p:sld>
+</file>
+
+<file path=ppt/slides/slide7.xml><?xml version="1.0" encoding="utf-8"?>
+<p:sld xmlns:p="http://schemas.openxmlformats.org/presentationml/2006/main">
+  <p:cSld>
+    <p:bg>
+      <p:bgPr>
+        <a:solidFill xmlns:a="http://schemas.openxmlformats.org/drawingml/2006/main">
+          <a:srgbClr val="FFFFFF"/>
+        </a:solidFill>
+      </p:bgPr>
+    </p:bg>
+    <p:spTree>
+      <p:nvGrpSpPr>
+        <p:cNvPr id="1" name=""/>
+        <p:cNvGrpSpPr/>
+        <p:nvPr/>
+      </p:nvGrpSpPr>
+      <p:grpSpPr/>
+      <p:pic>
+        <p:nvPicPr>
+          <p:cNvPr id="100150" name="Picture 1" descr="SMart ILIA — UMONS"/>
+          <p:cNvPicPr>
+            <a:picLocks xmlns:a="http://schemas.openxmlformats.org/drawingml/2006/main" noChangeAspect="1"/>
+          </p:cNvPicPr>
+          <p:nvPr/>
+        </p:nvPicPr>
+        <p:blipFill>
+          <a:blip xmlns:r="http://schemas.openxmlformats.org/officeDocument/2006/relationships" xmlns:a="http://schemas.openxmlformats.org/drawingml/2006/main" r:embed="Red121f576291414e"/>
+          <a:stretch xmlns:a="http://schemas.openxmlformats.org/drawingml/2006/main">
+            <a:fillRect/>
+          </a:stretch>
+        </p:blipFill>
+        <p:spPr>
+          <a:xfrm xmlns:a="http://schemas.openxmlformats.org/drawingml/2006/main">
+            <a:off x="9702000" y="216000"/>
+            <a:ext cx="1699200" cy="582331"/>
+          </a:xfrm>
+          <a:prstGeom xmlns:a="http://schemas.openxmlformats.org/drawingml/2006/main" prst="rect">
+            <a:avLst/>
+          </a:prstGeom>
+        </p:spPr>
+      </p:pic>
+      <p:sp>
+        <p:nvSpPr>
+          <p:cNvPr id="100151" name="Element-4"/>
+          <p:cNvSpPr/>
+          <p:nvPr/>
+        </p:nvSpPr>
+        <p:spPr>
+          <a:xfrm xmlns:a="http://schemas.openxmlformats.org/drawingml/2006/main">
+            <a:off x="792000" y="309600"/>
+            <a:ext cx="1764000" cy="208800"/>
+          </a:xfrm>
+          <a:prstGeom xmlns:a="http://schemas.openxmlformats.org/drawingml/2006/main" prst="rect">
+            <a:avLst/>
+          </a:prstGeom>
+          <a:noFill xmlns:a="http://schemas.openxmlformats.org/drawingml/2006/main"/>
+          <a:ln xmlns:a="http://schemas.openxmlformats.org/drawingml/2006/main">
+            <a:noFill/>
+          </a:ln>
+        </p:spPr>
+        <p:txBody>
+          <a:bodyPr xmlns:a="http://schemas.openxmlformats.org/drawingml/2006/main" lIns="0" tIns="0" rIns="0" bIns="0" anchor="ctr">
+            <a:noAutofit/>
+          </a:bodyPr>
+          <a:lstStyle xmlns:a="http://schemas.openxmlformats.org/drawingml/2006/main"/>
+          <a:p xmlns:a="http://schemas.openxmlformats.org/drawingml/2006/main">
+            <a:pPr algn="l"/>
+            <a:r>
+              <a:rPr lang="en-US" sz="950" b="0" i="0">
+                <a:solidFill>
+                  <a:srgbClr val="5C626C"/>
+                </a:solidFill>
+                <a:latin typeface="Arial"/>
+                <a:ea typeface="Arial"/>
+              </a:rPr>
+              <a:t>Objective</a:t>
+            </a:r>
+          </a:p>
+        </p:txBody>
+      </p:sp>
+      <p:sp>
+        <p:nvSpPr>
+          <p:cNvPr id="100152" name="Element-5"/>
+          <p:cNvSpPr/>
+          <p:nvPr/>
+        </p:nvSpPr>
+        <p:spPr>
+          <a:xfrm xmlns:a="http://schemas.openxmlformats.org/drawingml/2006/main">
+            <a:off x="2736000" y="309600"/>
+            <a:ext cx="1764000" cy="208800"/>
+          </a:xfrm>
+          <a:prstGeom xmlns:a="http://schemas.openxmlformats.org/drawingml/2006/main" prst="rect">
+            <a:avLst/>
+          </a:prstGeom>
+          <a:noFill xmlns:a="http://schemas.openxmlformats.org/drawingml/2006/main"/>
+          <a:ln xmlns:a="http://schemas.openxmlformats.org/drawingml/2006/main">
+            <a:noFill/>
+          </a:ln>
+        </p:spPr>
+        <p:txBody>
+          <a:bodyPr xmlns:a="http://schemas.openxmlformats.org/drawingml/2006/main" lIns="0" tIns="0" rIns="0" bIns="0" anchor="ctr">
+            <a:noAutofit/>
+          </a:bodyPr>
+          <a:lstStyle xmlns:a="http://schemas.openxmlformats.org/drawingml/2006/main"/>
+          <a:p xmlns:a="http://schemas.openxmlformats.org/drawingml/2006/main">
+            <a:pPr algn="l"/>
+            <a:r>
+              <a:rPr lang="en-US" sz="950" b="0" i="0">
+                <a:solidFill>
+                  <a:srgbClr val="5C626C"/>
+                </a:solidFill>
+                <a:latin typeface="Arial"/>
+                <a:ea typeface="Arial"/>
+              </a:rPr>
+              <a:t>Instrument</a:t>
+            </a:r>
+          </a:p>
+        </p:txBody>
+      </p:sp>
+      <p:sp>
+        <p:nvSpPr>
+          <p:cNvPr id="100153" name="Element-6"/>
+          <p:cNvSpPr/>
+          <p:nvPr/>
+        </p:nvSpPr>
+        <p:spPr>
+          <a:xfrm xmlns:a="http://schemas.openxmlformats.org/drawingml/2006/main">
+            <a:off x="4680000" y="309600"/>
+            <a:ext cx="1764000" cy="208800"/>
+          </a:xfrm>
+          <a:prstGeom xmlns:a="http://schemas.openxmlformats.org/drawingml/2006/main" prst="rect">
+            <a:avLst/>
+          </a:prstGeom>
+          <a:noFill xmlns:a="http://schemas.openxmlformats.org/drawingml/2006/main"/>
+          <a:ln xmlns:a="http://schemas.openxmlformats.org/drawingml/2006/main">
+            <a:noFill/>
+          </a:ln>
+        </p:spPr>
+        <p:txBody>
+          <a:bodyPr xmlns:a="http://schemas.openxmlformats.org/drawingml/2006/main" lIns="0" tIns="0" rIns="0" bIns="0" anchor="ctr">
+            <a:noAutofit/>
+          </a:bodyPr>
+          <a:lstStyle xmlns:a="http://schemas.openxmlformats.org/drawingml/2006/main"/>
+          <a:p xmlns:a="http://schemas.openxmlformats.org/drawingml/2006/main">
+            <a:pPr algn="l"/>
+            <a:r>
+              <a:rPr lang="en-US" sz="950" b="0" i="0">
+                <a:solidFill>
+                  <a:srgbClr val="B60036"/>
+                </a:solidFill>
+                <a:latin typeface="Arial"/>
+                <a:ea typeface="Arial"/>
+              </a:rPr>
+              <a:t>Hypotheses</a:t>
+            </a:r>
+          </a:p>
+        </p:txBody>
+      </p:sp>
+      <p:sp>
+        <p:nvSpPr>
+          <p:cNvPr id="100154" name="Element-7"/>
+          <p:cNvSpPr/>
+          <p:nvPr/>
+        </p:nvSpPr>
+        <p:spPr>
+          <a:xfrm xmlns:a="http://schemas.openxmlformats.org/drawingml/2006/main">
+            <a:off x="4680000" y="529200"/>
+            <a:ext cx="1764000" cy="16200"/>
+          </a:xfrm>
+          <a:prstGeom xmlns:a="http://schemas.openxmlformats.org/drawingml/2006/main" prst="rect">
+            <a:avLst/>
+          </a:prstGeom>
+          <a:solidFill xmlns:a="http://schemas.openxmlformats.org/drawingml/2006/main">
+            <a:srgbClr val="B60036"/>
+          </a:solidFill>
+          <a:ln xmlns:a="http://schemas.openxmlformats.org/drawingml/2006/main">
+            <a:noFill/>
+          </a:ln>
+        </p:spPr>
+        <p:txBody>
+          <a:bodyPr xmlns:a="http://schemas.openxmlformats.org/drawingml/2006/main" lIns="0" tIns="0" rIns="0" bIns="0" anchor="ctr">
+            <a:noAutofit/>
+          </a:bodyPr>
+          <a:lstStyle xmlns:a="http://schemas.openxmlformats.org/drawingml/2006/main"/>
+          <a:p xmlns:a="http://schemas.openxmlformats.org/drawingml/2006/main">
+            <a:pPr algn="l"/>
+            <a:endParaRPr lang="en-US" sz="1800" b="0" i="0">
+              <a:solidFill>
+                <a:srgbClr val="20252D"/>
+              </a:solidFill>
+              <a:latin typeface="Arial"/>
+              <a:ea typeface="Arial"/>
+            </a:endParaRPr>
+          </a:p>
+        </p:txBody>
+      </p:sp>
+      <p:sp>
+        <p:nvSpPr>
+          <p:cNvPr id="100155" name="Element-8"/>
+          <p:cNvSpPr/>
+          <p:nvPr/>
+        </p:nvSpPr>
+        <p:spPr>
+          <a:xfrm xmlns:a="http://schemas.openxmlformats.org/drawingml/2006/main">
+            <a:off x="6624000" y="309600"/>
+            <a:ext cx="1764000" cy="208800"/>
+          </a:xfrm>
+          <a:prstGeom xmlns:a="http://schemas.openxmlformats.org/drawingml/2006/main" prst="rect">
+            <a:avLst/>
+          </a:prstGeom>
+          <a:noFill xmlns:a="http://schemas.openxmlformats.org/drawingml/2006/main"/>
+          <a:ln xmlns:a="http://schemas.openxmlformats.org/drawingml/2006/main">
+            <a:noFill/>
+          </a:ln>
+        </p:spPr>
+        <p:txBody>
+          <a:bodyPr xmlns:a="http://schemas.openxmlformats.org/drawingml/2006/main" lIns="0" tIns="0" rIns="0" bIns="0" anchor="ctr">
+            <a:noAutofit/>
+          </a:bodyPr>
+          <a:lstStyle xmlns:a="http://schemas.openxmlformats.org/drawingml/2006/main"/>
+          <a:p xmlns:a="http://schemas.openxmlformats.org/drawingml/2006/main">
+            <a:pPr algn="l"/>
+            <a:r>
+              <a:rPr lang="en-US" sz="950" b="0" i="0">
+                <a:solidFill>
+                  <a:srgbClr val="5C626C"/>
+                </a:solidFill>
+                <a:latin typeface="Arial"/>
+                <a:ea typeface="Arial"/>
+              </a:rPr>
+              <a:t>Outlook</a:t>
+            </a:r>
+          </a:p>
+        </p:txBody>
+      </p:sp>
+      <p:sp>
+        <p:nvSpPr>
+          <p:cNvPr id="100156" name="Title"/>
+          <p:cNvSpPr/>
+          <p:nvPr/>
+        </p:nvSpPr>
+        <p:spPr>
+          <a:xfrm xmlns:a="http://schemas.openxmlformats.org/drawingml/2006/main">
+            <a:off x="792000" y="612000"/>
+            <a:ext cx="8748000" cy="648000"/>
+          </a:xfrm>
+          <a:prstGeom xmlns:a="http://schemas.openxmlformats.org/drawingml/2006/main" prst="rect">
+            <a:avLst/>
+          </a:prstGeom>
+          <a:noFill xmlns:a="http://schemas.openxmlformats.org/drawingml/2006/main"/>
+          <a:ln xmlns:a="http://schemas.openxmlformats.org/drawingml/2006/main">
+            <a:noFill/>
+          </a:ln>
+        </p:spPr>
+        <p:txBody>
+          <a:bodyPr xmlns:a="http://schemas.openxmlformats.org/drawingml/2006/main" lIns="0" tIns="0" rIns="0" bIns="0" anchor="ctr">
+            <a:noAutofit/>
+          </a:bodyPr>
+          <a:lstStyle xmlns:a="http://schemas.openxmlformats.org/drawingml/2006/main"/>
+          <a:p xmlns:a="http://schemas.openxmlformats.org/drawingml/2006/main">
+            <a:pPr algn="l"/>
+            <a:r>
+              <a:rPr lang="en-US" sz="2900" b="1" i="0">
+                <a:solidFill>
+                  <a:srgbClr val="20252D"/>
+                </a:solidFill>
+                <a:latin typeface="Arial"/>
+                <a:ea typeface="Arial"/>
+              </a:rPr>
+              <a:t>A control task before testing the model</a:t>
+            </a:r>
+          </a:p>
+        </p:txBody>
+      </p:sp>
+      <p:sp>
+        <p:nvSpPr>
+          <p:cNvPr id="100157" name="Element-10"/>
+          <p:cNvSpPr/>
+          <p:nvPr/>
+        </p:nvSpPr>
+        <p:spPr>
+          <a:xfrm xmlns:a="http://schemas.openxmlformats.org/drawingml/2006/main">
+            <a:off x="792000" y="1303200"/>
+            <a:ext cx="1224000" cy="25200"/>
+          </a:xfrm>
+          <a:prstGeom xmlns:a="http://schemas.openxmlformats.org/drawingml/2006/main" prst="rect">
+            <a:avLst/>
+          </a:prstGeom>
+          <a:solidFill xmlns:a="http://schemas.openxmlformats.org/drawingml/2006/main">
+            <a:srgbClr val="B60036"/>
+          </a:solidFill>
+          <a:ln xmlns:a="http://schemas.openxmlformats.org/drawingml/2006/main">
+            <a:noFill/>
+          </a:ln>
+        </p:spPr>
+        <p:txBody>
+          <a:bodyPr xmlns:a="http://schemas.openxmlformats.org/drawingml/2006/main" lIns="0" tIns="0" rIns="0" bIns="0" anchor="ctr">
+            <a:noAutofit/>
+          </a:bodyPr>
+          <a:lstStyle xmlns:a="http://schemas.openxmlformats.org/drawingml/2006/main"/>
+          <a:p xmlns:a="http://schemas.openxmlformats.org/drawingml/2006/main">
+            <a:pPr algn="l"/>
+            <a:endParaRPr lang="en-US" sz="1800" b="0" i="0">
+              <a:solidFill>
+                <a:srgbClr val="20252D"/>
+              </a:solidFill>
+              <a:latin typeface="Arial"/>
+              <a:ea typeface="Arial"/>
+            </a:endParaRPr>
+          </a:p>
+        </p:txBody>
+      </p:sp>
+      <p:sp>
+        <p:nvSpPr>
+          <p:cNvPr id="100158" name="Element-11"/>
+          <p:cNvSpPr/>
+          <p:nvPr/>
+        </p:nvSpPr>
+        <p:spPr>
+          <a:xfrm xmlns:a="http://schemas.openxmlformats.org/drawingml/2006/main">
+            <a:off x="792000" y="1602000"/>
+            <a:ext cx="10608000" cy="504000"/>
+          </a:xfrm>
+          <a:prstGeom xmlns:a="http://schemas.openxmlformats.org/drawingml/2006/main" prst="rect">
+            <a:avLst/>
+          </a:prstGeom>
+          <a:noFill xmlns:a="http://schemas.openxmlformats.org/drawingml/2006/main"/>
+          <a:ln xmlns:a="http://schemas.openxmlformats.org/drawingml/2006/main">
+            <a:noFill/>
+          </a:ln>
+        </p:spPr>
+        <p:txBody>
+          <a:bodyPr xmlns:a="http://schemas.openxmlformats.org/drawingml/2006/main" lIns="0" tIns="0" rIns="0" bIns="0" anchor="t">
+            <a:noAutofit/>
+          </a:bodyPr>
+          <a:lstStyle xmlns:a="http://schemas.openxmlformats.org/drawingml/2006/main"/>
+          <a:p xmlns:a="http://schemas.openxmlformats.org/drawingml/2006/main">
+            <a:pPr algn="l"/>
+            <a:r>
+              <a:rPr lang="en-US" sz="1550" b="0" i="0">
+                <a:solidFill>
+                  <a:srgbClr val="5C626C"/>
+                </a:solidFill>
+                <a:latin typeface="Arial"/>
+                <a:ea typeface="Arial"/>
+              </a:rPr>
+              <a:t>A control task, simple enough to be solved without inference.   Both approaches are required to pass.</a:t>
+            </a:r>
+          </a:p>
+        </p:txBody>
+      </p:sp>
+      <p:sp>
+        <p:nvSpPr>
+          <p:cNvPr id="100159" name="Element-12"/>
+          <p:cNvSpPr/>
+          <p:nvPr/>
+        </p:nvSpPr>
+        <p:spPr>
+          <a:xfrm xmlns:a="http://schemas.openxmlformats.org/drawingml/2006/main">
+            <a:off x="2718000" y="2131200"/>
+            <a:ext cx="4242000" cy="208800"/>
+          </a:xfrm>
+          <a:prstGeom xmlns:a="http://schemas.openxmlformats.org/drawingml/2006/main" prst="rect">
+            <a:avLst/>
+          </a:prstGeom>
+          <a:noFill xmlns:a="http://schemas.openxmlformats.org/drawingml/2006/main"/>
+          <a:ln xmlns:a="http://schemas.openxmlformats.org/drawingml/2006/main">
+            <a:noFill/>
+          </a:ln>
+        </p:spPr>
+        <p:txBody>
+          <a:bodyPr xmlns:a="http://schemas.openxmlformats.org/drawingml/2006/main" lIns="0" tIns="0" rIns="0" bIns="0" anchor="ctr">
+            <a:noAutofit/>
+          </a:bodyPr>
+          <a:lstStyle xmlns:a="http://schemas.openxmlformats.org/drawingml/2006/main"/>
+          <a:p xmlns:a="http://schemas.openxmlformats.org/drawingml/2006/main">
+            <a:pPr algn="ctr"/>
+            <a:r>
+              <a:rPr lang="en-US" sz="950" b="1" i="0">
+                <a:solidFill>
+                  <a:srgbClr val="5C626C"/>
+                </a:solidFill>
+                <a:latin typeface="Arial"/>
+                <a:ea typeface="Arial"/>
+              </a:rPr>
+              <a:t>model ✗</a:t>
+            </a:r>
+          </a:p>
+        </p:txBody>
+      </p:sp>
+      <p:sp>
+        <p:nvSpPr>
+          <p:cNvPr id="100160" name="Element-13"/>
+          <p:cNvSpPr/>
+          <p:nvPr/>
+        </p:nvSpPr>
+        <p:spPr>
+          <a:xfrm xmlns:a="http://schemas.openxmlformats.org/drawingml/2006/main">
+            <a:off x="7158000" y="2131200"/>
+            <a:ext cx="4242000" cy="208800"/>
+          </a:xfrm>
+          <a:prstGeom xmlns:a="http://schemas.openxmlformats.org/drawingml/2006/main" prst="rect">
+            <a:avLst/>
+          </a:prstGeom>
+          <a:noFill xmlns:a="http://schemas.openxmlformats.org/drawingml/2006/main"/>
+          <a:ln xmlns:a="http://schemas.openxmlformats.org/drawingml/2006/main">
+            <a:noFill/>
+          </a:ln>
+        </p:spPr>
+        <p:txBody>
+          <a:bodyPr xmlns:a="http://schemas.openxmlformats.org/drawingml/2006/main" lIns="0" tIns="0" rIns="0" bIns="0" anchor="ctr">
+            <a:noAutofit/>
+          </a:bodyPr>
+          <a:lstStyle xmlns:a="http://schemas.openxmlformats.org/drawingml/2006/main"/>
+          <a:p xmlns:a="http://schemas.openxmlformats.org/drawingml/2006/main">
+            <a:pPr algn="ctr"/>
+            <a:r>
+              <a:rPr lang="en-US" sz="950" b="1" i="0">
+                <a:solidFill>
+                  <a:srgbClr val="5C626C"/>
+                </a:solidFill>
+                <a:latin typeface="Arial"/>
+                <a:ea typeface="Arial"/>
+              </a:rPr>
+              <a:t>model ✓</a:t>
+            </a:r>
+          </a:p>
+        </p:txBody>
+      </p:sp>
+      <p:sp>
+        <p:nvSpPr>
+          <p:cNvPr id="100161" name="Element-14"/>
+          <p:cNvSpPr/>
+          <p:nvPr/>
+        </p:nvSpPr>
+        <p:spPr>
+          <a:xfrm xmlns:a="http://schemas.openxmlformats.org/drawingml/2006/main">
+            <a:off x="2718000" y="2322000"/>
+            <a:ext cx="4242000" cy="1278000"/>
+          </a:xfrm>
+          <a:prstGeom xmlns:a="http://schemas.openxmlformats.org/drawingml/2006/main" prst="rect">
+            <a:avLst/>
+          </a:prstGeom>
+          <a:solidFill xmlns:a="http://schemas.openxmlformats.org/drawingml/2006/main">
+            <a:srgbClr val="FCF0F4"/>
+          </a:solidFill>
+          <a:ln xmlns:a="http://schemas.openxmlformats.org/drawingml/2006/main" w="12700">
+            <a:solidFill>
+              <a:srgbClr val="B60036"/>
+            </a:solidFill>
+          </a:ln>
+        </p:spPr>
+        <p:txBody>
+          <a:bodyPr xmlns:a="http://schemas.openxmlformats.org/drawingml/2006/main" lIns="0" tIns="0" rIns="0" bIns="0" anchor="ctr">
+            <a:noAutofit/>
+          </a:bodyPr>
+          <a:lstStyle xmlns:a="http://schemas.openxmlformats.org/drawingml/2006/main"/>
+          <a:p xmlns:a="http://schemas.openxmlformats.org/drawingml/2006/main">
+            <a:pPr algn="l"/>
+            <a:endParaRPr lang="en-US" sz="1800" b="0" i="0">
+              <a:solidFill>
+                <a:srgbClr val="20252D"/>
+              </a:solidFill>
+              <a:latin typeface="Arial"/>
+              <a:ea typeface="Arial"/>
+            </a:endParaRPr>
+          </a:p>
+        </p:txBody>
+      </p:sp>
+      <p:sp>
+        <p:nvSpPr>
+          <p:cNvPr id="100162" name="Element-15"/>
+          <p:cNvSpPr/>
+          <p:nvPr/>
+        </p:nvSpPr>
+        <p:spPr>
+          <a:xfrm xmlns:a="http://schemas.openxmlformats.org/drawingml/2006/main">
+            <a:off x="2718000" y="2322000"/>
+            <a:ext cx="50400" cy="1278000"/>
+          </a:xfrm>
+          <a:prstGeom xmlns:a="http://schemas.openxmlformats.org/drawingml/2006/main" prst="rect">
+            <a:avLst/>
+          </a:prstGeom>
+          <a:solidFill xmlns:a="http://schemas.openxmlformats.org/drawingml/2006/main">
+            <a:srgbClr val="B60036"/>
+          </a:solidFill>
+          <a:ln xmlns:a="http://schemas.openxmlformats.org/drawingml/2006/main">
+            <a:noFill/>
+          </a:ln>
+        </p:spPr>
+        <p:txBody>
+          <a:bodyPr xmlns:a="http://schemas.openxmlformats.org/drawingml/2006/main" lIns="0" tIns="0" rIns="0" bIns="0" anchor="ctr">
+            <a:noAutofit/>
+          </a:bodyPr>
+          <a:lstStyle xmlns:a="http://schemas.openxmlformats.org/drawingml/2006/main"/>
+          <a:p xmlns:a="http://schemas.openxmlformats.org/drawingml/2006/main">
+            <a:pPr algn="l"/>
+            <a:endParaRPr lang="en-US" sz="1800" b="0" i="0">
+              <a:solidFill>
+                <a:srgbClr val="20252D"/>
+              </a:solidFill>
+              <a:latin typeface="Arial"/>
+              <a:ea typeface="Arial"/>
+            </a:endParaRPr>
+          </a:p>
+        </p:txBody>
+      </p:sp>
+      <p:sp>
+        <p:nvSpPr>
+          <p:cNvPr id="100163" name="Element-16"/>
+          <p:cNvSpPr/>
+          <p:nvPr/>
+        </p:nvSpPr>
+        <p:spPr>
+          <a:xfrm xmlns:a="http://schemas.openxmlformats.org/drawingml/2006/main">
+            <a:off x="2988000" y="2322000"/>
+            <a:ext cx="3756000" cy="1278000"/>
+          </a:xfrm>
+          <a:prstGeom xmlns:a="http://schemas.openxmlformats.org/drawingml/2006/main" prst="rect">
+            <a:avLst/>
+          </a:prstGeom>
+          <a:noFill xmlns:a="http://schemas.openxmlformats.org/drawingml/2006/main"/>
+          <a:ln xmlns:a="http://schemas.openxmlformats.org/drawingml/2006/main">
+            <a:noFill/>
+          </a:ln>
+        </p:spPr>
+        <p:txBody>
+          <a:bodyPr xmlns:a="http://schemas.openxmlformats.org/drawingml/2006/main" lIns="0" tIns="0" rIns="0" bIns="0" anchor="ctr">
+            <a:noAutofit/>
+          </a:bodyPr>
+          <a:lstStyle xmlns:a="http://schemas.openxmlformats.org/drawingml/2006/main"/>
+          <a:p xmlns:a="http://schemas.openxmlformats.org/drawingml/2006/main">
+            <a:pPr algn="l"/>
+            <a:r>
+              <a:rPr lang="en-US" sz="1900" b="1" i="0">
+                <a:solidFill>
+                  <a:srgbClr val="B60036"/>
+                </a:solidFill>
+                <a:latin typeface="Arial"/>
+                <a:ea typeface="Arial"/>
+              </a:rPr>
+              <a:t>a defect in the instrument</a:t>
+            </a:r>
+          </a:p>
+        </p:txBody>
+      </p:sp>
+      <p:sp>
+        <p:nvSpPr>
+          <p:cNvPr id="100164" name="Element-17"/>
+          <p:cNvSpPr/>
+          <p:nvPr/>
+        </p:nvSpPr>
+        <p:spPr>
+          <a:xfrm xmlns:a="http://schemas.openxmlformats.org/drawingml/2006/main">
+            <a:off x="7158000" y="2322000"/>
+            <a:ext cx="4242000" cy="1278000"/>
+          </a:xfrm>
+          <a:prstGeom xmlns:a="http://schemas.openxmlformats.org/drawingml/2006/main" prst="rect">
+            <a:avLst/>
+          </a:prstGeom>
+          <a:solidFill xmlns:a="http://schemas.openxmlformats.org/drawingml/2006/main">
+            <a:srgbClr val="EFF6FC"/>
+          </a:solidFill>
+          <a:ln xmlns:a="http://schemas.openxmlformats.org/drawingml/2006/main" w="12700">
+            <a:solidFill>
+              <a:srgbClr val="D9DEE5"/>
+            </a:solidFill>
+          </a:ln>
+        </p:spPr>
+        <p:txBody>
+          <a:bodyPr xmlns:a="http://schemas.openxmlformats.org/drawingml/2006/main" lIns="0" tIns="0" rIns="0" bIns="0" anchor="ctr">
+            <a:noAutofit/>
+          </a:bodyPr>
+          <a:lstStyle xmlns:a="http://schemas.openxmlformats.org/drawingml/2006/main"/>
+          <a:p xmlns:a="http://schemas.openxmlformats.org/drawingml/2006/main">
+            <a:pPr algn="l"/>
+            <a:endParaRPr lang="en-US" sz="1800" b="0" i="0">
+              <a:solidFill>
+                <a:srgbClr val="20252D"/>
+              </a:solidFill>
+              <a:latin typeface="Arial"/>
+              <a:ea typeface="Arial"/>
+            </a:endParaRPr>
+          </a:p>
+        </p:txBody>
+      </p:sp>
+      <p:sp>
+        <p:nvSpPr>
+          <p:cNvPr id="100165" name="Element-18"/>
+          <p:cNvSpPr/>
+          <p:nvPr/>
+        </p:nvSpPr>
+        <p:spPr>
+          <a:xfrm xmlns:a="http://schemas.openxmlformats.org/drawingml/2006/main">
+            <a:off x="7158000" y="2322000"/>
+            <a:ext cx="50400" cy="1278000"/>
+          </a:xfrm>
+          <a:prstGeom xmlns:a="http://schemas.openxmlformats.org/drawingml/2006/main" prst="rect">
+            <a:avLst/>
+          </a:prstGeom>
+          <a:solidFill xmlns:a="http://schemas.openxmlformats.org/drawingml/2006/main">
+            <a:srgbClr val="2E7D5B"/>
+          </a:solidFill>
+          <a:ln xmlns:a="http://schemas.openxmlformats.org/drawingml/2006/main">
+            <a:noFill/>
+          </a:ln>
+        </p:spPr>
+        <p:txBody>
+          <a:bodyPr xmlns:a="http://schemas.openxmlformats.org/drawingml/2006/main" lIns="0" tIns="0" rIns="0" bIns="0" anchor="ctr">
+            <a:noAutofit/>
+          </a:bodyPr>
+          <a:lstStyle xmlns:a="http://schemas.openxmlformats.org/drawingml/2006/main"/>
+          <a:p xmlns:a="http://schemas.openxmlformats.org/drawingml/2006/main">
+            <a:pPr algn="l"/>
+            <a:endParaRPr lang="en-US" sz="1800" b="0" i="0">
+              <a:solidFill>
+                <a:srgbClr val="20252D"/>
+              </a:solidFill>
+              <a:latin typeface="Arial"/>
+              <a:ea typeface="Arial"/>
+            </a:endParaRPr>
+          </a:p>
+        </p:txBody>
+      </p:sp>
+      <p:sp>
+        <p:nvSpPr>
+          <p:cNvPr id="100166" name="Element-19"/>
+          <p:cNvSpPr/>
+          <p:nvPr/>
+        </p:nvSpPr>
+        <p:spPr>
+          <a:xfrm xmlns:a="http://schemas.openxmlformats.org/drawingml/2006/main">
+            <a:off x="7428000" y="2322000"/>
+            <a:ext cx="3756000" cy="1278000"/>
+          </a:xfrm>
+          <a:prstGeom xmlns:a="http://schemas.openxmlformats.org/drawingml/2006/main" prst="rect">
+            <a:avLst/>
+          </a:prstGeom>
+          <a:noFill xmlns:a="http://schemas.openxmlformats.org/drawingml/2006/main"/>
+          <a:ln xmlns:a="http://schemas.openxmlformats.org/drawingml/2006/main">
+            <a:noFill/>
+          </a:ln>
+        </p:spPr>
+        <p:txBody>
+          <a:bodyPr xmlns:a="http://schemas.openxmlformats.org/drawingml/2006/main" lIns="0" tIns="0" rIns="0" bIns="0" anchor="ctr">
+            <a:noAutofit/>
+          </a:bodyPr>
+          <a:lstStyle xmlns:a="http://schemas.openxmlformats.org/drawingml/2006/main"/>
+          <a:p xmlns:a="http://schemas.openxmlformats.org/drawingml/2006/main">
+            <a:pPr algn="l"/>
+            <a:r>
+              <a:rPr lang="en-US" sz="1900" b="1" i="0">
+                <a:solidFill>
+                  <a:srgbClr val="2E7D5B"/>
+                </a:solidFill>
+                <a:latin typeface="Arial"/>
+                <a:ea typeface="Arial"/>
+              </a:rPr>
+              <a:t>valid — the hypotheses may be read</a:t>
+            </a:r>
+          </a:p>
+        </p:txBody>
+      </p:sp>
+      <p:sp>
+        <p:nvSpPr>
+          <p:cNvPr id="100167" name="Element-20"/>
+          <p:cNvSpPr/>
+          <p:nvPr/>
+        </p:nvSpPr>
+        <p:spPr>
+          <a:xfrm xmlns:a="http://schemas.openxmlformats.org/drawingml/2006/main">
+            <a:off x="2718000" y="3708000"/>
+            <a:ext cx="4242000" cy="1278000"/>
+          </a:xfrm>
+          <a:prstGeom xmlns:a="http://schemas.openxmlformats.org/drawingml/2006/main" prst="rect">
+            <a:avLst/>
+          </a:prstGeom>
+          <a:solidFill xmlns:a="http://schemas.openxmlformats.org/drawingml/2006/main">
+            <a:srgbClr val="F6F7F9"/>
+          </a:solidFill>
+          <a:ln xmlns:a="http://schemas.openxmlformats.org/drawingml/2006/main" w="12700">
+            <a:solidFill>
+              <a:srgbClr val="D9DEE5"/>
+            </a:solidFill>
+          </a:ln>
+        </p:spPr>
+        <p:txBody>
+          <a:bodyPr xmlns:a="http://schemas.openxmlformats.org/drawingml/2006/main" lIns="0" tIns="0" rIns="0" bIns="0" anchor="ctr">
+            <a:noAutofit/>
+          </a:bodyPr>
+          <a:lstStyle xmlns:a="http://schemas.openxmlformats.org/drawingml/2006/main"/>
+          <a:p xmlns:a="http://schemas.openxmlformats.org/drawingml/2006/main">
+            <a:pPr algn="l"/>
+            <a:endParaRPr lang="en-US" sz="1800" b="0" i="0">
+              <a:solidFill>
+                <a:srgbClr val="20252D"/>
+              </a:solidFill>
+              <a:latin typeface="Arial"/>
+              <a:ea typeface="Arial"/>
+            </a:endParaRPr>
+          </a:p>
+        </p:txBody>
+      </p:sp>
+      <p:sp>
+        <p:nvSpPr>
+          <p:cNvPr id="100168" name="Element-21"/>
+          <p:cNvSpPr/>
+          <p:nvPr/>
+        </p:nvSpPr>
+        <p:spPr>
+          <a:xfrm xmlns:a="http://schemas.openxmlformats.org/drawingml/2006/main">
+            <a:off x="2718000" y="3708000"/>
+            <a:ext cx="50400" cy="1278000"/>
+          </a:xfrm>
+          <a:prstGeom xmlns:a="http://schemas.openxmlformats.org/drawingml/2006/main" prst="rect">
+            <a:avLst/>
+          </a:prstGeom>
+          <a:solidFill xmlns:a="http://schemas.openxmlformats.org/drawingml/2006/main">
+            <a:srgbClr val="D9DEE5"/>
+          </a:solidFill>
+          <a:ln xmlns:a="http://schemas.openxmlformats.org/drawingml/2006/main">
+            <a:noFill/>
+          </a:ln>
+        </p:spPr>
+        <p:txBody>
+          <a:bodyPr xmlns:a="http://schemas.openxmlformats.org/drawingml/2006/main" lIns="0" tIns="0" rIns="0" bIns="0" anchor="ctr">
+            <a:noAutofit/>
+          </a:bodyPr>
+          <a:lstStyle xmlns:a="http://schemas.openxmlformats.org/drawingml/2006/main"/>
+          <a:p xmlns:a="http://schemas.openxmlformats.org/drawingml/2006/main">
+            <a:pPr algn="l"/>
+            <a:endParaRPr lang="en-US" sz="1800" b="0" i="0">
+              <a:solidFill>
+                <a:srgbClr val="20252D"/>
+              </a:solidFill>
+              <a:latin typeface="Arial"/>
+              <a:ea typeface="Arial"/>
+            </a:endParaRPr>
+          </a:p>
+        </p:txBody>
+      </p:sp>
+      <p:sp>
+        <p:nvSpPr>
+          <p:cNvPr id="100169" name="Element-22"/>
+          <p:cNvSpPr/>
+          <p:nvPr/>
+        </p:nvSpPr>
+        <p:spPr>
+          <a:xfrm xmlns:a="http://schemas.openxmlformats.org/drawingml/2006/main">
+            <a:off x="2988000" y="3708000"/>
+            <a:ext cx="3756000" cy="1278000"/>
+          </a:xfrm>
+          <a:prstGeom xmlns:a="http://schemas.openxmlformats.org/drawingml/2006/main" prst="rect">
+            <a:avLst/>
+          </a:prstGeom>
+          <a:noFill xmlns:a="http://schemas.openxmlformats.org/drawingml/2006/main"/>
+          <a:ln xmlns:a="http://schemas.openxmlformats.org/drawingml/2006/main">
+            <a:noFill/>
+          </a:ln>
+        </p:spPr>
+        <p:txBody>
+          <a:bodyPr xmlns:a="http://schemas.openxmlformats.org/drawingml/2006/main" lIns="0" tIns="0" rIns="0" bIns="0" anchor="ctr">
+            <a:noAutofit/>
+          </a:bodyPr>
+          <a:lstStyle xmlns:a="http://schemas.openxmlformats.org/drawingml/2006/main"/>
+          <a:p xmlns:a="http://schemas.openxmlformats.org/drawingml/2006/main">
+            <a:pPr algn="l"/>
+            <a:r>
+              <a:rPr lang="en-US" sz="1900" b="0" i="0">
+                <a:solidFill>
+                  <a:srgbClr val="5C626C"/>
+                </a:solidFill>
+                <a:latin typeface="Arial"/>
+                <a:ea typeface="Arial"/>
+              </a:rPr>
+              <a:t>beyond the reach of this instrument</a:t>
+            </a:r>
+          </a:p>
+        </p:txBody>
+      </p:sp>
+      <p:sp>
+        <p:nvSpPr>
+          <p:cNvPr id="100170" name="Element-23"/>
+          <p:cNvSpPr/>
+          <p:nvPr/>
+        </p:nvSpPr>
+        <p:spPr>
+          <a:xfrm xmlns:a="http://schemas.openxmlformats.org/drawingml/2006/main">
+            <a:off x="7158000" y="3708000"/>
+            <a:ext cx="4242000" cy="1278000"/>
+          </a:xfrm>
+          <a:prstGeom xmlns:a="http://schemas.openxmlformats.org/drawingml/2006/main" prst="rect">
+            <a:avLst/>
+          </a:prstGeom>
+          <a:solidFill xmlns:a="http://schemas.openxmlformats.org/drawingml/2006/main">
+            <a:srgbClr val="F6F7F9"/>
+          </a:solidFill>
+          <a:ln xmlns:a="http://schemas.openxmlformats.org/drawingml/2006/main" w="12700">
+            <a:solidFill>
+              <a:srgbClr val="D9DEE5"/>
+            </a:solidFill>
+          </a:ln>
+        </p:spPr>
+        <p:txBody>
+          <a:bodyPr xmlns:a="http://schemas.openxmlformats.org/drawingml/2006/main" lIns="0" tIns="0" rIns="0" bIns="0" anchor="ctr">
+            <a:noAutofit/>
+          </a:bodyPr>
+          <a:lstStyle xmlns:a="http://schemas.openxmlformats.org/drawingml/2006/main"/>
+          <a:p xmlns:a="http://schemas.openxmlformats.org/drawingml/2006/main">
+            <a:pPr algn="l"/>
+            <a:endParaRPr lang="en-US" sz="1800" b="0" i="0">
+              <a:solidFill>
+                <a:srgbClr val="20252D"/>
+              </a:solidFill>
+              <a:latin typeface="Arial"/>
+              <a:ea typeface="Arial"/>
+            </a:endParaRPr>
+          </a:p>
+        </p:txBody>
+      </p:sp>
+      <p:sp>
+        <p:nvSpPr>
+          <p:cNvPr id="100171" name="Element-24"/>
+          <p:cNvSpPr/>
+          <p:nvPr/>
+        </p:nvSpPr>
+        <p:spPr>
+          <a:xfrm xmlns:a="http://schemas.openxmlformats.org/drawingml/2006/main">
+            <a:off x="7158000" y="3708000"/>
+            <a:ext cx="50400" cy="1278000"/>
+          </a:xfrm>
+          <a:prstGeom xmlns:a="http://schemas.openxmlformats.org/drawingml/2006/main" prst="rect">
+            <a:avLst/>
+          </a:prstGeom>
+          <a:solidFill xmlns:a="http://schemas.openxmlformats.org/drawingml/2006/main">
+            <a:srgbClr val="D9DEE5"/>
+          </a:solidFill>
+          <a:ln xmlns:a="http://schemas.openxmlformats.org/drawingml/2006/main">
+            <a:noFill/>
+          </a:ln>
+        </p:spPr>
+        <p:txBody>
+          <a:bodyPr xmlns:a="http://schemas.openxmlformats.org/drawingml/2006/main" lIns="0" tIns="0" rIns="0" bIns="0" anchor="ctr">
+            <a:noAutofit/>
+          </a:bodyPr>
+          <a:lstStyle xmlns:a="http://schemas.openxmlformats.org/drawingml/2006/main"/>
+          <a:p xmlns:a="http://schemas.openxmlformats.org/drawingml/2006/main">
+            <a:pPr algn="l"/>
+            <a:endParaRPr lang="en-US" sz="1800" b="0" i="0">
+              <a:solidFill>
+                <a:srgbClr val="20252D"/>
+              </a:solidFill>
+              <a:latin typeface="Arial"/>
+              <a:ea typeface="Arial"/>
+            </a:endParaRPr>
+          </a:p>
+        </p:txBody>
+      </p:sp>
+      <p:sp>
+        <p:nvSpPr>
+          <p:cNvPr id="100172" name="Element-25"/>
+          <p:cNvSpPr/>
+          <p:nvPr/>
+        </p:nvSpPr>
+        <p:spPr>
+          <a:xfrm xmlns:a="http://schemas.openxmlformats.org/drawingml/2006/main">
+            <a:off x="7428000" y="3708000"/>
+            <a:ext cx="3756000" cy="1278000"/>
+          </a:xfrm>
+          <a:prstGeom xmlns:a="http://schemas.openxmlformats.org/drawingml/2006/main" prst="rect">
+            <a:avLst/>
+          </a:prstGeom>
+          <a:noFill xmlns:a="http://schemas.openxmlformats.org/drawingml/2006/main"/>
+          <a:ln xmlns:a="http://schemas.openxmlformats.org/drawingml/2006/main">
+            <a:noFill/>
+          </a:ln>
+        </p:spPr>
+        <p:txBody>
+          <a:bodyPr xmlns:a="http://schemas.openxmlformats.org/drawingml/2006/main" lIns="0" tIns="0" rIns="0" bIns="0" anchor="ctr">
+            <a:noAutofit/>
+          </a:bodyPr>
+          <a:lstStyle xmlns:a="http://schemas.openxmlformats.org/drawingml/2006/main"/>
+          <a:p xmlns:a="http://schemas.openxmlformats.org/drawingml/2006/main">
+            <a:pPr algn="l"/>
+            <a:r>
+              <a:rPr lang="en-US" sz="1900" b="1" i="0">
+                <a:solidFill>
+                  <a:srgbClr val="20252D"/>
+                </a:solidFill>
+                <a:latin typeface="Arial"/>
+                <a:ea typeface="Arial"/>
+              </a:rPr>
+              <a:t>a gain, or a coverage gap</a:t>
+            </a:r>
+          </a:p>
+        </p:txBody>
+      </p:sp>
+      <p:sp>
+        <p:nvSpPr>
+          <p:cNvPr id="100173" name="Element-26"/>
+          <p:cNvSpPr/>
+          <p:nvPr/>
+        </p:nvSpPr>
+        <p:spPr>
+          <a:xfrm xmlns:a="http://schemas.openxmlformats.org/drawingml/2006/main">
+            <a:off x="792000" y="2322000"/>
+            <a:ext cx="1746000" cy="1278000"/>
+          </a:xfrm>
+          <a:prstGeom xmlns:a="http://schemas.openxmlformats.org/drawingml/2006/main" prst="rect">
+            <a:avLst/>
+          </a:prstGeom>
+          <a:noFill xmlns:a="http://schemas.openxmlformats.org/drawingml/2006/main"/>
+          <a:ln xmlns:a="http://schemas.openxmlformats.org/drawingml/2006/main">
+            <a:noFill/>
+          </a:ln>
+        </p:spPr>
+        <p:txBody>
+          <a:bodyPr xmlns:a="http://schemas.openxmlformats.org/drawingml/2006/main" lIns="0" tIns="0" rIns="0" bIns="0" anchor="ctr">
+            <a:noAutofit/>
+          </a:bodyPr>
+          <a:lstStyle xmlns:a="http://schemas.openxmlformats.org/drawingml/2006/main"/>
+          <a:p xmlns:a="http://schemas.openxmlformats.org/drawingml/2006/main">
+            <a:pPr algn="r"/>
+            <a:r>
+              <a:rPr lang="en-US" sz="1700" b="1" i="0">
+                <a:solidFill>
+                  <a:srgbClr val="5C626C"/>
+                </a:solidFill>
+                <a:latin typeface="Arial"/>
+                <a:ea typeface="Arial"/>
+              </a:rPr>
+              <a:t>script ✓</a:t>
+            </a:r>
+          </a:p>
+        </p:txBody>
+      </p:sp>
+      <p:sp>
+        <p:nvSpPr>
+          <p:cNvPr id="100174" name="Element-27"/>
+          <p:cNvSpPr/>
+          <p:nvPr/>
+        </p:nvSpPr>
+        <p:spPr>
+          <a:xfrm xmlns:a="http://schemas.openxmlformats.org/drawingml/2006/main">
+            <a:off x="792000" y="3708000"/>
+            <a:ext cx="1746000" cy="1278000"/>
+          </a:xfrm>
+          <a:prstGeom xmlns:a="http://schemas.openxmlformats.org/drawingml/2006/main" prst="rect">
+            <a:avLst/>
+          </a:prstGeom>
+          <a:noFill xmlns:a="http://schemas.openxmlformats.org/drawingml/2006/main"/>
+          <a:ln xmlns:a="http://schemas.openxmlformats.org/drawingml/2006/main">
+            <a:noFill/>
+          </a:ln>
+        </p:spPr>
+        <p:txBody>
+          <a:bodyPr xmlns:a="http://schemas.openxmlformats.org/drawingml/2006/main" lIns="0" tIns="0" rIns="0" bIns="0" anchor="ctr">
+            <a:noAutofit/>
+          </a:bodyPr>
+          <a:lstStyle xmlns:a="http://schemas.openxmlformats.org/drawingml/2006/main"/>
+          <a:p xmlns:a="http://schemas.openxmlformats.org/drawingml/2006/main">
+            <a:pPr algn="r"/>
+            <a:r>
+              <a:rPr lang="en-US" sz="1700" b="1" i="0">
+                <a:solidFill>
+                  <a:srgbClr val="5C626C"/>
+                </a:solidFill>
+                <a:latin typeface="Arial"/>
+                <a:ea typeface="Arial"/>
+              </a:rPr>
+              <a:t>script ✗</a:t>
+            </a:r>
+          </a:p>
+        </p:txBody>
+      </p:sp>
+      <p:sp>
+        <p:nvSpPr>
+          <p:cNvPr id="100175" name="Element-28"/>
+          <p:cNvSpPr/>
+          <p:nvPr/>
+        </p:nvSpPr>
+        <p:spPr>
+          <a:xfrm xmlns:a="http://schemas.openxmlformats.org/drawingml/2006/main">
+            <a:off x="792000" y="5335200"/>
+            <a:ext cx="10608000" cy="10800"/>
+          </a:xfrm>
+          <a:prstGeom xmlns:a="http://schemas.openxmlformats.org/drawingml/2006/main" prst="rect">
+            <a:avLst/>
+          </a:prstGeom>
+          <a:solidFill xmlns:a="http://schemas.openxmlformats.org/drawingml/2006/main">
+            <a:srgbClr val="D9DEE5"/>
+          </a:solidFill>
+          <a:ln xmlns:a="http://schemas.openxmlformats.org/drawingml/2006/main">
+            <a:noFill/>
+          </a:ln>
+        </p:spPr>
+        <p:txBody>
+          <a:bodyPr xmlns:a="http://schemas.openxmlformats.org/drawingml/2006/main" lIns="0" tIns="0" rIns="0" bIns="0" anchor="ctr">
+            <a:noAutofit/>
+          </a:bodyPr>
+          <a:lstStyle xmlns:a="http://schemas.openxmlformats.org/drawingml/2006/main"/>
+          <a:p xmlns:a="http://schemas.openxmlformats.org/drawingml/2006/main">
+            <a:pPr algn="l"/>
+            <a:endParaRPr lang="en-US" sz="1800" b="0" i="0">
+              <a:solidFill>
+                <a:srgbClr val="20252D"/>
+              </a:solidFill>
+              <a:latin typeface="Arial"/>
+              <a:ea typeface="Arial"/>
+            </a:endParaRPr>
+          </a:p>
+        </p:txBody>
+      </p:sp>
+      <p:sp>
+        <p:nvSpPr>
+          <p:cNvPr id="100176" name="Caption-7"/>
+          <p:cNvSpPr/>
+          <p:nvPr/>
+        </p:nvSpPr>
+        <p:spPr>
+          <a:xfrm xmlns:a="http://schemas.openxmlformats.org/drawingml/2006/main">
+            <a:off x="792000" y="5356800"/>
+            <a:ext cx="10608000" cy="864000"/>
+          </a:xfrm>
+          <a:prstGeom xmlns:a="http://schemas.openxmlformats.org/drawingml/2006/main" prst="rect">
+            <a:avLst/>
+          </a:prstGeom>
+          <a:noFill xmlns:a="http://schemas.openxmlformats.org/drawingml/2006/main"/>
+          <a:ln xmlns:a="http://schemas.openxmlformats.org/drawingml/2006/main">
+            <a:noFill/>
+          </a:ln>
+        </p:spPr>
+        <p:txBody>
+          <a:bodyPr xmlns:a="http://schemas.openxmlformats.org/drawingml/2006/main" lIns="0" tIns="0" rIns="0" bIns="0" anchor="t">
+            <a:noAutofit/>
+          </a:bodyPr>
+          <a:lstStyle xmlns:a="http://schemas.openxmlformats.org/drawingml/2006/main"/>
+          <a:p xmlns:a="http://schemas.openxmlformats.org/drawingml/2006/main">
+            <a:pPr algn="l"/>
+            <a:r>
+              <a:rPr lang="en-US" sz="2100" b="1">
+                <a:solidFill>
+                  <a:srgbClr val="B60036"/>
+                </a:solidFill>
+                <a:latin typeface="Arial"/>
+                <a:ea typeface="Arial"/>
+              </a:rPr>
+              <a:t>Only a control that the script and the model both pass permits the hypotheses to be read.</a:t>
+            </a:r>
+          </a:p>
+        </p:txBody>
+      </p:sp>
+      <p:sp>
+        <p:nvSpPr>
+          <p:cNvPr id="100177" name="Element-30"/>
+          <p:cNvSpPr/>
+          <p:nvPr/>
+        </p:nvSpPr>
+        <p:spPr>
+          <a:xfrm xmlns:a="http://schemas.openxmlformats.org/drawingml/2006/main">
+            <a:off x="792000" y="6112800"/>
+            <a:ext cx="10608000" cy="180000"/>
+          </a:xfrm>
+          <a:prstGeom xmlns:a="http://schemas.openxmlformats.org/drawingml/2006/main" prst="rect">
+            <a:avLst/>
+          </a:prstGeom>
+          <a:noFill xmlns:a="http://schemas.openxmlformats.org/drawingml/2006/main"/>
+          <a:ln xmlns:a="http://schemas.openxmlformats.org/drawingml/2006/main">
+            <a:noFill/>
+          </a:ln>
+        </p:spPr>
+        <p:txBody>
+          <a:bodyPr xmlns:a="http://schemas.openxmlformats.org/drawingml/2006/main" lIns="0" tIns="0" rIns="0" bIns="0" anchor="t">
+            <a:noAutofit/>
+          </a:bodyPr>
+          <a:lstStyle xmlns:a="http://schemas.openxmlformats.org/drawingml/2006/main"/>
+          <a:p xmlns:a="http://schemas.openxmlformats.org/drawingml/2006/main">
+            <a:pPr algn="l"/>
+            <a:r>
+              <a:rPr lang="en-US" sz="800" b="0" i="0">
+                <a:solidFill>
+                  <a:srgbClr val="5C626C"/>
+                </a:solidFill>
+                <a:latin typeface="Arial"/>
+                <a:ea typeface="Arial"/>
+              </a:rPr>
+              <a:t>Implemented and tested offline. The laboratory run remains outstanding.</a:t>
+            </a:r>
+          </a:p>
+        </p:txBody>
+      </p:sp>
+      <p:sp>
+        <p:nvSpPr>
+          <p:cNvPr id="100178" name="Element-31"/>
+          <p:cNvSpPr/>
+          <p:nvPr/>
+        </p:nvSpPr>
+        <p:spPr>
+          <a:xfrm xmlns:a="http://schemas.openxmlformats.org/drawingml/2006/main">
+            <a:off x="792000" y="6444000"/>
+            <a:ext cx="5040000" cy="180000"/>
+          </a:xfrm>
+          <a:prstGeom xmlns:a="http://schemas.openxmlformats.org/drawingml/2006/main" prst="rect">
+            <a:avLst/>
+          </a:prstGeom>
+          <a:noFill xmlns:a="http://schemas.openxmlformats.org/drawingml/2006/main"/>
+          <a:ln xmlns:a="http://schemas.openxmlformats.org/drawingml/2006/main">
+            <a:noFill/>
+          </a:ln>
+        </p:spPr>
+        <p:txBody>
+          <a:bodyPr xmlns:a="http://schemas.openxmlformats.org/drawingml/2006/main" lIns="0" tIns="0" rIns="0" bIns="0" anchor="ctr">
+            <a:noAutofit/>
+          </a:bodyPr>
+          <a:lstStyle xmlns:a="http://schemas.openxmlformats.org/drawingml/2006/main"/>
+          <a:p xmlns:a="http://schemas.openxmlformats.org/drawingml/2006/main">
+            <a:pPr algn="l"/>
+            <a:r>
+              <a:rPr lang="en-US" sz="800" b="0" i="0">
+                <a:solidFill>
+                  <a:srgbClr val="5C626C"/>
+                </a:solidFill>
+                <a:latin typeface="Arial"/>
+                <a:ea typeface="Arial"/>
+              </a:rPr>
+              <a:t>Project LANCE — NATO SPS G6259</a:t>
+            </a:r>
+          </a:p>
+        </p:txBody>
+      </p:sp>
+      <p:sp>
+        <p:nvSpPr>
+          <p:cNvPr id="100179" name="Element-32"/>
+          <p:cNvSpPr/>
+          <p:nvPr/>
+        </p:nvSpPr>
+        <p:spPr>
+          <a:xfrm xmlns:a="http://schemas.openxmlformats.org/drawingml/2006/main">
+            <a:off x="10752000" y="6444000"/>
+            <a:ext cx="648000" cy="180000"/>
+          </a:xfrm>
+          <a:prstGeom xmlns:a="http://schemas.openxmlformats.org/drawingml/2006/main" prst="rect">
+            <a:avLst/>
+          </a:prstGeom>
+          <a:noFill xmlns:a="http://schemas.openxmlformats.org/drawingml/2006/main"/>
+          <a:ln xmlns:a="http://schemas.openxmlformats.org/drawingml/2006/main">
+            <a:noFill/>
+          </a:ln>
+        </p:spPr>
+        <p:txBody>
+          <a:bodyPr xmlns:a="http://schemas.openxmlformats.org/drawingml/2006/main" lIns="0" tIns="0" rIns="0" bIns="0" anchor="ctr">
+            <a:noAutofit/>
+          </a:bodyPr>
+          <a:lstStyle xmlns:a="http://schemas.openxmlformats.org/drawingml/2006/main"/>
+          <a:p xmlns:a="http://schemas.openxmlformats.org/drawingml/2006/main">
+            <a:pPr algn="r"/>
+            <a:r>
+              <a:rPr lang="en-US" sz="800" b="0" i="0">
+                <a:solidFill>
+                  <a:srgbClr val="5C626C"/>
+                </a:solidFill>
+                <a:latin typeface="Arial"/>
+                <a:ea typeface="Arial"/>
+              </a:rPr>
+              <a:t>7</a:t>
+            </a:r>
+          </a:p>
+        </p:txBody>
+      </p:sp>
+    </p:spTree>
+  </p:cSld>
+</p:sld>
+</file>
+
+<file path=ppt/slides/slide8.xml><?xml version="1.0" encoding="utf-8"?>
+<p:sld xmlns:p="http://schemas.openxmlformats.org/presentationml/2006/main">
+  <p:cSld>
+    <p:bg>
+      <p:bgPr>
+        <a:solidFill xmlns:a="http://schemas.openxmlformats.org/drawingml/2006/main">
+          <a:srgbClr val="FFFFFF"/>
+        </a:solidFill>
+      </p:bgPr>
+    </p:bg>
+    <p:spTree>
+      <p:nvGrpSpPr>
+        <p:cNvPr id="1" name=""/>
+        <p:cNvGrpSpPr/>
+        <p:nvPr/>
+      </p:nvGrpSpPr>
+      <p:grpSpPr/>
+      <p:pic>
+        <p:nvPicPr>
+          <p:cNvPr id="100180" name="Picture 1" descr="SMart ILIA — UMONS"/>
+          <p:cNvPicPr>
+            <a:picLocks xmlns:a="http://schemas.openxmlformats.org/drawingml/2006/main" noChangeAspect="1"/>
+          </p:cNvPicPr>
+          <p:nvPr/>
+        </p:nvPicPr>
+        <p:blipFill>
+          <a:blip xmlns:r="http://schemas.openxmlformats.org/officeDocument/2006/relationships" xmlns:a="http://schemas.openxmlformats.org/drawingml/2006/main" r:embed="R5e3dae17e1bf4ec3"/>
+          <a:stretch xmlns:a="http://schemas.openxmlformats.org/drawingml/2006/main">
+            <a:fillRect/>
+          </a:stretch>
+        </p:blipFill>
+        <p:spPr>
+          <a:xfrm xmlns:a="http://schemas.openxmlformats.org/drawingml/2006/main">
+            <a:off x="9702000" y="216000"/>
+            <a:ext cx="1699200" cy="582331"/>
+          </a:xfrm>
+          <a:prstGeom xmlns:a="http://schemas.openxmlformats.org/drawingml/2006/main" prst="rect">
+            <a:avLst/>
+          </a:prstGeom>
+        </p:spPr>
+      </p:pic>
+      <p:sp>
+        <p:nvSpPr>
+          <p:cNvPr id="100181" name="Element-4"/>
+          <p:cNvSpPr/>
+          <p:nvPr/>
+        </p:nvSpPr>
+        <p:spPr>
+          <a:xfrm xmlns:a="http://schemas.openxmlformats.org/drawingml/2006/main">
+            <a:off x="792000" y="309600"/>
+            <a:ext cx="1764000" cy="208800"/>
+          </a:xfrm>
+          <a:prstGeom xmlns:a="http://schemas.openxmlformats.org/drawingml/2006/main" prst="rect">
+            <a:avLst/>
+          </a:prstGeom>
+          <a:noFill xmlns:a="http://schemas.openxmlformats.org/drawingml/2006/main"/>
+          <a:ln xmlns:a="http://schemas.openxmlformats.org/drawingml/2006/main">
+            <a:noFill/>
+          </a:ln>
+        </p:spPr>
+        <p:txBody>
+          <a:bodyPr xmlns:a="http://schemas.openxmlformats.org/drawingml/2006/main" lIns="0" tIns="0" rIns="0" bIns="0" anchor="ctr">
+            <a:noAutofit/>
+          </a:bodyPr>
+          <a:lstStyle xmlns:a="http://schemas.openxmlformats.org/drawingml/2006/main"/>
+          <a:p xmlns:a="http://schemas.openxmlformats.org/drawingml/2006/main">
+            <a:pPr algn="l"/>
+            <a:r>
+              <a:rPr lang="en-US" sz="950" b="0" i="0">
+                <a:solidFill>
+                  <a:srgbClr val="5C626C"/>
+                </a:solidFill>
+                <a:latin typeface="Arial"/>
+                <a:ea typeface="Arial"/>
+              </a:rPr>
+              <a:t>Objective</a:t>
+            </a:r>
+          </a:p>
+        </p:txBody>
+      </p:sp>
+      <p:sp>
+        <p:nvSpPr>
+          <p:cNvPr id="100182" name="Element-5"/>
+          <p:cNvSpPr/>
+          <p:nvPr/>
+        </p:nvSpPr>
+        <p:spPr>
+          <a:xfrm xmlns:a="http://schemas.openxmlformats.org/drawingml/2006/main">
+            <a:off x="2736000" y="309600"/>
+            <a:ext cx="1764000" cy="208800"/>
+          </a:xfrm>
+          <a:prstGeom xmlns:a="http://schemas.openxmlformats.org/drawingml/2006/main" prst="rect">
+            <a:avLst/>
+          </a:prstGeom>
+          <a:noFill xmlns:a="http://schemas.openxmlformats.org/drawingml/2006/main"/>
+          <a:ln xmlns:a="http://schemas.openxmlformats.org/drawingml/2006/main">
+            <a:noFill/>
+          </a:ln>
+        </p:spPr>
+        <p:txBody>
+          <a:bodyPr xmlns:a="http://schemas.openxmlformats.org/drawingml/2006/main" lIns="0" tIns="0" rIns="0" bIns="0" anchor="ctr">
+            <a:noAutofit/>
+          </a:bodyPr>
+          <a:lstStyle xmlns:a="http://schemas.openxmlformats.org/drawingml/2006/main"/>
+          <a:p xmlns:a="http://schemas.openxmlformats.org/drawingml/2006/main">
+            <a:pPr algn="l"/>
+            <a:r>
+              <a:rPr lang="en-US" sz="950" b="0" i="0">
+                <a:solidFill>
+                  <a:srgbClr val="5C626C"/>
+                </a:solidFill>
+                <a:latin typeface="Arial"/>
+                <a:ea typeface="Arial"/>
+              </a:rPr>
+              <a:t>Instrument</a:t>
+            </a:r>
+          </a:p>
+        </p:txBody>
+      </p:sp>
+      <p:sp>
+        <p:nvSpPr>
+          <p:cNvPr id="100183" name="Element-6"/>
+          <p:cNvSpPr/>
+          <p:nvPr/>
+        </p:nvSpPr>
+        <p:spPr>
+          <a:xfrm xmlns:a="http://schemas.openxmlformats.org/drawingml/2006/main">
+            <a:off x="4680000" y="309600"/>
+            <a:ext cx="1764000" cy="208800"/>
+          </a:xfrm>
+          <a:prstGeom xmlns:a="http://schemas.openxmlformats.org/drawingml/2006/main" prst="rect">
+            <a:avLst/>
+          </a:prstGeom>
+          <a:noFill xmlns:a="http://schemas.openxmlformats.org/drawingml/2006/main"/>
+          <a:ln xmlns:a="http://schemas.openxmlformats.org/drawingml/2006/main">
+            <a:noFill/>
+          </a:ln>
+        </p:spPr>
+        <p:txBody>
+          <a:bodyPr xmlns:a="http://schemas.openxmlformats.org/drawingml/2006/main" lIns="0" tIns="0" rIns="0" bIns="0" anchor="ctr">
+            <a:noAutofit/>
+          </a:bodyPr>
+          <a:lstStyle xmlns:a="http://schemas.openxmlformats.org/drawingml/2006/main"/>
+          <a:p xmlns:a="http://schemas.openxmlformats.org/drawingml/2006/main">
+            <a:pPr algn="l"/>
+            <a:r>
+              <a:rPr lang="en-US" sz="950" b="0" i="0">
+                <a:solidFill>
+                  <a:srgbClr val="5C626C"/>
+                </a:solidFill>
+                <a:latin typeface="Arial"/>
+                <a:ea typeface="Arial"/>
+              </a:rPr>
+              <a:t>Hypotheses</a:t>
+            </a:r>
+          </a:p>
+        </p:txBody>
+      </p:sp>
+      <p:sp>
+        <p:nvSpPr>
+          <p:cNvPr id="100184" name="Element-7"/>
+          <p:cNvSpPr/>
+          <p:nvPr/>
+        </p:nvSpPr>
+        <p:spPr>
+          <a:xfrm xmlns:a="http://schemas.openxmlformats.org/drawingml/2006/main">
+            <a:off x="6624000" y="309600"/>
+            <a:ext cx="1764000" cy="208800"/>
+          </a:xfrm>
+          <a:prstGeom xmlns:a="http://schemas.openxmlformats.org/drawingml/2006/main" prst="rect">
+            <a:avLst/>
+          </a:prstGeom>
+          <a:noFill xmlns:a="http://schemas.openxmlformats.org/drawingml/2006/main"/>
+          <a:ln xmlns:a="http://schemas.openxmlformats.org/drawingml/2006/main">
+            <a:noFill/>
+          </a:ln>
+        </p:spPr>
+        <p:txBody>
+          <a:bodyPr xmlns:a="http://schemas.openxmlformats.org/drawingml/2006/main" lIns="0" tIns="0" rIns="0" bIns="0" anchor="ctr">
+            <a:noAutofit/>
+          </a:bodyPr>
+          <a:lstStyle xmlns:a="http://schemas.openxmlformats.org/drawingml/2006/main"/>
+          <a:p xmlns:a="http://schemas.openxmlformats.org/drawingml/2006/main">
+            <a:pPr algn="l"/>
+            <a:r>
+              <a:rPr lang="en-US" sz="950" b="0" i="0">
+                <a:solidFill>
+                  <a:srgbClr val="B60036"/>
+                </a:solidFill>
+                <a:latin typeface="Arial"/>
+                <a:ea typeface="Arial"/>
+              </a:rPr>
+              <a:t>Outlook</a:t>
+            </a:r>
+          </a:p>
+        </p:txBody>
+      </p:sp>
+      <p:sp>
+        <p:nvSpPr>
+          <p:cNvPr id="100185" name="Element-8"/>
+          <p:cNvSpPr/>
+          <p:nvPr/>
+        </p:nvSpPr>
+        <p:spPr>
+          <a:xfrm xmlns:a="http://schemas.openxmlformats.org/drawingml/2006/main">
+            <a:off x="6624000" y="529200"/>
+            <a:ext cx="1764000" cy="16200"/>
+          </a:xfrm>
+          <a:prstGeom xmlns:a="http://schemas.openxmlformats.org/drawingml/2006/main" prst="rect">
+            <a:avLst/>
+          </a:prstGeom>
+          <a:solidFill xmlns:a="http://schemas.openxmlformats.org/drawingml/2006/main">
+            <a:srgbClr val="B60036"/>
+          </a:solidFill>
+          <a:ln xmlns:a="http://schemas.openxmlformats.org/drawingml/2006/main">
+            <a:noFill/>
+          </a:ln>
+        </p:spPr>
+        <p:txBody>
+          <a:bodyPr xmlns:a="http://schemas.openxmlformats.org/drawingml/2006/main" lIns="0" tIns="0" rIns="0" bIns="0" anchor="ctr">
+            <a:noAutofit/>
+          </a:bodyPr>
+          <a:lstStyle xmlns:a="http://schemas.openxmlformats.org/drawingml/2006/main"/>
+          <a:p xmlns:a="http://schemas.openxmlformats.org/drawingml/2006/main">
+            <a:pPr algn="l"/>
+            <a:endParaRPr lang="en-US" sz="1800" b="0" i="0">
+              <a:solidFill>
+                <a:srgbClr val="20252D"/>
+              </a:solidFill>
+              <a:latin typeface="Arial"/>
+              <a:ea typeface="Arial"/>
+            </a:endParaRPr>
+          </a:p>
+        </p:txBody>
+      </p:sp>
+      <p:sp>
+        <p:nvSpPr>
+          <p:cNvPr id="100186" name="Title"/>
+          <p:cNvSpPr/>
+          <p:nvPr/>
+        </p:nvSpPr>
+        <p:spPr>
+          <a:xfrm xmlns:a="http://schemas.openxmlformats.org/drawingml/2006/main">
+            <a:off x="792000" y="612000"/>
+            <a:ext cx="8748000" cy="648000"/>
+          </a:xfrm>
+          <a:prstGeom xmlns:a="http://schemas.openxmlformats.org/drawingml/2006/main" prst="rect">
+            <a:avLst/>
+          </a:prstGeom>
+          <a:noFill xmlns:a="http://schemas.openxmlformats.org/drawingml/2006/main"/>
+          <a:ln xmlns:a="http://schemas.openxmlformats.org/drawingml/2006/main">
+            <a:noFill/>
+          </a:ln>
+        </p:spPr>
+        <p:txBody>
+          <a:bodyPr xmlns:a="http://schemas.openxmlformats.org/drawingml/2006/main" lIns="0" tIns="0" rIns="0" bIns="0" anchor="ctr">
+            <a:noAutofit/>
+          </a:bodyPr>
+          <a:lstStyle xmlns:a="http://schemas.openxmlformats.org/drawingml/2006/main"/>
+          <a:p xmlns:a="http://schemas.openxmlformats.org/drawingml/2006/main">
+            <a:pPr algn="l"/>
+            <a:r>
+              <a:rPr lang="en-US" sz="2900" b="1" i="0">
+                <a:solidFill>
+                  <a:srgbClr val="20252D"/>
+                </a:solidFill>
+                <a:latin typeface="Arial"/>
+                <a:ea typeface="Arial"/>
+              </a:rPr>
+              <a:t>What we cannot claim</a:t>
+            </a:r>
+          </a:p>
+        </p:txBody>
+      </p:sp>
+      <p:sp>
+        <p:nvSpPr>
+          <p:cNvPr id="100187" name="Element-10"/>
+          <p:cNvSpPr/>
+          <p:nvPr/>
+        </p:nvSpPr>
+        <p:spPr>
+          <a:xfrm xmlns:a="http://schemas.openxmlformats.org/drawingml/2006/main">
+            <a:off x="792000" y="1303200"/>
+            <a:ext cx="1224000" cy="25200"/>
+          </a:xfrm>
+          <a:prstGeom xmlns:a="http://schemas.openxmlformats.org/drawingml/2006/main" prst="rect">
+            <a:avLst/>
+          </a:prstGeom>
+          <a:solidFill xmlns:a="http://schemas.openxmlformats.org/drawingml/2006/main">
+            <a:srgbClr val="B60036"/>
+          </a:solidFill>
+          <a:ln xmlns:a="http://schemas.openxmlformats.org/drawingml/2006/main">
+            <a:noFill/>
+          </a:ln>
+        </p:spPr>
+        <p:txBody>
+          <a:bodyPr xmlns:a="http://schemas.openxmlformats.org/drawingml/2006/main" lIns="0" tIns="0" rIns="0" bIns="0" anchor="ctr">
+            <a:noAutofit/>
+          </a:bodyPr>
+          <a:lstStyle xmlns:a="http://schemas.openxmlformats.org/drawingml/2006/main"/>
+          <a:p xmlns:a="http://schemas.openxmlformats.org/drawingml/2006/main">
+            <a:pPr algn="l"/>
+            <a:endParaRPr lang="en-US" sz="1800" b="0" i="0">
+              <a:solidFill>
+                <a:srgbClr val="20252D"/>
+              </a:solidFill>
+              <a:latin typeface="Arial"/>
+              <a:ea typeface="Arial"/>
+            </a:endParaRPr>
+          </a:p>
+        </p:txBody>
+      </p:sp>
+      <p:sp>
+        <p:nvSpPr>
+          <p:cNvPr id="100188" name="Element-11"/>
+          <p:cNvSpPr/>
+          <p:nvPr/>
+        </p:nvSpPr>
+        <p:spPr>
+          <a:xfrm xmlns:a="http://schemas.openxmlformats.org/drawingml/2006/main">
+            <a:off x="792000" y="1728000"/>
+            <a:ext cx="10608000" cy="918000"/>
+          </a:xfrm>
+          <a:prstGeom xmlns:a="http://schemas.openxmlformats.org/drawingml/2006/main" prst="rect">
+            <a:avLst/>
+          </a:prstGeom>
+          <a:solidFill xmlns:a="http://schemas.openxmlformats.org/drawingml/2006/main">
+            <a:srgbClr val="F6F7F9"/>
+          </a:solidFill>
+          <a:ln xmlns:a="http://schemas.openxmlformats.org/drawingml/2006/main" w="12700">
+            <a:solidFill>
+              <a:srgbClr val="D9DEE5"/>
+            </a:solidFill>
+          </a:ln>
+        </p:spPr>
+        <p:txBody>
+          <a:bodyPr xmlns:a="http://schemas.openxmlformats.org/drawingml/2006/main" lIns="0" tIns="0" rIns="0" bIns="0" anchor="ctr">
+            <a:noAutofit/>
+          </a:bodyPr>
+          <a:lstStyle xmlns:a="http://schemas.openxmlformats.org/drawingml/2006/main"/>
+          <a:p xmlns:a="http://schemas.openxmlformats.org/drawingml/2006/main">
+            <a:pPr algn="l"/>
+            <a:endParaRPr lang="en-US" sz="1800" b="0" i="0">
+              <a:solidFill>
+                <a:srgbClr val="20252D"/>
+              </a:solidFill>
+              <a:latin typeface="Arial"/>
+              <a:ea typeface="Arial"/>
+            </a:endParaRPr>
+          </a:p>
+        </p:txBody>
+      </p:sp>
+      <p:sp>
+        <p:nvSpPr>
+          <p:cNvPr id="100189" name="Element-12"/>
+          <p:cNvSpPr/>
+          <p:nvPr/>
+        </p:nvSpPr>
+        <p:spPr>
+          <a:xfrm xmlns:a="http://schemas.openxmlformats.org/drawingml/2006/main">
+            <a:off x="792000" y="1728000"/>
+            <a:ext cx="50400" cy="918000"/>
+          </a:xfrm>
+          <a:prstGeom xmlns:a="http://schemas.openxmlformats.org/drawingml/2006/main" prst="rect">
+            <a:avLst/>
+          </a:prstGeom>
+          <a:solidFill xmlns:a="http://schemas.openxmlformats.org/drawingml/2006/main">
+            <a:srgbClr val="B60036"/>
+          </a:solidFill>
+          <a:ln xmlns:a="http://schemas.openxmlformats.org/drawingml/2006/main">
+            <a:noFill/>
+          </a:ln>
+        </p:spPr>
+        <p:txBody>
+          <a:bodyPr xmlns:a="http://schemas.openxmlformats.org/drawingml/2006/main" lIns="0" tIns="0" rIns="0" bIns="0" anchor="ctr">
+            <a:noAutofit/>
+          </a:bodyPr>
+          <a:lstStyle xmlns:a="http://schemas.openxmlformats.org/drawingml/2006/main"/>
+          <a:p xmlns:a="http://schemas.openxmlformats.org/drawingml/2006/main">
+            <a:pPr algn="l"/>
+            <a:endParaRPr lang="en-US" sz="1800" b="0" i="0">
+              <a:solidFill>
+                <a:srgbClr val="20252D"/>
+              </a:solidFill>
+              <a:latin typeface="Arial"/>
+              <a:ea typeface="Arial"/>
+            </a:endParaRPr>
+          </a:p>
+        </p:txBody>
+      </p:sp>
+      <p:sp>
+        <p:nvSpPr>
+          <p:cNvPr id="100190" name="Element-13"/>
+          <p:cNvSpPr/>
+          <p:nvPr/>
+        </p:nvSpPr>
+        <p:spPr>
+          <a:xfrm xmlns:a="http://schemas.openxmlformats.org/drawingml/2006/main">
+            <a:off x="1098000" y="1728000"/>
+            <a:ext cx="396000" cy="918000"/>
+          </a:xfrm>
+          <a:prstGeom xmlns:a="http://schemas.openxmlformats.org/drawingml/2006/main" prst="rect">
+            <a:avLst/>
+          </a:prstGeom>
+          <a:noFill xmlns:a="http://schemas.openxmlformats.org/drawingml/2006/main"/>
+          <a:ln xmlns:a="http://schemas.openxmlformats.org/drawingml/2006/main">
+            <a:noFill/>
+          </a:ln>
+        </p:spPr>
+        <p:txBody>
+          <a:bodyPr xmlns:a="http://schemas.openxmlformats.org/drawingml/2006/main" lIns="0" tIns="0" rIns="0" bIns="0" anchor="ctr">
+            <a:noAutofit/>
+          </a:bodyPr>
+          <a:lstStyle xmlns:a="http://schemas.openxmlformats.org/drawingml/2006/main"/>
+          <a:p xmlns:a="http://schemas.openxmlformats.org/drawingml/2006/main">
+            <a:pPr algn="l"/>
+            <a:r>
+              <a:rPr lang="en-US" sz="2200" b="1" i="0">
+                <a:solidFill>
+                  <a:srgbClr val="B60036"/>
+                </a:solidFill>
+                <a:latin typeface="Arial"/>
+                <a:ea typeface="Arial"/>
+              </a:rPr>
+              <a:t>✕</a:t>
+            </a:r>
+          </a:p>
+        </p:txBody>
+      </p:sp>
+      <p:sp>
+        <p:nvSpPr>
+          <p:cNvPr id="100191" name="Element-14"/>
+          <p:cNvSpPr/>
+          <p:nvPr/>
+        </p:nvSpPr>
+        <p:spPr>
+          <a:xfrm xmlns:a="http://schemas.openxmlformats.org/drawingml/2006/main">
+            <a:off x="1620000" y="1728000"/>
+            <a:ext cx="3384000" cy="918000"/>
+          </a:xfrm>
+          <a:prstGeom xmlns:a="http://schemas.openxmlformats.org/drawingml/2006/main" prst="rect">
+            <a:avLst/>
+          </a:prstGeom>
+          <a:noFill xmlns:a="http://schemas.openxmlformats.org/drawingml/2006/main"/>
+          <a:ln xmlns:a="http://schemas.openxmlformats.org/drawingml/2006/main">
+            <a:noFill/>
+          </a:ln>
+        </p:spPr>
+        <p:txBody>
+          <a:bodyPr xmlns:a="http://schemas.openxmlformats.org/drawingml/2006/main" lIns="0" tIns="0" rIns="0" bIns="0" anchor="ctr">
+            <a:noAutofit/>
+          </a:bodyPr>
+          <a:lstStyle xmlns:a="http://schemas.openxmlformats.org/drawingml/2006/main"/>
+          <a:p xmlns:a="http://schemas.openxmlformats.org/drawingml/2006/main">
+            <a:pPr algn="l"/>
+            <a:r>
+              <a:rPr lang="en-US" sz="2000" b="1" i="0">
+                <a:solidFill>
+                  <a:srgbClr val="B60036"/>
+                </a:solidFill>
+                <a:latin typeface="Arial"/>
+                <a:ea typeface="Arial"/>
+              </a:rPr>
+              <a:t>No general advantage</a:t>
+            </a:r>
+          </a:p>
+        </p:txBody>
+      </p:sp>
+      <p:sp>
+        <p:nvSpPr>
+          <p:cNvPr id="100192" name="Element-15"/>
+          <p:cNvSpPr/>
+          <p:nvPr/>
+        </p:nvSpPr>
+        <p:spPr>
+          <a:xfrm xmlns:a="http://schemas.openxmlformats.org/drawingml/2006/main">
+            <a:off x="5148000" y="1728000"/>
+            <a:ext cx="5928000" cy="918000"/>
+          </a:xfrm>
+          <a:prstGeom xmlns:a="http://schemas.openxmlformats.org/drawingml/2006/main" prst="rect">
+            <a:avLst/>
+          </a:prstGeom>
+          <a:noFill xmlns:a="http://schemas.openxmlformats.org/drawingml/2006/main"/>
+          <a:ln xmlns:a="http://schemas.openxmlformats.org/drawingml/2006/main">
+            <a:noFill/>
+          </a:ln>
+        </p:spPr>
+        <p:txBody>
+          <a:bodyPr xmlns:a="http://schemas.openxmlformats.org/drawingml/2006/main" lIns="0" tIns="0" rIns="0" bIns="0" anchor="ctr">
+            <a:noAutofit/>
+          </a:bodyPr>
+          <a:lstStyle xmlns:a="http://schemas.openxmlformats.org/drawingml/2006/main"/>
+          <a:p xmlns:a="http://schemas.openxmlformats.org/drawingml/2006/main">
+            <a:pPr algn="l"/>
+            <a:r>
+              <a:rPr lang="en-US" sz="1500" b="0" i="0">
+                <a:solidFill>
+                  <a:srgbClr val="20252D"/>
+                </a:solidFill>
+                <a:latin typeface="Arial"/>
+                <a:ea typeface="Arial"/>
+              </a:rPr>
+              <a:t>No hypothesis has yet been executed.</a:t>
+            </a:r>
+          </a:p>
+        </p:txBody>
+      </p:sp>
+      <p:sp>
+        <p:nvSpPr>
+          <p:cNvPr id="100193" name="Element-16"/>
+          <p:cNvSpPr/>
+          <p:nvPr/>
+        </p:nvSpPr>
+        <p:spPr>
+          <a:xfrm xmlns:a="http://schemas.openxmlformats.org/drawingml/2006/main">
+            <a:off x="792000" y="2826000"/>
+            <a:ext cx="10608000" cy="918000"/>
+          </a:xfrm>
+          <a:prstGeom xmlns:a="http://schemas.openxmlformats.org/drawingml/2006/main" prst="rect">
+            <a:avLst/>
+          </a:prstGeom>
+          <a:solidFill xmlns:a="http://schemas.openxmlformats.org/drawingml/2006/main">
+            <a:srgbClr val="F6F7F9"/>
+          </a:solidFill>
+          <a:ln xmlns:a="http://schemas.openxmlformats.org/drawingml/2006/main" w="12700">
+            <a:solidFill>
+              <a:srgbClr val="D9DEE5"/>
+            </a:solidFill>
+          </a:ln>
+        </p:spPr>
+        <p:txBody>
+          <a:bodyPr xmlns:a="http://schemas.openxmlformats.org/drawingml/2006/main" lIns="0" tIns="0" rIns="0" bIns="0" anchor="ctr">
+            <a:noAutofit/>
+          </a:bodyPr>
+          <a:lstStyle xmlns:a="http://schemas.openxmlformats.org/drawingml/2006/main"/>
+          <a:p xmlns:a="http://schemas.openxmlformats.org/drawingml/2006/main">
+            <a:pPr algn="l"/>
+            <a:endParaRPr lang="en-US" sz="1800" b="0" i="0">
+              <a:solidFill>
+                <a:srgbClr val="20252D"/>
+              </a:solidFill>
+              <a:latin typeface="Arial"/>
+              <a:ea typeface="Arial"/>
+            </a:endParaRPr>
+          </a:p>
+        </p:txBody>
+      </p:sp>
+      <p:sp>
+        <p:nvSpPr>
+          <p:cNvPr id="100194" name="Element-17"/>
+          <p:cNvSpPr/>
+          <p:nvPr/>
+        </p:nvSpPr>
+        <p:spPr>
+          <a:xfrm xmlns:a="http://schemas.openxmlformats.org/drawingml/2006/main">
+            <a:off x="792000" y="2826000"/>
+            <a:ext cx="50400" cy="918000"/>
+          </a:xfrm>
+          <a:prstGeom xmlns:a="http://schemas.openxmlformats.org/drawingml/2006/main" prst="rect">
+            <a:avLst/>
+          </a:prstGeom>
+          <a:solidFill xmlns:a="http://schemas.openxmlformats.org/drawingml/2006/main">
+            <a:srgbClr val="B60036"/>
+          </a:solidFill>
+          <a:ln xmlns:a="http://schemas.openxmlformats.org/drawingml/2006/main">
+            <a:noFill/>
+          </a:ln>
+        </p:spPr>
+        <p:txBody>
+          <a:bodyPr xmlns:a="http://schemas.openxmlformats.org/drawingml/2006/main" lIns="0" tIns="0" rIns="0" bIns="0" anchor="ctr">
+            <a:noAutofit/>
+          </a:bodyPr>
+          <a:lstStyle xmlns:a="http://schemas.openxmlformats.org/drawingml/2006/main"/>
+          <a:p xmlns:a="http://schemas.openxmlformats.org/drawingml/2006/main">
+            <a:pPr algn="l"/>
+            <a:endParaRPr lang="en-US" sz="1800" b="0" i="0">
+              <a:solidFill>
+                <a:srgbClr val="20252D"/>
+              </a:solidFill>
+              <a:latin typeface="Arial"/>
+              <a:ea typeface="Arial"/>
+            </a:endParaRPr>
+          </a:p>
+        </p:txBody>
+      </p:sp>
+      <p:sp>
+        <p:nvSpPr>
+          <p:cNvPr id="100195" name="Element-18"/>
+          <p:cNvSpPr/>
+          <p:nvPr/>
+        </p:nvSpPr>
+        <p:spPr>
+          <a:xfrm xmlns:a="http://schemas.openxmlformats.org/drawingml/2006/main">
+            <a:off x="1098000" y="2826000"/>
+            <a:ext cx="396000" cy="918000"/>
+          </a:xfrm>
+          <a:prstGeom xmlns:a="http://schemas.openxmlformats.org/drawingml/2006/main" prst="rect">
+            <a:avLst/>
+          </a:prstGeom>
+          <a:noFill xmlns:a="http://schemas.openxmlformats.org/drawingml/2006/main"/>
+          <a:ln xmlns:a="http://schemas.openxmlformats.org/drawingml/2006/main">
+            <a:noFill/>
+          </a:ln>
+        </p:spPr>
+        <p:txBody>
+          <a:bodyPr xmlns:a="http://schemas.openxmlformats.org/drawingml/2006/main" lIns="0" tIns="0" rIns="0" bIns="0" anchor="ctr">
+            <a:noAutofit/>
+          </a:bodyPr>
+          <a:lstStyle xmlns:a="http://schemas.openxmlformats.org/drawingml/2006/main"/>
+          <a:p xmlns:a="http://schemas.openxmlformats.org/drawingml/2006/main">
+            <a:pPr algn="l"/>
+            <a:r>
+              <a:rPr lang="en-US" sz="2200" b="1" i="0">
+                <a:solidFill>
+                  <a:srgbClr val="B60036"/>
+                </a:solidFill>
+                <a:latin typeface="Arial"/>
+                <a:ea typeface="Arial"/>
+              </a:rPr>
+              <a:t>✕</a:t>
+            </a:r>
+          </a:p>
+        </p:txBody>
+      </p:sp>
+      <p:sp>
+        <p:nvSpPr>
+          <p:cNvPr id="100196" name="Element-19"/>
+          <p:cNvSpPr/>
+          <p:nvPr/>
+        </p:nvSpPr>
+        <p:spPr>
+          <a:xfrm xmlns:a="http://schemas.openxmlformats.org/drawingml/2006/main">
+            <a:off x="1620000" y="2826000"/>
+            <a:ext cx="3384000" cy="918000"/>
+          </a:xfrm>
+          <a:prstGeom xmlns:a="http://schemas.openxmlformats.org/drawingml/2006/main" prst="rect">
+            <a:avLst/>
+          </a:prstGeom>
+          <a:noFill xmlns:a="http://schemas.openxmlformats.org/drawingml/2006/main"/>
+          <a:ln xmlns:a="http://schemas.openxmlformats.org/drawingml/2006/main">
+            <a:noFill/>
+          </a:ln>
+        </p:spPr>
+        <p:txBody>
+          <a:bodyPr xmlns:a="http://schemas.openxmlformats.org/drawingml/2006/main" lIns="0" tIns="0" rIns="0" bIns="0" anchor="ctr">
+            <a:noAutofit/>
+          </a:bodyPr>
+          <a:lstStyle xmlns:a="http://schemas.openxmlformats.org/drawingml/2006/main"/>
+          <a:p xmlns:a="http://schemas.openxmlformats.org/drawingml/2006/main">
+            <a:pPr algn="l"/>
+            <a:r>
+              <a:rPr lang="en-US" sz="2000" b="1" i="0">
+                <a:solidFill>
+                  <a:srgbClr val="B60036"/>
+                </a:solidFill>
+                <a:latin typeface="Arial"/>
+                <a:ea typeface="Arial"/>
+              </a:rPr>
+              <a:t>No confidence interval</a:t>
+            </a:r>
+          </a:p>
+        </p:txBody>
+      </p:sp>
+      <p:sp>
+        <p:nvSpPr>
+          <p:cNvPr id="100197" name="Element-20"/>
+          <p:cNvSpPr/>
+          <p:nvPr/>
+        </p:nvSpPr>
+        <p:spPr>
+          <a:xfrm xmlns:a="http://schemas.openxmlformats.org/drawingml/2006/main">
+            <a:off x="5148000" y="2826000"/>
+            <a:ext cx="5928000" cy="918000"/>
+          </a:xfrm>
+          <a:prstGeom xmlns:a="http://schemas.openxmlformats.org/drawingml/2006/main" prst="rect">
+            <a:avLst/>
+          </a:prstGeom>
+          <a:noFill xmlns:a="http://schemas.openxmlformats.org/drawingml/2006/main"/>
+          <a:ln xmlns:a="http://schemas.openxmlformats.org/drawingml/2006/main">
+            <a:noFill/>
+          </a:ln>
+        </p:spPr>
+        <p:txBody>
+          <a:bodyPr xmlns:a="http://schemas.openxmlformats.org/drawingml/2006/main" lIns="0" tIns="0" rIns="0" bIns="0" anchor="ctr">
+            <a:noAutofit/>
+          </a:bodyPr>
+          <a:lstStyle xmlns:a="http://schemas.openxmlformats.org/drawingml/2006/main"/>
+          <a:p xmlns:a="http://schemas.openxmlformats.org/drawingml/2006/main">
+            <a:pPr algn="l"/>
+            <a:r>
+              <a:rPr lang="en-US" sz="1500" b="0" i="0">
+                <a:solidFill>
+                  <a:srgbClr val="20252D"/>
+                </a:solidFill>
+                <a:latin typeface="Arial"/>
+                <a:ea typeface="Arial"/>
+              </a:rPr>
+              <a:t>Three repetitions yield a dispersion, not a sample.</a:t>
+            </a:r>
+          </a:p>
+        </p:txBody>
+      </p:sp>
+      <p:sp>
+        <p:nvSpPr>
+          <p:cNvPr id="100198" name="Element-21"/>
+          <p:cNvSpPr/>
+          <p:nvPr/>
+        </p:nvSpPr>
+        <p:spPr>
+          <a:xfrm xmlns:a="http://schemas.openxmlformats.org/drawingml/2006/main">
+            <a:off x="792000" y="3924000"/>
+            <a:ext cx="10608000" cy="918000"/>
+          </a:xfrm>
+          <a:prstGeom xmlns:a="http://schemas.openxmlformats.org/drawingml/2006/main" prst="rect">
+            <a:avLst/>
+          </a:prstGeom>
+          <a:solidFill xmlns:a="http://schemas.openxmlformats.org/drawingml/2006/main">
+            <a:srgbClr val="F6F7F9"/>
+          </a:solidFill>
+          <a:ln xmlns:a="http://schemas.openxmlformats.org/drawingml/2006/main" w="12700">
+            <a:solidFill>
+              <a:srgbClr val="D9DEE5"/>
+            </a:solidFill>
+          </a:ln>
+        </p:spPr>
+        <p:txBody>
+          <a:bodyPr xmlns:a="http://schemas.openxmlformats.org/drawingml/2006/main" lIns="0" tIns="0" rIns="0" bIns="0" anchor="ctr">
+            <a:noAutofit/>
+          </a:bodyPr>
+          <a:lstStyle xmlns:a="http://schemas.openxmlformats.org/drawingml/2006/main"/>
+          <a:p xmlns:a="http://schemas.openxmlformats.org/drawingml/2006/main">
+            <a:pPr algn="l"/>
+            <a:endParaRPr lang="en-US" sz="1800" b="0" i="0">
+              <a:solidFill>
+                <a:srgbClr val="20252D"/>
+              </a:solidFill>
+              <a:latin typeface="Arial"/>
+              <a:ea typeface="Arial"/>
+            </a:endParaRPr>
+          </a:p>
+        </p:txBody>
+      </p:sp>
+      <p:sp>
+        <p:nvSpPr>
+          <p:cNvPr id="100199" name="Element-22"/>
+          <p:cNvSpPr/>
+          <p:nvPr/>
+        </p:nvSpPr>
+        <p:spPr>
+          <a:xfrm xmlns:a="http://schemas.openxmlformats.org/drawingml/2006/main">
+            <a:off x="792000" y="3924000"/>
+            <a:ext cx="50400" cy="918000"/>
+          </a:xfrm>
+          <a:prstGeom xmlns:a="http://schemas.openxmlformats.org/drawingml/2006/main" prst="rect">
+            <a:avLst/>
+          </a:prstGeom>
+          <a:solidFill xmlns:a="http://schemas.openxmlformats.org/drawingml/2006/main">
+            <a:srgbClr val="B60036"/>
+          </a:solidFill>
+          <a:ln xmlns:a="http://schemas.openxmlformats.org/drawingml/2006/main">
+            <a:noFill/>
+          </a:ln>
+        </p:spPr>
+        <p:txBody>
+          <a:bodyPr xmlns:a="http://schemas.openxmlformats.org/drawingml/2006/main" lIns="0" tIns="0" rIns="0" bIns="0" anchor="ctr">
+            <a:noAutofit/>
+          </a:bodyPr>
+          <a:lstStyle xmlns:a="http://schemas.openxmlformats.org/drawingml/2006/main"/>
+          <a:p xmlns:a="http://schemas.openxmlformats.org/drawingml/2006/main">
+            <a:pPr algn="l"/>
+            <a:endParaRPr lang="en-US" sz="1800" b="0" i="0">
+              <a:solidFill>
+                <a:srgbClr val="20252D"/>
+              </a:solidFill>
+              <a:latin typeface="Arial"/>
+              <a:ea typeface="Arial"/>
+            </a:endParaRPr>
+          </a:p>
+        </p:txBody>
+      </p:sp>
+      <p:sp>
+        <p:nvSpPr>
+          <p:cNvPr id="100200" name="Element-23"/>
+          <p:cNvSpPr/>
+          <p:nvPr/>
+        </p:nvSpPr>
+        <p:spPr>
+          <a:xfrm xmlns:a="http://schemas.openxmlformats.org/drawingml/2006/main">
+            <a:off x="1098000" y="3924000"/>
+            <a:ext cx="396000" cy="918000"/>
+          </a:xfrm>
+          <a:prstGeom xmlns:a="http://schemas.openxmlformats.org/drawingml/2006/main" prst="rect">
+            <a:avLst/>
+          </a:prstGeom>
+          <a:noFill xmlns:a="http://schemas.openxmlformats.org/drawingml/2006/main"/>
+          <a:ln xmlns:a="http://schemas.openxmlformats.org/drawingml/2006/main">
+            <a:noFill/>
+          </a:ln>
+        </p:spPr>
+        <p:txBody>
+          <a:bodyPr xmlns:a="http://schemas.openxmlformats.org/drawingml/2006/main" lIns="0" tIns="0" rIns="0" bIns="0" anchor="ctr">
+            <a:noAutofit/>
+          </a:bodyPr>
+          <a:lstStyle xmlns:a="http://schemas.openxmlformats.org/drawingml/2006/main"/>
+          <a:p xmlns:a="http://schemas.openxmlformats.org/drawingml/2006/main">
+            <a:pPr algn="l"/>
+            <a:r>
+              <a:rPr lang="en-US" sz="2200" b="1" i="0">
+                <a:solidFill>
+                  <a:srgbClr val="B60036"/>
+                </a:solidFill>
+                <a:latin typeface="Arial"/>
+                <a:ea typeface="Arial"/>
+              </a:rPr>
+              <a:t>✕</a:t>
+            </a:r>
+          </a:p>
+        </p:txBody>
+      </p:sp>
+      <p:sp>
+        <p:nvSpPr>
+          <p:cNvPr id="100201" name="Element-24"/>
+          <p:cNvSpPr/>
+          <p:nvPr/>
+        </p:nvSpPr>
+        <p:spPr>
+          <a:xfrm xmlns:a="http://schemas.openxmlformats.org/drawingml/2006/main">
+            <a:off x="1620000" y="3924000"/>
+            <a:ext cx="3384000" cy="918000"/>
+          </a:xfrm>
+          <a:prstGeom xmlns:a="http://schemas.openxmlformats.org/drawingml/2006/main" prst="rect">
+            <a:avLst/>
+          </a:prstGeom>
+          <a:noFill xmlns:a="http://schemas.openxmlformats.org/drawingml/2006/main"/>
+          <a:ln xmlns:a="http://schemas.openxmlformats.org/drawingml/2006/main">
+            <a:noFill/>
+          </a:ln>
+        </p:spPr>
+        <p:txBody>
+          <a:bodyPr xmlns:a="http://schemas.openxmlformats.org/drawingml/2006/main" lIns="0" tIns="0" rIns="0" bIns="0" anchor="ctr">
+            <a:noAutofit/>
+          </a:bodyPr>
+          <a:lstStyle xmlns:a="http://schemas.openxmlformats.org/drawingml/2006/main"/>
+          <a:p xmlns:a="http://schemas.openxmlformats.org/drawingml/2006/main">
+            <a:pPr algn="l"/>
+            <a:r>
+              <a:rPr lang="en-US" sz="2000" b="1" i="0">
+                <a:solidFill>
+                  <a:srgbClr val="B60036"/>
+                </a:solidFill>
+                <a:latin typeface="Arial"/>
+                <a:ea typeface="Arial"/>
+              </a:rPr>
+              <a:t>No admitted evidence</a:t>
+            </a:r>
+          </a:p>
+        </p:txBody>
+      </p:sp>
+      <p:sp>
+        <p:nvSpPr>
+          <p:cNvPr id="100202" name="Element-25"/>
+          <p:cNvSpPr/>
+          <p:nvPr/>
+        </p:nvSpPr>
+        <p:spPr>
+          <a:xfrm xmlns:a="http://schemas.openxmlformats.org/drawingml/2006/main">
+            <a:off x="5148000" y="3924000"/>
+            <a:ext cx="5928000" cy="918000"/>
+          </a:xfrm>
+          <a:prstGeom xmlns:a="http://schemas.openxmlformats.org/drawingml/2006/main" prst="rect">
+            <a:avLst/>
+          </a:prstGeom>
+          <a:noFill xmlns:a="http://schemas.openxmlformats.org/drawingml/2006/main"/>
+          <a:ln xmlns:a="http://schemas.openxmlformats.org/drawingml/2006/main">
+            <a:noFill/>
+          </a:ln>
+        </p:spPr>
+        <p:txBody>
+          <a:bodyPr xmlns:a="http://schemas.openxmlformats.org/drawingml/2006/main" lIns="0" tIns="0" rIns="0" bIns="0" anchor="ctr">
+            <a:noAutofit/>
+          </a:bodyPr>
+          <a:lstStyle xmlns:a="http://schemas.openxmlformats.org/drawingml/2006/main"/>
+          <a:p xmlns:a="http://schemas.openxmlformats.org/drawingml/2006/main">
+            <a:pPr algn="l"/>
+            <a:r>
+              <a:rPr lang="en-US" sz="1500" b="0" i="0">
+                <a:solidFill>
+                  <a:srgbClr val="20252D"/>
+                </a:solidFill>
+                <a:latin typeface="Arial"/>
+                <a:ea typeface="Arial"/>
+              </a:rPr>
+              <a:t>The metric definition is not frozen.</a:t>
+            </a:r>
+          </a:p>
+        </p:txBody>
+      </p:sp>
+      <p:sp>
+        <p:nvSpPr>
+          <p:cNvPr id="100203" name="Element-26"/>
+          <p:cNvSpPr/>
+          <p:nvPr/>
+        </p:nvSpPr>
+        <p:spPr>
+          <a:xfrm xmlns:a="http://schemas.openxmlformats.org/drawingml/2006/main">
+            <a:off x="792000" y="5335200"/>
+            <a:ext cx="10608000" cy="10800"/>
+          </a:xfrm>
+          <a:prstGeom xmlns:a="http://schemas.openxmlformats.org/drawingml/2006/main" prst="rect">
+            <a:avLst/>
+          </a:prstGeom>
+          <a:solidFill xmlns:a="http://schemas.openxmlformats.org/drawingml/2006/main">
+            <a:srgbClr val="D9DEE5"/>
+          </a:solidFill>
+          <a:ln xmlns:a="http://schemas.openxmlformats.org/drawingml/2006/main">
+            <a:noFill/>
+          </a:ln>
+        </p:spPr>
+        <p:txBody>
+          <a:bodyPr xmlns:a="http://schemas.openxmlformats.org/drawingml/2006/main" lIns="0" tIns="0" rIns="0" bIns="0" anchor="ctr">
+            <a:noAutofit/>
+          </a:bodyPr>
+          <a:lstStyle xmlns:a="http://schemas.openxmlformats.org/drawingml/2006/main"/>
+          <a:p xmlns:a="http://schemas.openxmlformats.org/drawingml/2006/main">
+            <a:pPr algn="l"/>
+            <a:endParaRPr lang="en-US" sz="1800" b="0" i="0">
+              <a:solidFill>
+                <a:srgbClr val="20252D"/>
+              </a:solidFill>
+              <a:latin typeface="Arial"/>
+              <a:ea typeface="Arial"/>
+            </a:endParaRPr>
+          </a:p>
+        </p:txBody>
+      </p:sp>
+      <p:sp>
+        <p:nvSpPr>
+          <p:cNvPr id="100204" name="Caption-8"/>
+          <p:cNvSpPr/>
+          <p:nvPr/>
+        </p:nvSpPr>
+        <p:spPr>
+          <a:xfrm xmlns:a="http://schemas.openxmlformats.org/drawingml/2006/main">
+            <a:off x="792000" y="5356800"/>
+            <a:ext cx="10608000" cy="864000"/>
+          </a:xfrm>
+          <a:prstGeom xmlns:a="http://schemas.openxmlformats.org/drawingml/2006/main" prst="rect">
+            <a:avLst/>
+          </a:prstGeom>
+          <a:noFill xmlns:a="http://schemas.openxmlformats.org/drawingml/2006/main"/>
+          <a:ln xmlns:a="http://schemas.openxmlformats.org/drawingml/2006/main">
+            <a:noFill/>
+          </a:ln>
+        </p:spPr>
+        <p:txBody>
+          <a:bodyPr xmlns:a="http://schemas.openxmlformats.org/drawingml/2006/main" lIns="0" tIns="0" rIns="0" bIns="0" anchor="t">
+            <a:noAutofit/>
+          </a:bodyPr>
+          <a:lstStyle xmlns:a="http://schemas.openxmlformats.org/drawingml/2006/main"/>
+          <a:p xmlns:a="http://schemas.openxmlformats.org/drawingml/2006/main">
+            <a:pPr algn="l"/>
+            <a:r>
+              <a:rPr lang="en-US" sz="2100" b="1">
+                <a:solidFill>
+                  <a:srgbClr val="B60036"/>
+                </a:solidFill>
+                <a:latin typeface="Arial"/>
+                <a:ea typeface="Arial"/>
+              </a:rPr>
+              <a:t>A successful run is not a measurement: one early run reported success while every model arm had failed.</a:t>
+            </a:r>
+          </a:p>
+        </p:txBody>
+      </p:sp>
+      <p:sp>
+        <p:nvSpPr>
+          <p:cNvPr id="100205" name="Element-28"/>
+          <p:cNvSpPr/>
+          <p:nvPr/>
+        </p:nvSpPr>
+        <p:spPr>
+          <a:xfrm xmlns:a="http://schemas.openxmlformats.org/drawingml/2006/main">
+            <a:off x="792000" y="6444000"/>
+            <a:ext cx="5040000" cy="180000"/>
+          </a:xfrm>
+          <a:prstGeom xmlns:a="http://schemas.openxmlformats.org/drawingml/2006/main" prst="rect">
+            <a:avLst/>
+          </a:prstGeom>
+          <a:noFill xmlns:a="http://schemas.openxmlformats.org/drawingml/2006/main"/>
+          <a:ln xmlns:a="http://schemas.openxmlformats.org/drawingml/2006/main">
+            <a:noFill/>
+          </a:ln>
+        </p:spPr>
+        <p:txBody>
+          <a:bodyPr xmlns:a="http://schemas.openxmlformats.org/drawingml/2006/main" lIns="0" tIns="0" rIns="0" bIns="0" anchor="ctr">
+            <a:noAutofit/>
+          </a:bodyPr>
+          <a:lstStyle xmlns:a="http://schemas.openxmlformats.org/drawingml/2006/main"/>
+          <a:p xmlns:a="http://schemas.openxmlformats.org/drawingml/2006/main">
+            <a:pPr algn="l"/>
+            <a:r>
+              <a:rPr lang="en-US" sz="800" b="0" i="0">
+                <a:solidFill>
+                  <a:srgbClr val="5C626C"/>
+                </a:solidFill>
+                <a:latin typeface="Arial"/>
+                <a:ea typeface="Arial"/>
+              </a:rPr>
+              <a:t>Project LANCE — NATO SPS G6259</a:t>
+            </a:r>
+          </a:p>
+        </p:txBody>
+      </p:sp>
+      <p:sp>
+        <p:nvSpPr>
+          <p:cNvPr id="100206" name="Element-29"/>
+          <p:cNvSpPr/>
+          <p:nvPr/>
+        </p:nvSpPr>
+        <p:spPr>
+          <a:xfrm xmlns:a="http://schemas.openxmlformats.org/drawingml/2006/main">
+            <a:off x="10752000" y="6444000"/>
+            <a:ext cx="648000" cy="180000"/>
+          </a:xfrm>
+          <a:prstGeom xmlns:a="http://schemas.openxmlformats.org/drawingml/2006/main" prst="rect">
+            <a:avLst/>
+          </a:prstGeom>
+          <a:noFill xmlns:a="http://schemas.openxmlformats.org/drawingml/2006/main"/>
+          <a:ln xmlns:a="http://schemas.openxmlformats.org/drawingml/2006/main">
+            <a:noFill/>
+          </a:ln>
+        </p:spPr>
+        <p:txBody>
+          <a:bodyPr xmlns:a="http://schemas.openxmlformats.org/drawingml/2006/main" lIns="0" tIns="0" rIns="0" bIns="0" anchor="ctr">
+            <a:noAutofit/>
+          </a:bodyPr>
+          <a:lstStyle xmlns:a="http://schemas.openxmlformats.org/drawingml/2006/main"/>
+          <a:p xmlns:a="http://schemas.openxmlformats.org/drawingml/2006/main">
+            <a:pPr algn="r"/>
+            <a:r>
+              <a:rPr lang="en-US" sz="800" b="0" i="0">
+                <a:solidFill>
+                  <a:srgbClr val="5C626C"/>
+                </a:solidFill>
+                <a:latin typeface="Arial"/>
+                <a:ea typeface="Arial"/>
+              </a:rPr>
+              <a:t>8</a:t>
+            </a:r>
+          </a:p>
+        </p:txBody>
+      </p:sp>
+    </p:spTree>
+  </p:cSld>
+</p:sld>
+</file>
+
+<file path=ppt/slides/slide9.xml><?xml version="1.0" encoding="utf-8"?>
+<p:sld xmlns:p="http://schemas.openxmlformats.org/presentationml/2006/main">
+  <p:cSld>
+    <p:bg>
+      <p:bgPr>
+        <a:solidFill xmlns:a="http://schemas.openxmlformats.org/drawingml/2006/main">
+          <a:srgbClr val="FFFFFF"/>
+        </a:solidFill>
+      </p:bgPr>
+    </p:bg>
+    <p:spTree>
+      <p:nvGrpSpPr>
+        <p:cNvPr id="1" name=""/>
+        <p:cNvGrpSpPr/>
+        <p:nvPr/>
+      </p:nvGrpSpPr>
+      <p:grpSpPr/>
+      <p:pic>
+        <p:nvPicPr>
+          <p:cNvPr id="100207" name="Picture 1" descr="SMart ILIA — UMONS"/>
+          <p:cNvPicPr>
+            <a:picLocks xmlns:a="http://schemas.openxmlformats.org/drawingml/2006/main" noChangeAspect="1"/>
+          </p:cNvPicPr>
+          <p:nvPr/>
+        </p:nvPicPr>
+        <p:blipFill>
+          <a:blip xmlns:r="http://schemas.openxmlformats.org/officeDocument/2006/relationships" xmlns:a="http://schemas.openxmlformats.org/drawingml/2006/main" r:embed="R60c590c97f374bdf"/>
+          <a:stretch xmlns:a="http://schemas.openxmlformats.org/drawingml/2006/main">
+            <a:fillRect/>
+          </a:stretch>
+        </p:blipFill>
+        <p:spPr>
+          <a:xfrm xmlns:a="http://schemas.openxmlformats.org/drawingml/2006/main">
+            <a:off x="9702000" y="216000"/>
+            <a:ext cx="1699200" cy="582331"/>
+          </a:xfrm>
+          <a:prstGeom xmlns:a="http://schemas.openxmlformats.org/drawingml/2006/main" prst="rect">
+            <a:avLst/>
+          </a:prstGeom>
+        </p:spPr>
+      </p:pic>
+      <p:sp>
+        <p:nvSpPr>
+          <p:cNvPr id="100208" name="Element-4"/>
+          <p:cNvSpPr/>
+          <p:nvPr/>
+        </p:nvSpPr>
+        <p:spPr>
+          <a:xfrm xmlns:a="http://schemas.openxmlformats.org/drawingml/2006/main">
+            <a:off x="792000" y="309600"/>
+            <a:ext cx="1764000" cy="208800"/>
+          </a:xfrm>
+          <a:prstGeom xmlns:a="http://schemas.openxmlformats.org/drawingml/2006/main" prst="rect">
+            <a:avLst/>
+          </a:prstGeom>
+          <a:noFill xmlns:a="http://schemas.openxmlformats.org/drawingml/2006/main"/>
+          <a:ln xmlns:a="http://schemas.openxmlformats.org/drawingml/2006/main">
+            <a:noFill/>
+          </a:ln>
+        </p:spPr>
+        <p:txBody>
+          <a:bodyPr xmlns:a="http://schemas.openxmlformats.org/drawingml/2006/main" lIns="0" tIns="0" rIns="0" bIns="0" anchor="ctr">
+            <a:noAutofit/>
+          </a:bodyPr>
+          <a:lstStyle xmlns:a="http://schemas.openxmlformats.org/drawingml/2006/main"/>
+          <a:p xmlns:a="http://schemas.openxmlformats.org/drawingml/2006/main">
+            <a:pPr algn="l"/>
+            <a:r>
+              <a:rPr lang="en-US" sz="950" b="0" i="0">
+                <a:solidFill>
+                  <a:srgbClr val="5C626C"/>
+                </a:solidFill>
+                <a:latin typeface="Arial"/>
+                <a:ea typeface="Arial"/>
+              </a:rPr>
+              <a:t>Objective</a:t>
+            </a:r>
+          </a:p>
+        </p:txBody>
+      </p:sp>
+      <p:sp>
+        <p:nvSpPr>
+          <p:cNvPr id="100209" name="Element-5"/>
+          <p:cNvSpPr/>
+          <p:nvPr/>
+        </p:nvSpPr>
+        <p:spPr>
+          <a:xfrm xmlns:a="http://schemas.openxmlformats.org/drawingml/2006/main">
+            <a:off x="2736000" y="309600"/>
+            <a:ext cx="1764000" cy="208800"/>
+          </a:xfrm>
+          <a:prstGeom xmlns:a="http://schemas.openxmlformats.org/drawingml/2006/main" prst="rect">
+            <a:avLst/>
+          </a:prstGeom>
+          <a:noFill xmlns:a="http://schemas.openxmlformats.org/drawingml/2006/main"/>
+          <a:ln xmlns:a="http://schemas.openxmlformats.org/drawingml/2006/main">
+            <a:noFill/>
+          </a:ln>
+        </p:spPr>
+        <p:txBody>
+          <a:bodyPr xmlns:a="http://schemas.openxmlformats.org/drawingml/2006/main" lIns="0" tIns="0" rIns="0" bIns="0" anchor="ctr">
+            <a:noAutofit/>
+          </a:bodyPr>
+          <a:lstStyle xmlns:a="http://schemas.openxmlformats.org/drawingml/2006/main"/>
+          <a:p xmlns:a="http://schemas.openxmlformats.org/drawingml/2006/main">
+            <a:pPr algn="l"/>
+            <a:r>
+              <a:rPr lang="en-US" sz="950" b="0" i="0">
+                <a:solidFill>
+                  <a:srgbClr val="5C626C"/>
+                </a:solidFill>
+                <a:latin typeface="Arial"/>
+                <a:ea typeface="Arial"/>
+              </a:rPr>
+              <a:t>Instrument</a:t>
+            </a:r>
+          </a:p>
+        </p:txBody>
+      </p:sp>
+      <p:sp>
+        <p:nvSpPr>
+          <p:cNvPr id="100210" name="Element-6"/>
+          <p:cNvSpPr/>
+          <p:nvPr/>
+        </p:nvSpPr>
+        <p:spPr>
+          <a:xfrm xmlns:a="http://schemas.openxmlformats.org/drawingml/2006/main">
+            <a:off x="4680000" y="309600"/>
+            <a:ext cx="1764000" cy="208800"/>
+          </a:xfrm>
+          <a:prstGeom xmlns:a="http://schemas.openxmlformats.org/drawingml/2006/main" prst="rect">
+            <a:avLst/>
+          </a:prstGeom>
+          <a:noFill xmlns:a="http://schemas.openxmlformats.org/drawingml/2006/main"/>
+          <a:ln xmlns:a="http://schemas.openxmlformats.org/drawingml/2006/main">
+            <a:noFill/>
+          </a:ln>
+        </p:spPr>
+        <p:txBody>
+          <a:bodyPr xmlns:a="http://schemas.openxmlformats.org/drawingml/2006/main" lIns="0" tIns="0" rIns="0" bIns="0" anchor="ctr">
+            <a:noAutofit/>
+          </a:bodyPr>
+          <a:lstStyle xmlns:a="http://schemas.openxmlformats.org/drawingml/2006/main"/>
+          <a:p xmlns:a="http://schemas.openxmlformats.org/drawingml/2006/main">
+            <a:pPr algn="l"/>
+            <a:r>
+              <a:rPr lang="en-US" sz="950" b="0" i="0">
+                <a:solidFill>
+                  <a:srgbClr val="5C626C"/>
+                </a:solidFill>
+                <a:latin typeface="Arial"/>
+                <a:ea typeface="Arial"/>
+              </a:rPr>
+              <a:t>Hypotheses</a:t>
+            </a:r>
+          </a:p>
+        </p:txBody>
+      </p:sp>
+      <p:sp>
+        <p:nvSpPr>
+          <p:cNvPr id="100211" name="Element-7"/>
+          <p:cNvSpPr/>
+          <p:nvPr/>
+        </p:nvSpPr>
+        <p:spPr>
+          <a:xfrm xmlns:a="http://schemas.openxmlformats.org/drawingml/2006/main">
+            <a:off x="6624000" y="309600"/>
+            <a:ext cx="1764000" cy="208800"/>
+          </a:xfrm>
+          <a:prstGeom xmlns:a="http://schemas.openxmlformats.org/drawingml/2006/main" prst="rect">
+            <a:avLst/>
+          </a:prstGeom>
+          <a:noFill xmlns:a="http://schemas.openxmlformats.org/drawingml/2006/main"/>
+          <a:ln xmlns:a="http://schemas.openxmlformats.org/drawingml/2006/main">
+            <a:noFill/>
+          </a:ln>
+        </p:spPr>
+        <p:txBody>
+          <a:bodyPr xmlns:a="http://schemas.openxmlformats.org/drawingml/2006/main" lIns="0" tIns="0" rIns="0" bIns="0" anchor="ctr">
+            <a:noAutofit/>
+          </a:bodyPr>
+          <a:lstStyle xmlns:a="http://schemas.openxmlformats.org/drawingml/2006/main"/>
+          <a:p xmlns:a="http://schemas.openxmlformats.org/drawingml/2006/main">
+            <a:pPr algn="l"/>
+            <a:r>
+              <a:rPr lang="en-US" sz="950" b="0" i="0">
+                <a:solidFill>
+                  <a:srgbClr val="B60036"/>
+                </a:solidFill>
+                <a:latin typeface="Arial"/>
+                <a:ea typeface="Arial"/>
+              </a:rPr>
+              <a:t>Outlook</a:t>
+            </a:r>
+          </a:p>
+        </p:txBody>
+      </p:sp>
+      <p:sp>
+        <p:nvSpPr>
+          <p:cNvPr id="100212" name="Element-8"/>
+          <p:cNvSpPr/>
+          <p:nvPr/>
+        </p:nvSpPr>
+        <p:spPr>
+          <a:xfrm xmlns:a="http://schemas.openxmlformats.org/drawingml/2006/main">
+            <a:off x="6624000" y="529200"/>
+            <a:ext cx="1764000" cy="16200"/>
+          </a:xfrm>
+          <a:prstGeom xmlns:a="http://schemas.openxmlformats.org/drawingml/2006/main" prst="rect">
+            <a:avLst/>
+          </a:prstGeom>
+          <a:solidFill xmlns:a="http://schemas.openxmlformats.org/drawingml/2006/main">
+            <a:srgbClr val="B60036"/>
+          </a:solidFill>
+          <a:ln xmlns:a="http://schemas.openxmlformats.org/drawingml/2006/main">
+            <a:noFill/>
+          </a:ln>
+        </p:spPr>
+        <p:txBody>
+          <a:bodyPr xmlns:a="http://schemas.openxmlformats.org/drawingml/2006/main" lIns="0" tIns="0" rIns="0" bIns="0" anchor="ctr">
+            <a:noAutofit/>
+          </a:bodyPr>
+          <a:lstStyle xmlns:a="http://schemas.openxmlformats.org/drawingml/2006/main"/>
+          <a:p xmlns:a="http://schemas.openxmlformats.org/drawingml/2006/main">
+            <a:pPr algn="l"/>
+            <a:endParaRPr lang="en-US" sz="1800" b="0" i="0">
+              <a:solidFill>
+                <a:srgbClr val="20252D"/>
+              </a:solidFill>
+              <a:latin typeface="Arial"/>
+              <a:ea typeface="Arial"/>
+            </a:endParaRPr>
+          </a:p>
+        </p:txBody>
+      </p:sp>
+      <p:sp>
+        <p:nvSpPr>
+          <p:cNvPr id="100213" name="Title"/>
+          <p:cNvSpPr/>
+          <p:nvPr/>
+        </p:nvSpPr>
+        <p:spPr>
+          <a:xfrm xmlns:a="http://schemas.openxmlformats.org/drawingml/2006/main">
+            <a:off x="792000" y="612000"/>
+            <a:ext cx="8748000" cy="648000"/>
+          </a:xfrm>
+          <a:prstGeom xmlns:a="http://schemas.openxmlformats.org/drawingml/2006/main" prst="rect">
+            <a:avLst/>
+          </a:prstGeom>
+          <a:noFill xmlns:a="http://schemas.openxmlformats.org/drawingml/2006/main"/>
+          <a:ln xmlns:a="http://schemas.openxmlformats.org/drawingml/2006/main">
+            <a:noFill/>
+          </a:ln>
+        </p:spPr>
+        <p:txBody>
+          <a:bodyPr xmlns:a="http://schemas.openxmlformats.org/drawingml/2006/main" lIns="0" tIns="0" rIns="0" bIns="0" anchor="ctr">
+            <a:noAutofit/>
+          </a:bodyPr>
+          <a:lstStyle xmlns:a="http://schemas.openxmlformats.org/drawingml/2006/main"/>
+          <a:p xmlns:a="http://schemas.openxmlformats.org/drawingml/2006/main">
+            <a:pPr algn="l"/>
+            <a:r>
+              <a:rPr lang="en-US" sz="2900" b="1" i="0">
+                <a:solidFill>
+                  <a:srgbClr val="20252D"/>
+                </a:solidFill>
+                <a:latin typeface="Arial"/>
+                <a:ea typeface="Arial"/>
+              </a:rPr>
+              <a:t>Next steps</a:t>
+            </a:r>
+          </a:p>
+        </p:txBody>
+      </p:sp>
+      <p:sp>
+        <p:nvSpPr>
+          <p:cNvPr id="100214" name="Element-10"/>
+          <p:cNvSpPr/>
+          <p:nvPr/>
+        </p:nvSpPr>
+        <p:spPr>
+          <a:xfrm xmlns:a="http://schemas.openxmlformats.org/drawingml/2006/main">
+            <a:off x="792000" y="1303200"/>
+            <a:ext cx="1224000" cy="25200"/>
+          </a:xfrm>
+          <a:prstGeom xmlns:a="http://schemas.openxmlformats.org/drawingml/2006/main" prst="rect">
+            <a:avLst/>
+          </a:prstGeom>
+          <a:solidFill xmlns:a="http://schemas.openxmlformats.org/drawingml/2006/main">
+            <a:srgbClr val="B60036"/>
+          </a:solidFill>
+          <a:ln xmlns:a="http://schemas.openxmlformats.org/drawingml/2006/main">
+            <a:noFill/>
+          </a:ln>
+        </p:spPr>
+        <p:txBody>
+          <a:bodyPr xmlns:a="http://schemas.openxmlformats.org/drawingml/2006/main" lIns="0" tIns="0" rIns="0" bIns="0" anchor="ctr">
+            <a:noAutofit/>
+          </a:bodyPr>
+          <a:lstStyle xmlns:a="http://schemas.openxmlformats.org/drawingml/2006/main"/>
+          <a:p xmlns:a="http://schemas.openxmlformats.org/drawingml/2006/main">
+            <a:pPr algn="l"/>
+            <a:endParaRPr lang="en-US" sz="1800" b="0" i="0">
+              <a:solidFill>
+                <a:srgbClr val="20252D"/>
+              </a:solidFill>
+              <a:latin typeface="Arial"/>
+              <a:ea typeface="Arial"/>
+            </a:endParaRPr>
+          </a:p>
+        </p:txBody>
+      </p:sp>
+      <p:sp>
+        <p:nvSpPr>
+          <p:cNvPr id="100215" name="Fixed-11"/>
+          <p:cNvSpPr/>
+          <p:nvPr/>
+        </p:nvSpPr>
+        <p:spPr>
+          <a:xfrm xmlns:a="http://schemas.openxmlformats.org/drawingml/2006/main">
+            <a:off x="792000" y="1782000"/>
+            <a:ext cx="432000" cy="558000"/>
+          </a:xfrm>
+          <a:prstGeom xmlns:a="http://schemas.openxmlformats.org/drawingml/2006/main" prst="rect">
+            <a:avLst/>
+          </a:prstGeom>
+          <a:noFill xmlns:a="http://schemas.openxmlformats.org/drawingml/2006/main"/>
+          <a:ln xmlns:a="http://schemas.openxmlformats.org/drawingml/2006/main">
+            <a:noFill/>
+          </a:ln>
+        </p:spPr>
+        <p:txBody>
+          <a:bodyPr xmlns:a="http://schemas.openxmlformats.org/drawingml/2006/main" lIns="0" tIns="0" rIns="0" bIns="0" anchor="ctr">
+            <a:noAutofit/>
+          </a:bodyPr>
+          <a:lstStyle xmlns:a="http://schemas.openxmlformats.org/drawingml/2006/main"/>
+          <a:p xmlns:a="http://schemas.openxmlformats.org/drawingml/2006/main">
+            <a:pPr algn="l"/>
+            <a:r>
+              <a:rPr lang="en-US" sz="2200" b="1" i="0">
+                <a:solidFill>
+                  <a:srgbClr val="B60036"/>
+                </a:solidFill>
+                <a:latin typeface="Arial"/>
+                <a:ea typeface="Arial"/>
+              </a:rPr>
+              <a:t>1</a:t>
+            </a:r>
+          </a:p>
+        </p:txBody>
+      </p:sp>
+      <p:sp>
+        <p:nvSpPr>
+          <p:cNvPr id="100216" name="Fixed-12"/>
+          <p:cNvSpPr/>
+          <p:nvPr/>
+        </p:nvSpPr>
+        <p:spPr>
+          <a:xfrm xmlns:a="http://schemas.openxmlformats.org/drawingml/2006/main">
+            <a:off x="1494000" y="1782000"/>
+            <a:ext cx="6252400" cy="558000"/>
+          </a:xfrm>
+          <a:prstGeom xmlns:a="http://schemas.openxmlformats.org/drawingml/2006/main" prst="rect">
+            <a:avLst/>
+          </a:prstGeom>
+          <a:noFill xmlns:a="http://schemas.openxmlformats.org/drawingml/2006/main"/>
+          <a:ln xmlns:a="http://schemas.openxmlformats.org/drawingml/2006/main">
+            <a:noFill/>
+          </a:ln>
+        </p:spPr>
+        <p:txBody>
+          <a:bodyPr xmlns:a="http://schemas.openxmlformats.org/drawingml/2006/main" lIns="0" tIns="0" rIns="0" bIns="0" anchor="ctr">
+            <a:noAutofit/>
+          </a:bodyPr>
+          <a:lstStyle xmlns:a="http://schemas.openxmlformats.org/drawingml/2006/main"/>
+          <a:p xmlns:a="http://schemas.openxmlformats.org/drawingml/2006/main">
+            <a:pPr algn="l"/>
+            <a:r>
+              <a:rPr lang="en-US" sz="2000" b="0" i="0">
+                <a:solidFill>
+                  <a:srgbClr val="20252D"/>
+                </a:solidFill>
+                <a:latin typeface="Arial"/>
+                <a:ea typeface="Arial"/>
+              </a:rPr>
+              <a:t>Execute V0 on a held-out instance</a:t>
+            </a:r>
+          </a:p>
+        </p:txBody>
+      </p:sp>
+      <p:sp>
+        <p:nvSpPr>
+          <p:cNvPr id="100217" name="Element-13"/>
+          <p:cNvSpPr/>
+          <p:nvPr/>
+        </p:nvSpPr>
+        <p:spPr>
+          <a:xfrm xmlns:a="http://schemas.openxmlformats.org/drawingml/2006/main">
+            <a:off x="1494000" y="2430000"/>
+            <a:ext cx="6252400" cy="10800"/>
+          </a:xfrm>
+          <a:prstGeom xmlns:a="http://schemas.openxmlformats.org/drawingml/2006/main" prst="rect">
+            <a:avLst/>
+          </a:prstGeom>
+          <a:solidFill xmlns:a="http://schemas.openxmlformats.org/drawingml/2006/main">
+            <a:srgbClr val="D9DEE5"/>
+          </a:solidFill>
+          <a:ln xmlns:a="http://schemas.openxmlformats.org/drawingml/2006/main">
+            <a:noFill/>
+          </a:ln>
+        </p:spPr>
+        <p:txBody>
+          <a:bodyPr xmlns:a="http://schemas.openxmlformats.org/drawingml/2006/main" lIns="0" tIns="0" rIns="0" bIns="0" anchor="ctr">
+            <a:noAutofit/>
+          </a:bodyPr>
+          <a:lstStyle xmlns:a="http://schemas.openxmlformats.org/drawingml/2006/main"/>
+          <a:p xmlns:a="http://schemas.openxmlformats.org/drawingml/2006/main">
+            <a:pPr algn="l"/>
+            <a:endParaRPr lang="en-US" sz="1800" b="0" i="0">
+              <a:solidFill>
+                <a:srgbClr val="20252D"/>
+              </a:solidFill>
+              <a:latin typeface="Arial"/>
+              <a:ea typeface="Arial"/>
+            </a:endParaRPr>
+          </a:p>
+        </p:txBody>
+      </p:sp>
+      <p:sp>
+        <p:nvSpPr>
+          <p:cNvPr id="100218" name="Fixed-14"/>
+          <p:cNvSpPr/>
+          <p:nvPr/>
+        </p:nvSpPr>
+        <p:spPr>
+          <a:xfrm xmlns:a="http://schemas.openxmlformats.org/drawingml/2006/main">
+            <a:off x="792000" y="2718000"/>
+            <a:ext cx="432000" cy="558000"/>
+          </a:xfrm>
+          <a:prstGeom xmlns:a="http://schemas.openxmlformats.org/drawingml/2006/main" prst="rect">
+            <a:avLst/>
+          </a:prstGeom>
+          <a:noFill xmlns:a="http://schemas.openxmlformats.org/drawingml/2006/main"/>
+          <a:ln xmlns:a="http://schemas.openxmlformats.org/drawingml/2006/main">
+            <a:noFill/>
+          </a:ln>
+        </p:spPr>
+        <p:txBody>
+          <a:bodyPr xmlns:a="http://schemas.openxmlformats.org/drawingml/2006/main" lIns="0" tIns="0" rIns="0" bIns="0" anchor="ctr">
+            <a:noAutofit/>
+          </a:bodyPr>
+          <a:lstStyle xmlns:a="http://schemas.openxmlformats.org/drawingml/2006/main"/>
+          <a:p xmlns:a="http://schemas.openxmlformats.org/drawingml/2006/main">
+            <a:pPr algn="l"/>
+            <a:r>
+              <a:rPr lang="en-US" sz="2200" b="1" i="0">
+                <a:solidFill>
+                  <a:srgbClr val="B60036"/>
+                </a:solidFill>
+                <a:latin typeface="Arial"/>
+                <a:ea typeface="Arial"/>
+              </a:rPr>
+              <a:t>2</a:t>
+            </a:r>
+          </a:p>
+        </p:txBody>
+      </p:sp>
+      <p:sp>
+        <p:nvSpPr>
+          <p:cNvPr id="100219" name="Fixed-15"/>
+          <p:cNvSpPr/>
+          <p:nvPr/>
+        </p:nvSpPr>
+        <p:spPr>
+          <a:xfrm xmlns:a="http://schemas.openxmlformats.org/drawingml/2006/main">
+            <a:off x="1494000" y="2718000"/>
+            <a:ext cx="6252400" cy="558000"/>
+          </a:xfrm>
+          <a:prstGeom xmlns:a="http://schemas.openxmlformats.org/drawingml/2006/main" prst="rect">
+            <a:avLst/>
+          </a:prstGeom>
+          <a:noFill xmlns:a="http://schemas.openxmlformats.org/drawingml/2006/main"/>
+          <a:ln xmlns:a="http://schemas.openxmlformats.org/drawingml/2006/main">
+            <a:noFill/>
+          </a:ln>
+        </p:spPr>
+        <p:txBody>
+          <a:bodyPr xmlns:a="http://schemas.openxmlformats.org/drawingml/2006/main" lIns="0" tIns="0" rIns="0" bIns="0" anchor="ctr">
+            <a:noAutofit/>
+          </a:bodyPr>
+          <a:lstStyle xmlns:a="http://schemas.openxmlformats.org/drawingml/2006/main"/>
+          <a:p xmlns:a="http://schemas.openxmlformats.org/drawingml/2006/main">
+            <a:pPr algn="l"/>
+            <a:r>
+              <a:rPr lang="en-US" sz="2000" b="0" i="0">
+                <a:solidFill>
+                  <a:srgbClr val="20252D"/>
+                </a:solidFill>
+                <a:latin typeface="Arial"/>
+                <a:ea typeface="Arial"/>
+              </a:rPr>
+              <a:t>Develop a parameterisable test harness</a:t>
+            </a:r>
+          </a:p>
+        </p:txBody>
+      </p:sp>
+      <p:sp>
+        <p:nvSpPr>
+          <p:cNvPr id="100220" name="Element-16"/>
+          <p:cNvSpPr/>
+          <p:nvPr/>
+        </p:nvSpPr>
+        <p:spPr>
+          <a:xfrm xmlns:a="http://schemas.openxmlformats.org/drawingml/2006/main">
+            <a:off x="1494000" y="3366000"/>
+            <a:ext cx="6252400" cy="10800"/>
+          </a:xfrm>
+          <a:prstGeom xmlns:a="http://schemas.openxmlformats.org/drawingml/2006/main" prst="rect">
+            <a:avLst/>
+          </a:prstGeom>
+          <a:solidFill xmlns:a="http://schemas.openxmlformats.org/drawingml/2006/main">
+            <a:srgbClr val="D9DEE5"/>
+          </a:solidFill>
+          <a:ln xmlns:a="http://schemas.openxmlformats.org/drawingml/2006/main">
+            <a:noFill/>
+          </a:ln>
+        </p:spPr>
+        <p:txBody>
+          <a:bodyPr xmlns:a="http://schemas.openxmlformats.org/drawingml/2006/main" lIns="0" tIns="0" rIns="0" bIns="0" anchor="ctr">
+            <a:noAutofit/>
+          </a:bodyPr>
+          <a:lstStyle xmlns:a="http://schemas.openxmlformats.org/drawingml/2006/main"/>
+          <a:p xmlns:a="http://schemas.openxmlformats.org/drawingml/2006/main">
+            <a:pPr algn="l"/>
+            <a:endParaRPr lang="en-US" sz="1800" b="0" i="0">
+              <a:solidFill>
+                <a:srgbClr val="20252D"/>
+              </a:solidFill>
+              <a:latin typeface="Arial"/>
+              <a:ea typeface="Arial"/>
+            </a:endParaRPr>
+          </a:p>
+        </p:txBody>
+      </p:sp>
+      <p:sp>
+        <p:nvSpPr>
+          <p:cNvPr id="100221" name="Fixed-17"/>
+          <p:cNvSpPr/>
+          <p:nvPr/>
+        </p:nvSpPr>
+        <p:spPr>
+          <a:xfrm xmlns:a="http://schemas.openxmlformats.org/drawingml/2006/main">
+            <a:off x="792000" y="3654000"/>
+            <a:ext cx="432000" cy="558000"/>
+          </a:xfrm>
+          <a:prstGeom xmlns:a="http://schemas.openxmlformats.org/drawingml/2006/main" prst="rect">
+            <a:avLst/>
+          </a:prstGeom>
+          <a:noFill xmlns:a="http://schemas.openxmlformats.org/drawingml/2006/main"/>
+          <a:ln xmlns:a="http://schemas.openxmlformats.org/drawingml/2006/main">
+            <a:noFill/>
+          </a:ln>
+        </p:spPr>
+        <p:txBody>
+          <a:bodyPr xmlns:a="http://schemas.openxmlformats.org/drawingml/2006/main" lIns="0" tIns="0" rIns="0" bIns="0" anchor="ctr">
+            <a:noAutofit/>
+          </a:bodyPr>
+          <a:lstStyle xmlns:a="http://schemas.openxmlformats.org/drawingml/2006/main"/>
+          <a:p xmlns:a="http://schemas.openxmlformats.org/drawingml/2006/main">
+            <a:pPr algn="l"/>
+            <a:r>
+              <a:rPr lang="en-US" sz="2200" b="1" i="0">
+                <a:solidFill>
+                  <a:srgbClr val="B60036"/>
+                </a:solidFill>
+                <a:latin typeface="Arial"/>
+                <a:ea typeface="Arial"/>
+              </a:rPr>
+              <a:t>3</a:t>
+            </a:r>
+          </a:p>
+        </p:txBody>
+      </p:sp>
+      <p:sp>
+        <p:nvSpPr>
+          <p:cNvPr id="100222" name="Fixed-18"/>
+          <p:cNvSpPr/>
+          <p:nvPr/>
+        </p:nvSpPr>
+        <p:spPr>
+          <a:xfrm xmlns:a="http://schemas.openxmlformats.org/drawingml/2006/main">
+            <a:off x="1494000" y="3654000"/>
+            <a:ext cx="6252400" cy="558000"/>
+          </a:xfrm>
+          <a:prstGeom xmlns:a="http://schemas.openxmlformats.org/drawingml/2006/main" prst="rect">
+            <a:avLst/>
+          </a:prstGeom>
+          <a:noFill xmlns:a="http://schemas.openxmlformats.org/drawingml/2006/main"/>
+          <a:ln xmlns:a="http://schemas.openxmlformats.org/drawingml/2006/main">
+            <a:noFill/>
+          </a:ln>
+        </p:spPr>
+        <p:txBody>
+          <a:bodyPr xmlns:a="http://schemas.openxmlformats.org/drawingml/2006/main" lIns="0" tIns="0" rIns="0" bIns="0" anchor="ctr">
+            <a:noAutofit/>
+          </a:bodyPr>
+          <a:lstStyle xmlns:a="http://schemas.openxmlformats.org/drawingml/2006/main"/>
+          <a:p xmlns:a="http://schemas.openxmlformats.org/drawingml/2006/main">
+            <a:pPr algn="l"/>
+            <a:r>
+              <a:rPr lang="en-US" sz="2000" b="0" i="0">
+                <a:solidFill>
+                  <a:srgbClr val="20252D"/>
+                </a:solidFill>
+                <a:latin typeface="Arial"/>
+                <a:ea typeface="Arial"/>
+              </a:rPr>
+              <a:t>Build the scenario families for H2, H3 and H4</a:t>
+            </a:r>
+          </a:p>
+        </p:txBody>
+      </p:sp>
+      <p:sp>
+        <p:nvSpPr>
+          <p:cNvPr id="100223" name="Element-19"/>
+          <p:cNvSpPr/>
+          <p:nvPr/>
+        </p:nvSpPr>
+        <p:spPr>
+          <a:xfrm xmlns:a="http://schemas.openxmlformats.org/drawingml/2006/main">
+            <a:off x="1494000" y="4302000"/>
+            <a:ext cx="6252400" cy="10800"/>
+          </a:xfrm>
+          <a:prstGeom xmlns:a="http://schemas.openxmlformats.org/drawingml/2006/main" prst="rect">
+            <a:avLst/>
+          </a:prstGeom>
+          <a:solidFill xmlns:a="http://schemas.openxmlformats.org/drawingml/2006/main">
+            <a:srgbClr val="D9DEE5"/>
+          </a:solidFill>
+          <a:ln xmlns:a="http://schemas.openxmlformats.org/drawingml/2006/main">
+            <a:noFill/>
+          </a:ln>
+        </p:spPr>
+        <p:txBody>
+          <a:bodyPr xmlns:a="http://schemas.openxmlformats.org/drawingml/2006/main" lIns="0" tIns="0" rIns="0" bIns="0" anchor="ctr">
+            <a:noAutofit/>
+          </a:bodyPr>
+          <a:lstStyle xmlns:a="http://schemas.openxmlformats.org/drawingml/2006/main"/>
+          <a:p xmlns:a="http://schemas.openxmlformats.org/drawingml/2006/main">
+            <a:pPr algn="l"/>
+            <a:endParaRPr lang="en-US" sz="1800" b="0" i="0">
+              <a:solidFill>
+                <a:srgbClr val="20252D"/>
+              </a:solidFill>
+              <a:latin typeface="Arial"/>
+              <a:ea typeface="Arial"/>
+            </a:endParaRPr>
+          </a:p>
+        </p:txBody>
+      </p:sp>
+      <p:sp>
+        <p:nvSpPr>
+          <p:cNvPr id="100224" name="Fixed-20"/>
+          <p:cNvSpPr/>
+          <p:nvPr/>
+        </p:nvSpPr>
+        <p:spPr>
+          <a:xfrm xmlns:a="http://schemas.openxmlformats.org/drawingml/2006/main">
+            <a:off x="792000" y="4590000"/>
+            <a:ext cx="432000" cy="558000"/>
+          </a:xfrm>
+          <a:prstGeom xmlns:a="http://schemas.openxmlformats.org/drawingml/2006/main" prst="rect">
+            <a:avLst/>
+          </a:prstGeom>
+          <a:noFill xmlns:a="http://schemas.openxmlformats.org/drawingml/2006/main"/>
+          <a:ln xmlns:a="http://schemas.openxmlformats.org/drawingml/2006/main">
+            <a:noFill/>
+          </a:ln>
+        </p:spPr>
+        <p:txBody>
+          <a:bodyPr xmlns:a="http://schemas.openxmlformats.org/drawingml/2006/main" lIns="0" tIns="0" rIns="0" bIns="0" anchor="ctr">
+            <a:noAutofit/>
+          </a:bodyPr>
+          <a:lstStyle xmlns:a="http://schemas.openxmlformats.org/drawingml/2006/main"/>
+          <a:p xmlns:a="http://schemas.openxmlformats.org/drawingml/2006/main">
+            <a:pPr algn="l"/>
+            <a:r>
+              <a:rPr lang="en-US" sz="2200" b="1" i="0">
+                <a:solidFill>
+                  <a:srgbClr val="B60036"/>
+                </a:solidFill>
+                <a:latin typeface="Arial"/>
+                <a:ea typeface="Arial"/>
+              </a:rPr>
+              <a:t>4</a:t>
+            </a:r>
+          </a:p>
+        </p:txBody>
+      </p:sp>
+      <p:sp>
+        <p:nvSpPr>
+          <p:cNvPr id="100225" name="Fixed-21"/>
+          <p:cNvSpPr/>
+          <p:nvPr/>
+        </p:nvSpPr>
+        <p:spPr>
+          <a:xfrm xmlns:a="http://schemas.openxmlformats.org/drawingml/2006/main">
+            <a:off x="1494000" y="4590000"/>
+            <a:ext cx="6252400" cy="558000"/>
+          </a:xfrm>
+          <a:prstGeom xmlns:a="http://schemas.openxmlformats.org/drawingml/2006/main" prst="rect">
+            <a:avLst/>
+          </a:prstGeom>
+          <a:noFill xmlns:a="http://schemas.openxmlformats.org/drawingml/2006/main"/>
+          <a:ln xmlns:a="http://schemas.openxmlformats.org/drawingml/2006/main">
+            <a:noFill/>
+          </a:ln>
+        </p:spPr>
+        <p:txBody>
+          <a:bodyPr xmlns:a="http://schemas.openxmlformats.org/drawingml/2006/main" lIns="0" tIns="0" rIns="0" bIns="0" anchor="ctr">
+            <a:noAutofit/>
+          </a:bodyPr>
+          <a:lstStyle xmlns:a="http://schemas.openxmlformats.org/drawingml/2006/main"/>
+          <a:p xmlns:a="http://schemas.openxmlformats.org/drawingml/2006/main">
+            <a:pPr algn="l"/>
+            <a:r>
+              <a:rPr lang="en-US" sz="2000" b="0" i="0">
+                <a:solidFill>
+                  <a:srgbClr val="20252D"/>
+                </a:solidFill>
+                <a:latin typeface="Arial"/>
+                <a:ea typeface="Arial"/>
+              </a:rPr>
+              <a:t>Deploy a reproducible platform</a:t>
+            </a:r>
+          </a:p>
+        </p:txBody>
+      </p:sp>
+      <p:sp>
+        <p:nvSpPr>
+          <p:cNvPr id="100226" name="Element-22"/>
+          <p:cNvSpPr/>
+          <p:nvPr/>
+        </p:nvSpPr>
+        <p:spPr>
+          <a:xfrm xmlns:a="http://schemas.openxmlformats.org/drawingml/2006/main">
+            <a:off x="7998400" y="1782000"/>
+            <a:ext cx="3401600" cy="2952000"/>
+          </a:xfrm>
+          <a:prstGeom xmlns:a="http://schemas.openxmlformats.org/drawingml/2006/main" prst="roundRect">
+            <a:avLst/>
+          </a:prstGeom>
+          <a:solidFill xmlns:a="http://schemas.openxmlformats.org/drawingml/2006/main">
+            <a:srgbClr val="FCF0F4"/>
+          </a:solidFill>
+          <a:ln xmlns:a="http://schemas.openxmlformats.org/drawingml/2006/main" w="12700">
+            <a:solidFill>
+              <a:srgbClr val="FCF0F4"/>
+            </a:solidFill>
+          </a:ln>
+        </p:spPr>
+        <p:txBody>
+          <a:bodyPr xmlns:a="http://schemas.openxmlformats.org/drawingml/2006/main" lIns="0" tIns="0" rIns="0" bIns="0" anchor="ctr">
+            <a:noAutofit/>
+          </a:bodyPr>
+          <a:lstStyle xmlns:a="http://schemas.openxmlformats.org/drawingml/2006/main"/>
+          <a:p xmlns:a="http://schemas.openxmlformats.org/drawingml/2006/main">
+            <a:pPr algn="l"/>
+            <a:endParaRPr lang="en-US" sz="1800" b="0" i="0">
+              <a:solidFill>
+                <a:srgbClr val="20252D"/>
+              </a:solidFill>
+              <a:latin typeface="Arial"/>
+              <a:ea typeface="Arial"/>
+            </a:endParaRPr>
+          </a:p>
+        </p:txBody>
+      </p:sp>
+      <p:sp>
+        <p:nvSpPr>
+          <p:cNvPr id="100227" name="Element-23"/>
+          <p:cNvSpPr/>
+          <p:nvPr/>
+        </p:nvSpPr>
+        <p:spPr>
+          <a:xfrm xmlns:a="http://schemas.openxmlformats.org/drawingml/2006/main">
+            <a:off x="7998400" y="1782000"/>
+            <a:ext cx="50400" cy="2952000"/>
+          </a:xfrm>
+          <a:prstGeom xmlns:a="http://schemas.openxmlformats.org/drawingml/2006/main" prst="rect">
+            <a:avLst/>
+          </a:prstGeom>
+          <a:solidFill xmlns:a="http://schemas.openxmlformats.org/drawingml/2006/main">
+            <a:srgbClr val="B60036"/>
+          </a:solidFill>
+          <a:ln xmlns:a="http://schemas.openxmlformats.org/drawingml/2006/main">
+            <a:noFill/>
+          </a:ln>
+        </p:spPr>
+        <p:txBody>
+          <a:bodyPr xmlns:a="http://schemas.openxmlformats.org/drawingml/2006/main" lIns="0" tIns="0" rIns="0" bIns="0" anchor="ctr">
+            <a:noAutofit/>
+          </a:bodyPr>
+          <a:lstStyle xmlns:a="http://schemas.openxmlformats.org/drawingml/2006/main"/>
+          <a:p xmlns:a="http://schemas.openxmlformats.org/drawingml/2006/main">
+            <a:pPr algn="l"/>
+            <a:endParaRPr lang="en-US" sz="1800" b="0" i="0">
+              <a:solidFill>
+                <a:srgbClr val="20252D"/>
+              </a:solidFill>
+              <a:latin typeface="Arial"/>
+              <a:ea typeface="Arial"/>
+            </a:endParaRPr>
+          </a:p>
+        </p:txBody>
+      </p:sp>
+      <p:sp>
+        <p:nvSpPr>
+          <p:cNvPr id="100228" name="Fixed-24"/>
+          <p:cNvSpPr/>
+          <p:nvPr/>
+        </p:nvSpPr>
+        <p:spPr>
+          <a:xfrm xmlns:a="http://schemas.openxmlformats.org/drawingml/2006/main">
+            <a:off x="8304400" y="1879200"/>
+            <a:ext cx="2789600" cy="342000"/>
+          </a:xfrm>
+          <a:prstGeom xmlns:a="http://schemas.openxmlformats.org/drawingml/2006/main" prst="rect">
+            <a:avLst/>
+          </a:prstGeom>
+          <a:noFill xmlns:a="http://schemas.openxmlformats.org/drawingml/2006/main"/>
+          <a:ln xmlns:a="http://schemas.openxmlformats.org/drawingml/2006/main">
+            <a:noFill/>
+          </a:ln>
+        </p:spPr>
+        <p:txBody>
+          <a:bodyPr xmlns:a="http://schemas.openxmlformats.org/drawingml/2006/main" lIns="0" tIns="0" rIns="0" bIns="0" anchor="ctr">
+            <a:noAutofit/>
+          </a:bodyPr>
+          <a:lstStyle xmlns:a="http://schemas.openxmlformats.org/drawingml/2006/main"/>
+          <a:p xmlns:a="http://schemas.openxmlformats.org/drawingml/2006/main">
+            <a:pPr algn="l"/>
+            <a:r>
+              <a:rPr lang="en-US" sz="1700" b="1" i="0">
+                <a:solidFill>
+                  <a:srgbClr val="B60036"/>
+                </a:solidFill>
+                <a:latin typeface="Arial"/>
+                <a:ea typeface="Arial"/>
+              </a:rPr>
+              <a:t>Support requested</a:t>
+            </a:r>
+          </a:p>
+        </p:txBody>
+      </p:sp>
+      <p:sp>
+        <p:nvSpPr>
+          <p:cNvPr id="100229" name="Element-25"/>
+          <p:cNvSpPr/>
+          <p:nvPr/>
+        </p:nvSpPr>
+        <p:spPr>
+          <a:xfrm xmlns:a="http://schemas.openxmlformats.org/drawingml/2006/main">
+            <a:off x="8304400" y="2466000"/>
+            <a:ext cx="162000" cy="39600"/>
+          </a:xfrm>
+          <a:prstGeom xmlns:a="http://schemas.openxmlformats.org/drawingml/2006/main" prst="rect">
+            <a:avLst/>
+          </a:prstGeom>
+          <a:solidFill xmlns:a="http://schemas.openxmlformats.org/drawingml/2006/main">
+            <a:srgbClr val="B60036"/>
+          </a:solidFill>
+          <a:ln xmlns:a="http://schemas.openxmlformats.org/drawingml/2006/main">
+            <a:noFill/>
+          </a:ln>
+        </p:spPr>
+        <p:txBody>
+          <a:bodyPr xmlns:a="http://schemas.openxmlformats.org/drawingml/2006/main" lIns="0" tIns="0" rIns="0" bIns="0" anchor="ctr">
+            <a:noAutofit/>
+          </a:bodyPr>
+          <a:lstStyle xmlns:a="http://schemas.openxmlformats.org/drawingml/2006/main"/>
+          <a:p xmlns:a="http://schemas.openxmlformats.org/drawingml/2006/main">
+            <a:pPr algn="l"/>
+            <a:endParaRPr lang="en-US" sz="1800" b="0" i="0">
+              <a:solidFill>
+                <a:srgbClr val="20252D"/>
+              </a:solidFill>
+              <a:latin typeface="Arial"/>
+              <a:ea typeface="Arial"/>
+            </a:endParaRPr>
+          </a:p>
+        </p:txBody>
+      </p:sp>
+      <p:sp>
+        <p:nvSpPr>
+          <p:cNvPr id="100230" name="Fixed-26"/>
+          <p:cNvSpPr/>
+          <p:nvPr/>
+        </p:nvSpPr>
+        <p:spPr>
+          <a:xfrm xmlns:a="http://schemas.openxmlformats.org/drawingml/2006/main">
+            <a:off x="8574400" y="2322000"/>
+            <a:ext cx="2717600" cy="756000"/>
+          </a:xfrm>
+          <a:prstGeom xmlns:a="http://schemas.openxmlformats.org/drawingml/2006/main" prst="rect">
+            <a:avLst/>
+          </a:prstGeom>
+          <a:noFill xmlns:a="http://schemas.openxmlformats.org/drawingml/2006/main"/>
+          <a:ln xmlns:a="http://schemas.openxmlformats.org/drawingml/2006/main">
+            <a:noFill/>
+          </a:ln>
+        </p:spPr>
+        <p:txBody>
+          <a:bodyPr xmlns:a="http://schemas.openxmlformats.org/drawingml/2006/main" lIns="0" tIns="0" rIns="0" bIns="0" anchor="t">
+            <a:noAutofit/>
+          </a:bodyPr>
+          <a:lstStyle xmlns:a="http://schemas.openxmlformats.org/drawingml/2006/main"/>
+          <a:p xmlns:a="http://schemas.openxmlformats.org/drawingml/2006/main">
+            <a:pPr algn="l"/>
+            <a:r>
+              <a:rPr lang="en-US" sz="1600" b="0" i="0">
+                <a:solidFill>
+                  <a:srgbClr val="20252D"/>
+                </a:solidFill>
+                <a:latin typeface="Arial"/>
+                <a:ea typeface="Arial"/>
+              </a:rPr>
+              <a:t>access to real vendor artifacts</a:t>
+            </a:r>
+          </a:p>
+        </p:txBody>
+      </p:sp>
+      <p:sp>
+        <p:nvSpPr>
+          <p:cNvPr id="100231" name="Element-27"/>
+          <p:cNvSpPr/>
+          <p:nvPr/>
+        </p:nvSpPr>
+        <p:spPr>
+          <a:xfrm xmlns:a="http://schemas.openxmlformats.org/drawingml/2006/main">
+            <a:off x="8304400" y="3348000"/>
+            <a:ext cx="162000" cy="39600"/>
+          </a:xfrm>
+          <a:prstGeom xmlns:a="http://schemas.openxmlformats.org/drawingml/2006/main" prst="rect">
+            <a:avLst/>
+          </a:prstGeom>
+          <a:solidFill xmlns:a="http://schemas.openxmlformats.org/drawingml/2006/main">
+            <a:srgbClr val="B60036"/>
+          </a:solidFill>
+          <a:ln xmlns:a="http://schemas.openxmlformats.org/drawingml/2006/main">
+            <a:noFill/>
+          </a:ln>
+        </p:spPr>
+        <p:txBody>
+          <a:bodyPr xmlns:a="http://schemas.openxmlformats.org/drawingml/2006/main" lIns="0" tIns="0" rIns="0" bIns="0" anchor="ctr">
+            <a:noAutofit/>
+          </a:bodyPr>
+          <a:lstStyle xmlns:a="http://schemas.openxmlformats.org/drawingml/2006/main"/>
+          <a:p xmlns:a="http://schemas.openxmlformats.org/drawingml/2006/main">
+            <a:pPr algn="l"/>
+            <a:endParaRPr lang="en-US" sz="1800" b="0" i="0">
+              <a:solidFill>
+                <a:srgbClr val="20252D"/>
+              </a:solidFill>
+              <a:latin typeface="Arial"/>
+              <a:ea typeface="Arial"/>
+            </a:endParaRPr>
+          </a:p>
+        </p:txBody>
+      </p:sp>
+      <p:sp>
+        <p:nvSpPr>
+          <p:cNvPr id="100232" name="Fixed-28"/>
+          <p:cNvSpPr/>
+          <p:nvPr/>
+        </p:nvSpPr>
+        <p:spPr>
+          <a:xfrm xmlns:a="http://schemas.openxmlformats.org/drawingml/2006/main">
+            <a:off x="8574400" y="3204000"/>
+            <a:ext cx="2717600" cy="756000"/>
+          </a:xfrm>
+          <a:prstGeom xmlns:a="http://schemas.openxmlformats.org/drawingml/2006/main" prst="rect">
+            <a:avLst/>
+          </a:prstGeom>
+          <a:noFill xmlns:a="http://schemas.openxmlformats.org/drawingml/2006/main"/>
+          <a:ln xmlns:a="http://schemas.openxmlformats.org/drawingml/2006/main">
+            <a:noFill/>
+          </a:ln>
+        </p:spPr>
+        <p:txBody>
+          <a:bodyPr xmlns:a="http://schemas.openxmlformats.org/drawingml/2006/main" lIns="0" tIns="0" rIns="0" bIns="0" anchor="t">
+            <a:noAutofit/>
+          </a:bodyPr>
+          <a:lstStyle xmlns:a="http://schemas.openxmlformats.org/drawingml/2006/main"/>
+          <a:p xmlns:a="http://schemas.openxmlformats.org/drawingml/2006/main">
+            <a:pPr algn="l"/>
+            <a:r>
+              <a:rPr lang="en-US" sz="1600" b="0" i="0">
+                <a:solidFill>
+                  <a:srgbClr val="20252D"/>
+                </a:solidFill>
+                <a:latin typeface="Arial"/>
+                <a:ea typeface="Arial"/>
+              </a:rPr>
+              <a:t>an adversarial review of the register</a:t>
+            </a:r>
+          </a:p>
+        </p:txBody>
+      </p:sp>
+      <p:sp>
+        <p:nvSpPr>
+          <p:cNvPr id="100233" name="Element-29"/>
+          <p:cNvSpPr/>
+          <p:nvPr/>
+        </p:nvSpPr>
+        <p:spPr>
+          <a:xfrm xmlns:a="http://schemas.openxmlformats.org/drawingml/2006/main">
+            <a:off x="792000" y="5335200"/>
+            <a:ext cx="10608000" cy="10800"/>
+          </a:xfrm>
+          <a:prstGeom xmlns:a="http://schemas.openxmlformats.org/drawingml/2006/main" prst="rect">
+            <a:avLst/>
+          </a:prstGeom>
+          <a:solidFill xmlns:a="http://schemas.openxmlformats.org/drawingml/2006/main">
+            <a:srgbClr val="D9DEE5"/>
+          </a:solidFill>
+          <a:ln xmlns:a="http://schemas.openxmlformats.org/drawingml/2006/main">
+            <a:noFill/>
+          </a:ln>
+        </p:spPr>
+        <p:txBody>
+          <a:bodyPr xmlns:a="http://schemas.openxmlformats.org/drawingml/2006/main" lIns="0" tIns="0" rIns="0" bIns="0" anchor="ctr">
+            <a:noAutofit/>
+          </a:bodyPr>
+          <a:lstStyle xmlns:a="http://schemas.openxmlformats.org/drawingml/2006/main"/>
+          <a:p xmlns:a="http://schemas.openxmlformats.org/drawingml/2006/main">
+            <a:pPr algn="l"/>
+            <a:endParaRPr lang="en-US" sz="1800" b="0" i="0">
+              <a:solidFill>
+                <a:srgbClr val="20252D"/>
+              </a:solidFill>
+              <a:latin typeface="Arial"/>
+              <a:ea typeface="Arial"/>
+            </a:endParaRPr>
+          </a:p>
+        </p:txBody>
+      </p:sp>
+      <p:sp>
+        <p:nvSpPr>
+          <p:cNvPr id="100234" name="Caption-9"/>
+          <p:cNvSpPr/>
+          <p:nvPr/>
+        </p:nvSpPr>
+        <p:spPr>
+          <a:xfrm xmlns:a="http://schemas.openxmlformats.org/drawingml/2006/main">
+            <a:off x="792000" y="5356800"/>
+            <a:ext cx="10608000" cy="864000"/>
+          </a:xfrm>
+          <a:prstGeom xmlns:a="http://schemas.openxmlformats.org/drawingml/2006/main" prst="rect">
+            <a:avLst/>
+          </a:prstGeom>
+          <a:noFill xmlns:a="http://schemas.openxmlformats.org/drawingml/2006/main"/>
+          <a:ln xmlns:a="http://schemas.openxmlformats.org/drawingml/2006/main">
+            <a:noFill/>
+          </a:ln>
+        </p:spPr>
+        <p:txBody>
+          <a:bodyPr xmlns:a="http://schemas.openxmlformats.org/drawingml/2006/main" lIns="0" tIns="0" rIns="0" bIns="0" anchor="t">
+            <a:noAutofit/>
+          </a:bodyPr>
+          <a:lstStyle xmlns:a="http://schemas.openxmlformats.org/drawingml/2006/main"/>
+          <a:p xmlns:a="http://schemas.openxmlformats.org/drawingml/2006/main">
+            <a:pPr algn="l"/>
+            <a:r>
+              <a:rPr lang="en-US" sz="2100" b="1">
+                <a:solidFill>
+                  <a:srgbClr val="B60036"/>
+                </a:solidFill>
+                <a:latin typeface="Arial"/>
+                <a:ea typeface="Arial"/>
+              </a:rPr>
+              <a:t>Order follows conditions, not dates.</a:t>
+            </a:r>
+          </a:p>
+        </p:txBody>
+      </p:sp>
+      <p:sp>
+        <p:nvSpPr>
+          <p:cNvPr id="100235" name="Element-31"/>
+          <p:cNvSpPr/>
+          <p:nvPr/>
+        </p:nvSpPr>
+        <p:spPr>
+          <a:xfrm xmlns:a="http://schemas.openxmlformats.org/drawingml/2006/main">
+            <a:off x="792000" y="5781600"/>
+            <a:ext cx="10608000" cy="180000"/>
+          </a:xfrm>
+          <a:prstGeom xmlns:a="http://schemas.openxmlformats.org/drawingml/2006/main" prst="rect">
+            <a:avLst/>
+          </a:prstGeom>
+          <a:noFill xmlns:a="http://schemas.openxmlformats.org/drawingml/2006/main"/>
+          <a:ln xmlns:a="http://schemas.openxmlformats.org/drawingml/2006/main">
+            <a:noFill/>
+          </a:ln>
+        </p:spPr>
+        <p:txBody>
+          <a:bodyPr xmlns:a="http://schemas.openxmlformats.org/drawingml/2006/main" lIns="0" tIns="0" rIns="0" bIns="0" anchor="t">
+            <a:noAutofit/>
+          </a:bodyPr>
+          <a:lstStyle xmlns:a="http://schemas.openxmlformats.org/drawingml/2006/main"/>
+          <a:p xmlns:a="http://schemas.openxmlformats.org/drawingml/2006/main">
+            <a:pPr algn="l"/>
+            <a:r>
+              <a:rPr lang="en-US" sz="800" b="0" i="0">
+                <a:solidFill>
+                  <a:srgbClr val="5C626C"/>
+                </a:solidFill>
+                <a:latin typeface="Arial"/>
+                <a:ea typeface="Arial"/>
+              </a:rPr>
+              <a:t>AsiaCCS 2027 — submission deadline 11 December 2026 (AoE).</a:t>
+            </a:r>
+          </a:p>
+        </p:txBody>
+      </p:sp>
+      <p:sp>
+        <p:nvSpPr>
+          <p:cNvPr id="100236" name="Element-32"/>
+          <p:cNvSpPr/>
+          <p:nvPr/>
+        </p:nvSpPr>
+        <p:spPr>
+          <a:xfrm xmlns:a="http://schemas.openxmlformats.org/drawingml/2006/main">
+            <a:off x="792000" y="6444000"/>
+            <a:ext cx="5040000" cy="180000"/>
+          </a:xfrm>
+          <a:prstGeom xmlns:a="http://schemas.openxmlformats.org/drawingml/2006/main" prst="rect">
+            <a:avLst/>
+          </a:prstGeom>
+          <a:noFill xmlns:a="http://schemas.openxmlformats.org/drawingml/2006/main"/>
+          <a:ln xmlns:a="http://schemas.openxmlformats.org/drawingml/2006/main">
+            <a:noFill/>
+          </a:ln>
+        </p:spPr>
+        <p:txBody>
+          <a:bodyPr xmlns:a="http://schemas.openxmlformats.org/drawingml/2006/main" lIns="0" tIns="0" rIns="0" bIns="0" anchor="ctr">
+            <a:noAutofit/>
+          </a:bodyPr>
+          <a:lstStyle xmlns:a="http://schemas.openxmlformats.org/drawingml/2006/main"/>
+          <a:p xmlns:a="http://schemas.openxmlformats.org/drawingml/2006/main">
+            <a:pPr algn="l"/>
+            <a:r>
+              <a:rPr lang="en-US" sz="800" b="0" i="0">
+                <a:solidFill>
+                  <a:srgbClr val="5C626C"/>
+                </a:solidFill>
+                <a:latin typeface="Arial"/>
+                <a:ea typeface="Arial"/>
+              </a:rPr>
+              <a:t>Project LANCE — NATO SPS G6259</a:t>
+            </a:r>
+          </a:p>
+        </p:txBody>
+      </p:sp>
+      <p:sp>
+        <p:nvSpPr>
+          <p:cNvPr id="100237" name="Element-33"/>
+          <p:cNvSpPr/>
+          <p:nvPr/>
+        </p:nvSpPr>
+        <p:spPr>
+          <a:xfrm xmlns:a="http://schemas.openxmlformats.org/drawingml/2006/main">
+            <a:off x="10752000" y="6444000"/>
+            <a:ext cx="648000" cy="180000"/>
+          </a:xfrm>
+          <a:prstGeom xmlns:a="http://schemas.openxmlformats.org/drawingml/2006/main" prst="rect">
+            <a:avLst/>
+          </a:prstGeom>
+          <a:noFill xmlns:a="http://schemas.openxmlformats.org/drawingml/2006/main"/>
+          <a:ln xmlns:a="http://schemas.openxmlformats.org/drawingml/2006/main">
+            <a:noFill/>
+          </a:ln>
+        </p:spPr>
+        <p:txBody>
+          <a:bodyPr xmlns:a="http://schemas.openxmlformats.org/drawingml/2006/main" lIns="0" tIns="0" rIns="0" bIns="0" anchor="ctr">
+            <a:noAutofit/>
+          </a:bodyPr>
+          <a:lstStyle xmlns:a="http://schemas.openxmlformats.org/drawingml/2006/main"/>
+          <a:p xmlns:a="http://schemas.openxmlformats.org/drawingml/2006/main">
+            <a:pPr algn="r"/>
+            <a:r>
+              <a:rPr lang="en-US" sz="800" b="0" i="0">
+                <a:solidFill>
+                  <a:srgbClr val="5C626C"/>
+                </a:solidFill>
+                <a:latin typeface="Arial"/>
+                <a:ea typeface="Arial"/>
+              </a:rPr>
+              <a:t>9</a:t>
             </a:r>
           </a:p>
         </p:txBody>
